--- a/network-testing/network_testing.pptx
+++ b/network-testing/network_testing.pptx
@@ -7,7 +7,7 @@
   <p:sldIdLst>
     <p:sldId id="256" r:id="rId7"/>
     <p:sldId id="257" r:id="rId8"/>
-    <p:sldId id="258" r:id="rId9"/>
+    <p:sldId id="258" r:id="rId10"/>
     <p:sldId id="259" r:id="rId11"/>
     <p:sldId id="260" r:id="rId12"/>
     <p:sldId id="261" r:id="rId13"/>
@@ -36,9 +36,6 @@
     <p:sldId id="284" r:id="rId36"/>
     <p:sldId id="285" r:id="rId37"/>
     <p:sldId id="286" r:id="rId38"/>
-    <p:sldId id="287" r:id="rId39"/>
-    <p:sldId id="288" r:id="rId40"/>
-    <p:sldId id="289" r:id="rId41"/>
   </p:sldIdLst>
   <p:sldSz cx="12191695" cy="6858000" type="screen4x3"/>
   <p:notesSz cx="6858000" cy="9144000"/>
@@ -535,7 +532,7 @@
           <a:lstStyle/>
           <a:p>
             <a:r>
-              <a:t>Frame the talk: "is the network the problem?" answered at fleet scale over plain ssh. The three tools measure different layers of the same fabric; reachable is the hygiene step that makes any of them reliable on a real, decaying host list.</a:t>
+              <a:t>The frame for the whole talk. Bandwidth, packet rate and latency fail independently, so no single tool can tell you the network is fine. netmesh is cheap enough to run during an incident; iperf_orchestrator is the scheduled stress test; mx is the request/response rate test that looks like real RPC and storage traffic. Because they share one host-list grammar and one deployment model, learning one means you know how to drive all three.</a:t>
             </a:r>
           </a:p>
         </p:txBody>
@@ -605,7 +602,7 @@
           <a:lstStyle/>
           <a:p>
             <a:r>
-              <a:t>The alternative is a week of hand-run iperf, ad-hoc pssh loops, and numbers nobody trusts. The design rules (droppable onto any prod host, honest accounting, composability) run through all of them.</a:t>
+              <a:t>The alternative is a week of hand-run iperf, ad-hoc pssh loops, and numbers nobody trusts. Spell out "they compose" plainly: one server list drives everything, and the outputs are designed to sit next to each other — pruning the list, baselining, then loading is a chain of commands, not three integrations. The pipeline on the slide is the whole talk in one line; the three big sections that follow just walk it left to right.</a:t>
             </a:r>
           </a:p>
         </p:txBody>
@@ -675,7 +672,7 @@
           <a:lstStyle/>
           <a:p>
             <a:r>
-              <a:t>Different layers fail independently: a fabric can carry 100 Gbit of bulk TCP and still collapse at 2 Mpps of answered packets. A 9.4 Gbit/s result at 300 µs idle RTT and one at 42 ms are *different results* — you need more than one of these numbers to know which you have.</a:t>
+              <a:t>This answers "can the test still run when several servers are down?" — twice over. First, prune: reachable keeps the list true, distinguishes a key problem from a dead box (auth / refused / dns / no-route / timeout / down), and converges instead of decaying. Second, the tools themselves tolerate failures mid-run: per-host failures are reported and skipped, not fatal. reachable prod.txt -i before every big run is the habit to sell.</a:t>
             </a:r>
           </a:p>
         </p:txBody>
@@ -745,7 +742,7 @@
           <a:lstStyle/>
           <a:p>
             <a:r>
-              <a:t>Each tool's output tells you whether the next one's numbers make sense.</a:t>
+              <a:t>One command in (iperf-orchestrator --servers servers.txt all), four artifacts out; the heatmap is the one you open first.</a:t>
             </a:r>
           </a:p>
         </p:txBody>
@@ -815,7 +812,7 @@
           <a:lstStyle/>
           <a:p>
             <a:r>
-              <a:t>This is the resilience story: prune first, and the tools tolerate whatever died since. reachable prod.txt -i before every big run.</a:t>
+              <a:t>Quick grounding for anyone who hasn't used it. Set up the iperf2-vs-iperf3 story here.</a:t>
             </a:r>
           </a:p>
         </p:txBody>
@@ -885,7 +882,7 @@
           <a:lstStyle/>
           <a:p>
             <a:r>
-              <a:t>One command in (iperf-orchestrator --servers servers.txt all), four artifacts out; the heatmap is the one you open first.</a:t>
+              <a:t>Each of these was a real problem hit and fixed; the tool is the accumulated answers. Mention check-iperf catches distros where iperf is secretly a symlink to iperf3 (WRONG_VERSION).</a:t>
             </a:r>
           </a:p>
         </p:txBody>
@@ -911,146 +908,6 @@
 </file>
 
 <file path=ppt/notesSlides/notesSlide7.xml><?xml version="1.0" encoding="utf-8"?>
-<p:notes xmlns:a="http://schemas.openxmlformats.org/drawingml/2006/main" xmlns:p="http://schemas.openxmlformats.org/presentationml/2006/main" xmlns:r="http://schemas.openxmlformats.org/officeDocument/2006/relationships">
-  <p:cSld>
-    <p:spTree>
-      <p:nvGrpSpPr>
-        <p:cNvPr id="1" name=""/>
-        <p:cNvGrpSpPr/>
-        <p:nvPr/>
-      </p:nvGrpSpPr>
-      <p:grpSpPr>
-        <a:xfrm>
-          <a:off x="0" y="0"/>
-          <a:ext cx="0" cy="0"/>
-          <a:chOff x="0" y="0"/>
-          <a:chExt cx="0" cy="0"/>
-        </a:xfrm>
-      </p:grpSpPr>
-      <p:sp>
-        <p:nvSpPr>
-          <p:cNvPr id="2" name="Slide Image Placeholder 1"/>
-          <p:cNvSpPr>
-            <a:spLocks noGrp="1"/>
-          </p:cNvSpPr>
-          <p:nvPr>
-            <p:ph type="sldImg" idx="2"/>
-          </p:nvPr>
-        </p:nvSpPr>
-        <p:spPr/>
-      </p:sp>
-      <p:sp>
-        <p:nvSpPr>
-          <p:cNvPr id="3" name="Notes Placeholder 2"/>
-          <p:cNvSpPr>
-            <a:spLocks noGrp="1"/>
-          </p:cNvSpPr>
-          <p:nvPr>
-            <p:ph type="body" idx="3" sz="quarter"/>
-          </p:nvPr>
-        </p:nvSpPr>
-        <p:spPr/>
-        <p:txBody>
-          <a:bodyPr/>
-          <a:lstStyle/>
-          <a:p>
-            <a:r>
-              <a:t>Quick grounding for anyone who hasn't used it. Set up the iperf2-vs-iperf3 story here.</a:t>
-            </a:r>
-          </a:p>
-        </p:txBody>
-      </p:sp>
-      <p:sp>
-        <p:nvSpPr>
-          <p:cNvPr id="4" name="Slide Number Placeholder 3"/>
-          <p:cNvSpPr>
-            <a:spLocks noGrp="1"/>
-          </p:cNvSpPr>
-          <p:nvPr>
-            <p:ph type="sldNum" idx="5" sz="quarter"/>
-          </p:nvPr>
-        </p:nvSpPr>
-        <p:spPr/>
-      </p:sp>
-    </p:spTree>
-  </p:cSld>
-  <p:clrMapOvr>
-    <a:masterClrMapping/>
-  </p:clrMapOvr>
-</p:notes>
-</file>
-
-<file path=ppt/notesSlides/notesSlide8.xml><?xml version="1.0" encoding="utf-8"?>
-<p:notes xmlns:a="http://schemas.openxmlformats.org/drawingml/2006/main" xmlns:p="http://schemas.openxmlformats.org/presentationml/2006/main" xmlns:r="http://schemas.openxmlformats.org/officeDocument/2006/relationships">
-  <p:cSld>
-    <p:spTree>
-      <p:nvGrpSpPr>
-        <p:cNvPr id="1" name=""/>
-        <p:cNvGrpSpPr/>
-        <p:nvPr/>
-      </p:nvGrpSpPr>
-      <p:grpSpPr>
-        <a:xfrm>
-          <a:off x="0" y="0"/>
-          <a:ext cx="0" cy="0"/>
-          <a:chOff x="0" y="0"/>
-          <a:chExt cx="0" cy="0"/>
-        </a:xfrm>
-      </p:grpSpPr>
-      <p:sp>
-        <p:nvSpPr>
-          <p:cNvPr id="2" name="Slide Image Placeholder 1"/>
-          <p:cNvSpPr>
-            <a:spLocks noGrp="1"/>
-          </p:cNvSpPr>
-          <p:nvPr>
-            <p:ph type="sldImg" idx="2"/>
-          </p:nvPr>
-        </p:nvSpPr>
-        <p:spPr/>
-      </p:sp>
-      <p:sp>
-        <p:nvSpPr>
-          <p:cNvPr id="3" name="Notes Placeholder 2"/>
-          <p:cNvSpPr>
-            <a:spLocks noGrp="1"/>
-          </p:cNvSpPr>
-          <p:nvPr>
-            <p:ph type="body" idx="3" sz="quarter"/>
-          </p:nvPr>
-        </p:nvSpPr>
-        <p:spPr/>
-        <p:txBody>
-          <a:bodyPr/>
-          <a:lstStyle/>
-          <a:p>
-            <a:r>
-              <a:t>Each of these was a real problem hit and fixed; the tool is the accumulated answers. Mention check-iperf catches distros where iperf is secretly a symlink to iperf3 (WRONG_VERSION).</a:t>
-            </a:r>
-          </a:p>
-        </p:txBody>
-      </p:sp>
-      <p:sp>
-        <p:nvSpPr>
-          <p:cNvPr id="4" name="Slide Number Placeholder 3"/>
-          <p:cNvSpPr>
-            <a:spLocks noGrp="1"/>
-          </p:cNvSpPr>
-          <p:nvPr>
-            <p:ph type="sldNum" idx="5" sz="quarter"/>
-          </p:nvPr>
-        </p:nvSpPr>
-        <p:spPr/>
-      </p:sp>
-    </p:spTree>
-  </p:cSld>
-  <p:clrMapOvr>
-    <a:masterClrMapping/>
-  </p:clrMapOvr>
-</p:notes>
-</file>
-
-<file path=ppt/notesSlides/notesSlide9.xml><?xml version="1.0" encoding="utf-8"?>
 <p:notes xmlns:a="http://schemas.openxmlformats.org/drawingml/2006/main" xmlns:p="http://schemas.openxmlformats.org/presentationml/2006/main" xmlns:r="http://schemas.openxmlformats.org/officeDocument/2006/relationships">
   <p:cSld>
     <p:spTree>
@@ -4116,6 +3973,13 @@
           <a:bodyPr/>
           <a:lstStyle/>
           <a:p>
+            <a:pPr>
+              <a:defRPr sz="4400" b="1">
+                <a:solidFill>
+                  <a:srgbClr val="1C2B3A"/>
+                </a:solidFill>
+              </a:defRPr>
+            </a:pPr>
             <a:r>
               <a:t>Network Testing at Fleet Scale</a:t>
             </a:r>
@@ -4137,11 +4001,30 @@
           <a:bodyPr/>
           <a:lstStyle/>
           <a:p>
-            <a:r>
-              <a:t>iperf_orchestrator · matrix_orchestrator (mx) · netmesh — with binnacle's reachable keeping the list honest</a:t>
-            </a:r>
-          </a:p>
-          <a:p>
+            <a:pPr>
+              <a:defRPr sz="2000">
+                <a:solidFill>
+                  <a:srgbClr val="3E5C76"/>
+                </a:solidFill>
+              </a:defRPr>
+            </a:pPr>
+            <a:r>
+              <a:t>iperf_orchestrator · matrix_orchestrator · netmesh</a:t>
+            </a:r>
+          </a:p>
+          <a:p>
+            <a:pPr>
+              <a:defRPr sz="1500" i="1"/>
+            </a:pPr>
+            <a:r>
+              <a:t>with binnacle’s reachable keeping the server list honest</a:t>
+            </a:r>
+          </a:p>
+          <a:p/>
+          <a:p>
+            <a:pPr>
+              <a:defRPr sz="1400" b="1"/>
+            </a:pPr>
             <a:r>
               <a:t>Martin Gallagher</a:t>
             </a:r>
@@ -4189,7 +4072,7 @@
               </a:defRPr>
             </a:pPr>
             <a:r>
-              <a:t>What is iperf?</a:t>
+              <a:t>Setup needs</a:t>
             </a:r>
           </a:p>
         </p:txBody>
@@ -4215,7 +4098,7 @@
               <a:defRPr sz="1600"/>
             </a:pPr>
             <a:r>
-              <a:t>The standard throughput tool: a client opens a TCP connection to a server and pushes bytes as fast as it can for N seconds; the report is the achieved end-to-end bandwidth.</a:t>
+              <a:t>Orchestrator host: bash 4+, ssh/scp, tar/gzip, Python 3.6+ (numpy + matplotlib only for the heatmap step).</a:t>
             </a:r>
           </a:p>
           <a:p>
@@ -4223,7 +4106,7 @@
               <a:defRPr sz="1600"/>
             </a:pPr>
             <a:r>
-              <a:t>iperf2 and iperf3 are different codebases, not versions of each other.</a:t>
+              <a:t>Every server: iperf2 (binary named iperf, 2.0.13+ for --full-duplex); sysstat's mpstat recommended; key-based ssh from the orchestrator (BatchMode — a password prompt is a failure, not a prompt).</a:t>
             </a:r>
           </a:p>
           <a:p>
@@ -4231,7 +4114,15 @@
               <a:defRPr sz="1600"/>
             </a:pPr>
             <a:r>
-              <a:t>The orchestrator uses iperf2's --full-duplex: both directions concurrently on a single TCP socket — one test per pair, and closer to what real traffic does to switch buffers.</a:t>
+              <a:t>Keys first: for h in $(grep -v '^#' servers.txt); do ssh-copy-id "$h"; done</a:t>
+            </a:r>
+          </a:p>
+          <a:p>
+            <a:pPr>
+              <a:defRPr sz="1600"/>
+            </a:pPr>
+            <a:r>
+              <a:t>Preflight: doctor (local deps + install hints), check-iperf (fleet), check-servers (what's already running).</a:t>
             </a:r>
           </a:p>
         </p:txBody>
@@ -4277,7 +4168,7 @@
               </a:defRPr>
             </a:pPr>
             <a:r>
-              <a:t>Why iperf2, not iperf3 (and why the orchestrator was necessary)</a:t>
+              <a:t>Running, collecting, interpreting, cleaning up</a:t>
             </a:r>
           </a:p>
         </p:txBody>
@@ -4303,7 +4194,7 @@
               <a:defRPr sz="1600"/>
             </a:pPr>
             <a:r>
-              <a:t>iperf3's server is single-threaded, one client at a time — in a mesh, everyone else gets "server busy". Workaround at N=100: 100 daemons × 100 ports × 100× firewall holes per host. The first version used iperf3 and collapsed under its own workarounds.</a:t>
+              <a:t>Pipeline: start-servers → run-tests → collect-results → parse-csv / parse-cpu / make-pivot / make-heatmap → stop-servers → cleanup --yes</a:t>
             </a:r>
           </a:p>
           <a:p>
@@ -4311,7 +4202,7 @@
               <a:defRPr sz="1600"/>
             </a:pPr>
             <a:r>
-              <a:t>iperf2's multi-threaded server takes concurrent clients on one port (5001) — one daemon per host, done.</a:t>
+              <a:t>all runs the whole thing; every stage is a standalone subcommand, safe to re-run (--run-id addresses old runs; results/latest symlink).</a:t>
             </a:r>
           </a:p>
           <a:p>
@@ -4319,7 +4210,7 @@
               <a:defRPr sz="1600"/>
             </a:pPr>
             <a:r>
-              <a:t>Why an orchestrator at all — a mesh has quadratic moving parts:</a:t>
+              <a:t>Interpreting: start with iperf_heatmap.png and results-summary (P50/P95/min/mean/max + 5 slowest pairs).</a:t>
             </a:r>
           </a:p>
           <a:p>
@@ -4327,7 +4218,7 @@
               <a:defRPr sz="1400"/>
             </a:pPr>
             <a:r>
-              <a:t>4,950 pairs at N=100 — nobody runs that by hand.</a:t>
+              <a:t>Rows = sender, columns = receiver. All-red row → that host's outbound is sick; all-red column → sick inbound. Bar chart ranks hosts by mean outgoing Mbps, with peak CPU% on each bar.</a:t>
             </a:r>
           </a:p>
           <a:p>
@@ -4335,31 +4226,15 @@
               <a:defRPr sz="1400"/>
             </a:pPr>
             <a:r>
-              <a:t>Synchronized start: compute now + 30 s once, push the epoch, every host busy-waits and fires within a fraction of a second. No locks, no protocol — just a number.</a:t>
-            </a:r>
-          </a:p>
-          <a:p>
-            <a:pPr lvl="1">
-              <a:defRPr sz="1400"/>
-            </a:pPr>
-            <a:r>
-              <a:t>Balanced client assignment (parity rule): for pair {i, j}, client = smaller index if i+j even, larger if odd → every host runs 49–50 clients instead of 0–99. Both ends compute it independently.</a:t>
-            </a:r>
-          </a:p>
-          <a:p>
-            <a:pPr lvl="1">
-              <a:defRPr sz="1400"/>
-            </a:pPr>
-            <a:r>
-              <a:t>Tar-batched collection: one tar + scp + untar per host ≈ minutes, vs ~80 minutes of N² scp handshakes.</a:t>
-            </a:r>
-          </a:p>
-          <a:p>
-            <a:pPr lvl="1">
-              <a:defRPr sz="1400"/>
-            </a:pPr>
-            <a:r>
-              <a:t>CPU sampled on every host during the run — because a throughput number without CPU next to it gets misread.</a:t>
+              <a:t>The classic misread: slow host + peak_total_pct ≈ 100% ⇒ you measured the CPU, not the fabric. Second classic: box-wide CPU 30% but softirq pinned at 100% on core 0 ⇒ RSS isn't spreading NIC IRQs — invisible without per-core data (mpstat -P ALL).</a:t>
+            </a:r>
+          </a:p>
+          <a:p>
+            <a:pPr>
+              <a:defRPr sz="1600"/>
+            </a:pPr>
+            <a:r>
+              <a:t>Cleanup: stop-servers kills daemons; cleanup --yes removes the remote dir — scoped to the run-id, so parallel runs on a shared FS never collide. Died halfway? all --resume; flaky host? all --keep-going.</a:t>
             </a:r>
           </a:p>
         </p:txBody>
@@ -4405,7 +4280,7 @@
               </a:defRPr>
             </a:pPr>
             <a:r>
-              <a:t>Why run it — and what it does / doesn't do</a:t>
+              <a:t>Different ways to run</a:t>
             </a:r>
           </a:p>
         </p:txBody>
@@ -4431,7 +4306,7 @@
               <a:defRPr sz="1600"/>
             </a:pPr>
             <a:r>
-              <a:t>Why: acceptance-test a new fabric or change window (load everything, see what breaks); rank slow hosts/links; get a defensible baseline picture of the fleet.</a:t>
+              <a:t>One-liner: iperf-orchestrator --servers servers.txt all — everything else is refinement.</a:t>
             </a:r>
           </a:p>
           <a:p>
@@ -4439,7 +4314,7 @@
               <a:defRPr sz="1600"/>
             </a:pPr>
             <a:r>
-              <a:t>Does: full-duplex TCP mesh; synchronized start; balanced pairs; per-host CPU (mpstat, /proc/stat fallback); parse → CSV/pivot/heatmap re-runnable per run-id; capped ssh fan-out (--jobs), optional --retries; fails open — one bad host doesn't abort a 100-host run.</a:t>
+              <a:t>Every setting is both a flag and an env var (--duration 60 ≡ IPERF_DURATION=60); flags win.</a:t>
             </a:r>
           </a:p>
           <a:p>
@@ -4447,47 +4322,23 @@
               <a:defRPr sz="1600"/>
             </a:pPr>
             <a:r>
-              <a:t>Doesn't:</a:t>
-            </a:r>
-          </a:p>
-          <a:p>
-            <a:pPr lvl="1">
-              <a:defRPr sz="1400"/>
-            </a:pPr>
-            <a:r>
-              <a:t>No UDP, no latency, no packet rate — that's netmesh/mx territory.</a:t>
-            </a:r>
-          </a:p>
-          <a:p>
-            <a:pPr lvl="1">
-              <a:defRPr sz="1400"/>
-            </a:pPr>
-            <a:r>
-              <a:t>Doesn't install iperf2 or distribute ssh keys — doctor / check-iperf verify, you provision.</a:t>
-            </a:r>
-          </a:p>
-          <a:p>
-            <a:pPr lvl="1">
-              <a:defRPr sz="1400"/>
-            </a:pPr>
-            <a:r>
-              <a:t>No normalization for mixed NIC speeds (1G hosts look red next to 10G).</a:t>
-            </a:r>
-          </a:p>
-          <a:p>
-            <a:pPr lvl="1">
-              <a:defRPr sz="1400"/>
-            </a:pPr>
-            <a:r>
-              <a:t>Heatmap past ~60 hosts drops cell labels by design; read the CSV for exact values.</a:t>
-            </a:r>
-          </a:p>
-          <a:p>
-            <a:pPr lvl="1">
-              <a:defRPr sz="1400"/>
-            </a:pPr>
-            <a:r>
-              <a:t>sequential-pair at N=100 ≈ 14 hours — the cleanest mode is priced accordingly.</a:t>
+              <a:t>Scale: --jobs 64 (ssh fan-out cap, setup/teardown only), --retries N (linear back-off), -P parallel streams, rolling's --total-time / --flows.</a:t>
+            </a:r>
+          </a:p>
+          <a:p>
+            <a:pPr>
+              <a:defRPr sz="1600"/>
+            </a:pPr>
+            <a:r>
+              <a:t>Trust: --dry-run prints every ssh/scp command; --verbose / --quiet; status probes hosts live.</a:t>
+            </a:r>
+          </a:p>
+          <a:p>
+            <a:pPr>
+              <a:defRPr sz="1600"/>
+            </a:pPr>
+            <a:r>
+              <a:t>Fit: --run-id for history; REMOTE_DIR safe on shared filesystems (files embed host + run-id); no hidden state anywhere.</a:t>
             </a:r>
           </a:p>
         </p:txBody>
@@ -4501,318 +4352,6 @@
 </file>
 
 <file path=ppt/slides/slide13.xml><?xml version="1.0" encoding="utf-8"?>
-<p:sld xmlns:a="http://schemas.openxmlformats.org/drawingml/2006/main" xmlns:p="http://schemas.openxmlformats.org/presentationml/2006/main" xmlns:r="http://schemas.openxmlformats.org/officeDocument/2006/relationships">
-  <p:cSld>
-    <p:spTree>
-      <p:nvGrpSpPr>
-        <p:cNvPr id="1" name=""/>
-        <p:cNvGrpSpPr/>
-        <p:nvPr/>
-      </p:nvGrpSpPr>
-      <p:grpSpPr/>
-      <p:sp>
-        <p:nvSpPr>
-          <p:cNvPr id="2" name="Title 1"/>
-          <p:cNvSpPr>
-            <a:spLocks noGrp="1"/>
-          </p:cNvSpPr>
-          <p:nvPr>
-            <p:ph type="title"/>
-          </p:nvPr>
-        </p:nvSpPr>
-        <p:spPr/>
-        <p:txBody>
-          <a:bodyPr/>
-          <a:lstStyle/>
-          <a:p>
-            <a:pPr>
-              <a:defRPr sz="2800" b="1">
-                <a:solidFill>
-                  <a:srgbClr val="1C2B3A"/>
-                </a:solidFill>
-              </a:defRPr>
-            </a:pPr>
-            <a:r>
-              <a:t>Setup needs</a:t>
-            </a:r>
-          </a:p>
-        </p:txBody>
-      </p:sp>
-      <p:sp>
-        <p:nvSpPr>
-          <p:cNvPr id="3" name="Content Placeholder 2"/>
-          <p:cNvSpPr>
-            <a:spLocks noGrp="1"/>
-          </p:cNvSpPr>
-          <p:nvPr>
-            <p:ph idx="1"/>
-          </p:nvPr>
-        </p:nvSpPr>
-        <p:spPr/>
-        <p:txBody>
-          <a:bodyPr wrap="square">
-            <a:normAutofit/>
-          </a:bodyPr>
-          <a:lstStyle/>
-          <a:p>
-            <a:pPr>
-              <a:defRPr sz="1600"/>
-            </a:pPr>
-            <a:r>
-              <a:t>Orchestrator host: bash 4+, ssh/scp, tar/gzip, Python 3.6+ (numpy + matplotlib only for the heatmap step).</a:t>
-            </a:r>
-          </a:p>
-          <a:p>
-            <a:pPr>
-              <a:defRPr sz="1600"/>
-            </a:pPr>
-            <a:r>
-              <a:t>Every server: iperf2 (binary named iperf, 2.0.13+ for --full-duplex); sysstat's mpstat recommended; key-based ssh from the orchestrator (BatchMode — a password prompt is a failure, not a prompt).</a:t>
-            </a:r>
-          </a:p>
-          <a:p>
-            <a:pPr>
-              <a:defRPr sz="1600"/>
-            </a:pPr>
-            <a:r>
-              <a:t>Keys first: for h in $(grep -v '^#' servers.txt); do ssh-copy-id "$h"; done</a:t>
-            </a:r>
-          </a:p>
-          <a:p>
-            <a:pPr>
-              <a:defRPr sz="1600"/>
-            </a:pPr>
-            <a:r>
-              <a:t>Preflight: doctor (local deps + install hints), check-iperf (fleet), check-servers (what's already running).</a:t>
-            </a:r>
-          </a:p>
-        </p:txBody>
-      </p:sp>
-    </p:spTree>
-  </p:cSld>
-  <p:clrMapOvr>
-    <a:masterClrMapping/>
-  </p:clrMapOvr>
-</p:sld>
-</file>
-
-<file path=ppt/slides/slide14.xml><?xml version="1.0" encoding="utf-8"?>
-<p:sld xmlns:a="http://schemas.openxmlformats.org/drawingml/2006/main" xmlns:p="http://schemas.openxmlformats.org/presentationml/2006/main" xmlns:r="http://schemas.openxmlformats.org/officeDocument/2006/relationships">
-  <p:cSld>
-    <p:spTree>
-      <p:nvGrpSpPr>
-        <p:cNvPr id="1" name=""/>
-        <p:cNvGrpSpPr/>
-        <p:nvPr/>
-      </p:nvGrpSpPr>
-      <p:grpSpPr/>
-      <p:sp>
-        <p:nvSpPr>
-          <p:cNvPr id="2" name="Title 1"/>
-          <p:cNvSpPr>
-            <a:spLocks noGrp="1"/>
-          </p:cNvSpPr>
-          <p:nvPr>
-            <p:ph type="title"/>
-          </p:nvPr>
-        </p:nvSpPr>
-        <p:spPr/>
-        <p:txBody>
-          <a:bodyPr/>
-          <a:lstStyle/>
-          <a:p>
-            <a:pPr>
-              <a:defRPr sz="2800" b="1">
-                <a:solidFill>
-                  <a:srgbClr val="1C2B3A"/>
-                </a:solidFill>
-              </a:defRPr>
-            </a:pPr>
-            <a:r>
-              <a:t>Running, collecting, interpreting, cleaning up</a:t>
-            </a:r>
-          </a:p>
-        </p:txBody>
-      </p:sp>
-      <p:sp>
-        <p:nvSpPr>
-          <p:cNvPr id="3" name="Content Placeholder 2"/>
-          <p:cNvSpPr>
-            <a:spLocks noGrp="1"/>
-          </p:cNvSpPr>
-          <p:nvPr>
-            <p:ph idx="1"/>
-          </p:nvPr>
-        </p:nvSpPr>
-        <p:spPr/>
-        <p:txBody>
-          <a:bodyPr wrap="square">
-            <a:normAutofit/>
-          </a:bodyPr>
-          <a:lstStyle/>
-          <a:p>
-            <a:pPr>
-              <a:defRPr sz="1600"/>
-            </a:pPr>
-            <a:r>
-              <a:t>Pipeline: start-servers → run-tests → collect-results → parse-csv / parse-cpu / make-pivot / make-heatmap → stop-servers → cleanup --yes</a:t>
-            </a:r>
-          </a:p>
-          <a:p>
-            <a:pPr>
-              <a:defRPr sz="1600"/>
-            </a:pPr>
-            <a:r>
-              <a:t>all runs the whole thing; every stage is a standalone subcommand, safe to re-run (--run-id addresses old runs; results/latest symlink).</a:t>
-            </a:r>
-          </a:p>
-          <a:p>
-            <a:pPr>
-              <a:defRPr sz="1600"/>
-            </a:pPr>
-            <a:r>
-              <a:t>Interpreting: start with iperf_heatmap.png and results-summary (P50/P95/min/mean/max + 5 slowest pairs).</a:t>
-            </a:r>
-          </a:p>
-          <a:p>
-            <a:pPr lvl="1">
-              <a:defRPr sz="1400"/>
-            </a:pPr>
-            <a:r>
-              <a:t>Rows = sender, columns = receiver. All-red row → that host's outbound is sick; all-red column → sick inbound. Bar chart ranks hosts by mean outgoing Mbps, with peak CPU% on each bar.</a:t>
-            </a:r>
-          </a:p>
-          <a:p>
-            <a:pPr lvl="1">
-              <a:defRPr sz="1400"/>
-            </a:pPr>
-            <a:r>
-              <a:t>The classic misread: slow host + peak_total_pct ≈ 100% ⇒ you measured the CPU, not the fabric. Second classic: box-wide CPU 30% but softirq pinned at 100% on core 0 ⇒ RSS isn't spreading NIC IRQs — invisible without per-core data (mpstat -P ALL).</a:t>
-            </a:r>
-          </a:p>
-          <a:p>
-            <a:pPr>
-              <a:defRPr sz="1600"/>
-            </a:pPr>
-            <a:r>
-              <a:t>Cleanup: stop-servers kills daemons; cleanup --yes removes the remote dir — scoped to the run-id, so parallel runs on a shared FS never collide. Died halfway? all --resume; flaky host? all --keep-going.</a:t>
-            </a:r>
-          </a:p>
-        </p:txBody>
-      </p:sp>
-    </p:spTree>
-  </p:cSld>
-  <p:clrMapOvr>
-    <a:masterClrMapping/>
-  </p:clrMapOvr>
-</p:sld>
-</file>
-
-<file path=ppt/slides/slide15.xml><?xml version="1.0" encoding="utf-8"?>
-<p:sld xmlns:a="http://schemas.openxmlformats.org/drawingml/2006/main" xmlns:p="http://schemas.openxmlformats.org/presentationml/2006/main" xmlns:r="http://schemas.openxmlformats.org/officeDocument/2006/relationships">
-  <p:cSld>
-    <p:spTree>
-      <p:nvGrpSpPr>
-        <p:cNvPr id="1" name=""/>
-        <p:cNvGrpSpPr/>
-        <p:nvPr/>
-      </p:nvGrpSpPr>
-      <p:grpSpPr/>
-      <p:sp>
-        <p:nvSpPr>
-          <p:cNvPr id="2" name="Title 1"/>
-          <p:cNvSpPr>
-            <a:spLocks noGrp="1"/>
-          </p:cNvSpPr>
-          <p:nvPr>
-            <p:ph type="title"/>
-          </p:nvPr>
-        </p:nvSpPr>
-        <p:spPr/>
-        <p:txBody>
-          <a:bodyPr/>
-          <a:lstStyle/>
-          <a:p>
-            <a:pPr>
-              <a:defRPr sz="2800" b="1">
-                <a:solidFill>
-                  <a:srgbClr val="1C2B3A"/>
-                </a:solidFill>
-              </a:defRPr>
-            </a:pPr>
-            <a:r>
-              <a:t>Different ways to run</a:t>
-            </a:r>
-          </a:p>
-        </p:txBody>
-      </p:sp>
-      <p:sp>
-        <p:nvSpPr>
-          <p:cNvPr id="3" name="Content Placeholder 2"/>
-          <p:cNvSpPr>
-            <a:spLocks noGrp="1"/>
-          </p:cNvSpPr>
-          <p:nvPr>
-            <p:ph idx="1"/>
-          </p:nvPr>
-        </p:nvSpPr>
-        <p:spPr/>
-        <p:txBody>
-          <a:bodyPr wrap="square">
-            <a:normAutofit/>
-          </a:bodyPr>
-          <a:lstStyle/>
-          <a:p>
-            <a:pPr>
-              <a:defRPr sz="1600"/>
-            </a:pPr>
-            <a:r>
-              <a:t>One-liner: iperf-orchestrator --servers servers.txt all — everything else is refinement.</a:t>
-            </a:r>
-          </a:p>
-          <a:p>
-            <a:pPr>
-              <a:defRPr sz="1600"/>
-            </a:pPr>
-            <a:r>
-              <a:t>Every setting is both a flag and an env var (--duration 60 ≡ IPERF_DURATION=60); flags win.</a:t>
-            </a:r>
-          </a:p>
-          <a:p>
-            <a:pPr>
-              <a:defRPr sz="1600"/>
-            </a:pPr>
-            <a:r>
-              <a:t>Scale: --jobs 64 (ssh fan-out cap, setup/teardown only), --retries N (linear back-off), -P parallel streams, rolling's --total-time / --flows.</a:t>
-            </a:r>
-          </a:p>
-          <a:p>
-            <a:pPr>
-              <a:defRPr sz="1600"/>
-            </a:pPr>
-            <a:r>
-              <a:t>Trust: --dry-run prints every ssh/scp command; --verbose / --quiet; status probes hosts live.</a:t>
-            </a:r>
-          </a:p>
-          <a:p>
-            <a:pPr>
-              <a:defRPr sz="1600"/>
-            </a:pPr>
-            <a:r>
-              <a:t>Fit: --run-id for history; REMOTE_DIR safe on shared filesystems (files embed host + run-id); no hidden state anywhere.</a:t>
-            </a:r>
-          </a:p>
-        </p:txBody>
-      </p:sp>
-    </p:spTree>
-  </p:cSld>
-  <p:clrMapOvr>
-    <a:masterClrMapping/>
-  </p:clrMapOvr>
-</p:sld>
-</file>
-
-<file path=ppt/slides/slide16.xml><?xml version="1.0" encoding="utf-8"?>
 <p:sld xmlns:a="http://schemas.openxmlformats.org/drawingml/2006/main" xmlns:p="http://schemas.openxmlformats.org/presentationml/2006/main" xmlns:r="http://schemas.openxmlformats.org/officeDocument/2006/relationships">
   <p:cSld>
     <p:spTree>
@@ -5227,6 +4766,286 @@
 </p:sld>
 </file>
 
+<file path=ppt/slides/slide14.xml><?xml version="1.0" encoding="utf-8"?>
+<p:sld xmlns:a="http://schemas.openxmlformats.org/drawingml/2006/main" xmlns:p="http://schemas.openxmlformats.org/presentationml/2006/main" xmlns:r="http://schemas.openxmlformats.org/officeDocument/2006/relationships">
+  <p:cSld>
+    <p:spTree>
+      <p:nvGrpSpPr>
+        <p:cNvPr id="1" name=""/>
+        <p:cNvGrpSpPr/>
+        <p:nvPr/>
+      </p:nvGrpSpPr>
+      <p:grpSpPr/>
+      <p:sp>
+        <p:nvSpPr>
+          <p:cNvPr id="2" name="Title 1"/>
+          <p:cNvSpPr>
+            <a:spLocks noGrp="1"/>
+          </p:cNvSpPr>
+          <p:nvPr>
+            <p:ph type="title"/>
+          </p:nvPr>
+        </p:nvSpPr>
+        <p:spPr/>
+        <p:txBody>
+          <a:bodyPr/>
+          <a:lstStyle/>
+          <a:p>
+            <a:r>
+              <a:t>Part 2 — matrix_orchestrator (mx)</a:t>
+            </a:r>
+          </a:p>
+        </p:txBody>
+      </p:sp>
+      <p:sp>
+        <p:nvSpPr>
+          <p:cNvPr id="3" name="Text Placeholder 2"/>
+          <p:cNvSpPr>
+            <a:spLocks noGrp="1"/>
+          </p:cNvSpPr>
+          <p:nvPr>
+            <p:ph type="body" idx="1"/>
+          </p:nvPr>
+        </p:nvSpPr>
+        <p:spPr/>
+        <p:txBody>
+          <a:bodyPr/>
+          <a:lstStyle/>
+          <a:p/>
+        </p:txBody>
+      </p:sp>
+    </p:spTree>
+  </p:cSld>
+  <p:clrMapOvr>
+    <a:masterClrMapping/>
+  </p:clrMapOvr>
+</p:sld>
+</file>
+
+<file path=ppt/slides/slide15.xml><?xml version="1.0" encoding="utf-8"?>
+<p:sld xmlns:a="http://schemas.openxmlformats.org/drawingml/2006/main" xmlns:p="http://schemas.openxmlformats.org/presentationml/2006/main" xmlns:r="http://schemas.openxmlformats.org/officeDocument/2006/relationships">
+  <p:cSld>
+    <p:spTree>
+      <p:nvGrpSpPr>
+        <p:cNvPr id="1" name=""/>
+        <p:cNvGrpSpPr/>
+        <p:nvPr/>
+      </p:nvGrpSpPr>
+      <p:grpSpPr/>
+      <p:sp>
+        <p:nvSpPr>
+          <p:cNvPr id="2" name="Title 1"/>
+          <p:cNvSpPr>
+            <a:spLocks noGrp="1"/>
+          </p:cNvSpPr>
+          <p:nvPr>
+            <p:ph type="title"/>
+          </p:nvPr>
+        </p:nvSpPr>
+        <p:spPr/>
+        <p:txBody>
+          <a:bodyPr/>
+          <a:lstStyle/>
+          <a:p>
+            <a:pPr>
+              <a:defRPr sz="2800" b="1">
+                <a:solidFill>
+                  <a:srgbClr val="1C2B3A"/>
+                </a:solidFill>
+              </a:defRPr>
+            </a:pPr>
+            <a:r>
+              <a:t>Purpose — beyond iperf_orchestrator</a:t>
+            </a:r>
+          </a:p>
+        </p:txBody>
+      </p:sp>
+      <p:sp>
+        <p:nvSpPr>
+          <p:cNvPr id="3" name="Content Placeholder 2"/>
+          <p:cNvSpPr>
+            <a:spLocks noGrp="1"/>
+          </p:cNvSpPr>
+          <p:nvPr>
+            <p:ph idx="1"/>
+          </p:nvPr>
+        </p:nvSpPr>
+        <p:spPr/>
+        <p:txBody>
+          <a:bodyPr wrap="square">
+            <a:normAutofit/>
+          </a:bodyPr>
+          <a:lstStyle/>
+          <a:p>
+            <a:pPr>
+              <a:defRPr sz="1600"/>
+            </a:pPr>
+            <a:r>
+              <a:t>iperf_orchestrator gives each pair's max TCP bandwidth. Real traffic isn't bulk bytes — it's RPCs, storage reads, control planes: small requests, sized answers, measured in packets.</a:t>
+            </a:r>
+          </a:p>
+          <a:p>
+            <a:pPr>
+              <a:defRPr sz="1600"/>
+            </a:pPr>
+            <a:r>
+              <a:t>mx runs that shape: every host sends *x*-byte requests at a target rate to every peer; every request gets a *y*-byte reply. That's the whole model.</a:t>
+            </a:r>
+          </a:p>
+          <a:p>
+            <a:pPr>
+              <a:defRPr sz="1600"/>
+            </a:pPr>
+            <a:r>
+              <a:t>Headline: packets per second the fleet can exchange when every packet must be answered — where fabrics and NICs actually fall over.</a:t>
+            </a:r>
+          </a:p>
+          <a:p>
+            <a:pPr>
+              <a:defRPr sz="1600"/>
+            </a:pPr>
+            <a:r>
+              <a:t>RTT falls out free: the reply carries the request's timestamp back → true round trip, no clock sync.</a:t>
+            </a:r>
+          </a:p>
+          <a:p>
+            <a:pPr>
+              <a:defRPr sz="1600"/>
+            </a:pPr>
+            <a:r>
+              <a:t>Asymmetry by design: --tx-size 128 --rx-size 8192 = RPC — equal pps both ways, 64× the bandwidth on the reply path. That asymmetry usually breaks first; the report keeps directions separate.</a:t>
+            </a:r>
+          </a:p>
+          <a:p>
+            <a:pPr>
+              <a:defRPr sz="1600"/>
+            </a:pPr>
+            <a:r>
+              <a:t>Why UDP only: "every x-byte request gets a y-byte reply" is a statement about packets; TCP would coalesce and re-segment → the pps number would be fiction. TCP goodput → iperf_orchestrator.</a:t>
+            </a:r>
+          </a:p>
+        </p:txBody>
+      </p:sp>
+    </p:spTree>
+  </p:cSld>
+  <p:clrMapOvr>
+    <a:masterClrMapping/>
+  </p:clrMapOvr>
+</p:sld>
+</file>
+
+<file path=ppt/slides/slide16.xml><?xml version="1.0" encoding="utf-8"?>
+<p:sld xmlns:a="http://schemas.openxmlformats.org/drawingml/2006/main" xmlns:p="http://schemas.openxmlformats.org/presentationml/2006/main" xmlns:r="http://schemas.openxmlformats.org/officeDocument/2006/relationships">
+  <p:cSld>
+    <p:spTree>
+      <p:nvGrpSpPr>
+        <p:cNvPr id="1" name=""/>
+        <p:cNvGrpSpPr/>
+        <p:nvPr/>
+      </p:nvGrpSpPr>
+      <p:grpSpPr/>
+      <p:sp>
+        <p:nvSpPr>
+          <p:cNvPr id="2" name="Title 1"/>
+          <p:cNvSpPr>
+            <a:spLocks noGrp="1"/>
+          </p:cNvSpPr>
+          <p:nvPr>
+            <p:ph type="title"/>
+          </p:nvPr>
+        </p:nvSpPr>
+        <p:spPr/>
+        <p:txBody>
+          <a:bodyPr/>
+          <a:lstStyle/>
+          <a:p>
+            <a:pPr>
+              <a:defRPr sz="2800" b="1">
+                <a:solidFill>
+                  <a:srgbClr val="1C2B3A"/>
+                </a:solidFill>
+              </a:defRPr>
+            </a:pPr>
+            <a:r>
+              <a:t>What it does / doesn't do</a:t>
+            </a:r>
+          </a:p>
+        </p:txBody>
+      </p:sp>
+      <p:sp>
+        <p:nvSpPr>
+          <p:cNvPr id="3" name="Content Placeholder 2"/>
+          <p:cNvSpPr>
+            <a:spLocks noGrp="1"/>
+          </p:cNvSpPr>
+          <p:nvPr>
+            <p:ph idx="1"/>
+          </p:nvPr>
+        </p:nvSpPr>
+        <p:spPr/>
+        <p:txBody>
+          <a:bodyPr wrap="square">
+            <a:normAutofit/>
+          </a:bodyPr>
+          <a:lstStyle/>
+          <a:p>
+            <a:pPr>
+              <a:defRPr sz="1600"/>
+            </a:pPr>
+            <a:r>
+              <a:t>Does: paced request/response matrix (rates, sizes, port all in one editable CSV); payload *and* wire rate (+66 B framing/packet — what the NIC actually carries); loss split forward/return; DELIVERED as the honest headline; RTT avg/p50/p99/max per flow; per-host CPU incl. the agent's own share; grids; check/hints/doctor preflight; fd soft-limits raised automatically.</a:t>
+            </a:r>
+          </a:p>
+          <a:p>
+            <a:pPr>
+              <a:defRPr sz="1600"/>
+            </a:pPr>
+            <a:r>
+              <a:t>Doesn't / limits:</a:t>
+            </a:r>
+          </a:p>
+          <a:p>
+            <a:pPr lvl="1">
+              <a:defRPr sz="1400"/>
+            </a:pPr>
+            <a:r>
+              <a:t>No TCP; no one-way delay (needs clock sync it refuses to pretend it has).</a:t>
+            </a:r>
+          </a:p>
+          <a:p>
+            <a:pPr lvl="1">
+              <a:defRPr sz="1400"/>
+            </a:pPr>
+            <a:r>
+              <a:t>Not a kernel-bypass blaster: ~200k pps per worker (one core), 1–4 Mpps per typical host; beyond a few Mpps the kernel UDP path is the wall as much as Python — wider fleet or AF_XDP/DPDK.</a:t>
+            </a:r>
+          </a:p>
+          <a:p>
+            <a:pPr lvl="1">
+              <a:defRPr sz="1400"/>
+            </a:pPr>
+            <a:r>
+              <a:t>Payload 32–65507 bytes; key-based ssh assumed (mx doctor checks).</a:t>
+            </a:r>
+          </a:p>
+          <a:p>
+            <a:pPr lvl="1">
+              <a:defRPr sz="1400"/>
+            </a:pPr>
+            <a:r>
+              <a:t>Won't hide its own limits: when a worker saturates, the summary says you're measuring the tool and names the fix.</a:t>
+            </a:r>
+          </a:p>
+        </p:txBody>
+      </p:sp>
+    </p:spTree>
+  </p:cSld>
+  <p:clrMapOvr>
+    <a:masterClrMapping/>
+  </p:clrMapOvr>
+</p:sld>
+</file>
+
 <file path=ppt/slides/slide17.xml><?xml version="1.0" encoding="utf-8"?>
 <p:sld xmlns:a="http://schemas.openxmlformats.org/drawingml/2006/main" xmlns:p="http://schemas.openxmlformats.org/presentationml/2006/main" xmlns:r="http://schemas.openxmlformats.org/officeDocument/2006/relationships">
   <p:cSld>
@@ -5252,27 +5071,237 @@
           <a:bodyPr/>
           <a:lstStyle/>
           <a:p>
-            <a:r>
-              <a:t>Part 2 — matrix_orchestrator (mx)</a:t>
-            </a:r>
-          </a:p>
-        </p:txBody>
-      </p:sp>
-      <p:sp>
-        <p:nvSpPr>
-          <p:cNvPr id="3" name="Text Placeholder 2"/>
-          <p:cNvSpPr>
-            <a:spLocks noGrp="1"/>
-          </p:cNvSpPr>
-          <p:nvPr>
-            <p:ph type="body" idx="1"/>
-          </p:nvPr>
-        </p:nvSpPr>
-        <p:spPr/>
-        <p:txBody>
-          <a:bodyPr/>
-          <a:lstStyle/>
-          <a:p/>
+            <a:pPr>
+              <a:defRPr sz="2800" b="1">
+                <a:solidFill>
+                  <a:srgbClr val="1C2B3A"/>
+                </a:solidFill>
+              </a:defRPr>
+            </a:pPr>
+            <a:r>
+              <a:t>How to run it — different from iperf_orchestrator</a:t>
+            </a:r>
+          </a:p>
+        </p:txBody>
+      </p:sp>
+      <p:sp>
+        <p:nvSpPr>
+          <p:cNvPr id="3" name="TextBox 2"/>
+          <p:cNvSpPr txBox="1"/>
+          <p:nvPr/>
+        </p:nvSpPr>
+        <p:spPr>
+          <a:xfrm>
+            <a:off x="640080" y="1234440"/>
+            <a:ext cx="10972800" cy="1984248"/>
+          </a:xfrm>
+          <a:prstGeom prst="rect">
+            <a:avLst/>
+          </a:prstGeom>
+          <a:noFill/>
+        </p:spPr>
+        <p:txBody>
+          <a:bodyPr wrap="none">
+            <a:spAutoFit/>
+          </a:bodyPr>
+          <a:lstStyle/>
+          <a:p>
+            <a:pPr>
+              <a:defRPr sz="1300">
+                <a:solidFill>
+                  <a:srgbClr val="24354A"/>
+                </a:solidFill>
+                <a:latin typeface="Consolas"/>
+              </a:defRPr>
+            </a:pPr>
+            <a:r>
+              <a:t>printf '%s\n' 10.0.0.10 10.0.0.11 10.0.0.12 &gt; servers.txt</a:t>
+            </a:r>
+          </a:p>
+          <a:p>
+            <a:pPr>
+              <a:defRPr sz="1300">
+                <a:solidFill>
+                  <a:srgbClr val="24354A"/>
+                </a:solidFill>
+                <a:latin typeface="Consolas"/>
+              </a:defRPr>
+            </a:pPr>
+            <a:r>
+              <a:t>mx gen --servers servers.txt --pps 20000   # 1. build matrix.csv</a:t>
+            </a:r>
+          </a:p>
+          <a:p>
+            <a:pPr>
+              <a:defRPr sz="1300">
+                <a:solidFill>
+                  <a:srgbClr val="24354A"/>
+                </a:solidFill>
+                <a:latin typeface="Consolas"/>
+              </a:defRPr>
+            </a:pPr>
+            <a:r>
+              <a:t>mx start                                   # 2. deploy + run everywhere</a:t>
+            </a:r>
+          </a:p>
+          <a:p>
+            <a:pPr>
+              <a:defRPr sz="1300">
+                <a:solidFill>
+                  <a:srgbClr val="24354A"/>
+                </a:solidFill>
+                <a:latin typeface="Consolas"/>
+              </a:defRPr>
+            </a:pPr>
+            <a:r>
+              <a:t>mx status                                  # 3. running? how fast?</a:t>
+            </a:r>
+          </a:p>
+          <a:p>
+            <a:pPr>
+              <a:defRPr sz="1300">
+                <a:solidFill>
+                  <a:srgbClr val="24354A"/>
+                </a:solidFill>
+                <a:latin typeface="Consolas"/>
+              </a:defRPr>
+            </a:pPr>
+            <a:r>
+              <a:t>mx summarize                               # 4. pps / Gbps / loss / latency</a:t>
+            </a:r>
+          </a:p>
+          <a:p>
+            <a:pPr>
+              <a:defRPr sz="1300">
+                <a:solidFill>
+                  <a:srgbClr val="24354A"/>
+                </a:solidFill>
+                <a:latin typeface="Consolas"/>
+              </a:defRPr>
+            </a:pPr>
+            <a:r>
+              <a:t>mx stop                                    # 5. stop the agents</a:t>
+            </a:r>
+          </a:p>
+          <a:p>
+            <a:pPr>
+              <a:defRPr sz="1300">
+                <a:solidFill>
+                  <a:srgbClr val="24354A"/>
+                </a:solidFill>
+                <a:latin typeface="Consolas"/>
+              </a:defRPr>
+            </a:pPr>
+            <a:r>
+              <a:t>mx clean                                   # 6. leave no trace</a:t>
+            </a:r>
+          </a:p>
+          <a:p>
+            <a:pPr>
+              <a:defRPr sz="1300">
+                <a:solidFill>
+                  <a:srgbClr val="24354A"/>
+                </a:solidFill>
+                <a:latin typeface="Consolas"/>
+              </a:defRPr>
+            </a:pPr>
+            <a:r>
+              <a:t># or all of it: mx run --for 60</a:t>
+            </a:r>
+          </a:p>
+        </p:txBody>
+      </p:sp>
+      <p:sp>
+        <p:nvSpPr>
+          <p:cNvPr id="4" name="TextBox 3"/>
+          <p:cNvSpPr txBox="1"/>
+          <p:nvPr/>
+        </p:nvSpPr>
+        <p:spPr>
+          <a:xfrm>
+            <a:off x="822960" y="3355848"/>
+            <a:ext cx="10607040" cy="621792"/>
+          </a:xfrm>
+          <a:prstGeom prst="rect">
+            <a:avLst/>
+          </a:prstGeom>
+          <a:noFill/>
+        </p:spPr>
+        <p:txBody>
+          <a:bodyPr wrap="square">
+            <a:spAutoFit/>
+          </a:bodyPr>
+          <a:lstStyle/>
+          <a:p>
+            <a:pPr>
+              <a:defRPr sz="1400"/>
+            </a:pPr>
+            <a:r>
+              <a:t>• Differences from iperf_orchestrator: servers need nothing but Python 3.6+ (no iperf2 to install); config lives in matrix.csv, not flags you re-type; pure-Python single file, stdlib only.</a:t>
+            </a:r>
+          </a:p>
+        </p:txBody>
+      </p:sp>
+      <p:sp>
+        <p:nvSpPr>
+          <p:cNvPr id="5" name="TextBox 4"/>
+          <p:cNvSpPr txBox="1"/>
+          <p:nvPr/>
+        </p:nvSpPr>
+        <p:spPr>
+          <a:xfrm>
+            <a:off x="822960" y="4050792"/>
+            <a:ext cx="10607040" cy="310896"/>
+          </a:xfrm>
+          <a:prstGeom prst="rect">
+            <a:avLst/>
+          </a:prstGeom>
+          <a:noFill/>
+        </p:spPr>
+        <p:txBody>
+          <a:bodyPr wrap="square">
+            <a:spAutoFit/>
+          </a:bodyPr>
+          <a:lstStyle/>
+          <a:p>
+            <a:pPr>
+              <a:defRPr sz="1400"/>
+            </a:pPr>
+            <a:r>
+              <a:t>• Five more when needed: run, check (will the NICs carry this?), hints (goal → command), logs, doctor.</a:t>
+            </a:r>
+          </a:p>
+        </p:txBody>
+      </p:sp>
+      <p:sp>
+        <p:nvSpPr>
+          <p:cNvPr id="6" name="TextBox 5"/>
+          <p:cNvSpPr txBox="1"/>
+          <p:nvPr/>
+        </p:nvSpPr>
+        <p:spPr>
+          <a:xfrm>
+            <a:off x="822960" y="4434840"/>
+            <a:ext cx="10607040" cy="310896"/>
+          </a:xfrm>
+          <a:prstGeom prst="rect">
+            <a:avLst/>
+          </a:prstGeom>
+          <a:noFill/>
+        </p:spPr>
+        <p:txBody>
+          <a:bodyPr wrap="square">
+            <a:spAutoFit/>
+          </a:bodyPr>
+          <a:lstStyle/>
+          <a:p>
+            <a:pPr>
+              <a:defRPr sz="1400"/>
+            </a:pPr>
+            <a:r>
+              <a:t>• Every fleet command: --user --jobs --remote-dir --python --dry-run (+ MX_* env vars).</a:t>
+            </a:r>
+          </a:p>
         </p:txBody>
       </p:sp>
     </p:spTree>
@@ -5316,73 +5345,325 @@
               </a:defRPr>
             </a:pPr>
             <a:r>
-              <a:t>Purpose — beyond iperf_orchestrator</a:t>
-            </a:r>
-          </a:p>
-        </p:txBody>
-      </p:sp>
-      <p:sp>
-        <p:nvSpPr>
-          <p:cNvPr id="3" name="Content Placeholder 2"/>
-          <p:cNvSpPr>
-            <a:spLocks noGrp="1"/>
-          </p:cNvSpPr>
-          <p:nvPr>
-            <p:ph idx="1"/>
-          </p:nvPr>
-        </p:nvSpPr>
-        <p:spPr/>
+              <a:t>The matrix file — and changing the run mid-stream</a:t>
+            </a:r>
+          </a:p>
+        </p:txBody>
+      </p:sp>
+      <p:sp>
+        <p:nvSpPr>
+          <p:cNvPr id="3" name="TextBox 2"/>
+          <p:cNvSpPr txBox="1"/>
+          <p:nvPr/>
+        </p:nvSpPr>
+        <p:spPr>
+          <a:xfrm>
+            <a:off x="640080" y="1234440"/>
+            <a:ext cx="10972800" cy="1545336"/>
+          </a:xfrm>
+          <a:prstGeom prst="rect">
+            <a:avLst/>
+          </a:prstGeom>
+          <a:noFill/>
+        </p:spPr>
+        <p:txBody>
+          <a:bodyPr wrap="none">
+            <a:spAutoFit/>
+          </a:bodyPr>
+          <a:lstStyle/>
+          <a:p>
+            <a:pPr>
+              <a:defRPr sz="1300">
+                <a:solidFill>
+                  <a:srgbClr val="24354A"/>
+                </a:solidFill>
+                <a:latin typeface="Consolas"/>
+              </a:defRPr>
+            </a:pPr>
+            <a:r>
+              <a:t># mx matrix v1 -- rows send, columns receive, cells are packets/sec</a:t>
+            </a:r>
+          </a:p>
+          <a:p>
+            <a:pPr>
+              <a:defRPr sz="1300">
+                <a:solidFill>
+                  <a:srgbClr val="24354A"/>
+                </a:solidFill>
+                <a:latin typeface="Consolas"/>
+              </a:defRPr>
+            </a:pPr>
+            <a:r>
+              <a:t># tx_size=64 rx_size=512 port=5300</a:t>
+            </a:r>
+          </a:p>
+          <a:p>
+            <a:pPr>
+              <a:defRPr sz="1300">
+                <a:solidFill>
+                  <a:srgbClr val="24354A"/>
+                </a:solidFill>
+                <a:latin typeface="Consolas"/>
+              </a:defRPr>
+            </a:pPr>
+            <a:r>
+              <a:t>src\dst,10.0.0.10,10.0.0.11,10.0.0.12</a:t>
+            </a:r>
+          </a:p>
+          <a:p>
+            <a:pPr>
+              <a:defRPr sz="1300">
+                <a:solidFill>
+                  <a:srgbClr val="24354A"/>
+                </a:solidFill>
+                <a:latin typeface="Consolas"/>
+              </a:defRPr>
+            </a:pPr>
+            <a:r>
+              <a:t>10.0.0.10,,20000,20000</a:t>
+            </a:r>
+          </a:p>
+          <a:p>
+            <a:pPr>
+              <a:defRPr sz="1300">
+                <a:solidFill>
+                  <a:srgbClr val="24354A"/>
+                </a:solidFill>
+                <a:latin typeface="Consolas"/>
+              </a:defRPr>
+            </a:pPr>
+            <a:r>
+              <a:t>10.0.0.11,5000,,max</a:t>
+            </a:r>
+          </a:p>
+          <a:p>
+            <a:pPr>
+              <a:defRPr sz="1300">
+                <a:solidFill>
+                  <a:srgbClr val="24354A"/>
+                </a:solidFill>
+                <a:latin typeface="Consolas"/>
+              </a:defRPr>
+            </a:pPr>
+            <a:r>
+              <a:t>10.0.0.12,20000,20000,</a:t>
+            </a:r>
+          </a:p>
+        </p:txBody>
+      </p:sp>
+      <p:sp>
+        <p:nvSpPr>
+          <p:cNvPr id="4" name="TextBox 3"/>
+          <p:cNvSpPr txBox="1"/>
+          <p:nvPr/>
+        </p:nvSpPr>
+        <p:spPr>
+          <a:xfrm>
+            <a:off x="822960" y="2916936"/>
+            <a:ext cx="10607040" cy="310896"/>
+          </a:xfrm>
+          <a:prstGeom prst="rect">
+            <a:avLst/>
+          </a:prstGeom>
+          <a:noFill/>
+        </p:spPr>
         <p:txBody>
           <a:bodyPr wrap="square">
-            <a:normAutofit/>
+            <a:spAutoFit/>
           </a:bodyPr>
           <a:lstStyle/>
           <a:p>
             <a:pPr>
-              <a:defRPr sz="1600"/>
-            </a:pPr>
-            <a:r>
-              <a:t>iperf_orchestrator gives each pair's max TCP bandwidth. Real traffic isn't bulk bytes — it's RPCs, storage reads, control planes: small requests, sized answers, measured in packets.</a:t>
-            </a:r>
-          </a:p>
-          <a:p>
-            <a:pPr>
-              <a:defRPr sz="1600"/>
-            </a:pPr>
-            <a:r>
-              <a:t>mx runs that shape: every host sends *x*-byte requests at a target rate to every peer; every request gets a *y*-byte reply. That's the whole model.</a:t>
-            </a:r>
-          </a:p>
-          <a:p>
-            <a:pPr>
-              <a:defRPr sz="1600"/>
-            </a:pPr>
-            <a:r>
-              <a:t>Headline: packets per second the fleet can exchange when every packet must be answered — where fabrics and NICs actually fall over.</a:t>
-            </a:r>
-          </a:p>
-          <a:p>
-            <a:pPr>
-              <a:defRPr sz="1600"/>
-            </a:pPr>
-            <a:r>
-              <a:t>RTT falls out free: the reply carries the request's timestamp back → true round trip, no clock sync.</a:t>
-            </a:r>
-          </a:p>
-          <a:p>
-            <a:pPr>
-              <a:defRPr sz="1600"/>
-            </a:pPr>
-            <a:r>
-              <a:t>Asymmetry by design: --tx-size 128 --rx-size 8192 = RPC — equal pps both ways, 64× the bandwidth on the reply path. That asymmetry usually breaks first; the report keeps directions separate.</a:t>
-            </a:r>
-          </a:p>
-          <a:p>
-            <a:pPr>
-              <a:defRPr sz="1600"/>
-            </a:pPr>
-            <a:r>
-              <a:t>Why UDP only: "every x-byte request gets a y-byte reply" is a statement about packets; TCP would coalesce and re-segment → the pps number would be fiction. TCP goodput → iperf_orchestrator.</a:t>
+              <a:defRPr sz="1400"/>
+            </a:pPr>
+            <a:r>
+              <a:t>• Everything about the traffic lives here; no command needs the flags again. Host tokens: name[=addr[:port]].</a:t>
+            </a:r>
+          </a:p>
+        </p:txBody>
+      </p:sp>
+      <p:sp>
+        <p:nvSpPr>
+          <p:cNvPr id="5" name="TextBox 4"/>
+          <p:cNvSpPr txBox="1"/>
+          <p:nvPr/>
+        </p:nvSpPr>
+        <p:spPr>
+          <a:xfrm>
+            <a:off x="822960" y="3300984"/>
+            <a:ext cx="10607040" cy="310896"/>
+          </a:xfrm>
+          <a:prstGeom prst="rect">
+            <a:avLst/>
+          </a:prstGeom>
+          <a:noFill/>
+        </p:spPr>
+        <p:txBody>
+          <a:bodyPr wrap="square">
+            <a:spAutoFit/>
+          </a:bodyPr>
+          <a:lstStyle/>
+          <a:p>
+            <a:pPr>
+              <a:defRPr sz="1400"/>
+            </a:pPr>
+            <a:r>
+              <a:t>• Mid-stream = edit + mx start again (agents redeploy in seconds):</a:t>
+            </a:r>
+          </a:p>
+        </p:txBody>
+      </p:sp>
+      <p:sp>
+        <p:nvSpPr>
+          <p:cNvPr id="6" name="TextBox 5"/>
+          <p:cNvSpPr txBox="1"/>
+          <p:nvPr/>
+        </p:nvSpPr>
+        <p:spPr>
+          <a:xfrm>
+            <a:off x="1143000" y="3685032"/>
+            <a:ext cx="10287000" cy="310896"/>
+          </a:xfrm>
+          <a:prstGeom prst="rect">
+            <a:avLst/>
+          </a:prstGeom>
+          <a:noFill/>
+        </p:spPr>
+        <p:txBody>
+          <a:bodyPr wrap="square">
+            <a:spAutoFit/>
+          </a:bodyPr>
+          <a:lstStyle/>
+          <a:p>
+            <a:pPr>
+              <a:defRPr sz="1250"/>
+            </a:pPr>
+            <a:r>
+              <a:t>• blank a cell → that flow is gone</a:t>
+            </a:r>
+          </a:p>
+        </p:txBody>
+      </p:sp>
+      <p:sp>
+        <p:nvSpPr>
+          <p:cNvPr id="7" name="TextBox 6"/>
+          <p:cNvSpPr txBox="1"/>
+          <p:nvPr/>
+        </p:nvSpPr>
+        <p:spPr>
+          <a:xfrm>
+            <a:off x="1143000" y="4069080"/>
+            <a:ext cx="10287000" cy="310896"/>
+          </a:xfrm>
+          <a:prstGeom prst="rect">
+            <a:avLst/>
+          </a:prstGeom>
+          <a:noFill/>
+        </p:spPr>
+        <p:txBody>
+          <a:bodyPr wrap="square">
+            <a:spAutoFit/>
+          </a:bodyPr>
+          <a:lstStyle/>
+          <a:p>
+            <a:pPr>
+              <a:defRPr sz="1250"/>
+            </a:pPr>
+            <a:r>
+              <a:t>• change a cell → that pair gets its own rate</a:t>
+            </a:r>
+          </a:p>
+        </p:txBody>
+      </p:sp>
+      <p:sp>
+        <p:nvSpPr>
+          <p:cNvPr id="8" name="TextBox 7"/>
+          <p:cNvSpPr txBox="1"/>
+          <p:nvPr/>
+        </p:nvSpPr>
+        <p:spPr>
+          <a:xfrm>
+            <a:off x="1143000" y="4453128"/>
+            <a:ext cx="10287000" cy="310896"/>
+          </a:xfrm>
+          <a:prstGeom prst="rect">
+            <a:avLst/>
+          </a:prstGeom>
+          <a:noFill/>
+        </p:spPr>
+        <p:txBody>
+          <a:bodyPr wrap="square">
+            <a:spAutoFit/>
+          </a:bodyPr>
+          <a:lstStyle/>
+          <a:p>
+            <a:pPr>
+              <a:defRPr sz="1250"/>
+            </a:pPr>
+            <a:r>
+              <a:t>• write max → that pair runs unpaced</a:t>
+            </a:r>
+          </a:p>
+        </p:txBody>
+      </p:sp>
+      <p:sp>
+        <p:nvSpPr>
+          <p:cNvPr id="9" name="TextBox 8"/>
+          <p:cNvSpPr txBox="1"/>
+          <p:nvPr/>
+        </p:nvSpPr>
+        <p:spPr>
+          <a:xfrm>
+            <a:off x="1143000" y="4837176"/>
+            <a:ext cx="10287000" cy="310896"/>
+          </a:xfrm>
+          <a:prstGeom prst="rect">
+            <a:avLst/>
+          </a:prstGeom>
+          <a:noFill/>
+        </p:spPr>
+        <p:txBody>
+          <a:bodyPr wrap="square">
+            <a:spAutoFit/>
+          </a:bodyPr>
+          <a:lstStyle/>
+          <a:p>
+            <a:pPr>
+              <a:defRPr sz="1250"/>
+            </a:pPr>
+            <a:r>
+              <a:t>• edit the header → reshape sizes / port</a:t>
+            </a:r>
+          </a:p>
+        </p:txBody>
+      </p:sp>
+      <p:sp>
+        <p:nvSpPr>
+          <p:cNvPr id="10" name="TextBox 9"/>
+          <p:cNvSpPr txBox="1"/>
+          <p:nvPr/>
+        </p:nvSpPr>
+        <p:spPr>
+          <a:xfrm>
+            <a:off x="822960" y="5221224"/>
+            <a:ext cx="10607040" cy="621792"/>
+          </a:xfrm>
+          <a:prstGeom prst="rect">
+            <a:avLst/>
+          </a:prstGeom>
+          <a:noFill/>
+        </p:spPr>
+        <p:txBody>
+          <a:bodyPr wrap="square">
+            <a:spAutoFit/>
+          </a:bodyPr>
+          <a:lstStyle/>
+          <a:p>
+            <a:pPr>
+              <a:defRPr sz="1400"/>
+            </a:pPr>
+            <a:r>
+              <a:t>• Non-uniform investigations ("only cross-rack pairs", "one hot pair unpaced") are text edits, not new features.</a:t>
             </a:r>
           </a:p>
         </p:txBody>
@@ -5428,7 +5709,7 @@
               </a:defRPr>
             </a:pPr>
             <a:r>
-              <a:t>What it does / doesn't do</a:t>
+              <a:t>Getting results</a:t>
             </a:r>
           </a:p>
         </p:txBody>
@@ -5454,7 +5735,7 @@
               <a:defRPr sz="1600"/>
             </a:pPr>
             <a:r>
-              <a:t>Does: paced request/response matrix (rates, sizes, port all in one editable CSV); payload *and* wire rate (+66 B framing/packet — what the NIC actually carries); loss split forward/return; DELIVERED as the honest headline; RTT avg/p50/p99/max per flow; per-host CPU incl. the agent's own share; grids; check/hints/doctor preflight; fd soft-limits raised automatically.</a:t>
+              <a:t>mx status --watch 5 — live ticker, one line per host.</a:t>
             </a:r>
           </a:p>
           <a:p>
@@ -5462,39 +5743,31 @@
               <a:defRPr sz="1600"/>
             </a:pPr>
             <a:r>
-              <a:t>Doesn't / limits:</a:t>
-            </a:r>
-          </a:p>
-          <a:p>
-            <a:pPr lvl="1">
-              <a:defRPr sz="1400"/>
-            </a:pPr>
-            <a:r>
-              <a:t>No TCP; no one-way delay (needs clock sync it refuses to pretend it has).</a:t>
-            </a:r>
-          </a:p>
-          <a:p>
-            <a:pPr lvl="1">
-              <a:defRPr sz="1400"/>
-            </a:pPr>
-            <a:r>
-              <a:t>Not a kernel-bypass blaster: ~200k pps per worker (one core), 1–4 Mpps per typical host; beyond a few Mpps the kernel UDP path is the wall as much as Python — wider fleet or AF_XDP/DPDK.</a:t>
-            </a:r>
-          </a:p>
-          <a:p>
-            <a:pPr lvl="1">
-              <a:defRPr sz="1400"/>
-            </a:pPr>
-            <a:r>
-              <a:t>Payload 32–65507 bytes; key-based ssh assumed (mx doctor checks).</a:t>
-            </a:r>
-          </a:p>
-          <a:p>
-            <a:pPr lvl="1">
-              <a:defRPr sz="1400"/>
-            </a:pPr>
-            <a:r>
-              <a:t>Won't hide its own limits: when a worker saturates, the summary says you're measuring the tool and names the fix.</a:t>
+              <a:t>mx summarize — fleet totals, per-host table (worst delivery first), worst flows, and a computed WHAT TO DO NEXT.</a:t>
+            </a:r>
+          </a:p>
+          <a:p>
+            <a:pPr>
+              <a:defRPr sz="1600"/>
+            </a:pPr>
+            <a:r>
+              <a:t>mx summarize --grid g — N×N CSVs in the matrix's shape: pps, delivered, loss, rtt_p99. Dark row = sick sender; dark column = sick receiver; dark block = congested pair of leaves.</a:t>
+            </a:r>
+          </a:p>
+          <a:p>
+            <a:pPr>
+              <a:defRPr sz="1600"/>
+            </a:pPr>
+            <a:r>
+              <a:t>reports/&lt;host&gt;.csv — one row per flow per interval (pps, loss, RTT percentiles, CPU, workers). Plain CSV; plot with anything.</a:t>
+            </a:r>
+          </a:p>
+          <a:p>
+            <a:pPr>
+              <a:defRPr sz="1600"/>
+            </a:pPr>
+            <a:r>
+              <a:t>mx logs for the agents' own logs. Reports survive mx stop; only mx clean removes them.</a:t>
             </a:r>
           </a:p>
         </p:txBody>
@@ -5532,62 +5805,6 @@
           <a:bodyPr/>
           <a:lstStyle/>
           <a:p>
-            <a:r>
-              <a:t>Part 0 — Overview</a:t>
-            </a:r>
-          </a:p>
-        </p:txBody>
-      </p:sp>
-      <p:sp>
-        <p:nvSpPr>
-          <p:cNvPr id="3" name="Text Placeholder 2"/>
-          <p:cNvSpPr>
-            <a:spLocks noGrp="1"/>
-          </p:cNvSpPr>
-          <p:nvPr>
-            <p:ph type="body" idx="1"/>
-          </p:nvPr>
-        </p:nvSpPr>
-        <p:spPr/>
-        <p:txBody>
-          <a:bodyPr/>
-          <a:lstStyle/>
-          <a:p/>
-        </p:txBody>
-      </p:sp>
-    </p:spTree>
-  </p:cSld>
-  <p:clrMapOvr>
-    <a:masterClrMapping/>
-  </p:clrMapOvr>
-</p:sld>
-</file>
-
-<file path=ppt/slides/slide20.xml><?xml version="1.0" encoding="utf-8"?>
-<p:sld xmlns:a="http://schemas.openxmlformats.org/drawingml/2006/main" xmlns:p="http://schemas.openxmlformats.org/presentationml/2006/main" xmlns:r="http://schemas.openxmlformats.org/officeDocument/2006/relationships">
-  <p:cSld>
-    <p:spTree>
-      <p:nvGrpSpPr>
-        <p:cNvPr id="1" name=""/>
-        <p:cNvGrpSpPr/>
-        <p:nvPr/>
-      </p:nvGrpSpPr>
-      <p:grpSpPr/>
-      <p:sp>
-        <p:nvSpPr>
-          <p:cNvPr id="2" name="Title 1"/>
-          <p:cNvSpPr>
-            <a:spLocks noGrp="1"/>
-          </p:cNvSpPr>
-          <p:nvPr>
-            <p:ph type="title"/>
-          </p:nvPr>
-        </p:nvSpPr>
-        <p:spPr/>
-        <p:txBody>
-          <a:bodyPr/>
-          <a:lstStyle/>
-          <a:p>
             <a:pPr>
               <a:defRPr sz="2800" b="1">
                 <a:solidFill>
@@ -5596,7 +5813,7 @@
               </a:defRPr>
             </a:pPr>
             <a:r>
-              <a:t>How to run it — different from iperf_orchestrator</a:t>
+              <a:t>Three questions, three tools</a:t>
             </a:r>
           </a:p>
         </p:txBody>
@@ -5609,134 +5826,7 @@
         </p:nvSpPr>
         <p:spPr>
           <a:xfrm>
-            <a:off x="640080" y="1234440"/>
-            <a:ext cx="10972800" cy="1984248"/>
-          </a:xfrm>
-          <a:prstGeom prst="rect">
-            <a:avLst/>
-          </a:prstGeom>
-          <a:noFill/>
-        </p:spPr>
-        <p:txBody>
-          <a:bodyPr wrap="none">
-            <a:spAutoFit/>
-          </a:bodyPr>
-          <a:lstStyle/>
-          <a:p>
-            <a:pPr>
-              <a:defRPr sz="1300">
-                <a:solidFill>
-                  <a:srgbClr val="24354A"/>
-                </a:solidFill>
-                <a:latin typeface="Consolas"/>
-              </a:defRPr>
-            </a:pPr>
-            <a:r>
-              <a:t>printf '%s\n' 10.0.0.10 10.0.0.11 10.0.0.12 &gt; servers.txt</a:t>
-            </a:r>
-          </a:p>
-          <a:p>
-            <a:pPr>
-              <a:defRPr sz="1300">
-                <a:solidFill>
-                  <a:srgbClr val="24354A"/>
-                </a:solidFill>
-                <a:latin typeface="Consolas"/>
-              </a:defRPr>
-            </a:pPr>
-            <a:r>
-              <a:t>mx gen --servers servers.txt --pps 20000   # 1. build matrix.csv</a:t>
-            </a:r>
-          </a:p>
-          <a:p>
-            <a:pPr>
-              <a:defRPr sz="1300">
-                <a:solidFill>
-                  <a:srgbClr val="24354A"/>
-                </a:solidFill>
-                <a:latin typeface="Consolas"/>
-              </a:defRPr>
-            </a:pPr>
-            <a:r>
-              <a:t>mx start                                   # 2. deploy + run everywhere</a:t>
-            </a:r>
-          </a:p>
-          <a:p>
-            <a:pPr>
-              <a:defRPr sz="1300">
-                <a:solidFill>
-                  <a:srgbClr val="24354A"/>
-                </a:solidFill>
-                <a:latin typeface="Consolas"/>
-              </a:defRPr>
-            </a:pPr>
-            <a:r>
-              <a:t>mx status                                  # 3. running? how fast?</a:t>
-            </a:r>
-          </a:p>
-          <a:p>
-            <a:pPr>
-              <a:defRPr sz="1300">
-                <a:solidFill>
-                  <a:srgbClr val="24354A"/>
-                </a:solidFill>
-                <a:latin typeface="Consolas"/>
-              </a:defRPr>
-            </a:pPr>
-            <a:r>
-              <a:t>mx summarize                               # 4. pps / Gbps / loss / latency</a:t>
-            </a:r>
-          </a:p>
-          <a:p>
-            <a:pPr>
-              <a:defRPr sz="1300">
-                <a:solidFill>
-                  <a:srgbClr val="24354A"/>
-                </a:solidFill>
-                <a:latin typeface="Consolas"/>
-              </a:defRPr>
-            </a:pPr>
-            <a:r>
-              <a:t>mx stop                                    # 5. stop the agents</a:t>
-            </a:r>
-          </a:p>
-          <a:p>
-            <a:pPr>
-              <a:defRPr sz="1300">
-                <a:solidFill>
-                  <a:srgbClr val="24354A"/>
-                </a:solidFill>
-                <a:latin typeface="Consolas"/>
-              </a:defRPr>
-            </a:pPr>
-            <a:r>
-              <a:t>mx clean                                   # 6. leave no trace</a:t>
-            </a:r>
-          </a:p>
-          <a:p>
-            <a:pPr>
-              <a:defRPr sz="1300">
-                <a:solidFill>
-                  <a:srgbClr val="24354A"/>
-                </a:solidFill>
-                <a:latin typeface="Consolas"/>
-              </a:defRPr>
-            </a:pPr>
-            <a:r>
-              <a:t># or all of it: mx run --for 60</a:t>
-            </a:r>
-          </a:p>
-        </p:txBody>
-      </p:sp>
-      <p:sp>
-        <p:nvSpPr>
-          <p:cNvPr id="4" name="TextBox 3"/>
-          <p:cNvSpPr txBox="1"/>
-          <p:nvPr/>
-        </p:nvSpPr>
-        <p:spPr>
-          <a:xfrm>
-            <a:off x="822960" y="3355848"/>
+            <a:off x="822960" y="1234440"/>
             <a:ext cx="10607040" cy="621792"/>
           </a:xfrm>
           <a:prstGeom prst="rect">
@@ -5754,2538 +5844,21 @@
               <a:defRPr sz="1400"/>
             </a:pPr>
             <a:r>
-              <a:t>• Differences from iperf_orchestrator: servers need nothing but Python 3.6+ (no iperf2 to install); config lives in matrix.csv, not flags you re-type; pure-Python single file, stdlib only.</a:t>
-            </a:r>
-          </a:p>
-        </p:txBody>
-      </p:sp>
-      <p:sp>
-        <p:nvSpPr>
-          <p:cNvPr id="5" name="TextBox 4"/>
-          <p:cNvSpPr txBox="1"/>
-          <p:nvPr/>
-        </p:nvSpPr>
-        <p:spPr>
-          <a:xfrm>
-            <a:off x="822960" y="4050792"/>
-            <a:ext cx="10607040" cy="310896"/>
-          </a:xfrm>
-          <a:prstGeom prst="rect">
-            <a:avLst/>
-          </a:prstGeom>
-          <a:noFill/>
-        </p:spPr>
-        <p:txBody>
-          <a:bodyPr wrap="square">
-            <a:spAutoFit/>
-          </a:bodyPr>
-          <a:lstStyle/>
-          <a:p>
-            <a:pPr>
-              <a:defRPr sz="1400"/>
-            </a:pPr>
-            <a:r>
-              <a:t>• Five more when needed: run, check (will the NICs carry this?), hints (goal → command), logs, doctor.</a:t>
-            </a:r>
-          </a:p>
-        </p:txBody>
-      </p:sp>
-      <p:sp>
-        <p:nvSpPr>
-          <p:cNvPr id="6" name="TextBox 5"/>
-          <p:cNvSpPr txBox="1"/>
-          <p:nvPr/>
-        </p:nvSpPr>
-        <p:spPr>
-          <a:xfrm>
-            <a:off x="822960" y="4434840"/>
-            <a:ext cx="10607040" cy="310896"/>
-          </a:xfrm>
-          <a:prstGeom prst="rect">
-            <a:avLst/>
-          </a:prstGeom>
-          <a:noFill/>
-        </p:spPr>
-        <p:txBody>
-          <a:bodyPr wrap="square">
-            <a:spAutoFit/>
-          </a:bodyPr>
-          <a:lstStyle/>
-          <a:p>
-            <a:pPr>
-              <a:defRPr sz="1400"/>
-            </a:pPr>
-            <a:r>
-              <a:t>• Every fleet command: --user --jobs --remote-dir --python --dry-run (+ MX_* env vars).</a:t>
-            </a:r>
-          </a:p>
-        </p:txBody>
-      </p:sp>
-    </p:spTree>
-  </p:cSld>
-  <p:clrMapOvr>
-    <a:masterClrMapping/>
-  </p:clrMapOvr>
-</p:sld>
-</file>
-
-<file path=ppt/slides/slide21.xml><?xml version="1.0" encoding="utf-8"?>
-<p:sld xmlns:a="http://schemas.openxmlformats.org/drawingml/2006/main" xmlns:p="http://schemas.openxmlformats.org/presentationml/2006/main" xmlns:r="http://schemas.openxmlformats.org/officeDocument/2006/relationships">
-  <p:cSld>
-    <p:spTree>
-      <p:nvGrpSpPr>
-        <p:cNvPr id="1" name=""/>
-        <p:cNvGrpSpPr/>
-        <p:nvPr/>
-      </p:nvGrpSpPr>
-      <p:grpSpPr/>
-      <p:sp>
-        <p:nvSpPr>
-          <p:cNvPr id="2" name="Title 1"/>
-          <p:cNvSpPr>
-            <a:spLocks noGrp="1"/>
-          </p:cNvSpPr>
-          <p:nvPr>
-            <p:ph type="title"/>
-          </p:nvPr>
-        </p:nvSpPr>
-        <p:spPr/>
-        <p:txBody>
-          <a:bodyPr/>
-          <a:lstStyle/>
-          <a:p>
-            <a:pPr>
-              <a:defRPr sz="2800" b="1">
-                <a:solidFill>
-                  <a:srgbClr val="1C2B3A"/>
-                </a:solidFill>
-              </a:defRPr>
-            </a:pPr>
-            <a:r>
-              <a:t>The matrix file — and changing the run mid-stream</a:t>
-            </a:r>
-          </a:p>
-        </p:txBody>
-      </p:sp>
-      <p:sp>
-        <p:nvSpPr>
-          <p:cNvPr id="3" name="TextBox 2"/>
-          <p:cNvSpPr txBox="1"/>
-          <p:nvPr/>
-        </p:nvSpPr>
-        <p:spPr>
-          <a:xfrm>
-            <a:off x="640080" y="1234440"/>
-            <a:ext cx="10972800" cy="1545336"/>
-          </a:xfrm>
-          <a:prstGeom prst="rect">
-            <a:avLst/>
-          </a:prstGeom>
-          <a:noFill/>
-        </p:spPr>
-        <p:txBody>
-          <a:bodyPr wrap="none">
-            <a:spAutoFit/>
-          </a:bodyPr>
-          <a:lstStyle/>
-          <a:p>
-            <a:pPr>
-              <a:defRPr sz="1300">
-                <a:solidFill>
-                  <a:srgbClr val="24354A"/>
-                </a:solidFill>
-                <a:latin typeface="Consolas"/>
-              </a:defRPr>
-            </a:pPr>
-            <a:r>
-              <a:t># mx matrix v1 -- rows send, columns receive, cells are packets/sec</a:t>
-            </a:r>
-          </a:p>
-          <a:p>
-            <a:pPr>
-              <a:defRPr sz="1300">
-                <a:solidFill>
-                  <a:srgbClr val="24354A"/>
-                </a:solidFill>
-                <a:latin typeface="Consolas"/>
-              </a:defRPr>
-            </a:pPr>
-            <a:r>
-              <a:t># tx_size=64 rx_size=512 port=5300</a:t>
-            </a:r>
-          </a:p>
-          <a:p>
-            <a:pPr>
-              <a:defRPr sz="1300">
-                <a:solidFill>
-                  <a:srgbClr val="24354A"/>
-                </a:solidFill>
-                <a:latin typeface="Consolas"/>
-              </a:defRPr>
-            </a:pPr>
-            <a:r>
-              <a:t>src\dst,10.0.0.10,10.0.0.11,10.0.0.12</a:t>
-            </a:r>
-          </a:p>
-          <a:p>
-            <a:pPr>
-              <a:defRPr sz="1300">
-                <a:solidFill>
-                  <a:srgbClr val="24354A"/>
-                </a:solidFill>
-                <a:latin typeface="Consolas"/>
-              </a:defRPr>
-            </a:pPr>
-            <a:r>
-              <a:t>10.0.0.10,,20000,20000</a:t>
-            </a:r>
-          </a:p>
-          <a:p>
-            <a:pPr>
-              <a:defRPr sz="1300">
-                <a:solidFill>
-                  <a:srgbClr val="24354A"/>
-                </a:solidFill>
-                <a:latin typeface="Consolas"/>
-              </a:defRPr>
-            </a:pPr>
-            <a:r>
-              <a:t>10.0.0.11,5000,,max</a:t>
-            </a:r>
-          </a:p>
-          <a:p>
-            <a:pPr>
-              <a:defRPr sz="1300">
-                <a:solidFill>
-                  <a:srgbClr val="24354A"/>
-                </a:solidFill>
-                <a:latin typeface="Consolas"/>
-              </a:defRPr>
-            </a:pPr>
-            <a:r>
-              <a:t>10.0.0.12,20000,20000,</a:t>
-            </a:r>
-          </a:p>
-        </p:txBody>
-      </p:sp>
-      <p:sp>
-        <p:nvSpPr>
-          <p:cNvPr id="4" name="TextBox 3"/>
-          <p:cNvSpPr txBox="1"/>
-          <p:nvPr/>
-        </p:nvSpPr>
-        <p:spPr>
-          <a:xfrm>
-            <a:off x="822960" y="2916936"/>
-            <a:ext cx="10607040" cy="310896"/>
-          </a:xfrm>
-          <a:prstGeom prst="rect">
-            <a:avLst/>
-          </a:prstGeom>
-          <a:noFill/>
-        </p:spPr>
-        <p:txBody>
-          <a:bodyPr wrap="square">
-            <a:spAutoFit/>
-          </a:bodyPr>
-          <a:lstStyle/>
-          <a:p>
-            <a:pPr>
-              <a:defRPr sz="1400"/>
-            </a:pPr>
-            <a:r>
-              <a:t>• Everything about the traffic lives here; no command needs the flags again. Host tokens: name[=addr[:port]].</a:t>
-            </a:r>
-          </a:p>
-        </p:txBody>
-      </p:sp>
-      <p:sp>
-        <p:nvSpPr>
-          <p:cNvPr id="5" name="TextBox 4"/>
-          <p:cNvSpPr txBox="1"/>
-          <p:nvPr/>
-        </p:nvSpPr>
-        <p:spPr>
-          <a:xfrm>
-            <a:off x="822960" y="3300984"/>
-            <a:ext cx="10607040" cy="310896"/>
-          </a:xfrm>
-          <a:prstGeom prst="rect">
-            <a:avLst/>
-          </a:prstGeom>
-          <a:noFill/>
-        </p:spPr>
-        <p:txBody>
-          <a:bodyPr wrap="square">
-            <a:spAutoFit/>
-          </a:bodyPr>
-          <a:lstStyle/>
-          <a:p>
-            <a:pPr>
-              <a:defRPr sz="1400"/>
-            </a:pPr>
-            <a:r>
-              <a:t>• Mid-stream = edit + mx start again (agents redeploy in seconds):</a:t>
-            </a:r>
-          </a:p>
-        </p:txBody>
-      </p:sp>
-      <p:sp>
-        <p:nvSpPr>
-          <p:cNvPr id="6" name="TextBox 5"/>
-          <p:cNvSpPr txBox="1"/>
-          <p:nvPr/>
-        </p:nvSpPr>
-        <p:spPr>
-          <a:xfrm>
-            <a:off x="1143000" y="3685032"/>
-            <a:ext cx="10287000" cy="310896"/>
-          </a:xfrm>
-          <a:prstGeom prst="rect">
-            <a:avLst/>
-          </a:prstGeom>
-          <a:noFill/>
-        </p:spPr>
-        <p:txBody>
-          <a:bodyPr wrap="square">
-            <a:spAutoFit/>
-          </a:bodyPr>
-          <a:lstStyle/>
-          <a:p>
-            <a:pPr>
-              <a:defRPr sz="1250"/>
-            </a:pPr>
-            <a:r>
-              <a:t>• blank a cell → that flow is gone</a:t>
-            </a:r>
-          </a:p>
-        </p:txBody>
-      </p:sp>
-      <p:sp>
-        <p:nvSpPr>
-          <p:cNvPr id="7" name="TextBox 6"/>
-          <p:cNvSpPr txBox="1"/>
-          <p:nvPr/>
-        </p:nvSpPr>
-        <p:spPr>
-          <a:xfrm>
-            <a:off x="1143000" y="4069080"/>
-            <a:ext cx="10287000" cy="310896"/>
-          </a:xfrm>
-          <a:prstGeom prst="rect">
-            <a:avLst/>
-          </a:prstGeom>
-          <a:noFill/>
-        </p:spPr>
-        <p:txBody>
-          <a:bodyPr wrap="square">
-            <a:spAutoFit/>
-          </a:bodyPr>
-          <a:lstStyle/>
-          <a:p>
-            <a:pPr>
-              <a:defRPr sz="1250"/>
-            </a:pPr>
-            <a:r>
-              <a:t>• change a cell → that pair gets its own rate</a:t>
-            </a:r>
-          </a:p>
-        </p:txBody>
-      </p:sp>
-      <p:sp>
-        <p:nvSpPr>
-          <p:cNvPr id="8" name="TextBox 7"/>
-          <p:cNvSpPr txBox="1"/>
-          <p:nvPr/>
-        </p:nvSpPr>
-        <p:spPr>
-          <a:xfrm>
-            <a:off x="1143000" y="4453128"/>
-            <a:ext cx="10287000" cy="310896"/>
-          </a:xfrm>
-          <a:prstGeom prst="rect">
-            <a:avLst/>
-          </a:prstGeom>
-          <a:noFill/>
-        </p:spPr>
-        <p:txBody>
-          <a:bodyPr wrap="square">
-            <a:spAutoFit/>
-          </a:bodyPr>
-          <a:lstStyle/>
-          <a:p>
-            <a:pPr>
-              <a:defRPr sz="1250"/>
-            </a:pPr>
-            <a:r>
-              <a:t>• write max → that pair runs unpaced</a:t>
-            </a:r>
-          </a:p>
-        </p:txBody>
-      </p:sp>
-      <p:sp>
-        <p:nvSpPr>
-          <p:cNvPr id="9" name="TextBox 8"/>
-          <p:cNvSpPr txBox="1"/>
-          <p:nvPr/>
-        </p:nvSpPr>
-        <p:spPr>
-          <a:xfrm>
-            <a:off x="1143000" y="4837176"/>
-            <a:ext cx="10287000" cy="310896"/>
-          </a:xfrm>
-          <a:prstGeom prst="rect">
-            <a:avLst/>
-          </a:prstGeom>
-          <a:noFill/>
-        </p:spPr>
-        <p:txBody>
-          <a:bodyPr wrap="square">
-            <a:spAutoFit/>
-          </a:bodyPr>
-          <a:lstStyle/>
-          <a:p>
-            <a:pPr>
-              <a:defRPr sz="1250"/>
-            </a:pPr>
-            <a:r>
-              <a:t>• edit the header → reshape sizes / port</a:t>
-            </a:r>
-          </a:p>
-        </p:txBody>
-      </p:sp>
-      <p:sp>
-        <p:nvSpPr>
-          <p:cNvPr id="10" name="TextBox 9"/>
-          <p:cNvSpPr txBox="1"/>
-          <p:nvPr/>
-        </p:nvSpPr>
-        <p:spPr>
-          <a:xfrm>
-            <a:off x="822960" y="5221224"/>
-            <a:ext cx="10607040" cy="621792"/>
-          </a:xfrm>
-          <a:prstGeom prst="rect">
-            <a:avLst/>
-          </a:prstGeom>
-          <a:noFill/>
-        </p:spPr>
-        <p:txBody>
-          <a:bodyPr wrap="square">
-            <a:spAutoFit/>
-          </a:bodyPr>
-          <a:lstStyle/>
-          <a:p>
-            <a:pPr>
-              <a:defRPr sz="1400"/>
-            </a:pPr>
-            <a:r>
-              <a:t>• Non-uniform investigations ("only cross-rack pairs", "one hot pair unpaced") are text edits, not new features.</a:t>
-            </a:r>
-          </a:p>
-        </p:txBody>
-      </p:sp>
-    </p:spTree>
-  </p:cSld>
-  <p:clrMapOvr>
-    <a:masterClrMapping/>
-  </p:clrMapOvr>
-</p:sld>
-</file>
-
-<file path=ppt/slides/slide22.xml><?xml version="1.0" encoding="utf-8"?>
-<p:sld xmlns:a="http://schemas.openxmlformats.org/drawingml/2006/main" xmlns:p="http://schemas.openxmlformats.org/presentationml/2006/main" xmlns:r="http://schemas.openxmlformats.org/officeDocument/2006/relationships">
-  <p:cSld>
-    <p:spTree>
-      <p:nvGrpSpPr>
-        <p:cNvPr id="1" name=""/>
-        <p:cNvGrpSpPr/>
-        <p:nvPr/>
-      </p:nvGrpSpPr>
-      <p:grpSpPr/>
-      <p:sp>
-        <p:nvSpPr>
-          <p:cNvPr id="2" name="Title 1"/>
-          <p:cNvSpPr>
-            <a:spLocks noGrp="1"/>
-          </p:cNvSpPr>
-          <p:nvPr>
-            <p:ph type="title"/>
-          </p:nvPr>
-        </p:nvSpPr>
-        <p:spPr/>
-        <p:txBody>
-          <a:bodyPr/>
-          <a:lstStyle/>
-          <a:p>
-            <a:pPr>
-              <a:defRPr sz="2800" b="1">
-                <a:solidFill>
-                  <a:srgbClr val="1C2B3A"/>
-                </a:solidFill>
-              </a:defRPr>
-            </a:pPr>
-            <a:r>
-              <a:t>Getting results</a:t>
-            </a:r>
-          </a:p>
-        </p:txBody>
-      </p:sp>
-      <p:sp>
-        <p:nvSpPr>
-          <p:cNvPr id="3" name="Content Placeholder 2"/>
-          <p:cNvSpPr>
-            <a:spLocks noGrp="1"/>
-          </p:cNvSpPr>
-          <p:nvPr>
-            <p:ph idx="1"/>
-          </p:nvPr>
-        </p:nvSpPr>
-        <p:spPr/>
-        <p:txBody>
-          <a:bodyPr wrap="square">
-            <a:normAutofit/>
-          </a:bodyPr>
-          <a:lstStyle/>
-          <a:p>
-            <a:pPr>
-              <a:defRPr sz="1600"/>
-            </a:pPr>
-            <a:r>
-              <a:t>mx status --watch 5 — live ticker, one line per host.</a:t>
-            </a:r>
-          </a:p>
-          <a:p>
-            <a:pPr>
-              <a:defRPr sz="1600"/>
-            </a:pPr>
-            <a:r>
-              <a:t>mx summarize — fleet totals, per-host table (worst delivery first), worst flows, and a computed WHAT TO DO NEXT.</a:t>
-            </a:r>
-          </a:p>
-          <a:p>
-            <a:pPr>
-              <a:defRPr sz="1600"/>
-            </a:pPr>
-            <a:r>
-              <a:t>mx summarize --grid g — N×N CSVs in the matrix's shape: pps, delivered, loss, rtt_p99. Dark row = sick sender; dark column = sick receiver; dark block = congested pair of leaves.</a:t>
-            </a:r>
-          </a:p>
-          <a:p>
-            <a:pPr>
-              <a:defRPr sz="1600"/>
-            </a:pPr>
-            <a:r>
-              <a:t>reports/&lt;host&gt;.csv — one row per flow per interval (pps, loss, RTT percentiles, CPU, workers). Plain CSV; plot with anything.</a:t>
-            </a:r>
-          </a:p>
-          <a:p>
-            <a:pPr>
-              <a:defRPr sz="1600"/>
-            </a:pPr>
-            <a:r>
-              <a:t>mx logs for the agents' own logs. Reports survive mx stop; only mx clean removes them.</a:t>
-            </a:r>
-          </a:p>
-        </p:txBody>
-      </p:sp>
-    </p:spTree>
-  </p:cSld>
-  <p:clrMapOvr>
-    <a:masterClrMapping/>
-  </p:clrMapOvr>
-</p:sld>
-</file>
-
-<file path=ppt/slides/slide23.xml><?xml version="1.0" encoding="utf-8"?>
-<p:sld xmlns:a="http://schemas.openxmlformats.org/drawingml/2006/main" xmlns:p="http://schemas.openxmlformats.org/presentationml/2006/main" xmlns:r="http://schemas.openxmlformats.org/officeDocument/2006/relationships">
-  <p:cSld>
-    <p:spTree>
-      <p:nvGrpSpPr>
-        <p:cNvPr id="1" name=""/>
-        <p:cNvGrpSpPr/>
-        <p:nvPr/>
-      </p:nvGrpSpPr>
-      <p:grpSpPr/>
-      <p:sp>
-        <p:nvSpPr>
-          <p:cNvPr id="2" name="Title 1"/>
-          <p:cNvSpPr>
-            <a:spLocks noGrp="1"/>
-          </p:cNvSpPr>
-          <p:nvPr>
-            <p:ph type="title"/>
-          </p:nvPr>
-        </p:nvSpPr>
-        <p:spPr/>
-        <p:txBody>
-          <a:bodyPr/>
-          <a:lstStyle/>
-          <a:p>
-            <a:pPr>
-              <a:defRPr sz="2800" b="1">
-                <a:solidFill>
-                  <a:srgbClr val="1C2B3A"/>
-                </a:solidFill>
-              </a:defRPr>
-            </a:pPr>
-            <a:r>
-              <a:t>Interpreting the summary</a:t>
-            </a:r>
-          </a:p>
-        </p:txBody>
-      </p:sp>
-      <p:sp>
-        <p:nvSpPr>
-          <p:cNvPr id="3" name="TextBox 2"/>
-          <p:cNvSpPr txBox="1"/>
-          <p:nvPr/>
-        </p:nvSpPr>
-        <p:spPr>
-          <a:xfrm>
-            <a:off x="640080" y="1234440"/>
-            <a:ext cx="10972800" cy="1545336"/>
-          </a:xfrm>
-          <a:prstGeom prst="rect">
-            <a:avLst/>
-          </a:prstGeom>
-          <a:noFill/>
-        </p:spPr>
-        <p:txBody>
-          <a:bodyPr wrap="none">
-            <a:spAutoFit/>
-          </a:bodyPr>
-          <a:lstStyle/>
-          <a:p>
-            <a:pPr>
-              <a:defRPr sz="1300">
-                <a:solidFill>
-                  <a:srgbClr val="24354A"/>
-                </a:solidFill>
-                <a:latin typeface="Consolas"/>
-              </a:defRPr>
-            </a:pPr>
-            <a:r>
-              <a:t>REQUESTS   2.640 Mpps   2.75 Gbps wire</a:t>
-            </a:r>
-          </a:p>
-          <a:p>
-            <a:pPr>
-              <a:defRPr sz="1300">
-                <a:solidFill>
-                  <a:srgbClr val="24354A"/>
-                </a:solidFill>
-                <a:latin typeface="Consolas"/>
-              </a:defRPr>
-            </a:pPr>
-            <a:r>
-              <a:t>DELIVERED  2.601 Mpps   98.52% of what was sent</a:t>
-            </a:r>
-          </a:p>
-          <a:p>
-            <a:pPr>
-              <a:defRPr sz="1300">
-                <a:solidFill>
-                  <a:srgbClr val="24354A"/>
-                </a:solidFill>
-                <a:latin typeface="Consolas"/>
-              </a:defRPr>
-            </a:pPr>
-            <a:r>
-              <a:t>REPLIES    2.598 Mpps   2.71 Gbps wire</a:t>
-            </a:r>
-          </a:p>
-          <a:p>
-            <a:pPr>
-              <a:defRPr sz="1300">
-                <a:solidFill>
-                  <a:srgbClr val="24354A"/>
-                </a:solidFill>
-                <a:latin typeface="Consolas"/>
-              </a:defRPr>
-            </a:pPr>
-            <a:r>
-              <a:t>TARGET     2.640 Mpps   100.0% achieved</a:t>
-            </a:r>
-          </a:p>
-          <a:p>
-            <a:pPr>
-              <a:defRPr sz="1300">
-                <a:solidFill>
-                  <a:srgbClr val="24354A"/>
-                </a:solidFill>
-                <a:latin typeface="Consolas"/>
-              </a:defRPr>
-            </a:pPr>
-            <a:r>
-              <a:t>LOSS       1.59% round trip (1.48% forward, 0.11% back)</a:t>
-            </a:r>
-          </a:p>
-          <a:p>
-            <a:pPr>
-              <a:defRPr sz="1300">
-                <a:solidFill>
-                  <a:srgbClr val="24354A"/>
-                </a:solidFill>
-                <a:latin typeface="Consolas"/>
-              </a:defRPr>
-            </a:pPr>
-            <a:r>
-              <a:t>RTT        avg 240us; worst flow p50 190us p99 4.1ms max 31ms</a:t>
-            </a:r>
-          </a:p>
-        </p:txBody>
-      </p:sp>
-      <p:sp>
-        <p:nvSpPr>
-          <p:cNvPr id="4" name="TextBox 3"/>
-          <p:cNvSpPr txBox="1"/>
-          <p:nvPr/>
-        </p:nvSpPr>
-        <p:spPr>
-          <a:xfrm>
-            <a:off x="822960" y="2916936"/>
-            <a:ext cx="10607040" cy="310896"/>
-          </a:xfrm>
-          <a:prstGeom prst="rect">
-            <a:avLst/>
-          </a:prstGeom>
-          <a:noFill/>
-        </p:spPr>
-        <p:txBody>
-          <a:bodyPr wrap="square">
-            <a:spAutoFit/>
-          </a:bodyPr>
-          <a:lstStyle/>
-          <a:p>
-            <a:pPr>
-              <a:defRPr sz="1400"/>
-            </a:pPr>
-            <a:r>
-              <a:t>• DELIVERED is the honest number — senders can't see their own drops.</a:t>
-            </a:r>
-          </a:p>
-        </p:txBody>
-      </p:sp>
-      <p:sp>
-        <p:nvSpPr>
-          <p:cNvPr id="5" name="TextBox 4"/>
-          <p:cNvSpPr txBox="1"/>
-          <p:nvPr/>
-        </p:nvSpPr>
-        <p:spPr>
-          <a:xfrm>
-            <a:off x="822960" y="3300984"/>
-            <a:ext cx="10607040" cy="310896"/>
-          </a:xfrm>
-          <a:prstGeom prst="rect">
-            <a:avLst/>
-          </a:prstGeom>
-          <a:noFill/>
-        </p:spPr>
-        <p:txBody>
-          <a:bodyPr wrap="square">
-            <a:spAutoFit/>
-          </a:bodyPr>
-          <a:lstStyle/>
-          <a:p>
-            <a:pPr>
-              <a:defRPr sz="1400"/>
-            </a:pPr>
-            <a:r>
-              <a:t>• Loss split by leg — dropping 64 B requests vs dropping 8 KB replies need different fixes.</a:t>
-            </a:r>
-          </a:p>
-        </p:txBody>
-      </p:sp>
-      <p:sp>
-        <p:nvSpPr>
-          <p:cNvPr id="6" name="TextBox 5"/>
-          <p:cNvSpPr txBox="1"/>
-          <p:nvPr/>
-        </p:nvSpPr>
-        <p:spPr>
-          <a:xfrm>
-            <a:off x="822960" y="3685032"/>
-            <a:ext cx="10607040" cy="310896"/>
-          </a:xfrm>
-          <a:prstGeom prst="rect">
-            <a:avLst/>
-          </a:prstGeom>
-          <a:noFill/>
-        </p:spPr>
-        <p:txBody>
-          <a:bodyPr wrap="square">
-            <a:spAutoFit/>
-          </a:bodyPr>
-          <a:lstStyle/>
-          <a:p>
-            <a:pPr>
-              <a:defRPr sz="1400"/>
-            </a:pPr>
-            <a:r>
-              <a:t>• RTT is a true round trip — the stamp comes back; no clock sync involved.</a:t>
-            </a:r>
-          </a:p>
-        </p:txBody>
-      </p:sp>
-      <p:sp>
-        <p:nvSpPr>
-          <p:cNvPr id="7" name="TextBox 6"/>
-          <p:cNvSpPr txBox="1"/>
-          <p:nvPr/>
-        </p:nvSpPr>
-        <p:spPr>
-          <a:xfrm>
-            <a:off x="822960" y="4069080"/>
-            <a:ext cx="10607040" cy="932688"/>
-          </a:xfrm>
-          <a:prstGeom prst="rect">
-            <a:avLst/>
-          </a:prstGeom>
-          <a:noFill/>
-        </p:spPr>
-        <p:txBody>
-          <a:bodyPr wrap="square">
-            <a:spAutoFit/>
-          </a:bodyPr>
-          <a:lstStyle/>
-          <a:p>
-            <a:pPr>
-              <a:defRPr sz="1400"/>
-            </a:pPr>
-            <a:r>
-              <a:t>• Per-host CPU columns: cpu (box) / 1 core (busiest core) / agent (busiest worker as share of one core). agent ≈ 100% ⇒ you're measuring the tool, not the network — add workers (spare cores) or hosts; the summary says so in as many words.</a:t>
-            </a:r>
-          </a:p>
-        </p:txBody>
-      </p:sp>
-      <p:sp>
-        <p:nvSpPr>
-          <p:cNvPr id="8" name="TextBox 7"/>
-          <p:cNvSpPr txBox="1"/>
-          <p:nvPr/>
-        </p:nvSpPr>
-        <p:spPr>
-          <a:xfrm>
-            <a:off x="822960" y="5074920"/>
-            <a:ext cx="10607040" cy="1243584"/>
-          </a:xfrm>
-          <a:prstGeom prst="rect">
-            <a:avLst/>
-          </a:prstGeom>
-          <a:noFill/>
-        </p:spPr>
-        <p:txBody>
-          <a:bodyPr wrap="square">
-            <a:spAutoFit/>
-          </a:bodyPr>
-          <a:lstStyle/>
-          <a:p>
-            <a:pPr>
-              <a:defRPr sz="1400"/>
-            </a:pPr>
-            <a:r>
-              <a:t>• Performance model: ~200k pps × workers × hosts. Processes, not threads (GIL: 4 threads = 57k pps; 4 processes = 1.09M). One core pegged while the box idles? Workers can't outnumber flows → --streams N gives each pair N sockets (rate split, not multiplied) so workers/RSS/ECMP have tuples to spread: mx start --streams 8 --workers 32.</a:t>
-            </a:r>
-          </a:p>
-        </p:txBody>
-      </p:sp>
-    </p:spTree>
-  </p:cSld>
-  <p:clrMapOvr>
-    <a:masterClrMapping/>
-  </p:clrMapOvr>
-</p:sld>
-</file>
-
-<file path=ppt/slides/slide24.xml><?xml version="1.0" encoding="utf-8"?>
-<p:sld xmlns:a="http://schemas.openxmlformats.org/drawingml/2006/main" xmlns:p="http://schemas.openxmlformats.org/presentationml/2006/main" xmlns:r="http://schemas.openxmlformats.org/officeDocument/2006/relationships">
-  <p:cSld>
-    <p:spTree>
-      <p:nvGrpSpPr>
-        <p:cNvPr id="1" name=""/>
-        <p:cNvGrpSpPr/>
-        <p:nvPr/>
-      </p:nvGrpSpPr>
-      <p:grpSpPr/>
-      <p:sp>
-        <p:nvSpPr>
-          <p:cNvPr id="2" name="Title 1"/>
-          <p:cNvSpPr>
-            <a:spLocks noGrp="1"/>
-          </p:cNvSpPr>
-          <p:nvPr>
-            <p:ph type="title"/>
-          </p:nvPr>
-        </p:nvSpPr>
-        <p:spPr/>
-        <p:txBody>
-          <a:bodyPr/>
-          <a:lstStyle/>
-          <a:p>
-            <a:pPr>
-              <a:defRPr sz="2800" b="1">
-                <a:solidFill>
-                  <a:srgbClr val="1C2B3A"/>
-                </a:solidFill>
-              </a:defRPr>
-            </a:pPr>
-            <a:r>
-              <a:t>Finding the limit — and common options</a:t>
-            </a:r>
-          </a:p>
-        </p:txBody>
-      </p:sp>
-      <p:sp>
-        <p:nvSpPr>
-          <p:cNvPr id="3" name="Content Placeholder 2"/>
-          <p:cNvSpPr>
-            <a:spLocks noGrp="1"/>
-          </p:cNvSpPr>
-          <p:nvPr>
-            <p:ph idx="1"/>
-          </p:nvPr>
-        </p:nvSpPr>
-        <p:spPr/>
-        <p:txBody>
-          <a:bodyPr wrap="square">
-            <a:normAutofit/>
-          </a:bodyPr>
-          <a:lstStyle/>
-          <a:p>
-            <a:pPr>
-              <a:defRPr sz="1600"/>
-            </a:pPr>
-            <a:r>
-              <a:t>mx check --nic-gbps 25 --nic-mpps 15 first — was what you asked for even possible?</a:t>
-            </a:r>
-          </a:p>
-          <a:p>
-            <a:pPr>
-              <a:defRPr sz="1600"/>
-            </a:pPr>
-            <a:r>
-              <a:t>Ramp: --pps 50000 → run → --pps 100000 → … The last rate that delivers cleanly is the fleet's sustainable all-to-all packet rate.</a:t>
-            </a:r>
-          </a:p>
-          <a:p>
-            <a:pPr>
-              <a:defRPr sz="1600"/>
-            </a:pPr>
-            <a:r>
-              <a:t>Watch in order: (1) p99 lifting off the p50 — queues filling, usually before loss; (2) DELIVERED falling behind REQUESTS — something's dropping.</a:t>
-            </a:r>
-          </a:p>
-          <a:p>
-            <a:pPr>
-              <a:defRPr sz="1600"/>
-            </a:pPr>
-            <a:r>
-              <a:t>--pps max = unpaced: finds the ceiling fastest, tells you less about where it is.</a:t>
-            </a:r>
-          </a:p>
-          <a:p>
-            <a:pPr>
-              <a:defRPr sz="1600"/>
-            </a:pPr>
-            <a:r>
-              <a:t>Common shapes: --tx-size 64 --rx-size 64 --pps max (small-packet torture) · --tx-size 128 --rx-size 8192 (RPC) · --gbps 10 --tx-size 1400 (bandwidth-budget sizing) · mx start --bind eth1 (data-NIC pinning — retargets peers' addresses too, both halves of the two-NIC job).</a:t>
-            </a:r>
-          </a:p>
-        </p:txBody>
-      </p:sp>
-    </p:spTree>
-  </p:cSld>
-  <p:clrMapOvr>
-    <a:masterClrMapping/>
-  </p:clrMapOvr>
-</p:sld>
-</file>
-
-<file path=ppt/slides/slide25.xml><?xml version="1.0" encoding="utf-8"?>
-<p:sld xmlns:a="http://schemas.openxmlformats.org/drawingml/2006/main" xmlns:p="http://schemas.openxmlformats.org/presentationml/2006/main" xmlns:r="http://schemas.openxmlformats.org/officeDocument/2006/relationships">
-  <p:cSld>
-    <p:spTree>
-      <p:nvGrpSpPr>
-        <p:cNvPr id="1" name=""/>
-        <p:cNvGrpSpPr/>
-        <p:nvPr/>
-      </p:nvGrpSpPr>
-      <p:grpSpPr/>
-      <p:sp>
-        <p:nvSpPr>
-          <p:cNvPr id="2" name="Title 1"/>
-          <p:cNvSpPr>
-            <a:spLocks noGrp="1"/>
-          </p:cNvSpPr>
-          <p:nvPr>
-            <p:ph type="title"/>
-          </p:nvPr>
-        </p:nvSpPr>
-        <p:spPr/>
-        <p:txBody>
-          <a:bodyPr/>
-          <a:lstStyle/>
-          <a:p>
-            <a:pPr>
-              <a:defRPr sz="2800" b="1">
-                <a:solidFill>
-                  <a:srgbClr val="1C2B3A"/>
-                </a:solidFill>
-              </a:defRPr>
-            </a:pPr>
-            <a:r>
-              <a:t>Ways to run at different scales — getting the best run</a:t>
-            </a:r>
-          </a:p>
-        </p:txBody>
-      </p:sp>
-      <p:sp>
-        <p:nvSpPr>
-          <p:cNvPr id="3" name="Content Placeholder 2"/>
-          <p:cNvSpPr>
-            <a:spLocks noGrp="1"/>
-          </p:cNvSpPr>
-          <p:nvPr>
-            <p:ph idx="1"/>
-          </p:nvPr>
-        </p:nvSpPr>
-        <p:spPr/>
-        <p:txBody>
-          <a:bodyPr wrap="square">
-            <a:normAutofit/>
-          </a:bodyPr>
-          <a:lstStyle/>
-          <a:p>
-            <a:pPr>
-              <a:defRPr sz="1600"/>
-            </a:pPr>
-            <a:r>
-              <a:t>Small fleet (≤ ~30): full mesh (default gen). Every pair, continuously — the forensic shape. Big box, few peers? add --streams.</a:t>
-            </a:r>
-          </a:p>
-          <a:p>
-            <a:pPr>
-              <a:defRPr sz="1600"/>
-            </a:pPr>
-            <a:r>
-              <a:t>Large fleet: --peers K — k-regular shuffle: each host talks to exactly K shuffled peers. Equal per-host load by construction (K superimposed permutations), K sockets instead of N−1, seeded + replayable (--seed). --streams S multiplies 4-tuples for ECMP coverage; a host holds K×S sockets.</a:t>
-            </a:r>
-          </a:p>
-          <a:p>
-            <a:pPr>
-              <a:defRPr sz="1600"/>
-            </a:pPr>
-            <a:r>
-              <a:t>Full pair coverage at huge N: --peers K --dwell T — layered rotation: the N−1 shifts of the shuffle are dealt out K at a time into ⌈(N−1)/K⌉ edge-disjoint layers; agents switch layers on their own wall clock (no control channel). After one cycle every ordered pair measured exactly once; per-host load never changes. 1000 hosts: full coverage every ~6 min on 8 sockets (--dwell 3 --interval 1). --equal-layers for dip-free soaks; COVERAGE section + coverage_grid.csv report progress.</a:t>
-            </a:r>
-          </a:p>
-          <a:p>
-            <a:pPr>
-              <a:defRPr sz="1600"/>
-            </a:pPr>
-            <a:r>
-              <a:t>Dwell floor: whole multiple of --interval; useful floor ≈ 3× interval.</a:t>
-            </a:r>
-          </a:p>
-          <a:p>
-            <a:pPr>
-              <a:defRPr sz="1600"/>
-            </a:pPr>
-            <a:r>
-              <a:t>Don't want to remember this? mx hints --servers s.txt --pps-per-host N does the arithmetic and prints the command.</a:t>
-            </a:r>
-          </a:p>
-        </p:txBody>
-      </p:sp>
-    </p:spTree>
-  </p:cSld>
-  <p:clrMapOvr>
-    <a:masterClrMapping/>
-  </p:clrMapOvr>
-</p:sld>
-</file>
-
-<file path=ppt/slides/slide26.xml><?xml version="1.0" encoding="utf-8"?>
-<p:sld xmlns:a="http://schemas.openxmlformats.org/drawingml/2006/main" xmlns:p="http://schemas.openxmlformats.org/presentationml/2006/main" xmlns:r="http://schemas.openxmlformats.org/officeDocument/2006/relationships">
-  <p:cSld>
-    <p:spTree>
-      <p:nvGrpSpPr>
-        <p:cNvPr id="1" name=""/>
-        <p:cNvGrpSpPr/>
-        <p:nvPr/>
-      </p:nvGrpSpPr>
-      <p:grpSpPr/>
-      <p:sp>
-        <p:nvSpPr>
-          <p:cNvPr id="2" name="Title 1"/>
-          <p:cNvSpPr>
-            <a:spLocks noGrp="1"/>
-          </p:cNvSpPr>
-          <p:nvPr>
-            <p:ph type="title"/>
-          </p:nvPr>
-        </p:nvSpPr>
-        <p:spPr/>
-        <p:txBody>
-          <a:bodyPr/>
-          <a:lstStyle/>
-          <a:p>
-            <a:pPr>
-              <a:defRPr sz="2800" b="1">
-                <a:solidFill>
-                  <a:srgbClr val="1C2B3A"/>
-                </a:solidFill>
-              </a:defRPr>
-            </a:pPr>
-            <a:r>
-              <a:t>Stopping and cleaning up</a:t>
-            </a:r>
-          </a:p>
-        </p:txBody>
-      </p:sp>
-      <p:sp>
-        <p:nvSpPr>
-          <p:cNvPr id="3" name="Content Placeholder 2"/>
-          <p:cNvSpPr>
-            <a:spLocks noGrp="1"/>
-          </p:cNvSpPr>
-          <p:nvPr>
-            <p:ph idx="1"/>
-          </p:nvPr>
-        </p:nvSpPr>
-        <p:spPr/>
-        <p:txBody>
-          <a:bodyPr wrap="square">
-            <a:normAutofit/>
-          </a:bodyPr>
-          <a:lstStyle/>
-          <a:p>
-            <a:pPr>
-              <a:defRPr sz="1600"/>
-            </a:pPr>
-            <a:r>
-              <a:t>Everything on a server lives in one directory (/var/tmp/mx; --remote-dir to change): agent, matrix, log, report. No package, no sysctl, no unit file.</a:t>
-            </a:r>
-          </a:p>
-          <a:p>
-            <a:pPr>
-              <a:defRPr sz="1600"/>
-            </a:pPr>
-            <a:r>
-              <a:t>mx stop — agents halt; reports and logs stay for later collection.</a:t>
-            </a:r>
-          </a:p>
-          <a:p>
-            <a:pPr>
-              <a:defRPr sz="1600"/>
-            </a:pPr>
-            <a:r>
-              <a:t>Take mx logs and mx summarize first — then mx clean.</a:t>
-            </a:r>
-          </a:p>
-          <a:p>
-            <a:pPr>
-              <a:defRPr sz="1600"/>
-            </a:pPr>
-            <a:r>
-              <a:t>mx clean refuses to report success unless the directory is verifiably gone and no agent still runs.</a:t>
-            </a:r>
-          </a:p>
-          <a:p>
-            <a:pPr>
-              <a:defRPr sz="1600"/>
-            </a:pPr>
-            <a:r>
-              <a:t>Agents flush the current interval on SIGTERM — stopping doesn't discard the last seconds of data.</a:t>
-            </a:r>
-          </a:p>
-        </p:txBody>
-      </p:sp>
-    </p:spTree>
-  </p:cSld>
-  <p:clrMapOvr>
-    <a:masterClrMapping/>
-  </p:clrMapOvr>
-</p:sld>
-</file>
-
-<file path=ppt/slides/slide27.xml><?xml version="1.0" encoding="utf-8"?>
-<p:sld xmlns:a="http://schemas.openxmlformats.org/drawingml/2006/main" xmlns:p="http://schemas.openxmlformats.org/presentationml/2006/main" xmlns:r="http://schemas.openxmlformats.org/officeDocument/2006/relationships">
-  <p:cSld>
-    <p:spTree>
-      <p:nvGrpSpPr>
-        <p:cNvPr id="1" name=""/>
-        <p:cNvGrpSpPr/>
-        <p:nvPr/>
-      </p:nvGrpSpPr>
-      <p:grpSpPr/>
-      <p:sp>
-        <p:nvSpPr>
-          <p:cNvPr id="2" name="Title 1"/>
-          <p:cNvSpPr>
-            <a:spLocks noGrp="1"/>
-          </p:cNvSpPr>
-          <p:nvPr>
-            <p:ph type="title"/>
-          </p:nvPr>
-        </p:nvSpPr>
-        <p:spPr/>
-        <p:txBody>
-          <a:bodyPr/>
-          <a:lstStyle/>
-          <a:p>
-            <a:r>
-              <a:t>Part 3 — netmesh</a:t>
-            </a:r>
-          </a:p>
-        </p:txBody>
-      </p:sp>
-      <p:sp>
-        <p:nvSpPr>
-          <p:cNvPr id="3" name="Text Placeholder 2"/>
-          <p:cNvSpPr>
-            <a:spLocks noGrp="1"/>
-          </p:cNvSpPr>
-          <p:nvPr>
-            <p:ph type="body" idx="1"/>
-          </p:nvPr>
-        </p:nvSpPr>
-        <p:spPr/>
-        <p:txBody>
-          <a:bodyPr/>
-          <a:lstStyle/>
-          <a:p/>
-        </p:txBody>
-      </p:sp>
-    </p:spTree>
-  </p:cSld>
-  <p:clrMapOvr>
-    <a:masterClrMapping/>
-  </p:clrMapOvr>
-</p:sld>
-</file>
-
-<file path=ppt/slides/slide28.xml><?xml version="1.0" encoding="utf-8"?>
-<p:sld xmlns:a="http://schemas.openxmlformats.org/drawingml/2006/main" xmlns:p="http://schemas.openxmlformats.org/presentationml/2006/main" xmlns:r="http://schemas.openxmlformats.org/officeDocument/2006/relationships">
-  <p:cSld>
-    <p:spTree>
-      <p:nvGrpSpPr>
-        <p:cNvPr id="1" name=""/>
-        <p:cNvGrpSpPr/>
-        <p:nvPr/>
-      </p:nvGrpSpPr>
-      <p:grpSpPr/>
-      <p:sp>
-        <p:nvSpPr>
-          <p:cNvPr id="2" name="Title 1"/>
-          <p:cNvSpPr>
-            <a:spLocks noGrp="1"/>
-          </p:cNvSpPr>
-          <p:nvPr>
-            <p:ph type="title"/>
-          </p:nvPr>
-        </p:nvSpPr>
-        <p:spPr/>
-        <p:txBody>
-          <a:bodyPr/>
-          <a:lstStyle/>
-          <a:p>
-            <a:pPr>
-              <a:defRPr sz="2800" b="1">
-                <a:solidFill>
-                  <a:srgbClr val="1C2B3A"/>
-                </a:solidFill>
-              </a:defRPr>
-            </a:pPr>
-            <a:r>
-              <a:t>What it is, and how it fits the grouping</a:t>
-            </a:r>
-          </a:p>
-        </p:txBody>
-      </p:sp>
-      <p:sp>
-        <p:nvSpPr>
-          <p:cNvPr id="3" name="Content Placeholder 2"/>
-          <p:cNvSpPr>
-            <a:spLocks noGrp="1"/>
-          </p:cNvSpPr>
-          <p:nvPr>
-            <p:ph idx="1"/>
-          </p:nvPr>
-        </p:nvSpPr>
-        <p:spPr/>
-        <p:txBody>
-          <a:bodyPr wrap="square">
-            <a:normAutofit/>
-          </a:bodyPr>
-          <a:lstStyle/>
-          <a:p>
-            <a:pPr>
-              <a:defRPr sz="1600"/>
-            </a:pPr>
-            <a:r>
-              <a:t>One of binnacle's eight diagnostic tools (pip install binnacle); its question: "is it the network, and which link is sick?"</a:t>
-            </a:r>
-          </a:p>
-          <a:p>
-            <a:pPr>
-              <a:defRPr sz="1600"/>
-            </a:pPr>
-            <a:r>
-              <a:t>Measures RTT, jitter, loss and path MTU between machines when nothing else is running — the idle baseline.</a:t>
-            </a:r>
-          </a:p>
-          <a:p>
-            <a:pPr>
-              <a:defRPr sz="1600"/>
-            </a:pPr>
-            <a:r>
-              <a:t>The gap it fills: iperf_orchestrator = bandwidth under load; mx = pps under load. Neither says what the network does idle — and that's the baseline both numbers must be read against.</a:t>
-            </a:r>
-          </a:p>
-          <a:p>
-            <a:pPr>
-              <a:defRPr sz="1600"/>
-            </a:pPr>
-            <a:r>
-              <a:t>Deliberately the cheapest of the three: ~10 small packets/s per pair — safe on production during an incident.</a:t>
-            </a:r>
-          </a:p>
-          <a:p>
-            <a:pPr>
-              <a:defRPr sz="1600"/>
-            </a:pPr>
-            <a:r>
-              <a:t>Two hosts and one line is the design centre; mesh files, grids and layered scale-up exist but a two-box user never sees them.</a:t>
-            </a:r>
-          </a:p>
-          <a:p>
-            <a:pPr>
-              <a:defRPr sz="1600"/>
-            </a:pPr>
-            <a:r>
-              <a:t>Why run it: before blaming the network in an incident; before commissioning load tests; as a recurring health probe; and around a load test (--baseline) to see what the load does to latency.</a:t>
-            </a:r>
-          </a:p>
-        </p:txBody>
-      </p:sp>
-    </p:spTree>
-  </p:cSld>
-  <p:clrMapOvr>
-    <a:masterClrMapping/>
-  </p:clrMapOvr>
-</p:sld>
-</file>
-
-<file path=ppt/slides/slide29.xml><?xml version="1.0" encoding="utf-8"?>
-<p:sld xmlns:a="http://schemas.openxmlformats.org/drawingml/2006/main" xmlns:p="http://schemas.openxmlformats.org/presentationml/2006/main" xmlns:r="http://schemas.openxmlformats.org/officeDocument/2006/relationships">
-  <p:cSld>
-    <p:spTree>
-      <p:nvGrpSpPr>
-        <p:cNvPr id="1" name=""/>
-        <p:cNvGrpSpPr/>
-        <p:nvPr/>
-      </p:nvGrpSpPr>
-      <p:grpSpPr/>
-      <p:sp>
-        <p:nvSpPr>
-          <p:cNvPr id="2" name="Title 1"/>
-          <p:cNvSpPr>
-            <a:spLocks noGrp="1"/>
-          </p:cNvSpPr>
-          <p:nvPr>
-            <p:ph type="title"/>
-          </p:nvPr>
-        </p:nvSpPr>
-        <p:spPr/>
-        <p:txBody>
-          <a:bodyPr/>
-          <a:lstStyle/>
-          <a:p>
-            <a:pPr>
-              <a:defRPr sz="2800" b="1">
-                <a:solidFill>
-                  <a:srgbClr val="1C2B3A"/>
-                </a:solidFill>
-              </a:defRPr>
-            </a:pPr>
-            <a:r>
-              <a:t>How it probes (why not ping)</a:t>
-            </a:r>
-          </a:p>
-        </p:txBody>
-      </p:sp>
-      <p:sp>
-        <p:nvSpPr>
-          <p:cNvPr id="3" name="Content Placeholder 2"/>
-          <p:cNvSpPr>
-            <a:spLocks noGrp="1"/>
-          </p:cNvSpPr>
-          <p:nvPr>
-            <p:ph idx="1"/>
-          </p:nvPr>
-        </p:nvSpPr>
-        <p:spPr/>
-        <p:txBody>
-          <a:bodyPr wrap="square">
-            <a:normAutofit/>
-          </a:bodyPr>
-          <a:lstStyle/>
-          <a:p>
-            <a:pPr>
-              <a:defRPr sz="1600"/>
-            </a:pPr>
-            <a:r>
-              <a:t>UDP echoes between temporary agents — the only approach giving all four:</a:t>
-            </a:r>
-          </a:p>
-          <a:p>
-            <a:pPr lvl="1">
-              <a:defRPr sz="1400"/>
-            </a:pPr>
-            <a:r>
-              <a:t>No root — ordinary unprivileged UDP sockets both ends.</a:t>
-            </a:r>
-          </a:p>
-          <a:p>
-            <a:pPr lvl="1">
-              <a:defRPr sz="1400"/>
-            </a:pPr>
-            <a:r>
-              <a:t>Exact RTT, one clock — sender's own monotonic stamp echoed back untouched; no NTP assumptions.</a:t>
-            </a:r>
-          </a:p>
-          <a:p>
-            <a:pPr lvl="1">
-              <a:defRPr sz="1400"/>
-            </a:pPr>
-            <a:r>
-              <a:t>Loss split into forward/return legs — the responder independently counts what arrived. Not available from ping.</a:t>
-            </a:r>
-          </a:p>
-          <a:p>
-            <a:pPr lvl="1">
-              <a:defRPr sz="1400"/>
-            </a:pPr>
-            <a:r>
-              <a:t>Measures the data plane — ICMP is answered by router control planes (rate-limited, deprioritized), so it systematically lies about what application traffic sees.</a:t>
-            </a:r>
-          </a:p>
-          <a:p>
-            <a:pPr>
-              <a:defRPr sz="1600"/>
-            </a:pPr>
-            <a:r>
-              <a:t>One-way delay deliberately not reported — without PTP the clock offset would swamp the microseconds that matter. Instead: two separate round trips (A→B timed by A, B→A timed by B), compared — every number quoted is one that is actually true.</a:t>
-            </a:r>
-          </a:p>
-          <a:p>
-            <a:pPr>
-              <a:defRPr sz="1600"/>
-            </a:pPr>
-            <a:r>
-              <a:t>Can't deploy an agent (VIP, router, appliance)? Prefix with ~ → probed with ping, but segregated as ONE-SIDED in the report because those rows carry materially less.</a:t>
-            </a:r>
-          </a:p>
-        </p:txBody>
-      </p:sp>
-    </p:spTree>
-  </p:cSld>
-  <p:clrMapOvr>
-    <a:masterClrMapping/>
-  </p:clrMapOvr>
-</p:sld>
-</file>
-
-<file path=ppt/slides/slide3.xml><?xml version="1.0" encoding="utf-8"?>
-<p:sld xmlns:a="http://schemas.openxmlformats.org/drawingml/2006/main" xmlns:p="http://schemas.openxmlformats.org/presentationml/2006/main" xmlns:r="http://schemas.openxmlformats.org/officeDocument/2006/relationships">
-  <p:cSld>
-    <p:spTree>
-      <p:nvGrpSpPr>
-        <p:cNvPr id="1" name=""/>
-        <p:cNvGrpSpPr/>
-        <p:nvPr/>
-      </p:nvGrpSpPr>
-      <p:grpSpPr/>
-      <p:sp>
-        <p:nvSpPr>
-          <p:cNvPr id="2" name="Title 1"/>
-          <p:cNvSpPr>
-            <a:spLocks noGrp="1"/>
-          </p:cNvSpPr>
-          <p:nvPr>
-            <p:ph type="title"/>
-          </p:nvPr>
-        </p:nvSpPr>
-        <p:spPr/>
-        <p:txBody>
-          <a:bodyPr/>
-          <a:lstStyle/>
-          <a:p>
-            <a:pPr>
-              <a:defRPr sz="2800" b="1">
-                <a:solidFill>
-                  <a:srgbClr val="1C2B3A"/>
-                </a:solidFill>
-              </a:defRPr>
-            </a:pPr>
-            <a:r>
-              <a:t>Network testing with these tools</a:t>
-            </a:r>
-          </a:p>
-        </p:txBody>
-      </p:sp>
-      <p:sp>
-        <p:nvSpPr>
-          <p:cNvPr id="3" name="Content Placeholder 2"/>
-          <p:cNvSpPr>
-            <a:spLocks noGrp="1"/>
-          </p:cNvSpPr>
-          <p:nvPr>
-            <p:ph idx="1"/>
-          </p:nvPr>
-        </p:nvSpPr>
-        <p:spPr/>
-        <p:txBody>
-          <a:bodyPr wrap="square">
-            <a:normAutofit/>
-          </a:bodyPr>
-          <a:lstStyle/>
-          <a:p>
-            <a:pPr>
-              <a:defRPr sz="1600"/>
-            </a:pPr>
-            <a:r>
-              <a:t>Three questions about a fleet's network, three tools:</a:t>
-            </a:r>
-          </a:p>
-          <a:p>
-            <a:pPr lvl="1">
-              <a:defRPr sz="1400"/>
-            </a:pPr>
-            <a:r>
-              <a:t>netmesh (binnacle) — *what does the network do when idle?* RTT, jitter, loss, path MTU.</a:t>
-            </a:r>
-          </a:p>
-          <a:p>
-            <a:pPr lvl="1">
-              <a:defRPr sz="1400"/>
-            </a:pPr>
-            <a:r>
-              <a:t>iperf_orchestrator — *how much TCP bandwidth under load?* Full-mesh iperf2 throughput sweep.</a:t>
-            </a:r>
-          </a:p>
-          <a:p>
-            <a:pPr lvl="1">
-              <a:defRPr sz="1400"/>
-            </a:pPr>
-            <a:r>
-              <a:t>matrix_orchestrator (mx) — *how many packets per second, when every packet must be answered?* Request/response UDP matrix.</a:t>
-            </a:r>
-          </a:p>
-          <a:p>
-            <a:pPr>
-              <a:defRPr sz="1600"/>
-            </a:pPr>
-            <a:r>
-              <a:t>One family: same servers.txt grammar, same ssh-only model, N×N grid outputs that read the same way.</a:t>
-            </a:r>
-          </a:p>
-          <a:p>
-            <a:pPr>
-              <a:defRPr sz="1600"/>
-            </a:pPr>
-            <a:r>
-              <a:t>Plus reachable (binnacle): prunes dead entries from the server list so the run survives the servers that are down.</a:t>
-            </a:r>
-          </a:p>
-        </p:txBody>
-      </p:sp>
-    </p:spTree>
-  </p:cSld>
-  <p:clrMapOvr>
-    <a:masterClrMapping/>
-  </p:clrMapOvr>
-</p:sld>
-</file>
-
-<file path=ppt/slides/slide30.xml><?xml version="1.0" encoding="utf-8"?>
-<p:sld xmlns:a="http://schemas.openxmlformats.org/drawingml/2006/main" xmlns:p="http://schemas.openxmlformats.org/presentationml/2006/main" xmlns:r="http://schemas.openxmlformats.org/officeDocument/2006/relationships">
-  <p:cSld>
-    <p:spTree>
-      <p:nvGrpSpPr>
-        <p:cNvPr id="1" name=""/>
-        <p:cNvGrpSpPr/>
-        <p:nvPr/>
-      </p:nvGrpSpPr>
-      <p:grpSpPr/>
-      <p:sp>
-        <p:nvSpPr>
-          <p:cNvPr id="2" name="Title 1"/>
-          <p:cNvSpPr>
-            <a:spLocks noGrp="1"/>
-          </p:cNvSpPr>
-          <p:nvPr>
-            <p:ph type="title"/>
-          </p:nvPr>
-        </p:nvSpPr>
-        <p:spPr/>
-        <p:txBody>
-          <a:bodyPr/>
-          <a:lstStyle/>
-          <a:p>
-            <a:pPr>
-              <a:defRPr sz="2800" b="1">
-                <a:solidFill>
-                  <a:srgbClr val="1C2B3A"/>
-                </a:solidFill>
-              </a:defRPr>
-            </a:pPr>
-            <a:r>
-              <a:t>How to run it</a:t>
-            </a:r>
-          </a:p>
-        </p:txBody>
-      </p:sp>
-      <p:sp>
-        <p:nvSpPr>
-          <p:cNvPr id="3" name="TextBox 2"/>
-          <p:cNvSpPr txBox="1"/>
-          <p:nvPr/>
-        </p:nvSpPr>
-        <p:spPr>
-          <a:xfrm>
-            <a:off x="640080" y="1234440"/>
-            <a:ext cx="10972800" cy="1764792"/>
-          </a:xfrm>
-          <a:prstGeom prst="rect">
-            <a:avLst/>
-          </a:prstGeom>
-          <a:noFill/>
-        </p:spPr>
-        <p:txBody>
-          <a:bodyPr wrap="none">
-            <a:spAutoFit/>
-          </a:bodyPr>
-          <a:lstStyle/>
-          <a:p>
-            <a:pPr>
-              <a:defRPr sz="1300">
-                <a:solidFill>
-                  <a:srgbClr val="24354A"/>
-                </a:solidFill>
-                <a:latin typeface="Consolas"/>
-              </a:defRPr>
-            </a:pPr>
-            <a:r>
-              <a:t>netmesh selftest                        # prove it works here first (loopback, no ssh)</a:t>
-            </a:r>
-          </a:p>
-          <a:p>
-            <a:pPr>
-              <a:defRPr sz="1300">
-                <a:solidFill>
-                  <a:srgbClr val="24354A"/>
-                </a:solidFill>
-                <a:latin typeface="Consolas"/>
-              </a:defRPr>
-            </a:pPr>
-            <a:r>
-              <a:t>netmesh check web01 db01                # one-shot: gen, deploy, probe, summarize, clean</a:t>
-            </a:r>
-          </a:p>
-          <a:p>
-            <a:pPr>
-              <a:defRPr sz="1300">
-                <a:solidFill>
-                  <a:srgbClr val="24354A"/>
-                </a:solidFill>
-                <a:latin typeface="Consolas"/>
-              </a:defRPr>
-            </a:pPr>
-            <a:r>
-              <a:t>netmesh check web01 db01 --for 60</a:t>
-            </a:r>
-          </a:p>
-          <a:p>
-            <a:pPr>
-              <a:defRPr sz="1300">
-                <a:solidFill>
-                  <a:srgbClr val="24354A"/>
-                </a:solidFill>
-                <a:latin typeface="Consolas"/>
-              </a:defRPr>
-            </a:pPr>
-            <a:r>
-              <a:t>netmesh gen --servers prod.txt          # mesh file for repeat runs</a:t>
-            </a:r>
-          </a:p>
-          <a:p>
-            <a:pPr>
-              <a:defRPr sz="1300">
-                <a:solidFill>
-                  <a:srgbClr val="24354A"/>
-                </a:solidFill>
-                <a:latin typeface="Consolas"/>
-              </a:defRPr>
-            </a:pPr>
-            <a:r>
-              <a:t>netmesh run --for 300 --grid grids/</a:t>
-            </a:r>
-          </a:p>
-          <a:p>
-            <a:pPr>
-              <a:defRPr sz="1300">
-                <a:solidFill>
-                  <a:srgbClr val="24354A"/>
-                </a:solidFill>
-                <a:latin typeface="Consolas"/>
-              </a:defRPr>
-            </a:pPr>
-            <a:r>
-              <a:t>netmesh check web03 db01 --flows 8      # sweep source ports across a LAG/ECMP bundle</a:t>
-            </a:r>
-          </a:p>
-          <a:p>
-            <a:pPr>
-              <a:defRPr sz="1300">
-                <a:solidFill>
-                  <a:srgbClr val="24354A"/>
-                </a:solidFill>
-                <a:latin typeface="Consolas"/>
-              </a:defRPr>
-            </a:pPr>
-            <a:r>
-              <a:t>netmesh run --baseline 20 -- ./iperf_orchestrator.sh all   # idle first, then probe under load</a:t>
-            </a:r>
-          </a:p>
-        </p:txBody>
-      </p:sp>
-      <p:sp>
-        <p:nvSpPr>
-          <p:cNvPr id="4" name="TextBox 3"/>
-          <p:cNvSpPr txBox="1"/>
-          <p:nvPr/>
-        </p:nvSpPr>
-        <p:spPr>
-          <a:xfrm>
-            <a:off x="822960" y="3136392"/>
-            <a:ext cx="10607040" cy="621792"/>
-          </a:xfrm>
-          <a:prstGeom prst="rect">
-            <a:avLst/>
-          </a:prstGeom>
-          <a:noFill/>
-        </p:spPr>
-        <p:txBody>
-          <a:bodyPr wrap="square">
-            <a:spAutoFit/>
-          </a:bodyPr>
-          <a:lstStyle/>
-          <a:p>
-            <a:pPr>
-              <a:defRPr sz="1400"/>
-            </a:pPr>
-            <a:r>
-              <a:t>• Same verb set as mx (gen/start/status/summarize/stop/clean + run/collect/logs/paths/doctor); the mesh file shares mx's matrix grammar — learn one, know the other.</a:t>
-            </a:r>
-          </a:p>
-        </p:txBody>
-      </p:sp>
-      <p:sp>
-        <p:nvSpPr>
-          <p:cNvPr id="5" name="TextBox 4"/>
-          <p:cNvSpPr txBox="1"/>
-          <p:nvPr/>
-        </p:nvSpPr>
-        <p:spPr>
-          <a:xfrm>
-            <a:off x="822960" y="3831336"/>
-            <a:ext cx="10607040" cy="1243584"/>
-          </a:xfrm>
-          <a:prstGeom prst="rect">
-            <a:avLst/>
-          </a:prstGeom>
-          <a:noFill/>
-        </p:spPr>
-        <p:txBody>
-          <a:bodyPr wrap="square">
-            <a:spAutoFit/>
-          </a:bodyPr>
-          <a:lstStyle/>
-          <a:p>
-            <a:pPr>
-              <a:defRPr sz="1400"/>
-            </a:pPr>
-            <a:r>
-              <a:t>• --flows N matters: one source port = one 5-tuple = one path through a LAG/ECMP bundle — a sick member is hit or missed by luck (the fault that never reproduces). N buckets split the rate (never multiply it) and are compared against the median bucket: "port 40008 sees p50 4.1 ms where the median flow sees 142 µs — same pair, same instant, so what differs is the bundle member."</a:t>
-            </a:r>
-          </a:p>
-        </p:txBody>
-      </p:sp>
-      <p:sp>
-        <p:nvSpPr>
-          <p:cNvPr id="6" name="TextBox 5"/>
-          <p:cNvSpPr txBox="1"/>
-          <p:nvPr/>
-        </p:nvSpPr>
-        <p:spPr>
-          <a:xfrm>
-            <a:off x="822960" y="5148072"/>
-            <a:ext cx="10607040" cy="310896"/>
-          </a:xfrm>
-          <a:prstGeom prst="rect">
-            <a:avLst/>
-          </a:prstGeom>
-          <a:noFill/>
-        </p:spPr>
-        <p:txBody>
-          <a:bodyPr wrap="square">
-            <a:spAutoFit/>
-          </a:bodyPr>
-          <a:lstStyle/>
-          <a:p>
-            <a:pPr>
-              <a:defRPr sz="1400"/>
-            </a:pPr>
-            <a:r>
-              <a:t>• IPv6: refused by netmesh (the rest of binnacle's list grammar supports it).</a:t>
-            </a:r>
-          </a:p>
-        </p:txBody>
-      </p:sp>
-    </p:spTree>
-  </p:cSld>
-  <p:clrMapOvr>
-    <a:masterClrMapping/>
-  </p:clrMapOvr>
-</p:sld>
-</file>
-
-<file path=ppt/slides/slide31.xml><?xml version="1.0" encoding="utf-8"?>
-<p:sld xmlns:a="http://schemas.openxmlformats.org/drawingml/2006/main" xmlns:p="http://schemas.openxmlformats.org/presentationml/2006/main" xmlns:r="http://schemas.openxmlformats.org/officeDocument/2006/relationships">
-  <p:cSld>
-    <p:spTree>
-      <p:nvGrpSpPr>
-        <p:cNvPr id="1" name=""/>
-        <p:cNvGrpSpPr/>
-        <p:nvPr/>
-      </p:nvGrpSpPr>
-      <p:grpSpPr/>
-      <p:sp>
-        <p:nvSpPr>
-          <p:cNvPr id="2" name="Title 1"/>
-          <p:cNvSpPr>
-            <a:spLocks noGrp="1"/>
-          </p:cNvSpPr>
-          <p:nvPr>
-            <p:ph type="title"/>
-          </p:nvPr>
-        </p:nvSpPr>
-        <p:spPr/>
-        <p:txBody>
-          <a:bodyPr/>
-          <a:lstStyle/>
-          <a:p>
-            <a:pPr>
-              <a:defRPr sz="2800" b="1">
-                <a:solidFill>
-                  <a:srgbClr val="1C2B3A"/>
-                </a:solidFill>
-              </a:defRPr>
-            </a:pPr>
-            <a:r>
-              <a:t>Getting reports &amp; interpreting</a:t>
-            </a:r>
-          </a:p>
-        </p:txBody>
-      </p:sp>
-      <p:sp>
-        <p:nvSpPr>
-          <p:cNvPr id="3" name="Content Placeholder 2"/>
-          <p:cNvSpPr>
-            <a:spLocks noGrp="1"/>
-          </p:cNvSpPr>
-          <p:nvPr>
-            <p:ph idx="1"/>
-          </p:nvPr>
-        </p:nvSpPr>
-        <p:spPr/>
-        <p:txBody>
-          <a:bodyPr wrap="square">
-            <a:normAutofit/>
-          </a:bodyPr>
-          <a:lstStyle/>
-          <a:p>
-            <a:pPr>
-              <a:defRPr sz="1600"/>
-            </a:pPr>
-            <a:r>
-              <a:t>reports/&lt;host&gt;.csv — tidy long format, one row per peer per direction per interval. Blank means "not measured", never zero. --grid DIR writes rtt_p50/rtt_p99/jitter/loss/mtu/asym grids matching mx's layout.</a:t>
-            </a:r>
-          </a:p>
-          <a:p>
-            <a:pPr>
-              <a:defRPr sz="1600"/>
-            </a:pPr>
-            <a:r>
-              <a:t>Headline = median of pair p50s (one sick pair can't move it or hide inside it); worst pairs ranked by p99.</a:t>
-            </a:r>
-          </a:p>
-          <a:p>
-            <a:pPr>
-              <a:defRPr sz="1600"/>
-            </a:pPr>
-            <a:r>
-              <a:t>ASYMMETRY — A→B 8× slower than B→A ⇒ look at A's egress; the return path just proved itself fine. Diagnosis is computed, not canned: slow pairs sharing a source → that host's egress; sharing a destination → its ingress; spanning a group boundary → the path between.</a:t>
-            </a:r>
-          </a:p>
-          <a:p>
-            <a:pPr>
-              <a:defRPr sz="1600"/>
-            </a:pPr>
-            <a:r>
-              <a:t>PATH MTU — four outcomes: confirmed / blackhole (small packets echo, large vanish, no error returns — "small requests work, large transfers hang") / cached / unsupported. Found without root; only an end-to-end echo counts.</a:t>
-            </a:r>
-          </a:p>
-          <a:p>
-            <a:pPr>
-              <a:defRPr sz="1600"/>
-            </a:pPr>
-            <a:r>
-              <a:t>PATH SPREAD (--flows) — one bucket 28.9× the median = a sick LAG/ECMP member, named while the run is fresh.</a:t>
-            </a:r>
-          </a:p>
-          <a:p>
-            <a:pPr>
-              <a:defRPr sz="1600"/>
-            </a:pPr>
-            <a:r>
-              <a:t>UNDER LOAD (--baseline) — p99 210 µs idle → 42 ms loaded: the queue in front of the bottleneck; what everything sharing the path paid for the throughput number. Loss appearing only under load gets its own finding.</a:t>
-            </a:r>
-          </a:p>
-          <a:p>
-            <a:pPr>
-              <a:defRPr sz="1600"/>
-            </a:pPr>
-            <a:r>
-              <a:t>Measurement honesty: flags when a NIC's rx-usecs coalescing timer is the floor you measured (with the ethtool line); agent_cpu_pct ≈ 100 ⇒ you're measuring the tool.</a:t>
-            </a:r>
-          </a:p>
-          <a:p>
-            <a:pPr>
-              <a:defRPr sz="1600"/>
-            </a:pPr>
-            <a:r>
-              <a:t>A clean run says so plainly — "the network is not your problem" — and points at mx / iperf_orchestrator for the load question.</a:t>
-            </a:r>
-          </a:p>
-        </p:txBody>
-      </p:sp>
-    </p:spTree>
-  </p:cSld>
-  <p:clrMapOvr>
-    <a:masterClrMapping/>
-  </p:clrMapOvr>
-</p:sld>
-</file>
-
-<file path=ppt/slides/slide32.xml><?xml version="1.0" encoding="utf-8"?>
-<p:sld xmlns:a="http://schemas.openxmlformats.org/drawingml/2006/main" xmlns:p="http://schemas.openxmlformats.org/presentationml/2006/main" xmlns:r="http://schemas.openxmlformats.org/officeDocument/2006/relationships">
-  <p:cSld>
-    <p:spTree>
-      <p:nvGrpSpPr>
-        <p:cNvPr id="1" name=""/>
-        <p:cNvGrpSpPr/>
-        <p:nvPr/>
-      </p:nvGrpSpPr>
-      <p:grpSpPr/>
-      <p:sp>
-        <p:nvSpPr>
-          <p:cNvPr id="2" name="Title 1"/>
-          <p:cNvSpPr>
-            <a:spLocks noGrp="1"/>
-          </p:cNvSpPr>
-          <p:nvPr>
-            <p:ph type="title"/>
-          </p:nvPr>
-        </p:nvSpPr>
-        <p:spPr/>
-        <p:txBody>
-          <a:bodyPr/>
-          <a:lstStyle/>
-          <a:p>
-            <a:pPr>
-              <a:defRPr sz="2800" b="1">
-                <a:solidFill>
-                  <a:srgbClr val="1C2B3A"/>
-                </a:solidFill>
-              </a:defRPr>
-            </a:pPr>
-            <a:r>
-              <a:t>Stopping, cleaning up, following up</a:t>
-            </a:r>
-          </a:p>
-        </p:txBody>
-      </p:sp>
-      <p:sp>
-        <p:nvSpPr>
-          <p:cNvPr id="3" name="Content Placeholder 2"/>
-          <p:cNvSpPr>
-            <a:spLocks noGrp="1"/>
-          </p:cNvSpPr>
-          <p:nvPr>
-            <p:ph idx="1"/>
-          </p:nvPr>
-        </p:nvSpPr>
-        <p:spPr/>
-        <p:txBody>
-          <a:bodyPr wrap="square">
-            <a:normAutofit/>
-          </a:bodyPr>
-          <a:lstStyle/>
-          <a:p>
-            <a:pPr>
-              <a:defRPr sz="1600"/>
-            </a:pPr>
-            <a:r>
-              <a:t>check cleans up after itself — the two-host case never leaves anything behind. Managed runs: stop keeps reports; clean stops and removes every trace. No package, no daemon, no dotdir, no sysctl — ever. Agents flush on SIGTERM.</a:t>
-            </a:r>
-          </a:p>
-          <a:p>
-            <a:pPr>
-              <a:defRPr sz="1600"/>
-            </a:pPr>
-            <a:r>
-              <a:t>Reports replay: summarize --reports ./reports, even re-split around a load window after the fact (--load-split &lt;ts&gt;).</a:t>
-            </a:r>
-          </a:p>
-          <a:p>
-            <a:pPr>
-              <a:defRPr sz="1600"/>
-            </a:pPr>
-            <a:r>
-              <a:t>Following up on findings:</a:t>
-            </a:r>
-          </a:p>
-          <a:p>
-            <a:pPr lvl="1">
-              <a:defRPr sz="1400"/>
-            </a:pPr>
-            <a:r>
-              <a:t>Sick pair → netmesh paths --compare web03:db01 web01:db01 — hop lists side by side, first divergent hop marked. That hop is where to look.</a:t>
-            </a:r>
-          </a:p>
-          <a:p>
-            <a:pPr lvl="1">
-              <a:defRPr sz="1400"/>
-            </a:pPr>
-            <a:r>
-              <a:t>Grids drop into the same spreadsheet as mx's — line up idle RTT against loaded loss, pair by pair.</a:t>
-            </a:r>
-          </a:p>
-          <a:p>
-            <a:pPr lvl="1">
-              <a:defRPr sz="1400"/>
-            </a:pPr>
-            <a:r>
-              <a:t>Clean baseline → the network isn't the problem: go load it (mx run --for 60, iperf-orchestrator all).</a:t>
-            </a:r>
-          </a:p>
-          <a:p>
-            <a:pPr lvl="1">
-              <a:defRPr sz="1400"/>
-            </a:pPr>
-            <a:r>
-              <a:t>Host still slow → binnacle's why-slow checks the box before you blame the network again.</a:t>
-            </a:r>
-          </a:p>
-        </p:txBody>
-      </p:sp>
-    </p:spTree>
-  </p:cSld>
-  <p:clrMapOvr>
-    <a:masterClrMapping/>
-  </p:clrMapOvr>
-</p:sld>
-</file>
-
-<file path=ppt/slides/slide33.xml><?xml version="1.0" encoding="utf-8"?>
-<p:sld xmlns:a="http://schemas.openxmlformats.org/drawingml/2006/main" xmlns:p="http://schemas.openxmlformats.org/presentationml/2006/main" xmlns:r="http://schemas.openxmlformats.org/officeDocument/2006/relationships">
-  <p:cSld>
-    <p:spTree>
-      <p:nvGrpSpPr>
-        <p:cNvPr id="1" name=""/>
-        <p:cNvGrpSpPr/>
-        <p:nvPr/>
-      </p:nvGrpSpPr>
-      <p:grpSpPr/>
-      <p:sp>
-        <p:nvSpPr>
-          <p:cNvPr id="2" name="Title 1"/>
-          <p:cNvSpPr>
-            <a:spLocks noGrp="1"/>
-          </p:cNvSpPr>
-          <p:nvPr>
-            <p:ph type="title"/>
-          </p:nvPr>
-        </p:nvSpPr>
-        <p:spPr/>
-        <p:txBody>
-          <a:bodyPr/>
-          <a:lstStyle/>
-          <a:p>
-            <a:r>
-              <a:t>Close</a:t>
-            </a:r>
-          </a:p>
-        </p:txBody>
-      </p:sp>
-      <p:sp>
-        <p:nvSpPr>
-          <p:cNvPr id="3" name="Text Placeholder 2"/>
-          <p:cNvSpPr>
-            <a:spLocks noGrp="1"/>
-          </p:cNvSpPr>
-          <p:nvPr>
-            <p:ph type="body" idx="1"/>
-          </p:nvPr>
-        </p:nvSpPr>
-        <p:spPr/>
-        <p:txBody>
-          <a:bodyPr/>
-          <a:lstStyle/>
-          <a:p/>
-        </p:txBody>
-      </p:sp>
-    </p:spTree>
-  </p:cSld>
-  <p:clrMapOvr>
-    <a:masterClrMapping/>
-  </p:clrMapOvr>
-</p:sld>
-</file>
-
-<file path=ppt/slides/slide34.xml><?xml version="1.0" encoding="utf-8"?>
-<p:sld xmlns:a="http://schemas.openxmlformats.org/drawingml/2006/main" xmlns:p="http://schemas.openxmlformats.org/presentationml/2006/main" xmlns:r="http://schemas.openxmlformats.org/officeDocument/2006/relationships">
-  <p:cSld>
-    <p:spTree>
-      <p:nvGrpSpPr>
-        <p:cNvPr id="1" name=""/>
-        <p:cNvGrpSpPr/>
-        <p:nvPr/>
-      </p:nvGrpSpPr>
-      <p:grpSpPr/>
-      <p:sp>
-        <p:nvSpPr>
-          <p:cNvPr id="2" name="Title 1"/>
-          <p:cNvSpPr>
-            <a:spLocks noGrp="1"/>
-          </p:cNvSpPr>
-          <p:nvPr>
-            <p:ph type="title"/>
-          </p:nvPr>
-        </p:nvSpPr>
-        <p:spPr/>
-        <p:txBody>
-          <a:bodyPr/>
-          <a:lstStyle/>
-          <a:p>
-            <a:pPr>
-              <a:defRPr sz="2800" b="1">
-                <a:solidFill>
-                  <a:srgbClr val="1C2B3A"/>
-                </a:solidFill>
-              </a:defRPr>
-            </a:pPr>
-            <a:r>
-              <a:t>Putting it together</a:t>
-            </a:r>
-          </a:p>
-        </p:txBody>
-      </p:sp>
-      <p:sp>
-        <p:nvSpPr>
-          <p:cNvPr id="3" name="TextBox 2"/>
-          <p:cNvSpPr txBox="1"/>
-          <p:nvPr/>
-        </p:nvSpPr>
-        <p:spPr>
-          <a:xfrm>
-            <a:off x="640080" y="1234440"/>
-            <a:ext cx="10972800" cy="1325880"/>
-          </a:xfrm>
-          <a:prstGeom prst="rect">
-            <a:avLst/>
-          </a:prstGeom>
-          <a:noFill/>
-        </p:spPr>
-        <p:txBody>
-          <a:bodyPr wrap="none">
-            <a:spAutoFit/>
-          </a:bodyPr>
-          <a:lstStyle/>
-          <a:p>
-            <a:pPr>
-              <a:defRPr sz="1300">
-                <a:solidFill>
-                  <a:srgbClr val="24354A"/>
-                </a:solidFill>
-                <a:latin typeface="Consolas"/>
-              </a:defRPr>
-            </a:pPr>
-            <a:r>
-              <a:t>reachable prod.txt -i                       # prune -- the run survives the dead</a:t>
-            </a:r>
-          </a:p>
-          <a:p>
-            <a:pPr>
-              <a:defRPr sz="1300">
-                <a:solidFill>
-                  <a:srgbClr val="24354A"/>
-                </a:solidFill>
-                <a:latin typeface="Consolas"/>
-              </a:defRPr>
-            </a:pPr>
-            <a:r>
-              <a:t>netmesh check ...                           # idle baseline: is the fabric healthy?</a:t>
-            </a:r>
-          </a:p>
-          <a:p>
-            <a:pPr>
-              <a:defRPr sz="1300">
-                <a:solidFill>
-                  <a:srgbClr val="24354A"/>
-                </a:solidFill>
-                <a:latin typeface="Consolas"/>
-              </a:defRPr>
-            </a:pPr>
-            <a:r>
-              <a:t>iperf-orchestrator --servers prod.txt all   # TCP bandwidth: what breaks under load?</a:t>
-            </a:r>
-          </a:p>
-          <a:p>
-            <a:pPr>
-              <a:defRPr sz="1300">
-                <a:solidFill>
-                  <a:srgbClr val="24354A"/>
-                </a:solidFill>
-                <a:latin typeface="Consolas"/>
-              </a:defRPr>
-            </a:pPr>
-            <a:r>
-              <a:t>mx run --for 300                            # answered packets/sec: the RPC ceiling</a:t>
-            </a:r>
-          </a:p>
-          <a:p>
-            <a:pPr>
-              <a:defRPr sz="1300">
-                <a:solidFill>
-                  <a:srgbClr val="24354A"/>
-                </a:solidFill>
-                <a:latin typeface="Consolas"/>
-              </a:defRPr>
-            </a:pPr>
-            <a:r>
-              <a:t>netmesh run --baseline 20 -- &lt;load&gt;         # what the load did to latency</a:t>
-            </a:r>
-          </a:p>
-        </p:txBody>
-      </p:sp>
-      <p:sp>
-        <p:nvSpPr>
-          <p:cNvPr id="4" name="TextBox 3"/>
-          <p:cNvSpPr txBox="1"/>
-          <p:nvPr/>
-        </p:nvSpPr>
-        <p:spPr>
-          <a:xfrm>
-            <a:off x="822960" y="2697480"/>
-            <a:ext cx="10607040" cy="310896"/>
-          </a:xfrm>
-          <a:prstGeom prst="rect">
-            <a:avLst/>
-          </a:prstGeom>
-          <a:noFill/>
-        </p:spPr>
-        <p:txBody>
-          <a:bodyPr wrap="square">
-            <a:spAutoFit/>
-          </a:bodyPr>
-          <a:lstStyle/>
-          <a:p>
-            <a:pPr>
-              <a:defRPr sz="1400"/>
-            </a:pPr>
-            <a:r>
-              <a:t>• Baseline before load — a throughput number without its idle RTT is half a result.</a:t>
-            </a:r>
-          </a:p>
-        </p:txBody>
-      </p:sp>
-      <p:sp>
-        <p:nvSpPr>
-          <p:cNvPr id="5" name="TextBox 4"/>
-          <p:cNvSpPr txBox="1"/>
-          <p:nvPr/>
-        </p:nvSpPr>
-        <p:spPr>
-          <a:xfrm>
-            <a:off x="822960" y="3081528"/>
-            <a:ext cx="10607040" cy="310896"/>
-          </a:xfrm>
-          <a:prstGeom prst="rect">
-            <a:avLst/>
-          </a:prstGeom>
-          <a:noFill/>
-        </p:spPr>
-        <p:txBody>
-          <a:bodyPr wrap="square">
-            <a:spAutoFit/>
-          </a:bodyPr>
-          <a:lstStyle/>
-          <a:p>
-            <a:pPr>
-              <a:defRPr sz="1400"/>
-            </a:pPr>
-            <a:r>
-              <a:t>• Trust what arrived, not what was sent — and watch the CPU, or you're measuring the tool.</a:t>
-            </a:r>
-          </a:p>
-        </p:txBody>
-      </p:sp>
-      <p:sp>
-        <p:nvSpPr>
-          <p:cNvPr id="6" name="TextBox 5"/>
-          <p:cNvSpPr txBox="1"/>
-          <p:nvPr/>
-        </p:nvSpPr>
-        <p:spPr>
-          <a:xfrm>
-            <a:off x="822960" y="3465576"/>
-            <a:ext cx="10607040" cy="310896"/>
-          </a:xfrm>
-          <a:prstGeom prst="rect">
-            <a:avLst/>
-          </a:prstGeom>
-          <a:noFill/>
-        </p:spPr>
-        <p:txBody>
-          <a:bodyPr wrap="square">
-            <a:spAutoFit/>
-          </a:bodyPr>
-          <a:lstStyle/>
-          <a:p>
-            <a:pPr>
-              <a:defRPr sz="1400"/>
-            </a:pPr>
-            <a:r>
-              <a:t>• Keep the list real — reachable is why the whole pipeline still runs when servers are down.</a:t>
-            </a:r>
-          </a:p>
-        </p:txBody>
-      </p:sp>
-      <p:sp>
-        <p:nvSpPr>
-          <p:cNvPr id="7" name="TextBox 6"/>
-          <p:cNvSpPr txBox="1"/>
-          <p:nvPr/>
-        </p:nvSpPr>
-        <p:spPr>
-          <a:xfrm>
-            <a:off x="822960" y="3849624"/>
-            <a:ext cx="10607040" cy="310896"/>
-          </a:xfrm>
-          <a:prstGeom prst="rect">
-            <a:avLst/>
-          </a:prstGeom>
-          <a:noFill/>
-        </p:spPr>
-        <p:txBody>
-          <a:bodyPr wrap="square">
-            <a:spAutoFit/>
-          </a:bodyPr>
-          <a:lstStyle/>
-          <a:p>
-            <a:pPr>
-              <a:defRPr sz="1400"/>
-            </a:pPr>
-            <a:r>
-              <a:t>• All pip-installable: iperf-orchestrator, matrix-orchestrator, binnacle.</a:t>
-            </a:r>
-          </a:p>
-        </p:txBody>
-      </p:sp>
-    </p:spTree>
-  </p:cSld>
-  <p:clrMapOvr>
-    <a:masterClrMapping/>
-  </p:clrMapOvr>
-</p:sld>
-</file>
-
-<file path=ppt/slides/slide4.xml><?xml version="1.0" encoding="utf-8"?>
-<p:sld xmlns:a="http://schemas.openxmlformats.org/drawingml/2006/main" xmlns:p="http://schemas.openxmlformats.org/presentationml/2006/main" xmlns:r="http://schemas.openxmlformats.org/officeDocument/2006/relationships">
-  <p:cSld>
-    <p:spTree>
-      <p:nvGrpSpPr>
-        <p:cNvPr id="1" name=""/>
-        <p:cNvGrpSpPr/>
-        <p:nvPr/>
-      </p:nvGrpSpPr>
-      <p:grpSpPr/>
-      <p:sp>
-        <p:nvSpPr>
-          <p:cNvPr id="2" name="Title 1"/>
-          <p:cNvSpPr>
-            <a:spLocks noGrp="1"/>
-          </p:cNvSpPr>
-          <p:nvPr>
-            <p:ph type="title"/>
-          </p:nvPr>
-        </p:nvSpPr>
-        <p:spPr/>
-        <p:txBody>
-          <a:bodyPr/>
-          <a:lstStyle/>
-          <a:p>
-            <a:pPr>
-              <a:defRPr sz="2800" b="1">
-                <a:solidFill>
-                  <a:srgbClr val="1C2B3A"/>
-                </a:solidFill>
-              </a:defRPr>
-            </a:pPr>
-            <a:r>
-              <a:t>Why these tools</a:t>
-            </a:r>
-          </a:p>
-        </p:txBody>
-      </p:sp>
-      <p:sp>
-        <p:nvSpPr>
-          <p:cNvPr id="3" name="Content Placeholder 2"/>
-          <p:cNvSpPr>
-            <a:spLocks noGrp="1"/>
-          </p:cNvSpPr>
-          <p:nvPr>
-            <p:ph idx="1"/>
-          </p:nvPr>
-        </p:nvSpPr>
-        <p:spPr/>
-        <p:txBody>
-          <a:bodyPr wrap="square">
-            <a:normAutofit/>
-          </a:bodyPr>
-          <a:lstStyle/>
-          <a:p>
-            <a:pPr>
-              <a:defRPr sz="1600"/>
-            </a:pPr>
-            <a:r>
-              <a:t>No agents, no daemons, no root — plain Python/bash + ssh; nothing installed on servers.</a:t>
-            </a:r>
-          </a:p>
-          <a:p>
-            <a:pPr>
-              <a:defRPr sz="1600"/>
-            </a:pPr>
-            <a:r>
-              <a:t>Leave no trace — one remote directory; clean verifies it's actually gone before claiming success.</a:t>
-            </a:r>
-          </a:p>
-          <a:p>
-            <a:pPr>
-              <a:defRPr sz="1600"/>
-            </a:pPr>
-            <a:r>
-              <a:t>Honest numbers — blank means "not measured", never zero; DELIVERED (receiver-counted) outranks what was sent; causes outrank symptoms.</a:t>
-            </a:r>
-          </a:p>
-          <a:p>
-            <a:pPr>
-              <a:defRPr sz="1600"/>
-            </a:pPr>
-            <a:r>
-              <a:t>One self-contained file each — scp-able, stdlib-only; run from a checkout or pip install.</a:t>
-            </a:r>
-          </a:p>
-          <a:p>
-            <a:pPr>
-              <a:defRPr sz="1600"/>
-            </a:pPr>
-            <a:r>
-              <a:t>Built for fleets — capped parallel ssh fan-out, balanced load assignment, batched collection; patterns proven at N=100+.</a:t>
-            </a:r>
-          </a:p>
-          <a:p>
-            <a:pPr>
-              <a:defRPr sz="1600"/>
-            </a:pPr>
-            <a:r>
-              <a:t>They compose — shared list grammar; prune with reachable, baseline with netmesh, then load.</a:t>
-            </a:r>
-          </a:p>
-        </p:txBody>
-      </p:sp>
-    </p:spTree>
-  </p:cSld>
-  <p:clrMapOvr>
-    <a:masterClrMapping/>
-  </p:clrMapOvr>
-</p:sld>
-</file>
-
-<file path=ppt/slides/slide5.xml><?xml version="1.0" encoding="utf-8"?>
-<p:sld xmlns:a="http://schemas.openxmlformats.org/drawingml/2006/main" xmlns:p="http://schemas.openxmlformats.org/presentationml/2006/main" xmlns:r="http://schemas.openxmlformats.org/officeDocument/2006/relationships">
-  <p:cSld>
-    <p:spTree>
-      <p:nvGrpSpPr>
-        <p:cNvPr id="1" name=""/>
-        <p:cNvGrpSpPr/>
-        <p:nvPr/>
-      </p:nvGrpSpPr>
-      <p:grpSpPr/>
-      <p:sp>
-        <p:nvSpPr>
-          <p:cNvPr id="2" name="Title 1"/>
-          <p:cNvSpPr>
-            <a:spLocks noGrp="1"/>
-          </p:cNvSpPr>
-          <p:nvPr>
-            <p:ph type="title"/>
-          </p:nvPr>
-        </p:nvSpPr>
-        <p:spPr/>
-        <p:txBody>
-          <a:bodyPr/>
-          <a:lstStyle/>
-          <a:p>
-            <a:pPr>
-              <a:defRPr sz="2800" b="1">
-                <a:solidFill>
-                  <a:srgbClr val="1C2B3A"/>
-                </a:solidFill>
-              </a:defRPr>
-            </a:pPr>
-            <a:r>
-              <a:t>The differences — what each is measuring</a:t>
+              <a:t>Testing a fleet's network really means answering three different questions — each tool here answers one of them.</a:t>
             </a:r>
           </a:p>
         </p:txBody>
       </p:sp>
       <p:graphicFrame>
         <p:nvGraphicFramePr>
-          <p:cNvPr id="3" name="Table 2"/>
+          <p:cNvPr id="4" name="Table 3"/>
           <p:cNvGraphicFramePr>
             <a:graphicFrameLocks noGrp="1"/>
           </p:cNvGraphicFramePr>
           <p:nvPr/>
         </p:nvGraphicFramePr>
         <p:xfrm>
-          <a:off x="640080" y="1234440"/>
+          <a:off x="640080" y="1929384"/>
           <a:ext cx="10972800" cy="1463040"/>
         </p:xfrm>
         <a:graphic>
@@ -8295,11 +5868,10 @@
                 <a:tableStyleId>{5C22544A-7EE6-4342-B048-85BDC9FD1C3A}</a:tableStyleId>
               </a:tblPr>
               <a:tblGrid>
-                <a:gridCol w="2194560"/>
-                <a:gridCol w="2194560"/>
-                <a:gridCol w="2194560"/>
-                <a:gridCol w="2194560"/>
-                <a:gridCol w="2194560"/>
+                <a:gridCol w="2743200"/>
+                <a:gridCol w="2743200"/>
+                <a:gridCol w="2743200"/>
+                <a:gridCol w="2743200"/>
               </a:tblGrid>
               <a:tr h="365760">
                 <a:tc>
@@ -8326,22 +5898,7 @@
                         <a:defRPr sz="1250" b="1"/>
                       </a:pPr>
                       <a:r>
-                        <a:t>Traffic</a:t>
-                      </a:r>
-                    </a:p>
-                  </a:txBody>
-                  <a:tcPr/>
-                </a:tc>
-                <a:tc>
-                  <a:txBody>
-                    <a:bodyPr/>
-                    <a:lstStyle/>
-                    <a:p>
-                      <a:pPr>
-                        <a:defRPr sz="1250" b="1"/>
-                      </a:pPr>
-                      <a:r>
-                        <a:t>Headline number</a:t>
+                        <a:t>The question it answers</a:t>
                       </a:r>
                     </a:p>
                   </a:txBody>
@@ -8371,7 +5928,7 @@
                         <a:defRPr sz="1250" b="1"/>
                       </a:pPr>
                       <a:r>
-                        <a:t>Footprint</a:t>
+                        <a:t>Cost to run</a:t>
                       </a:r>
                     </a:p>
                   </a:txBody>
@@ -8403,22 +5960,7 @@
                         <a:defRPr sz="1200" b="0"/>
                       </a:pPr>
                       <a:r>
-                        <a:t>UDP echo probes (agents both ends)</a:t>
-                      </a:r>
-                    </a:p>
-                  </a:txBody>
-                  <a:tcPr/>
-                </a:tc>
-                <a:tc>
-                  <a:txBody>
-                    <a:bodyPr/>
-                    <a:lstStyle/>
-                    <a:p>
-                      <a:pPr>
-                        <a:defRPr sz="1200" b="0"/>
-                      </a:pPr>
-                      <a:r>
-                        <a:t>RTT p50/p99, jitter, loss split by leg, path MTU</a:t>
+                        <a:t>Is the network healthy, and which link is sick? — RTT, jitter, loss, path MTU</a:t>
                       </a:r>
                     </a:p>
                   </a:txBody>
@@ -8448,7 +5990,7 @@
                         <a:defRPr sz="1200" b="0"/>
                       </a:pPr>
                       <a:r>
-                        <a:t>~10 pkts/s/pair; safe during incidents</a:t>
+                        <a:t>~10 small pkts/s per pair; safe on production</a:t>
                       </a:r>
                     </a:p>
                   </a:txBody>
@@ -8480,7 +6022,7 @@
                         <a:defRPr sz="1200" b="0"/>
                       </a:pPr>
                       <a:r>
-                        <a:t>TCP full-duplex (iperf2)</a:t>
+                        <a:t>How much TCP bandwidth can every link carry, all at once?</a:t>
                       </a:r>
                     </a:p>
                   </a:txBody>
@@ -8495,7 +6037,7 @@
                         <a:defRPr sz="1200" b="0"/>
                       </a:pPr>
                       <a:r>
-                        <a:t>Mbps per direction per pair, + peak CPU</a:t>
+                        <a:t>Fully loaded</a:t>
                       </a:r>
                     </a:p>
                   </a:txBody>
@@ -8510,22 +6052,7 @@
                         <a:defRPr sz="1200" b="0"/>
                       </a:pPr>
                       <a:r>
-                        <a:t>Saturated</a:t>
-                      </a:r>
-                    </a:p>
-                  </a:txBody>
-                  <a:tcPr/>
-                </a:tc>
-                <a:tc>
-                  <a:txBody>
-                    <a:bodyPr/>
-                    <a:lstStyle/>
-                    <a:p>
-                      <a:pPr>
-                        <a:defRPr sz="1200" b="0"/>
-                      </a:pPr>
-                      <a:r>
-                        <a:t>Line-rate flood; schedule a window</a:t>
+                        <a:t>Line-rate flood — schedule a window</a:t>
                       </a:r>
                     </a:p>
                   </a:txBody>
@@ -8542,7 +6069,7 @@
                         <a:defRPr sz="1200" b="0"/>
                       </a:pPr>
                       <a:r>
-                        <a:t>matrix_orchestrator</a:t>
+                        <a:t>matrix_orchestrator (mx)</a:t>
                       </a:r>
                     </a:p>
                   </a:txBody>
@@ -8557,22 +6084,7 @@
                         <a:defRPr sz="1200" b="0"/>
                       </a:pPr>
                       <a:r>
-                        <a:t>UDP request/response, paced</a:t>
-                      </a:r>
-                    </a:p>
-                  </a:txBody>
-                  <a:tcPr/>
-                </a:tc>
-                <a:tc>
-                  <a:txBody>
-                    <a:bodyPr/>
-                    <a:lstStyle/>
-                    <a:p>
-                      <a:pPr>
-                        <a:defRPr sz="1200" b="0"/>
-                      </a:pPr>
-                      <a:r>
-                        <a:t>pps + Gbps wire, loss split, true RTT</a:t>
+                        <a:t>How many packets/sec can the fleet exchange, when every packet is answered?</a:t>
                       </a:r>
                     </a:p>
                   </a:txBody>
@@ -8613,6 +6125,2721 @@
           </a:graphicData>
         </a:graphic>
       </p:graphicFrame>
+      <p:sp>
+        <p:nvSpPr>
+          <p:cNvPr id="5" name="TextBox 4"/>
+          <p:cNvSpPr txBox="1"/>
+          <p:nvPr/>
+        </p:nvSpPr>
+        <p:spPr>
+          <a:xfrm>
+            <a:off x="822960" y="3575304"/>
+            <a:ext cx="10607040" cy="932688"/>
+          </a:xfrm>
+          <a:prstGeom prst="rect">
+            <a:avLst/>
+          </a:prstGeom>
+          <a:noFill/>
+        </p:spPr>
+        <p:txBody>
+          <a:bodyPr wrap="square">
+            <a:spAutoFit/>
+          </a:bodyPr>
+          <a:lstStyle/>
+          <a:p>
+            <a:pPr>
+              <a:defRPr sz="1400"/>
+            </a:pPr>
+            <a:r>
+              <a:t>They're one family: the same servers.txt, the same ssh-only model, and grids that read the same way. And they measure different layers of the same fabric — a 9.4 Gbit/s result over a 300 µs path and one over a 42 ms path are *different results*.</a:t>
+            </a:r>
+          </a:p>
+        </p:txBody>
+      </p:sp>
+    </p:spTree>
+  </p:cSld>
+  <p:clrMapOvr>
+    <a:masterClrMapping/>
+  </p:clrMapOvr>
+</p:sld>
+</file>
+
+<file path=ppt/slides/slide20.xml><?xml version="1.0" encoding="utf-8"?>
+<p:sld xmlns:a="http://schemas.openxmlformats.org/drawingml/2006/main" xmlns:p="http://schemas.openxmlformats.org/presentationml/2006/main" xmlns:r="http://schemas.openxmlformats.org/officeDocument/2006/relationships">
+  <p:cSld>
+    <p:spTree>
+      <p:nvGrpSpPr>
+        <p:cNvPr id="1" name=""/>
+        <p:cNvGrpSpPr/>
+        <p:nvPr/>
+      </p:nvGrpSpPr>
+      <p:grpSpPr/>
+      <p:sp>
+        <p:nvSpPr>
+          <p:cNvPr id="2" name="Title 1"/>
+          <p:cNvSpPr>
+            <a:spLocks noGrp="1"/>
+          </p:cNvSpPr>
+          <p:nvPr>
+            <p:ph type="title"/>
+          </p:nvPr>
+        </p:nvSpPr>
+        <p:spPr/>
+        <p:txBody>
+          <a:bodyPr/>
+          <a:lstStyle/>
+          <a:p>
+            <a:pPr>
+              <a:defRPr sz="2800" b="1">
+                <a:solidFill>
+                  <a:srgbClr val="1C2B3A"/>
+                </a:solidFill>
+              </a:defRPr>
+            </a:pPr>
+            <a:r>
+              <a:t>Interpreting the summary</a:t>
+            </a:r>
+          </a:p>
+        </p:txBody>
+      </p:sp>
+      <p:sp>
+        <p:nvSpPr>
+          <p:cNvPr id="3" name="TextBox 2"/>
+          <p:cNvSpPr txBox="1"/>
+          <p:nvPr/>
+        </p:nvSpPr>
+        <p:spPr>
+          <a:xfrm>
+            <a:off x="640080" y="1234440"/>
+            <a:ext cx="10972800" cy="1545336"/>
+          </a:xfrm>
+          <a:prstGeom prst="rect">
+            <a:avLst/>
+          </a:prstGeom>
+          <a:noFill/>
+        </p:spPr>
+        <p:txBody>
+          <a:bodyPr wrap="none">
+            <a:spAutoFit/>
+          </a:bodyPr>
+          <a:lstStyle/>
+          <a:p>
+            <a:pPr>
+              <a:defRPr sz="1300">
+                <a:solidFill>
+                  <a:srgbClr val="24354A"/>
+                </a:solidFill>
+                <a:latin typeface="Consolas"/>
+              </a:defRPr>
+            </a:pPr>
+            <a:r>
+              <a:t>REQUESTS   2.640 Mpps   2.75 Gbps wire</a:t>
+            </a:r>
+          </a:p>
+          <a:p>
+            <a:pPr>
+              <a:defRPr sz="1300">
+                <a:solidFill>
+                  <a:srgbClr val="24354A"/>
+                </a:solidFill>
+                <a:latin typeface="Consolas"/>
+              </a:defRPr>
+            </a:pPr>
+            <a:r>
+              <a:t>DELIVERED  2.601 Mpps   98.52% of what was sent</a:t>
+            </a:r>
+          </a:p>
+          <a:p>
+            <a:pPr>
+              <a:defRPr sz="1300">
+                <a:solidFill>
+                  <a:srgbClr val="24354A"/>
+                </a:solidFill>
+                <a:latin typeface="Consolas"/>
+              </a:defRPr>
+            </a:pPr>
+            <a:r>
+              <a:t>REPLIES    2.598 Mpps   2.71 Gbps wire</a:t>
+            </a:r>
+          </a:p>
+          <a:p>
+            <a:pPr>
+              <a:defRPr sz="1300">
+                <a:solidFill>
+                  <a:srgbClr val="24354A"/>
+                </a:solidFill>
+                <a:latin typeface="Consolas"/>
+              </a:defRPr>
+            </a:pPr>
+            <a:r>
+              <a:t>TARGET     2.640 Mpps   100.0% achieved</a:t>
+            </a:r>
+          </a:p>
+          <a:p>
+            <a:pPr>
+              <a:defRPr sz="1300">
+                <a:solidFill>
+                  <a:srgbClr val="24354A"/>
+                </a:solidFill>
+                <a:latin typeface="Consolas"/>
+              </a:defRPr>
+            </a:pPr>
+            <a:r>
+              <a:t>LOSS       1.59% round trip (1.48% forward, 0.11% back)</a:t>
+            </a:r>
+          </a:p>
+          <a:p>
+            <a:pPr>
+              <a:defRPr sz="1300">
+                <a:solidFill>
+                  <a:srgbClr val="24354A"/>
+                </a:solidFill>
+                <a:latin typeface="Consolas"/>
+              </a:defRPr>
+            </a:pPr>
+            <a:r>
+              <a:t>RTT        avg 240us; worst flow p50 190us p99 4.1ms max 31ms</a:t>
+            </a:r>
+          </a:p>
+        </p:txBody>
+      </p:sp>
+      <p:sp>
+        <p:nvSpPr>
+          <p:cNvPr id="4" name="TextBox 3"/>
+          <p:cNvSpPr txBox="1"/>
+          <p:nvPr/>
+        </p:nvSpPr>
+        <p:spPr>
+          <a:xfrm>
+            <a:off x="822960" y="2916936"/>
+            <a:ext cx="10607040" cy="310896"/>
+          </a:xfrm>
+          <a:prstGeom prst="rect">
+            <a:avLst/>
+          </a:prstGeom>
+          <a:noFill/>
+        </p:spPr>
+        <p:txBody>
+          <a:bodyPr wrap="square">
+            <a:spAutoFit/>
+          </a:bodyPr>
+          <a:lstStyle/>
+          <a:p>
+            <a:pPr>
+              <a:defRPr sz="1400"/>
+            </a:pPr>
+            <a:r>
+              <a:t>• DELIVERED is the honest number — senders can't see their own drops.</a:t>
+            </a:r>
+          </a:p>
+        </p:txBody>
+      </p:sp>
+      <p:sp>
+        <p:nvSpPr>
+          <p:cNvPr id="5" name="TextBox 4"/>
+          <p:cNvSpPr txBox="1"/>
+          <p:nvPr/>
+        </p:nvSpPr>
+        <p:spPr>
+          <a:xfrm>
+            <a:off x="822960" y="3300984"/>
+            <a:ext cx="10607040" cy="310896"/>
+          </a:xfrm>
+          <a:prstGeom prst="rect">
+            <a:avLst/>
+          </a:prstGeom>
+          <a:noFill/>
+        </p:spPr>
+        <p:txBody>
+          <a:bodyPr wrap="square">
+            <a:spAutoFit/>
+          </a:bodyPr>
+          <a:lstStyle/>
+          <a:p>
+            <a:pPr>
+              <a:defRPr sz="1400"/>
+            </a:pPr>
+            <a:r>
+              <a:t>• Loss split by leg — dropping 64 B requests vs dropping 8 KB replies need different fixes.</a:t>
+            </a:r>
+          </a:p>
+        </p:txBody>
+      </p:sp>
+      <p:sp>
+        <p:nvSpPr>
+          <p:cNvPr id="6" name="TextBox 5"/>
+          <p:cNvSpPr txBox="1"/>
+          <p:nvPr/>
+        </p:nvSpPr>
+        <p:spPr>
+          <a:xfrm>
+            <a:off x="822960" y="3685032"/>
+            <a:ext cx="10607040" cy="310896"/>
+          </a:xfrm>
+          <a:prstGeom prst="rect">
+            <a:avLst/>
+          </a:prstGeom>
+          <a:noFill/>
+        </p:spPr>
+        <p:txBody>
+          <a:bodyPr wrap="square">
+            <a:spAutoFit/>
+          </a:bodyPr>
+          <a:lstStyle/>
+          <a:p>
+            <a:pPr>
+              <a:defRPr sz="1400"/>
+            </a:pPr>
+            <a:r>
+              <a:t>• RTT is a true round trip — the stamp comes back; no clock sync involved.</a:t>
+            </a:r>
+          </a:p>
+        </p:txBody>
+      </p:sp>
+      <p:sp>
+        <p:nvSpPr>
+          <p:cNvPr id="7" name="TextBox 6"/>
+          <p:cNvSpPr txBox="1"/>
+          <p:nvPr/>
+        </p:nvSpPr>
+        <p:spPr>
+          <a:xfrm>
+            <a:off x="822960" y="4069080"/>
+            <a:ext cx="10607040" cy="932688"/>
+          </a:xfrm>
+          <a:prstGeom prst="rect">
+            <a:avLst/>
+          </a:prstGeom>
+          <a:noFill/>
+        </p:spPr>
+        <p:txBody>
+          <a:bodyPr wrap="square">
+            <a:spAutoFit/>
+          </a:bodyPr>
+          <a:lstStyle/>
+          <a:p>
+            <a:pPr>
+              <a:defRPr sz="1400"/>
+            </a:pPr>
+            <a:r>
+              <a:t>• Per-host CPU columns: cpu (box) / 1 core (busiest core) / agent (busiest worker as share of one core). agent ≈ 100% ⇒ you're measuring the tool, not the network — add workers (spare cores) or hosts; the summary says so in as many words.</a:t>
+            </a:r>
+          </a:p>
+        </p:txBody>
+      </p:sp>
+      <p:sp>
+        <p:nvSpPr>
+          <p:cNvPr id="8" name="TextBox 7"/>
+          <p:cNvSpPr txBox="1"/>
+          <p:nvPr/>
+        </p:nvSpPr>
+        <p:spPr>
+          <a:xfrm>
+            <a:off x="822960" y="5074920"/>
+            <a:ext cx="10607040" cy="1243584"/>
+          </a:xfrm>
+          <a:prstGeom prst="rect">
+            <a:avLst/>
+          </a:prstGeom>
+          <a:noFill/>
+        </p:spPr>
+        <p:txBody>
+          <a:bodyPr wrap="square">
+            <a:spAutoFit/>
+          </a:bodyPr>
+          <a:lstStyle/>
+          <a:p>
+            <a:pPr>
+              <a:defRPr sz="1400"/>
+            </a:pPr>
+            <a:r>
+              <a:t>• Performance model: ~200k pps × workers × hosts. Processes, not threads (GIL: 4 threads = 57k pps; 4 processes = 1.09M). One core pegged while the box idles? Workers can't outnumber flows → --streams N gives each pair N sockets (rate split, not multiplied) so workers/RSS/ECMP have tuples to spread: mx start --streams 8 --workers 32.</a:t>
+            </a:r>
+          </a:p>
+        </p:txBody>
+      </p:sp>
+    </p:spTree>
+  </p:cSld>
+  <p:clrMapOvr>
+    <a:masterClrMapping/>
+  </p:clrMapOvr>
+</p:sld>
+</file>
+
+<file path=ppt/slides/slide21.xml><?xml version="1.0" encoding="utf-8"?>
+<p:sld xmlns:a="http://schemas.openxmlformats.org/drawingml/2006/main" xmlns:p="http://schemas.openxmlformats.org/presentationml/2006/main" xmlns:r="http://schemas.openxmlformats.org/officeDocument/2006/relationships">
+  <p:cSld>
+    <p:spTree>
+      <p:nvGrpSpPr>
+        <p:cNvPr id="1" name=""/>
+        <p:cNvGrpSpPr/>
+        <p:nvPr/>
+      </p:nvGrpSpPr>
+      <p:grpSpPr/>
+      <p:sp>
+        <p:nvSpPr>
+          <p:cNvPr id="2" name="Title 1"/>
+          <p:cNvSpPr>
+            <a:spLocks noGrp="1"/>
+          </p:cNvSpPr>
+          <p:nvPr>
+            <p:ph type="title"/>
+          </p:nvPr>
+        </p:nvSpPr>
+        <p:spPr/>
+        <p:txBody>
+          <a:bodyPr/>
+          <a:lstStyle/>
+          <a:p>
+            <a:pPr>
+              <a:defRPr sz="2800" b="1">
+                <a:solidFill>
+                  <a:srgbClr val="1C2B3A"/>
+                </a:solidFill>
+              </a:defRPr>
+            </a:pPr>
+            <a:r>
+              <a:t>Finding the limit — and common options</a:t>
+            </a:r>
+          </a:p>
+        </p:txBody>
+      </p:sp>
+      <p:sp>
+        <p:nvSpPr>
+          <p:cNvPr id="3" name="Content Placeholder 2"/>
+          <p:cNvSpPr>
+            <a:spLocks noGrp="1"/>
+          </p:cNvSpPr>
+          <p:nvPr>
+            <p:ph idx="1"/>
+          </p:nvPr>
+        </p:nvSpPr>
+        <p:spPr/>
+        <p:txBody>
+          <a:bodyPr wrap="square">
+            <a:normAutofit/>
+          </a:bodyPr>
+          <a:lstStyle/>
+          <a:p>
+            <a:pPr>
+              <a:defRPr sz="1600"/>
+            </a:pPr>
+            <a:r>
+              <a:t>mx check --nic-gbps 25 --nic-mpps 15 first — was what you asked for even possible?</a:t>
+            </a:r>
+          </a:p>
+          <a:p>
+            <a:pPr>
+              <a:defRPr sz="1600"/>
+            </a:pPr>
+            <a:r>
+              <a:t>Ramp: --pps 50000 → run → --pps 100000 → … The last rate that delivers cleanly is the fleet's sustainable all-to-all packet rate.</a:t>
+            </a:r>
+          </a:p>
+          <a:p>
+            <a:pPr>
+              <a:defRPr sz="1600"/>
+            </a:pPr>
+            <a:r>
+              <a:t>Watch in order: (1) p99 lifting off the p50 — queues filling, usually before loss; (2) DELIVERED falling behind REQUESTS — something's dropping.</a:t>
+            </a:r>
+          </a:p>
+          <a:p>
+            <a:pPr>
+              <a:defRPr sz="1600"/>
+            </a:pPr>
+            <a:r>
+              <a:t>--pps max = unpaced: finds the ceiling fastest, tells you less about where it is.</a:t>
+            </a:r>
+          </a:p>
+          <a:p>
+            <a:pPr>
+              <a:defRPr sz="1600"/>
+            </a:pPr>
+            <a:r>
+              <a:t>Common shapes: --tx-size 64 --rx-size 64 --pps max (small-packet torture) · --tx-size 128 --rx-size 8192 (RPC) · --gbps 10 --tx-size 1400 (bandwidth-budget sizing) · mx start --bind eth1 (data-NIC pinning — retargets peers' addresses too, both halves of the two-NIC job).</a:t>
+            </a:r>
+          </a:p>
+        </p:txBody>
+      </p:sp>
+    </p:spTree>
+  </p:cSld>
+  <p:clrMapOvr>
+    <a:masterClrMapping/>
+  </p:clrMapOvr>
+</p:sld>
+</file>
+
+<file path=ppt/slides/slide22.xml><?xml version="1.0" encoding="utf-8"?>
+<p:sld xmlns:a="http://schemas.openxmlformats.org/drawingml/2006/main" xmlns:p="http://schemas.openxmlformats.org/presentationml/2006/main" xmlns:r="http://schemas.openxmlformats.org/officeDocument/2006/relationships">
+  <p:cSld>
+    <p:spTree>
+      <p:nvGrpSpPr>
+        <p:cNvPr id="1" name=""/>
+        <p:cNvGrpSpPr/>
+        <p:nvPr/>
+      </p:nvGrpSpPr>
+      <p:grpSpPr/>
+      <p:sp>
+        <p:nvSpPr>
+          <p:cNvPr id="2" name="Title 1"/>
+          <p:cNvSpPr>
+            <a:spLocks noGrp="1"/>
+          </p:cNvSpPr>
+          <p:nvPr>
+            <p:ph type="title"/>
+          </p:nvPr>
+        </p:nvSpPr>
+        <p:spPr/>
+        <p:txBody>
+          <a:bodyPr/>
+          <a:lstStyle/>
+          <a:p>
+            <a:pPr>
+              <a:defRPr sz="2800" b="1">
+                <a:solidFill>
+                  <a:srgbClr val="1C2B3A"/>
+                </a:solidFill>
+              </a:defRPr>
+            </a:pPr>
+            <a:r>
+              <a:t>Ways to run at different scales — getting the best run</a:t>
+            </a:r>
+          </a:p>
+        </p:txBody>
+      </p:sp>
+      <p:sp>
+        <p:nvSpPr>
+          <p:cNvPr id="3" name="Content Placeholder 2"/>
+          <p:cNvSpPr>
+            <a:spLocks noGrp="1"/>
+          </p:cNvSpPr>
+          <p:nvPr>
+            <p:ph idx="1"/>
+          </p:nvPr>
+        </p:nvSpPr>
+        <p:spPr/>
+        <p:txBody>
+          <a:bodyPr wrap="square">
+            <a:normAutofit/>
+          </a:bodyPr>
+          <a:lstStyle/>
+          <a:p>
+            <a:pPr>
+              <a:defRPr sz="1600"/>
+            </a:pPr>
+            <a:r>
+              <a:t>Small fleet (≤ ~30): full mesh (default gen). Every pair, continuously — the forensic shape. Big box, few peers? add --streams.</a:t>
+            </a:r>
+          </a:p>
+          <a:p>
+            <a:pPr>
+              <a:defRPr sz="1600"/>
+            </a:pPr>
+            <a:r>
+              <a:t>Large fleet: --peers K — k-regular shuffle: each host talks to exactly K shuffled peers. Equal per-host load by construction (K superimposed permutations), K sockets instead of N−1, seeded + replayable (--seed). --streams S multiplies 4-tuples for ECMP coverage; a host holds K×S sockets.</a:t>
+            </a:r>
+          </a:p>
+          <a:p>
+            <a:pPr>
+              <a:defRPr sz="1600"/>
+            </a:pPr>
+            <a:r>
+              <a:t>Full pair coverage at huge N: --peers K --dwell T — layered rotation: the N−1 shifts of the shuffle are dealt out K at a time into ⌈(N−1)/K⌉ edge-disjoint layers; agents switch layers on their own wall clock (no control channel). After one cycle every ordered pair measured exactly once; per-host load never changes. 1000 hosts: full coverage every ~6 min on 8 sockets (--dwell 3 --interval 1). --equal-layers for dip-free soaks; COVERAGE section + coverage_grid.csv report progress.</a:t>
+            </a:r>
+          </a:p>
+          <a:p>
+            <a:pPr>
+              <a:defRPr sz="1600"/>
+            </a:pPr>
+            <a:r>
+              <a:t>Dwell floor: whole multiple of --interval; useful floor ≈ 3× interval.</a:t>
+            </a:r>
+          </a:p>
+          <a:p>
+            <a:pPr>
+              <a:defRPr sz="1600"/>
+            </a:pPr>
+            <a:r>
+              <a:t>Don't want to remember this? mx hints --servers s.txt --pps-per-host N does the arithmetic and prints the command.</a:t>
+            </a:r>
+          </a:p>
+        </p:txBody>
+      </p:sp>
+    </p:spTree>
+  </p:cSld>
+  <p:clrMapOvr>
+    <a:masterClrMapping/>
+  </p:clrMapOvr>
+</p:sld>
+</file>
+
+<file path=ppt/slides/slide23.xml><?xml version="1.0" encoding="utf-8"?>
+<p:sld xmlns:a="http://schemas.openxmlformats.org/drawingml/2006/main" xmlns:p="http://schemas.openxmlformats.org/presentationml/2006/main" xmlns:r="http://schemas.openxmlformats.org/officeDocument/2006/relationships">
+  <p:cSld>
+    <p:spTree>
+      <p:nvGrpSpPr>
+        <p:cNvPr id="1" name=""/>
+        <p:cNvGrpSpPr/>
+        <p:nvPr/>
+      </p:nvGrpSpPr>
+      <p:grpSpPr/>
+      <p:sp>
+        <p:nvSpPr>
+          <p:cNvPr id="2" name="Title 1"/>
+          <p:cNvSpPr>
+            <a:spLocks noGrp="1"/>
+          </p:cNvSpPr>
+          <p:nvPr>
+            <p:ph type="title"/>
+          </p:nvPr>
+        </p:nvSpPr>
+        <p:spPr/>
+        <p:txBody>
+          <a:bodyPr/>
+          <a:lstStyle/>
+          <a:p>
+            <a:pPr>
+              <a:defRPr sz="2800" b="1">
+                <a:solidFill>
+                  <a:srgbClr val="1C2B3A"/>
+                </a:solidFill>
+              </a:defRPr>
+            </a:pPr>
+            <a:r>
+              <a:t>Stopping and cleaning up</a:t>
+            </a:r>
+          </a:p>
+        </p:txBody>
+      </p:sp>
+      <p:sp>
+        <p:nvSpPr>
+          <p:cNvPr id="3" name="Content Placeholder 2"/>
+          <p:cNvSpPr>
+            <a:spLocks noGrp="1"/>
+          </p:cNvSpPr>
+          <p:nvPr>
+            <p:ph idx="1"/>
+          </p:nvPr>
+        </p:nvSpPr>
+        <p:spPr/>
+        <p:txBody>
+          <a:bodyPr wrap="square">
+            <a:normAutofit/>
+          </a:bodyPr>
+          <a:lstStyle/>
+          <a:p>
+            <a:pPr>
+              <a:defRPr sz="1600"/>
+            </a:pPr>
+            <a:r>
+              <a:t>Everything on a server lives in one directory (/var/tmp/mx; --remote-dir to change): agent, matrix, log, report. No package, no sysctl, no unit file.</a:t>
+            </a:r>
+          </a:p>
+          <a:p>
+            <a:pPr>
+              <a:defRPr sz="1600"/>
+            </a:pPr>
+            <a:r>
+              <a:t>mx stop — agents halt; reports and logs stay for later collection.</a:t>
+            </a:r>
+          </a:p>
+          <a:p>
+            <a:pPr>
+              <a:defRPr sz="1600"/>
+            </a:pPr>
+            <a:r>
+              <a:t>Take mx logs and mx summarize first — then mx clean.</a:t>
+            </a:r>
+          </a:p>
+          <a:p>
+            <a:pPr>
+              <a:defRPr sz="1600"/>
+            </a:pPr>
+            <a:r>
+              <a:t>mx clean refuses to report success unless the directory is verifiably gone and no agent still runs.</a:t>
+            </a:r>
+          </a:p>
+          <a:p>
+            <a:pPr>
+              <a:defRPr sz="1600"/>
+            </a:pPr>
+            <a:r>
+              <a:t>Agents flush the current interval on SIGTERM — stopping doesn't discard the last seconds of data.</a:t>
+            </a:r>
+          </a:p>
+        </p:txBody>
+      </p:sp>
+    </p:spTree>
+  </p:cSld>
+  <p:clrMapOvr>
+    <a:masterClrMapping/>
+  </p:clrMapOvr>
+</p:sld>
+</file>
+
+<file path=ppt/slides/slide24.xml><?xml version="1.0" encoding="utf-8"?>
+<p:sld xmlns:a="http://schemas.openxmlformats.org/drawingml/2006/main" xmlns:p="http://schemas.openxmlformats.org/presentationml/2006/main" xmlns:r="http://schemas.openxmlformats.org/officeDocument/2006/relationships">
+  <p:cSld>
+    <p:spTree>
+      <p:nvGrpSpPr>
+        <p:cNvPr id="1" name=""/>
+        <p:cNvGrpSpPr/>
+        <p:nvPr/>
+      </p:nvGrpSpPr>
+      <p:grpSpPr/>
+      <p:sp>
+        <p:nvSpPr>
+          <p:cNvPr id="2" name="Title 1"/>
+          <p:cNvSpPr>
+            <a:spLocks noGrp="1"/>
+          </p:cNvSpPr>
+          <p:nvPr>
+            <p:ph type="title"/>
+          </p:nvPr>
+        </p:nvSpPr>
+        <p:spPr/>
+        <p:txBody>
+          <a:bodyPr/>
+          <a:lstStyle/>
+          <a:p>
+            <a:r>
+              <a:t>Part 3 — netmesh</a:t>
+            </a:r>
+          </a:p>
+        </p:txBody>
+      </p:sp>
+      <p:sp>
+        <p:nvSpPr>
+          <p:cNvPr id="3" name="Text Placeholder 2"/>
+          <p:cNvSpPr>
+            <a:spLocks noGrp="1"/>
+          </p:cNvSpPr>
+          <p:nvPr>
+            <p:ph type="body" idx="1"/>
+          </p:nvPr>
+        </p:nvSpPr>
+        <p:spPr/>
+        <p:txBody>
+          <a:bodyPr/>
+          <a:lstStyle/>
+          <a:p/>
+        </p:txBody>
+      </p:sp>
+    </p:spTree>
+  </p:cSld>
+  <p:clrMapOvr>
+    <a:masterClrMapping/>
+  </p:clrMapOvr>
+</p:sld>
+</file>
+
+<file path=ppt/slides/slide25.xml><?xml version="1.0" encoding="utf-8"?>
+<p:sld xmlns:a="http://schemas.openxmlformats.org/drawingml/2006/main" xmlns:p="http://schemas.openxmlformats.org/presentationml/2006/main" xmlns:r="http://schemas.openxmlformats.org/officeDocument/2006/relationships">
+  <p:cSld>
+    <p:spTree>
+      <p:nvGrpSpPr>
+        <p:cNvPr id="1" name=""/>
+        <p:cNvGrpSpPr/>
+        <p:nvPr/>
+      </p:nvGrpSpPr>
+      <p:grpSpPr/>
+      <p:sp>
+        <p:nvSpPr>
+          <p:cNvPr id="2" name="Title 1"/>
+          <p:cNvSpPr>
+            <a:spLocks noGrp="1"/>
+          </p:cNvSpPr>
+          <p:nvPr>
+            <p:ph type="title"/>
+          </p:nvPr>
+        </p:nvSpPr>
+        <p:spPr/>
+        <p:txBody>
+          <a:bodyPr/>
+          <a:lstStyle/>
+          <a:p>
+            <a:pPr>
+              <a:defRPr sz="2800" b="1">
+                <a:solidFill>
+                  <a:srgbClr val="1C2B3A"/>
+                </a:solidFill>
+              </a:defRPr>
+            </a:pPr>
+            <a:r>
+              <a:t>What it is, and how it fits the grouping</a:t>
+            </a:r>
+          </a:p>
+        </p:txBody>
+      </p:sp>
+      <p:sp>
+        <p:nvSpPr>
+          <p:cNvPr id="3" name="Content Placeholder 2"/>
+          <p:cNvSpPr>
+            <a:spLocks noGrp="1"/>
+          </p:cNvSpPr>
+          <p:nvPr>
+            <p:ph idx="1"/>
+          </p:nvPr>
+        </p:nvSpPr>
+        <p:spPr/>
+        <p:txBody>
+          <a:bodyPr wrap="square">
+            <a:normAutofit/>
+          </a:bodyPr>
+          <a:lstStyle/>
+          <a:p>
+            <a:pPr>
+              <a:defRPr sz="1600"/>
+            </a:pPr>
+            <a:r>
+              <a:t>One of binnacle's eight diagnostic tools (pip install binnacle); its question: "is it the network, and which link is sick?"</a:t>
+            </a:r>
+          </a:p>
+          <a:p>
+            <a:pPr>
+              <a:defRPr sz="1600"/>
+            </a:pPr>
+            <a:r>
+              <a:t>Measures RTT, jitter, loss and path MTU between machines when nothing else is running — the idle baseline.</a:t>
+            </a:r>
+          </a:p>
+          <a:p>
+            <a:pPr>
+              <a:defRPr sz="1600"/>
+            </a:pPr>
+            <a:r>
+              <a:t>The gap it fills: iperf_orchestrator = bandwidth under load; mx = pps under load. Neither says what the network does idle — and that's the baseline both numbers must be read against.</a:t>
+            </a:r>
+          </a:p>
+          <a:p>
+            <a:pPr>
+              <a:defRPr sz="1600"/>
+            </a:pPr>
+            <a:r>
+              <a:t>Deliberately the cheapest of the three: ~10 small packets/s per pair — safe on production during an incident.</a:t>
+            </a:r>
+          </a:p>
+          <a:p>
+            <a:pPr>
+              <a:defRPr sz="1600"/>
+            </a:pPr>
+            <a:r>
+              <a:t>Two hosts and one line is the design centre; mesh files, grids and layered scale-up exist but a two-box user never sees them.</a:t>
+            </a:r>
+          </a:p>
+          <a:p>
+            <a:pPr>
+              <a:defRPr sz="1600"/>
+            </a:pPr>
+            <a:r>
+              <a:t>Why run it: before blaming the network in an incident; before commissioning load tests; as a recurring health probe; and around a load test (--baseline) to see what the load does to latency.</a:t>
+            </a:r>
+          </a:p>
+        </p:txBody>
+      </p:sp>
+    </p:spTree>
+  </p:cSld>
+  <p:clrMapOvr>
+    <a:masterClrMapping/>
+  </p:clrMapOvr>
+</p:sld>
+</file>
+
+<file path=ppt/slides/slide26.xml><?xml version="1.0" encoding="utf-8"?>
+<p:sld xmlns:a="http://schemas.openxmlformats.org/drawingml/2006/main" xmlns:p="http://schemas.openxmlformats.org/presentationml/2006/main" xmlns:r="http://schemas.openxmlformats.org/officeDocument/2006/relationships">
+  <p:cSld>
+    <p:spTree>
+      <p:nvGrpSpPr>
+        <p:cNvPr id="1" name=""/>
+        <p:cNvGrpSpPr/>
+        <p:nvPr/>
+      </p:nvGrpSpPr>
+      <p:grpSpPr/>
+      <p:sp>
+        <p:nvSpPr>
+          <p:cNvPr id="2" name="Title 1"/>
+          <p:cNvSpPr>
+            <a:spLocks noGrp="1"/>
+          </p:cNvSpPr>
+          <p:nvPr>
+            <p:ph type="title"/>
+          </p:nvPr>
+        </p:nvSpPr>
+        <p:spPr/>
+        <p:txBody>
+          <a:bodyPr/>
+          <a:lstStyle/>
+          <a:p>
+            <a:pPr>
+              <a:defRPr sz="2800" b="1">
+                <a:solidFill>
+                  <a:srgbClr val="1C2B3A"/>
+                </a:solidFill>
+              </a:defRPr>
+            </a:pPr>
+            <a:r>
+              <a:t>How it probes (why not ping)</a:t>
+            </a:r>
+          </a:p>
+        </p:txBody>
+      </p:sp>
+      <p:sp>
+        <p:nvSpPr>
+          <p:cNvPr id="3" name="Content Placeholder 2"/>
+          <p:cNvSpPr>
+            <a:spLocks noGrp="1"/>
+          </p:cNvSpPr>
+          <p:nvPr>
+            <p:ph idx="1"/>
+          </p:nvPr>
+        </p:nvSpPr>
+        <p:spPr/>
+        <p:txBody>
+          <a:bodyPr wrap="square">
+            <a:normAutofit/>
+          </a:bodyPr>
+          <a:lstStyle/>
+          <a:p>
+            <a:pPr>
+              <a:defRPr sz="1600"/>
+            </a:pPr>
+            <a:r>
+              <a:t>UDP echoes between temporary agents — the only approach giving all four:</a:t>
+            </a:r>
+          </a:p>
+          <a:p>
+            <a:pPr lvl="1">
+              <a:defRPr sz="1400"/>
+            </a:pPr>
+            <a:r>
+              <a:t>No root — ordinary unprivileged UDP sockets both ends.</a:t>
+            </a:r>
+          </a:p>
+          <a:p>
+            <a:pPr lvl="1">
+              <a:defRPr sz="1400"/>
+            </a:pPr>
+            <a:r>
+              <a:t>Exact RTT, one clock — sender's own monotonic stamp echoed back untouched; no NTP assumptions.</a:t>
+            </a:r>
+          </a:p>
+          <a:p>
+            <a:pPr lvl="1">
+              <a:defRPr sz="1400"/>
+            </a:pPr>
+            <a:r>
+              <a:t>Loss split into forward/return legs — the responder independently counts what arrived. Not available from ping.</a:t>
+            </a:r>
+          </a:p>
+          <a:p>
+            <a:pPr lvl="1">
+              <a:defRPr sz="1400"/>
+            </a:pPr>
+            <a:r>
+              <a:t>Measures the data plane — ICMP is answered by router control planes (rate-limited, deprioritized), so it systematically lies about what application traffic sees.</a:t>
+            </a:r>
+          </a:p>
+          <a:p>
+            <a:pPr>
+              <a:defRPr sz="1600"/>
+            </a:pPr>
+            <a:r>
+              <a:t>One-way delay deliberately not reported — without PTP the clock offset would swamp the microseconds that matter. Instead: two separate round trips (A→B timed by A, B→A timed by B), compared — every number quoted is one that is actually true.</a:t>
+            </a:r>
+          </a:p>
+          <a:p>
+            <a:pPr>
+              <a:defRPr sz="1600"/>
+            </a:pPr>
+            <a:r>
+              <a:t>Can't deploy an agent (VIP, router, appliance)? Prefix with ~ → probed with ping, but segregated as ONE-SIDED in the report because those rows carry materially less.</a:t>
+            </a:r>
+          </a:p>
+        </p:txBody>
+      </p:sp>
+    </p:spTree>
+  </p:cSld>
+  <p:clrMapOvr>
+    <a:masterClrMapping/>
+  </p:clrMapOvr>
+</p:sld>
+</file>
+
+<file path=ppt/slides/slide27.xml><?xml version="1.0" encoding="utf-8"?>
+<p:sld xmlns:a="http://schemas.openxmlformats.org/drawingml/2006/main" xmlns:p="http://schemas.openxmlformats.org/presentationml/2006/main" xmlns:r="http://schemas.openxmlformats.org/officeDocument/2006/relationships">
+  <p:cSld>
+    <p:spTree>
+      <p:nvGrpSpPr>
+        <p:cNvPr id="1" name=""/>
+        <p:cNvGrpSpPr/>
+        <p:nvPr/>
+      </p:nvGrpSpPr>
+      <p:grpSpPr/>
+      <p:sp>
+        <p:nvSpPr>
+          <p:cNvPr id="2" name="Title 1"/>
+          <p:cNvSpPr>
+            <a:spLocks noGrp="1"/>
+          </p:cNvSpPr>
+          <p:nvPr>
+            <p:ph type="title"/>
+          </p:nvPr>
+        </p:nvSpPr>
+        <p:spPr/>
+        <p:txBody>
+          <a:bodyPr/>
+          <a:lstStyle/>
+          <a:p>
+            <a:pPr>
+              <a:defRPr sz="2800" b="1">
+                <a:solidFill>
+                  <a:srgbClr val="1C2B3A"/>
+                </a:solidFill>
+              </a:defRPr>
+            </a:pPr>
+            <a:r>
+              <a:t>How to run it</a:t>
+            </a:r>
+          </a:p>
+        </p:txBody>
+      </p:sp>
+      <p:sp>
+        <p:nvSpPr>
+          <p:cNvPr id="3" name="TextBox 2"/>
+          <p:cNvSpPr txBox="1"/>
+          <p:nvPr/>
+        </p:nvSpPr>
+        <p:spPr>
+          <a:xfrm>
+            <a:off x="640080" y="1234440"/>
+            <a:ext cx="10972800" cy="1764792"/>
+          </a:xfrm>
+          <a:prstGeom prst="rect">
+            <a:avLst/>
+          </a:prstGeom>
+          <a:noFill/>
+        </p:spPr>
+        <p:txBody>
+          <a:bodyPr wrap="none">
+            <a:spAutoFit/>
+          </a:bodyPr>
+          <a:lstStyle/>
+          <a:p>
+            <a:pPr>
+              <a:defRPr sz="1300">
+                <a:solidFill>
+                  <a:srgbClr val="24354A"/>
+                </a:solidFill>
+                <a:latin typeface="Consolas"/>
+              </a:defRPr>
+            </a:pPr>
+            <a:r>
+              <a:t>netmesh selftest                        # prove it works here first (loopback, no ssh)</a:t>
+            </a:r>
+          </a:p>
+          <a:p>
+            <a:pPr>
+              <a:defRPr sz="1300">
+                <a:solidFill>
+                  <a:srgbClr val="24354A"/>
+                </a:solidFill>
+                <a:latin typeface="Consolas"/>
+              </a:defRPr>
+            </a:pPr>
+            <a:r>
+              <a:t>netmesh check web01 db01                # one-shot: gen, deploy, probe, summarize, clean</a:t>
+            </a:r>
+          </a:p>
+          <a:p>
+            <a:pPr>
+              <a:defRPr sz="1300">
+                <a:solidFill>
+                  <a:srgbClr val="24354A"/>
+                </a:solidFill>
+                <a:latin typeface="Consolas"/>
+              </a:defRPr>
+            </a:pPr>
+            <a:r>
+              <a:t>netmesh check web01 db01 --for 60</a:t>
+            </a:r>
+          </a:p>
+          <a:p>
+            <a:pPr>
+              <a:defRPr sz="1300">
+                <a:solidFill>
+                  <a:srgbClr val="24354A"/>
+                </a:solidFill>
+                <a:latin typeface="Consolas"/>
+              </a:defRPr>
+            </a:pPr>
+            <a:r>
+              <a:t>netmesh gen --servers prod.txt          # mesh file for repeat runs</a:t>
+            </a:r>
+          </a:p>
+          <a:p>
+            <a:pPr>
+              <a:defRPr sz="1300">
+                <a:solidFill>
+                  <a:srgbClr val="24354A"/>
+                </a:solidFill>
+                <a:latin typeface="Consolas"/>
+              </a:defRPr>
+            </a:pPr>
+            <a:r>
+              <a:t>netmesh run --for 300 --grid grids/</a:t>
+            </a:r>
+          </a:p>
+          <a:p>
+            <a:pPr>
+              <a:defRPr sz="1300">
+                <a:solidFill>
+                  <a:srgbClr val="24354A"/>
+                </a:solidFill>
+                <a:latin typeface="Consolas"/>
+              </a:defRPr>
+            </a:pPr>
+            <a:r>
+              <a:t>netmesh check web03 db01 --flows 8      # sweep source ports across a LAG/ECMP bundle</a:t>
+            </a:r>
+          </a:p>
+          <a:p>
+            <a:pPr>
+              <a:defRPr sz="1300">
+                <a:solidFill>
+                  <a:srgbClr val="24354A"/>
+                </a:solidFill>
+                <a:latin typeface="Consolas"/>
+              </a:defRPr>
+            </a:pPr>
+            <a:r>
+              <a:t>netmesh run --baseline 20 -- ./iperf_orchestrator.sh all   # idle first, then probe under load</a:t>
+            </a:r>
+          </a:p>
+        </p:txBody>
+      </p:sp>
+      <p:sp>
+        <p:nvSpPr>
+          <p:cNvPr id="4" name="TextBox 3"/>
+          <p:cNvSpPr txBox="1"/>
+          <p:nvPr/>
+        </p:nvSpPr>
+        <p:spPr>
+          <a:xfrm>
+            <a:off x="822960" y="3136392"/>
+            <a:ext cx="10607040" cy="621792"/>
+          </a:xfrm>
+          <a:prstGeom prst="rect">
+            <a:avLst/>
+          </a:prstGeom>
+          <a:noFill/>
+        </p:spPr>
+        <p:txBody>
+          <a:bodyPr wrap="square">
+            <a:spAutoFit/>
+          </a:bodyPr>
+          <a:lstStyle/>
+          <a:p>
+            <a:pPr>
+              <a:defRPr sz="1400"/>
+            </a:pPr>
+            <a:r>
+              <a:t>• Same verb set as mx (gen/start/status/summarize/stop/clean + run/collect/logs/paths/doctor); the mesh file shares mx's matrix grammar — learn one, know the other.</a:t>
+            </a:r>
+          </a:p>
+        </p:txBody>
+      </p:sp>
+      <p:sp>
+        <p:nvSpPr>
+          <p:cNvPr id="5" name="TextBox 4"/>
+          <p:cNvSpPr txBox="1"/>
+          <p:nvPr/>
+        </p:nvSpPr>
+        <p:spPr>
+          <a:xfrm>
+            <a:off x="822960" y="3831336"/>
+            <a:ext cx="10607040" cy="1243584"/>
+          </a:xfrm>
+          <a:prstGeom prst="rect">
+            <a:avLst/>
+          </a:prstGeom>
+          <a:noFill/>
+        </p:spPr>
+        <p:txBody>
+          <a:bodyPr wrap="square">
+            <a:spAutoFit/>
+          </a:bodyPr>
+          <a:lstStyle/>
+          <a:p>
+            <a:pPr>
+              <a:defRPr sz="1400"/>
+            </a:pPr>
+            <a:r>
+              <a:t>• --flows N matters: one source port = one 5-tuple = one path through a LAG/ECMP bundle — a sick member is hit or missed by luck (the fault that never reproduces). N buckets split the rate (never multiply it) and are compared against the median bucket: "port 40008 sees p50 4.1 ms where the median flow sees 142 µs — same pair, same instant, so what differs is the bundle member."</a:t>
+            </a:r>
+          </a:p>
+        </p:txBody>
+      </p:sp>
+      <p:sp>
+        <p:nvSpPr>
+          <p:cNvPr id="6" name="TextBox 5"/>
+          <p:cNvSpPr txBox="1"/>
+          <p:nvPr/>
+        </p:nvSpPr>
+        <p:spPr>
+          <a:xfrm>
+            <a:off x="822960" y="5148072"/>
+            <a:ext cx="10607040" cy="310896"/>
+          </a:xfrm>
+          <a:prstGeom prst="rect">
+            <a:avLst/>
+          </a:prstGeom>
+          <a:noFill/>
+        </p:spPr>
+        <p:txBody>
+          <a:bodyPr wrap="square">
+            <a:spAutoFit/>
+          </a:bodyPr>
+          <a:lstStyle/>
+          <a:p>
+            <a:pPr>
+              <a:defRPr sz="1400"/>
+            </a:pPr>
+            <a:r>
+              <a:t>• IPv6: refused by netmesh (the rest of binnacle's list grammar supports it).</a:t>
+            </a:r>
+          </a:p>
+        </p:txBody>
+      </p:sp>
+    </p:spTree>
+  </p:cSld>
+  <p:clrMapOvr>
+    <a:masterClrMapping/>
+  </p:clrMapOvr>
+</p:sld>
+</file>
+
+<file path=ppt/slides/slide28.xml><?xml version="1.0" encoding="utf-8"?>
+<p:sld xmlns:a="http://schemas.openxmlformats.org/drawingml/2006/main" xmlns:p="http://schemas.openxmlformats.org/presentationml/2006/main" xmlns:r="http://schemas.openxmlformats.org/officeDocument/2006/relationships">
+  <p:cSld>
+    <p:spTree>
+      <p:nvGrpSpPr>
+        <p:cNvPr id="1" name=""/>
+        <p:cNvGrpSpPr/>
+        <p:nvPr/>
+      </p:nvGrpSpPr>
+      <p:grpSpPr/>
+      <p:sp>
+        <p:nvSpPr>
+          <p:cNvPr id="2" name="Title 1"/>
+          <p:cNvSpPr>
+            <a:spLocks noGrp="1"/>
+          </p:cNvSpPr>
+          <p:nvPr>
+            <p:ph type="title"/>
+          </p:nvPr>
+        </p:nvSpPr>
+        <p:spPr/>
+        <p:txBody>
+          <a:bodyPr/>
+          <a:lstStyle/>
+          <a:p>
+            <a:pPr>
+              <a:defRPr sz="2800" b="1">
+                <a:solidFill>
+                  <a:srgbClr val="1C2B3A"/>
+                </a:solidFill>
+              </a:defRPr>
+            </a:pPr>
+            <a:r>
+              <a:t>Getting reports &amp; interpreting</a:t>
+            </a:r>
+          </a:p>
+        </p:txBody>
+      </p:sp>
+      <p:sp>
+        <p:nvSpPr>
+          <p:cNvPr id="3" name="Content Placeholder 2"/>
+          <p:cNvSpPr>
+            <a:spLocks noGrp="1"/>
+          </p:cNvSpPr>
+          <p:nvPr>
+            <p:ph idx="1"/>
+          </p:nvPr>
+        </p:nvSpPr>
+        <p:spPr/>
+        <p:txBody>
+          <a:bodyPr wrap="square">
+            <a:normAutofit/>
+          </a:bodyPr>
+          <a:lstStyle/>
+          <a:p>
+            <a:pPr>
+              <a:defRPr sz="1600"/>
+            </a:pPr>
+            <a:r>
+              <a:t>reports/&lt;host&gt;.csv — tidy long format, one row per peer per direction per interval. Blank means "not measured", never zero. --grid DIR writes rtt_p50/rtt_p99/jitter/loss/mtu/asym grids matching mx's layout.</a:t>
+            </a:r>
+          </a:p>
+          <a:p>
+            <a:pPr>
+              <a:defRPr sz="1600"/>
+            </a:pPr>
+            <a:r>
+              <a:t>Headline = median of pair p50s (one sick pair can't move it or hide inside it); worst pairs ranked by p99.</a:t>
+            </a:r>
+          </a:p>
+          <a:p>
+            <a:pPr>
+              <a:defRPr sz="1600"/>
+            </a:pPr>
+            <a:r>
+              <a:t>ASYMMETRY — A→B 8× slower than B→A ⇒ look at A's egress; the return path just proved itself fine. Diagnosis is computed, not canned: slow pairs sharing a source → that host's egress; sharing a destination → its ingress; spanning a group boundary → the path between.</a:t>
+            </a:r>
+          </a:p>
+          <a:p>
+            <a:pPr>
+              <a:defRPr sz="1600"/>
+            </a:pPr>
+            <a:r>
+              <a:t>PATH MTU — four outcomes: confirmed / blackhole (small packets echo, large vanish, no error returns — "small requests work, large transfers hang") / cached / unsupported. Found without root; only an end-to-end echo counts.</a:t>
+            </a:r>
+          </a:p>
+          <a:p>
+            <a:pPr>
+              <a:defRPr sz="1600"/>
+            </a:pPr>
+            <a:r>
+              <a:t>PATH SPREAD (--flows) — one bucket 28.9× the median = a sick LAG/ECMP member, named while the run is fresh.</a:t>
+            </a:r>
+          </a:p>
+          <a:p>
+            <a:pPr>
+              <a:defRPr sz="1600"/>
+            </a:pPr>
+            <a:r>
+              <a:t>UNDER LOAD (--baseline) — p99 210 µs idle → 42 ms loaded: the queue in front of the bottleneck; what everything sharing the path paid for the throughput number. Loss appearing only under load gets its own finding.</a:t>
+            </a:r>
+          </a:p>
+          <a:p>
+            <a:pPr>
+              <a:defRPr sz="1600"/>
+            </a:pPr>
+            <a:r>
+              <a:t>Measurement honesty: flags when a NIC's rx-usecs coalescing timer is the floor you measured (with the ethtool line); agent_cpu_pct ≈ 100 ⇒ you're measuring the tool.</a:t>
+            </a:r>
+          </a:p>
+          <a:p>
+            <a:pPr>
+              <a:defRPr sz="1600"/>
+            </a:pPr>
+            <a:r>
+              <a:t>A clean run says so plainly — "the network is not your problem" — and points at mx / iperf_orchestrator for the load question.</a:t>
+            </a:r>
+          </a:p>
+        </p:txBody>
+      </p:sp>
+    </p:spTree>
+  </p:cSld>
+  <p:clrMapOvr>
+    <a:masterClrMapping/>
+  </p:clrMapOvr>
+</p:sld>
+</file>
+
+<file path=ppt/slides/slide29.xml><?xml version="1.0" encoding="utf-8"?>
+<p:sld xmlns:a="http://schemas.openxmlformats.org/drawingml/2006/main" xmlns:p="http://schemas.openxmlformats.org/presentationml/2006/main" xmlns:r="http://schemas.openxmlformats.org/officeDocument/2006/relationships">
+  <p:cSld>
+    <p:spTree>
+      <p:nvGrpSpPr>
+        <p:cNvPr id="1" name=""/>
+        <p:cNvGrpSpPr/>
+        <p:nvPr/>
+      </p:nvGrpSpPr>
+      <p:grpSpPr/>
+      <p:sp>
+        <p:nvSpPr>
+          <p:cNvPr id="2" name="Title 1"/>
+          <p:cNvSpPr>
+            <a:spLocks noGrp="1"/>
+          </p:cNvSpPr>
+          <p:nvPr>
+            <p:ph type="title"/>
+          </p:nvPr>
+        </p:nvSpPr>
+        <p:spPr/>
+        <p:txBody>
+          <a:bodyPr/>
+          <a:lstStyle/>
+          <a:p>
+            <a:pPr>
+              <a:defRPr sz="2800" b="1">
+                <a:solidFill>
+                  <a:srgbClr val="1C2B3A"/>
+                </a:solidFill>
+              </a:defRPr>
+            </a:pPr>
+            <a:r>
+              <a:t>Stopping, cleaning up, following up</a:t>
+            </a:r>
+          </a:p>
+        </p:txBody>
+      </p:sp>
+      <p:sp>
+        <p:nvSpPr>
+          <p:cNvPr id="3" name="Content Placeholder 2"/>
+          <p:cNvSpPr>
+            <a:spLocks noGrp="1"/>
+          </p:cNvSpPr>
+          <p:nvPr>
+            <p:ph idx="1"/>
+          </p:nvPr>
+        </p:nvSpPr>
+        <p:spPr/>
+        <p:txBody>
+          <a:bodyPr wrap="square">
+            <a:normAutofit/>
+          </a:bodyPr>
+          <a:lstStyle/>
+          <a:p>
+            <a:pPr>
+              <a:defRPr sz="1600"/>
+            </a:pPr>
+            <a:r>
+              <a:t>check cleans up after itself — the two-host case never leaves anything behind. Managed runs: stop keeps reports; clean stops and removes every trace. No package, no daemon, no dotdir, no sysctl — ever. Agents flush on SIGTERM.</a:t>
+            </a:r>
+          </a:p>
+          <a:p>
+            <a:pPr>
+              <a:defRPr sz="1600"/>
+            </a:pPr>
+            <a:r>
+              <a:t>Reports replay: summarize --reports ./reports, even re-split around a load window after the fact (--load-split &lt;ts&gt;).</a:t>
+            </a:r>
+          </a:p>
+          <a:p>
+            <a:pPr>
+              <a:defRPr sz="1600"/>
+            </a:pPr>
+            <a:r>
+              <a:t>Following up on findings:</a:t>
+            </a:r>
+          </a:p>
+          <a:p>
+            <a:pPr lvl="1">
+              <a:defRPr sz="1400"/>
+            </a:pPr>
+            <a:r>
+              <a:t>Sick pair → netmesh paths --compare web03:db01 web01:db01 — hop lists side by side, first divergent hop marked. That hop is where to look.</a:t>
+            </a:r>
+          </a:p>
+          <a:p>
+            <a:pPr lvl="1">
+              <a:defRPr sz="1400"/>
+            </a:pPr>
+            <a:r>
+              <a:t>Grids drop into the same spreadsheet as mx's — line up idle RTT against loaded loss, pair by pair.</a:t>
+            </a:r>
+          </a:p>
+          <a:p>
+            <a:pPr lvl="1">
+              <a:defRPr sz="1400"/>
+            </a:pPr>
+            <a:r>
+              <a:t>Clean baseline → the network isn't the problem: go load it (mx run --for 60, iperf-orchestrator all).</a:t>
+            </a:r>
+          </a:p>
+          <a:p>
+            <a:pPr lvl="1">
+              <a:defRPr sz="1400"/>
+            </a:pPr>
+            <a:r>
+              <a:t>Host still slow → binnacle's why-slow checks the box before you blame the network again.</a:t>
+            </a:r>
+          </a:p>
+        </p:txBody>
+      </p:sp>
+    </p:spTree>
+  </p:cSld>
+  <p:clrMapOvr>
+    <a:masterClrMapping/>
+  </p:clrMapOvr>
+</p:sld>
+</file>
+
+<file path=ppt/slides/slide3.xml><?xml version="1.0" encoding="utf-8"?>
+<p:sld xmlns:a="http://schemas.openxmlformats.org/drawingml/2006/main" xmlns:p="http://schemas.openxmlformats.org/presentationml/2006/main" xmlns:r="http://schemas.openxmlformats.org/officeDocument/2006/relationships">
+  <p:cSld>
+    <p:spTree>
+      <p:nvGrpSpPr>
+        <p:cNvPr id="1" name=""/>
+        <p:cNvGrpSpPr/>
+        <p:nvPr/>
+      </p:nvGrpSpPr>
+      <p:grpSpPr/>
+      <p:sp>
+        <p:nvSpPr>
+          <p:cNvPr id="2" name="Title 1"/>
+          <p:cNvSpPr>
+            <a:spLocks noGrp="1"/>
+          </p:cNvSpPr>
+          <p:nvPr>
+            <p:ph type="title"/>
+          </p:nvPr>
+        </p:nvSpPr>
+        <p:spPr/>
+        <p:txBody>
+          <a:bodyPr/>
+          <a:lstStyle/>
+          <a:p>
+            <a:pPr>
+              <a:defRPr sz="2800" b="1">
+                <a:solidFill>
+                  <a:srgbClr val="1C2B3A"/>
+                </a:solidFill>
+              </a:defRPr>
+            </a:pPr>
+            <a:r>
+              <a:t>Why these tools — and how they fit together</a:t>
+            </a:r>
+          </a:p>
+        </p:txBody>
+      </p:sp>
+      <p:sp>
+        <p:nvSpPr>
+          <p:cNvPr id="3" name="TextBox 2"/>
+          <p:cNvSpPr txBox="1"/>
+          <p:nvPr/>
+        </p:nvSpPr>
+        <p:spPr>
+          <a:xfrm>
+            <a:off x="822960" y="1234440"/>
+            <a:ext cx="10607040" cy="621792"/>
+          </a:xfrm>
+          <a:prstGeom prst="rect">
+            <a:avLst/>
+          </a:prstGeom>
+          <a:noFill/>
+        </p:spPr>
+        <p:txBody>
+          <a:bodyPr wrap="square">
+            <a:spAutoFit/>
+          </a:bodyPr>
+          <a:lstStyle/>
+          <a:p>
+            <a:pPr>
+              <a:defRPr sz="1400"/>
+            </a:pPr>
+            <a:r>
+              <a:t>• They go anywhere you can ssh. No agents, no daemons, no root — nothing installed on the servers, and clean removes every trace afterwards.</a:t>
+            </a:r>
+          </a:p>
+        </p:txBody>
+      </p:sp>
+      <p:sp>
+        <p:nvSpPr>
+          <p:cNvPr id="4" name="TextBox 3"/>
+          <p:cNvSpPr txBox="1"/>
+          <p:nvPr/>
+        </p:nvSpPr>
+        <p:spPr>
+          <a:xfrm>
+            <a:off x="822960" y="1929384"/>
+            <a:ext cx="10607040" cy="621792"/>
+          </a:xfrm>
+          <a:prstGeom prst="rect">
+            <a:avLst/>
+          </a:prstGeom>
+          <a:noFill/>
+        </p:spPr>
+        <p:txBody>
+          <a:bodyPr wrap="square">
+            <a:spAutoFit/>
+          </a:bodyPr>
+          <a:lstStyle/>
+          <a:p>
+            <a:pPr>
+              <a:defRPr sz="1400"/>
+            </a:pPr>
+            <a:r>
+              <a:t>• The numbers are honest. Blank never means zero, and the headline is what the *receiver* counted — not what the sender hoped. When a tool becomes its own bottleneck, it says so.</a:t>
+            </a:r>
+          </a:p>
+        </p:txBody>
+      </p:sp>
+      <p:sp>
+        <p:nvSpPr>
+          <p:cNvPr id="5" name="TextBox 4"/>
+          <p:cNvSpPr txBox="1"/>
+          <p:nvPr/>
+        </p:nvSpPr>
+        <p:spPr>
+          <a:xfrm>
+            <a:off x="822960" y="2624328"/>
+            <a:ext cx="10607040" cy="310896"/>
+          </a:xfrm>
+          <a:prstGeom prst="rect">
+            <a:avLst/>
+          </a:prstGeom>
+          <a:noFill/>
+        </p:spPr>
+        <p:txBody>
+          <a:bodyPr wrap="square">
+            <a:spAutoFit/>
+          </a:bodyPr>
+          <a:lstStyle/>
+          <a:p>
+            <a:pPr>
+              <a:defRPr sz="1400"/>
+            </a:pPr>
+            <a:r>
+              <a:t>• They're one file each. Stdlib-only Python — pip install it, or just scp the file and run it.</a:t>
+            </a:r>
+          </a:p>
+        </p:txBody>
+      </p:sp>
+      <p:sp>
+        <p:nvSpPr>
+          <p:cNvPr id="6" name="TextBox 5"/>
+          <p:cNvSpPr txBox="1"/>
+          <p:nvPr/>
+        </p:nvSpPr>
+        <p:spPr>
+          <a:xfrm>
+            <a:off x="822960" y="3008376"/>
+            <a:ext cx="10607040" cy="932688"/>
+          </a:xfrm>
+          <a:prstGeom prst="rect">
+            <a:avLst/>
+          </a:prstGeom>
+          <a:noFill/>
+        </p:spPr>
+        <p:txBody>
+          <a:bodyPr wrap="square">
+            <a:spAutoFit/>
+          </a:bodyPr>
+          <a:lstStyle/>
+          <a:p>
+            <a:pPr>
+              <a:defRPr sz="1400"/>
+            </a:pPr>
+            <a:r>
+              <a:t>• They compose — meaning each one's output is the next one's input. reachable rewrites the very servers.txt the others read; netmesh and mx write matching N×N grids that open side by side in one spreadsheet. You chain them; there's no glue to write.</a:t>
+            </a:r>
+          </a:p>
+        </p:txBody>
+      </p:sp>
+      <p:sp>
+        <p:nvSpPr>
+          <p:cNvPr id="7" name="Rounded Rectangle 6"/>
+          <p:cNvSpPr/>
+          <p:nvPr/>
+        </p:nvSpPr>
+        <p:spPr>
+          <a:xfrm>
+            <a:off x="640080" y="4014216"/>
+            <a:ext cx="1887321" cy="914400"/>
+          </a:xfrm>
+          <a:prstGeom prst="roundRect">
+            <a:avLst/>
+          </a:prstGeom>
+          <a:solidFill>
+            <a:srgbClr val="3D8B4F"/>
+          </a:solidFill>
+          <a:ln>
+            <a:noFill/>
+          </a:ln>
+        </p:spPr>
+        <p:style>
+          <a:lnRef idx="1">
+            <a:schemeClr val="accent1"/>
+          </a:lnRef>
+          <a:fillRef idx="3">
+            <a:schemeClr val="accent1"/>
+          </a:fillRef>
+          <a:effectRef idx="2">
+            <a:schemeClr val="accent1"/>
+          </a:effectRef>
+          <a:fontRef idx="minor">
+            <a:schemeClr val="lt1"/>
+          </a:fontRef>
+        </p:style>
+        <p:txBody>
+          <a:bodyPr rtlCol="0" anchor="ctr" wrap="square"/>
+          <a:lstStyle/>
+          <a:p>
+            <a:pPr algn="ctr">
+              <a:defRPr sz="1150" b="1">
+                <a:solidFill>
+                  <a:srgbClr val="FFFFFF"/>
+                </a:solidFill>
+                <a:latin typeface="Consolas"/>
+              </a:defRPr>
+            </a:pPr>
+            <a:r>
+              <a:t>reachable prod.txt -i</a:t>
+            </a:r>
+          </a:p>
+          <a:p>
+            <a:pPr>
+              <a:defRPr sz="1000">
+                <a:solidFill>
+                  <a:srgbClr val="F0F3F6"/>
+                </a:solidFill>
+              </a:defRPr>
+            </a:pPr>
+            <a:r>
+              <a:t>prune the list</a:t>
+            </a:r>
+          </a:p>
+        </p:txBody>
+      </p:sp>
+      <p:sp>
+        <p:nvSpPr>
+          <p:cNvPr id="8" name="TextBox 7"/>
+          <p:cNvSpPr txBox="1"/>
+          <p:nvPr/>
+        </p:nvSpPr>
+        <p:spPr>
+          <a:xfrm>
+            <a:off x="2527401" y="4270248"/>
+            <a:ext cx="384048" cy="365760"/>
+          </a:xfrm>
+          <a:prstGeom prst="rect">
+            <a:avLst/>
+          </a:prstGeom>
+          <a:noFill/>
+        </p:spPr>
+        <p:txBody>
+          <a:bodyPr wrap="none">
+            <a:spAutoFit/>
+          </a:bodyPr>
+          <a:lstStyle/>
+          <a:p>
+            <a:pPr>
+              <a:defRPr sz="1600" b="1">
+                <a:solidFill>
+                  <a:srgbClr val="3E5C76"/>
+                </a:solidFill>
+              </a:defRPr>
+            </a:pPr>
+            <a:r>
+              <a:t>→</a:t>
+            </a:r>
+          </a:p>
+        </p:txBody>
+      </p:sp>
+      <p:sp>
+        <p:nvSpPr>
+          <p:cNvPr id="9" name="Rounded Rectangle 8"/>
+          <p:cNvSpPr/>
+          <p:nvPr/>
+        </p:nvSpPr>
+        <p:spPr>
+          <a:xfrm>
+            <a:off x="2911449" y="4014216"/>
+            <a:ext cx="1887321" cy="914400"/>
+          </a:xfrm>
+          <a:prstGeom prst="roundRect">
+            <a:avLst/>
+          </a:prstGeom>
+          <a:solidFill>
+            <a:srgbClr val="12897B"/>
+          </a:solidFill>
+          <a:ln>
+            <a:noFill/>
+          </a:ln>
+        </p:spPr>
+        <p:style>
+          <a:lnRef idx="1">
+            <a:schemeClr val="accent1"/>
+          </a:lnRef>
+          <a:fillRef idx="3">
+            <a:schemeClr val="accent1"/>
+          </a:fillRef>
+          <a:effectRef idx="2">
+            <a:schemeClr val="accent1"/>
+          </a:effectRef>
+          <a:fontRef idx="minor">
+            <a:schemeClr val="lt1"/>
+          </a:fontRef>
+        </p:style>
+        <p:txBody>
+          <a:bodyPr rtlCol="0" anchor="ctr" wrap="square"/>
+          <a:lstStyle/>
+          <a:p>
+            <a:pPr algn="ctr">
+              <a:defRPr sz="1150" b="1">
+                <a:solidFill>
+                  <a:srgbClr val="FFFFFF"/>
+                </a:solidFill>
+                <a:latin typeface="Consolas"/>
+              </a:defRPr>
+            </a:pPr>
+            <a:r>
+              <a:t>netmesh check</a:t>
+            </a:r>
+          </a:p>
+          <a:p>
+            <a:pPr>
+              <a:defRPr sz="1000">
+                <a:solidFill>
+                  <a:srgbClr val="F0F3F6"/>
+                </a:solidFill>
+              </a:defRPr>
+            </a:pPr>
+            <a:r>
+              <a:t>idle baseline</a:t>
+            </a:r>
+          </a:p>
+        </p:txBody>
+      </p:sp>
+      <p:sp>
+        <p:nvSpPr>
+          <p:cNvPr id="10" name="TextBox 9"/>
+          <p:cNvSpPr txBox="1"/>
+          <p:nvPr/>
+        </p:nvSpPr>
+        <p:spPr>
+          <a:xfrm>
+            <a:off x="4798771" y="4270248"/>
+            <a:ext cx="384048" cy="365760"/>
+          </a:xfrm>
+          <a:prstGeom prst="rect">
+            <a:avLst/>
+          </a:prstGeom>
+          <a:noFill/>
+        </p:spPr>
+        <p:txBody>
+          <a:bodyPr wrap="none">
+            <a:spAutoFit/>
+          </a:bodyPr>
+          <a:lstStyle/>
+          <a:p>
+            <a:pPr>
+              <a:defRPr sz="1600" b="1">
+                <a:solidFill>
+                  <a:srgbClr val="3E5C76"/>
+                </a:solidFill>
+              </a:defRPr>
+            </a:pPr>
+            <a:r>
+              <a:t>→</a:t>
+            </a:r>
+          </a:p>
+        </p:txBody>
+      </p:sp>
+      <p:sp>
+        <p:nvSpPr>
+          <p:cNvPr id="11" name="Rounded Rectangle 10"/>
+          <p:cNvSpPr/>
+          <p:nvPr/>
+        </p:nvSpPr>
+        <p:spPr>
+          <a:xfrm>
+            <a:off x="5182819" y="4014216"/>
+            <a:ext cx="1887321" cy="914400"/>
+          </a:xfrm>
+          <a:prstGeom prst="roundRect">
+            <a:avLst/>
+          </a:prstGeom>
+          <a:solidFill>
+            <a:srgbClr val="D97C1F"/>
+          </a:solidFill>
+          <a:ln>
+            <a:noFill/>
+          </a:ln>
+        </p:spPr>
+        <p:style>
+          <a:lnRef idx="1">
+            <a:schemeClr val="accent1"/>
+          </a:lnRef>
+          <a:fillRef idx="3">
+            <a:schemeClr val="accent1"/>
+          </a:fillRef>
+          <a:effectRef idx="2">
+            <a:schemeClr val="accent1"/>
+          </a:effectRef>
+          <a:fontRef idx="minor">
+            <a:schemeClr val="lt1"/>
+          </a:fontRef>
+        </p:style>
+        <p:txBody>
+          <a:bodyPr rtlCol="0" anchor="ctr" wrap="square"/>
+          <a:lstStyle/>
+          <a:p>
+            <a:pPr algn="ctr">
+              <a:defRPr sz="1150" b="1">
+                <a:solidFill>
+                  <a:srgbClr val="FFFFFF"/>
+                </a:solidFill>
+                <a:latin typeface="Consolas"/>
+              </a:defRPr>
+            </a:pPr>
+            <a:r>
+              <a:t>iperf-orchestrator all</a:t>
+            </a:r>
+          </a:p>
+          <a:p>
+            <a:pPr>
+              <a:defRPr sz="1000">
+                <a:solidFill>
+                  <a:srgbClr val="F0F3F6"/>
+                </a:solidFill>
+              </a:defRPr>
+            </a:pPr>
+            <a:r>
+              <a:t>TCP under load</a:t>
+            </a:r>
+          </a:p>
+        </p:txBody>
+      </p:sp>
+      <p:sp>
+        <p:nvSpPr>
+          <p:cNvPr id="12" name="TextBox 11"/>
+          <p:cNvSpPr txBox="1"/>
+          <p:nvPr/>
+        </p:nvSpPr>
+        <p:spPr>
+          <a:xfrm>
+            <a:off x="7070140" y="4270248"/>
+            <a:ext cx="384048" cy="365760"/>
+          </a:xfrm>
+          <a:prstGeom prst="rect">
+            <a:avLst/>
+          </a:prstGeom>
+          <a:noFill/>
+        </p:spPr>
+        <p:txBody>
+          <a:bodyPr wrap="none">
+            <a:spAutoFit/>
+          </a:bodyPr>
+          <a:lstStyle/>
+          <a:p>
+            <a:pPr>
+              <a:defRPr sz="1600" b="1">
+                <a:solidFill>
+                  <a:srgbClr val="3E5C76"/>
+                </a:solidFill>
+              </a:defRPr>
+            </a:pPr>
+            <a:r>
+              <a:t>→</a:t>
+            </a:r>
+          </a:p>
+        </p:txBody>
+      </p:sp>
+      <p:sp>
+        <p:nvSpPr>
+          <p:cNvPr id="13" name="Rounded Rectangle 12"/>
+          <p:cNvSpPr/>
+          <p:nvPr/>
+        </p:nvSpPr>
+        <p:spPr>
+          <a:xfrm>
+            <a:off x="7454188" y="4014216"/>
+            <a:ext cx="1887321" cy="914400"/>
+          </a:xfrm>
+          <a:prstGeom prst="roundRect">
+            <a:avLst/>
+          </a:prstGeom>
+          <a:solidFill>
+            <a:srgbClr val="BE3B4E"/>
+          </a:solidFill>
+          <a:ln>
+            <a:noFill/>
+          </a:ln>
+        </p:spPr>
+        <p:style>
+          <a:lnRef idx="1">
+            <a:schemeClr val="accent1"/>
+          </a:lnRef>
+          <a:fillRef idx="3">
+            <a:schemeClr val="accent1"/>
+          </a:fillRef>
+          <a:effectRef idx="2">
+            <a:schemeClr val="accent1"/>
+          </a:effectRef>
+          <a:fontRef idx="minor">
+            <a:schemeClr val="lt1"/>
+          </a:fontRef>
+        </p:style>
+        <p:txBody>
+          <a:bodyPr rtlCol="0" anchor="ctr" wrap="square"/>
+          <a:lstStyle/>
+          <a:p>
+            <a:pPr algn="ctr">
+              <a:defRPr sz="1150" b="1">
+                <a:solidFill>
+                  <a:srgbClr val="FFFFFF"/>
+                </a:solidFill>
+                <a:latin typeface="Consolas"/>
+              </a:defRPr>
+            </a:pPr>
+            <a:r>
+              <a:t>mx run</a:t>
+            </a:r>
+          </a:p>
+          <a:p>
+            <a:pPr>
+              <a:defRPr sz="1000">
+                <a:solidFill>
+                  <a:srgbClr val="F0F3F6"/>
+                </a:solidFill>
+              </a:defRPr>
+            </a:pPr>
+            <a:r>
+              <a:t>pps under load</a:t>
+            </a:r>
+          </a:p>
+        </p:txBody>
+      </p:sp>
+      <p:sp>
+        <p:nvSpPr>
+          <p:cNvPr id="14" name="TextBox 13"/>
+          <p:cNvSpPr txBox="1"/>
+          <p:nvPr/>
+        </p:nvSpPr>
+        <p:spPr>
+          <a:xfrm>
+            <a:off x="9341510" y="4270248"/>
+            <a:ext cx="384048" cy="365760"/>
+          </a:xfrm>
+          <a:prstGeom prst="rect">
+            <a:avLst/>
+          </a:prstGeom>
+          <a:noFill/>
+        </p:spPr>
+        <p:txBody>
+          <a:bodyPr wrap="none">
+            <a:spAutoFit/>
+          </a:bodyPr>
+          <a:lstStyle/>
+          <a:p>
+            <a:pPr>
+              <a:defRPr sz="1600" b="1">
+                <a:solidFill>
+                  <a:srgbClr val="3E5C76"/>
+                </a:solidFill>
+              </a:defRPr>
+            </a:pPr>
+            <a:r>
+              <a:t>→</a:t>
+            </a:r>
+          </a:p>
+        </p:txBody>
+      </p:sp>
+      <p:sp>
+        <p:nvSpPr>
+          <p:cNvPr id="15" name="Rounded Rectangle 14"/>
+          <p:cNvSpPr/>
+          <p:nvPr/>
+        </p:nvSpPr>
+        <p:spPr>
+          <a:xfrm>
+            <a:off x="9725558" y="4014216"/>
+            <a:ext cx="1887321" cy="914400"/>
+          </a:xfrm>
+          <a:prstGeom prst="roundRect">
+            <a:avLst/>
+          </a:prstGeom>
+          <a:solidFill>
+            <a:srgbClr val="12897B"/>
+          </a:solidFill>
+          <a:ln>
+            <a:noFill/>
+          </a:ln>
+        </p:spPr>
+        <p:style>
+          <a:lnRef idx="1">
+            <a:schemeClr val="accent1"/>
+          </a:lnRef>
+          <a:fillRef idx="3">
+            <a:schemeClr val="accent1"/>
+          </a:fillRef>
+          <a:effectRef idx="2">
+            <a:schemeClr val="accent1"/>
+          </a:effectRef>
+          <a:fontRef idx="minor">
+            <a:schemeClr val="lt1"/>
+          </a:fontRef>
+        </p:style>
+        <p:txBody>
+          <a:bodyPr rtlCol="0" anchor="ctr" wrap="square"/>
+          <a:lstStyle/>
+          <a:p>
+            <a:pPr algn="ctr">
+              <a:defRPr sz="1150" b="1">
+                <a:solidFill>
+                  <a:srgbClr val="FFFFFF"/>
+                </a:solidFill>
+                <a:latin typeface="Consolas"/>
+              </a:defRPr>
+            </a:pPr>
+            <a:r>
+              <a:t>netmesh --baseline</a:t>
+            </a:r>
+          </a:p>
+          <a:p>
+            <a:pPr>
+              <a:defRPr sz="1000">
+                <a:solidFill>
+                  <a:srgbClr val="F0F3F6"/>
+                </a:solidFill>
+              </a:defRPr>
+            </a:pPr>
+            <a:r>
+              <a:t>latency under load</a:t>
+            </a:r>
+          </a:p>
+        </p:txBody>
+      </p:sp>
+      <p:sp>
+        <p:nvSpPr>
+          <p:cNvPr id="16" name="TextBox 15"/>
+          <p:cNvSpPr txBox="1"/>
+          <p:nvPr/>
+        </p:nvSpPr>
+        <p:spPr>
+          <a:xfrm>
+            <a:off x="822960" y="5129784"/>
+            <a:ext cx="10607040" cy="621792"/>
+          </a:xfrm>
+          <a:prstGeom prst="rect">
+            <a:avLst/>
+          </a:prstGeom>
+          <a:noFill/>
+        </p:spPr>
+        <p:txBody>
+          <a:bodyPr wrap="square">
+            <a:spAutoFit/>
+          </a:bodyPr>
+          <a:lstStyle/>
+          <a:p>
+            <a:pPr>
+              <a:defRPr sz="1400"/>
+            </a:pPr>
+            <a:r>
+              <a:t>Commissioning a new fabric? Run them left to right — each answer tells you whether the next number will make sense.</a:t>
+            </a:r>
+          </a:p>
+        </p:txBody>
+      </p:sp>
+    </p:spTree>
+  </p:cSld>
+  <p:clrMapOvr>
+    <a:masterClrMapping/>
+  </p:clrMapOvr>
+</p:sld>
+</file>
+
+<file path=ppt/slides/slide30.xml><?xml version="1.0" encoding="utf-8"?>
+<p:sld xmlns:a="http://schemas.openxmlformats.org/drawingml/2006/main" xmlns:p="http://schemas.openxmlformats.org/presentationml/2006/main" xmlns:r="http://schemas.openxmlformats.org/officeDocument/2006/relationships">
+  <p:cSld>
+    <p:spTree>
+      <p:nvGrpSpPr>
+        <p:cNvPr id="1" name=""/>
+        <p:cNvGrpSpPr/>
+        <p:nvPr/>
+      </p:nvGrpSpPr>
+      <p:grpSpPr/>
+      <p:sp>
+        <p:nvSpPr>
+          <p:cNvPr id="2" name="Title 1"/>
+          <p:cNvSpPr>
+            <a:spLocks noGrp="1"/>
+          </p:cNvSpPr>
+          <p:nvPr>
+            <p:ph type="title"/>
+          </p:nvPr>
+        </p:nvSpPr>
+        <p:spPr/>
+        <p:txBody>
+          <a:bodyPr/>
+          <a:lstStyle/>
+          <a:p>
+            <a:r>
+              <a:t>Close</a:t>
+            </a:r>
+          </a:p>
+        </p:txBody>
+      </p:sp>
+      <p:sp>
+        <p:nvSpPr>
+          <p:cNvPr id="3" name="Text Placeholder 2"/>
+          <p:cNvSpPr>
+            <a:spLocks noGrp="1"/>
+          </p:cNvSpPr>
+          <p:nvPr>
+            <p:ph type="body" idx="1"/>
+          </p:nvPr>
+        </p:nvSpPr>
+        <p:spPr/>
+        <p:txBody>
+          <a:bodyPr/>
+          <a:lstStyle/>
+          <a:p/>
+        </p:txBody>
+      </p:sp>
+    </p:spTree>
+  </p:cSld>
+  <p:clrMapOvr>
+    <a:masterClrMapping/>
+  </p:clrMapOvr>
+</p:sld>
+</file>
+
+<file path=ppt/slides/slide31.xml><?xml version="1.0" encoding="utf-8"?>
+<p:sld xmlns:a="http://schemas.openxmlformats.org/drawingml/2006/main" xmlns:p="http://schemas.openxmlformats.org/presentationml/2006/main" xmlns:r="http://schemas.openxmlformats.org/officeDocument/2006/relationships">
+  <p:cSld>
+    <p:spTree>
+      <p:nvGrpSpPr>
+        <p:cNvPr id="1" name=""/>
+        <p:cNvGrpSpPr/>
+        <p:nvPr/>
+      </p:nvGrpSpPr>
+      <p:grpSpPr/>
+      <p:sp>
+        <p:nvSpPr>
+          <p:cNvPr id="2" name="Title 1"/>
+          <p:cNvSpPr>
+            <a:spLocks noGrp="1"/>
+          </p:cNvSpPr>
+          <p:nvPr>
+            <p:ph type="title"/>
+          </p:nvPr>
+        </p:nvSpPr>
+        <p:spPr/>
+        <p:txBody>
+          <a:bodyPr/>
+          <a:lstStyle/>
+          <a:p>
+            <a:pPr>
+              <a:defRPr sz="2800" b="1">
+                <a:solidFill>
+                  <a:srgbClr val="1C2B3A"/>
+                </a:solidFill>
+              </a:defRPr>
+            </a:pPr>
+            <a:r>
+              <a:t>Putting it together</a:t>
+            </a:r>
+          </a:p>
+        </p:txBody>
+      </p:sp>
+      <p:sp>
+        <p:nvSpPr>
+          <p:cNvPr id="3" name="TextBox 2"/>
+          <p:cNvSpPr txBox="1"/>
+          <p:nvPr/>
+        </p:nvSpPr>
+        <p:spPr>
+          <a:xfrm>
+            <a:off x="640080" y="1234440"/>
+            <a:ext cx="10972800" cy="1325880"/>
+          </a:xfrm>
+          <a:prstGeom prst="rect">
+            <a:avLst/>
+          </a:prstGeom>
+          <a:noFill/>
+        </p:spPr>
+        <p:txBody>
+          <a:bodyPr wrap="none">
+            <a:spAutoFit/>
+          </a:bodyPr>
+          <a:lstStyle/>
+          <a:p>
+            <a:pPr>
+              <a:defRPr sz="1300">
+                <a:solidFill>
+                  <a:srgbClr val="24354A"/>
+                </a:solidFill>
+                <a:latin typeface="Consolas"/>
+              </a:defRPr>
+            </a:pPr>
+            <a:r>
+              <a:t>reachable prod.txt -i                       # prune -- the run survives the dead</a:t>
+            </a:r>
+          </a:p>
+          <a:p>
+            <a:pPr>
+              <a:defRPr sz="1300">
+                <a:solidFill>
+                  <a:srgbClr val="24354A"/>
+                </a:solidFill>
+                <a:latin typeface="Consolas"/>
+              </a:defRPr>
+            </a:pPr>
+            <a:r>
+              <a:t>netmesh check ...                           # idle baseline: is the fabric healthy?</a:t>
+            </a:r>
+          </a:p>
+          <a:p>
+            <a:pPr>
+              <a:defRPr sz="1300">
+                <a:solidFill>
+                  <a:srgbClr val="24354A"/>
+                </a:solidFill>
+                <a:latin typeface="Consolas"/>
+              </a:defRPr>
+            </a:pPr>
+            <a:r>
+              <a:t>iperf-orchestrator --servers prod.txt all   # TCP bandwidth: what breaks under load?</a:t>
+            </a:r>
+          </a:p>
+          <a:p>
+            <a:pPr>
+              <a:defRPr sz="1300">
+                <a:solidFill>
+                  <a:srgbClr val="24354A"/>
+                </a:solidFill>
+                <a:latin typeface="Consolas"/>
+              </a:defRPr>
+            </a:pPr>
+            <a:r>
+              <a:t>mx run --for 300                            # answered packets/sec: the RPC ceiling</a:t>
+            </a:r>
+          </a:p>
+          <a:p>
+            <a:pPr>
+              <a:defRPr sz="1300">
+                <a:solidFill>
+                  <a:srgbClr val="24354A"/>
+                </a:solidFill>
+                <a:latin typeface="Consolas"/>
+              </a:defRPr>
+            </a:pPr>
+            <a:r>
+              <a:t>netmesh run --baseline 20 -- &lt;load&gt;         # what the load did to latency</a:t>
+            </a:r>
+          </a:p>
+        </p:txBody>
+      </p:sp>
+      <p:sp>
+        <p:nvSpPr>
+          <p:cNvPr id="4" name="TextBox 3"/>
+          <p:cNvSpPr txBox="1"/>
+          <p:nvPr/>
+        </p:nvSpPr>
+        <p:spPr>
+          <a:xfrm>
+            <a:off x="822960" y="2697480"/>
+            <a:ext cx="10607040" cy="310896"/>
+          </a:xfrm>
+          <a:prstGeom prst="rect">
+            <a:avLst/>
+          </a:prstGeom>
+          <a:noFill/>
+        </p:spPr>
+        <p:txBody>
+          <a:bodyPr wrap="square">
+            <a:spAutoFit/>
+          </a:bodyPr>
+          <a:lstStyle/>
+          <a:p>
+            <a:pPr>
+              <a:defRPr sz="1400"/>
+            </a:pPr>
+            <a:r>
+              <a:t>• Baseline before load — a throughput number without its idle RTT is half a result.</a:t>
+            </a:r>
+          </a:p>
+        </p:txBody>
+      </p:sp>
+      <p:sp>
+        <p:nvSpPr>
+          <p:cNvPr id="5" name="TextBox 4"/>
+          <p:cNvSpPr txBox="1"/>
+          <p:nvPr/>
+        </p:nvSpPr>
+        <p:spPr>
+          <a:xfrm>
+            <a:off x="822960" y="3081528"/>
+            <a:ext cx="10607040" cy="310896"/>
+          </a:xfrm>
+          <a:prstGeom prst="rect">
+            <a:avLst/>
+          </a:prstGeom>
+          <a:noFill/>
+        </p:spPr>
+        <p:txBody>
+          <a:bodyPr wrap="square">
+            <a:spAutoFit/>
+          </a:bodyPr>
+          <a:lstStyle/>
+          <a:p>
+            <a:pPr>
+              <a:defRPr sz="1400"/>
+            </a:pPr>
+            <a:r>
+              <a:t>• Trust what arrived, not what was sent — and watch the CPU, or you're measuring the tool.</a:t>
+            </a:r>
+          </a:p>
+        </p:txBody>
+      </p:sp>
+      <p:sp>
+        <p:nvSpPr>
+          <p:cNvPr id="6" name="TextBox 5"/>
+          <p:cNvSpPr txBox="1"/>
+          <p:nvPr/>
+        </p:nvSpPr>
+        <p:spPr>
+          <a:xfrm>
+            <a:off x="822960" y="3465576"/>
+            <a:ext cx="10607040" cy="310896"/>
+          </a:xfrm>
+          <a:prstGeom prst="rect">
+            <a:avLst/>
+          </a:prstGeom>
+          <a:noFill/>
+        </p:spPr>
+        <p:txBody>
+          <a:bodyPr wrap="square">
+            <a:spAutoFit/>
+          </a:bodyPr>
+          <a:lstStyle/>
+          <a:p>
+            <a:pPr>
+              <a:defRPr sz="1400"/>
+            </a:pPr>
+            <a:r>
+              <a:t>• Keep the list real — reachable is why the whole pipeline still runs when servers are down.</a:t>
+            </a:r>
+          </a:p>
+        </p:txBody>
+      </p:sp>
+      <p:sp>
+        <p:nvSpPr>
+          <p:cNvPr id="7" name="TextBox 6"/>
+          <p:cNvSpPr txBox="1"/>
+          <p:nvPr/>
+        </p:nvSpPr>
+        <p:spPr>
+          <a:xfrm>
+            <a:off x="822960" y="3849624"/>
+            <a:ext cx="10607040" cy="310896"/>
+          </a:xfrm>
+          <a:prstGeom prst="rect">
+            <a:avLst/>
+          </a:prstGeom>
+          <a:noFill/>
+        </p:spPr>
+        <p:txBody>
+          <a:bodyPr wrap="square">
+            <a:spAutoFit/>
+          </a:bodyPr>
+          <a:lstStyle/>
+          <a:p>
+            <a:pPr>
+              <a:defRPr sz="1400"/>
+            </a:pPr>
+            <a:r>
+              <a:t>• All pip-installable: iperf-orchestrator, matrix-orchestrator, binnacle.</a:t>
+            </a:r>
+          </a:p>
+        </p:txBody>
+      </p:sp>
+    </p:spTree>
+  </p:cSld>
+  <p:clrMapOvr>
+    <a:masterClrMapping/>
+  </p:clrMapOvr>
+</p:sld>
+</file>
+
+<file path=ppt/slides/slide4.xml><?xml version="1.0" encoding="utf-8"?>
+<p:sld xmlns:a="http://schemas.openxmlformats.org/drawingml/2006/main" xmlns:p="http://schemas.openxmlformats.org/presentationml/2006/main" xmlns:r="http://schemas.openxmlformats.org/officeDocument/2006/relationships">
+  <p:cSld>
+    <p:spTree>
+      <p:nvGrpSpPr>
+        <p:cNvPr id="1" name=""/>
+        <p:cNvGrpSpPr/>
+        <p:nvPr/>
+      </p:nvGrpSpPr>
+      <p:grpSpPr/>
+      <p:sp>
+        <p:nvSpPr>
+          <p:cNvPr id="2" name="Title 1"/>
+          <p:cNvSpPr>
+            <a:spLocks noGrp="1"/>
+          </p:cNvSpPr>
+          <p:nvPr>
+            <p:ph type="title"/>
+          </p:nvPr>
+        </p:nvSpPr>
+        <p:spPr/>
+        <p:txBody>
+          <a:bodyPr/>
+          <a:lstStyle/>
+          <a:p>
+            <a:pPr>
+              <a:defRPr sz="2800" b="1">
+                <a:solidFill>
+                  <a:srgbClr val="1C2B3A"/>
+                </a:solidFill>
+              </a:defRPr>
+            </a:pPr>
+            <a:r>
+              <a:t>reachable — the run survives dead servers</a:t>
+            </a:r>
+          </a:p>
+        </p:txBody>
+      </p:sp>
+      <p:sp>
+        <p:nvSpPr>
+          <p:cNvPr id="3" name="TextBox 2"/>
+          <p:cNvSpPr txBox="1"/>
+          <p:nvPr/>
+        </p:nvSpPr>
+        <p:spPr>
+          <a:xfrm>
+            <a:off x="822960" y="1234440"/>
+            <a:ext cx="10607040" cy="621792"/>
+          </a:xfrm>
+          <a:prstGeom prst="rect">
+            <a:avLst/>
+          </a:prstGeom>
+          <a:noFill/>
+        </p:spPr>
+        <p:txBody>
+          <a:bodyPr wrap="square">
+            <a:spAutoFit/>
+          </a:bodyPr>
+          <a:lstStyle/>
+          <a:p>
+            <a:pPr>
+              <a:defRPr sz="1400"/>
+            </a:pPr>
+            <a:r>
+              <a:t>• Server lists rot — and a fan-out that silently skips eleven dead hosts looks exactly like one that ran everywhere.</a:t>
+            </a:r>
+          </a:p>
+        </p:txBody>
+      </p:sp>
+      <p:sp>
+        <p:nvSpPr>
+          <p:cNvPr id="4" name="TextBox 3"/>
+          <p:cNvSpPr txBox="1"/>
+          <p:nvPr/>
+        </p:nvSpPr>
+        <p:spPr>
+          <a:xfrm>
+            <a:off x="822960" y="1929384"/>
+            <a:ext cx="10607040" cy="932688"/>
+          </a:xfrm>
+          <a:prstGeom prst="rect">
+            <a:avLst/>
+          </a:prstGeom>
+          <a:noFill/>
+        </p:spPr>
+        <p:txBody>
+          <a:bodyPr wrap="square">
+            <a:spAutoFit/>
+          </a:bodyPr>
+          <a:lstStyle/>
+          <a:p>
+            <a:pPr>
+              <a:defRPr sz="1400"/>
+            </a:pPr>
+            <a:r>
+              <a:t>• reachable prod.txt -i pings and ssh's every entry and comments out the failures, with the reason and date. When a host comes back, the next run uncomments it — and your own comments are never touched, so it's safe on cron.</a:t>
+            </a:r>
+          </a:p>
+        </p:txBody>
+      </p:sp>
+      <p:sp>
+        <p:nvSpPr>
+          <p:cNvPr id="5" name="TextBox 4"/>
+          <p:cNvSpPr txBox="1"/>
+          <p:nvPr/>
+        </p:nvSpPr>
+        <p:spPr>
+          <a:xfrm>
+            <a:off x="822960" y="2935224"/>
+            <a:ext cx="10607040" cy="310896"/>
+          </a:xfrm>
+          <a:prstGeom prst="rect">
+            <a:avLst/>
+          </a:prstGeom>
+          <a:noFill/>
+        </p:spPr>
+        <p:txBody>
+          <a:bodyPr wrap="square">
+            <a:spAutoFit/>
+          </a:bodyPr>
+          <a:lstStyle/>
+          <a:p>
+            <a:pPr>
+              <a:defRPr sz="1400"/>
+            </a:pPr>
+            <a:r>
+              <a:t>• ssh is the gate, ping is the explanation: a host that answers ssh is kept even when ICMP is blocked.</a:t>
+            </a:r>
+          </a:p>
+        </p:txBody>
+      </p:sp>
+      <p:sp>
+        <p:nvSpPr>
+          <p:cNvPr id="6" name="TextBox 5"/>
+          <p:cNvSpPr txBox="1"/>
+          <p:nvPr/>
+        </p:nvSpPr>
+        <p:spPr>
+          <a:xfrm>
+            <a:off x="640080" y="3319272"/>
+            <a:ext cx="10972800" cy="1106424"/>
+          </a:xfrm>
+          <a:prstGeom prst="rect">
+            <a:avLst/>
+          </a:prstGeom>
+          <a:noFill/>
+        </p:spPr>
+        <p:txBody>
+          <a:bodyPr wrap="none">
+            <a:spAutoFit/>
+          </a:bodyPr>
+          <a:lstStyle/>
+          <a:p>
+            <a:pPr>
+              <a:defRPr sz="1300">
+                <a:solidFill>
+                  <a:srgbClr val="24354A"/>
+                </a:solidFill>
+                <a:latin typeface="Consolas"/>
+              </a:defRPr>
+            </a:pPr>
+            <a:r>
+              <a:t>web01</a:t>
+            </a:r>
+          </a:p>
+          <a:p>
+            <a:pPr>
+              <a:defRPr sz="1300">
+                <a:solidFill>
+                  <a:srgbClr val="24354A"/>
+                </a:solidFill>
+                <a:latin typeface="Consolas"/>
+              </a:defRPr>
+            </a:pPr>
+            <a:r>
+              <a:t># db07   #[unreachable] pings but ssh does not answer - 2026-08-15</a:t>
+            </a:r>
+          </a:p>
+          <a:p>
+            <a:pPr>
+              <a:defRPr sz="1300">
+                <a:solidFill>
+                  <a:srgbClr val="24354A"/>
+                </a:solidFill>
+                <a:latin typeface="Consolas"/>
+              </a:defRPr>
+            </a:pPr>
+            <a:r>
+              <a:t># ghost  #[unreachable] name does not resolve - 2026-08-15</a:t>
+            </a:r>
+          </a:p>
+          <a:p>
+            <a:pPr>
+              <a:defRPr sz="1300">
+                <a:solidFill>
+                  <a:srgbClr val="24354A"/>
+                </a:solidFill>
+                <a:latin typeface="Consolas"/>
+              </a:defRPr>
+            </a:pPr>
+            <a:r>
+              <a:t>noicmp   # ICMP blocked here by policy   &lt;- kept: ssh works</a:t>
+            </a:r>
+          </a:p>
+        </p:txBody>
+      </p:sp>
+      <p:sp>
+        <p:nvSpPr>
+          <p:cNvPr id="7" name="TextBox 6"/>
+          <p:cNvSpPr txBox="1"/>
+          <p:nvPr/>
+        </p:nvSpPr>
+        <p:spPr>
+          <a:xfrm>
+            <a:off x="822960" y="4562856"/>
+            <a:ext cx="10607040" cy="621792"/>
+          </a:xfrm>
+          <a:prstGeom prst="rect">
+            <a:avLst/>
+          </a:prstGeom>
+          <a:noFill/>
+        </p:spPr>
+        <p:txBody>
+          <a:bodyPr wrap="square">
+            <a:spAutoFit/>
+          </a:bodyPr>
+          <a:lstStyle/>
+          <a:p>
+            <a:pPr>
+              <a:defRPr sz="1400"/>
+            </a:pPr>
+            <a:r>
+              <a:t>• Belt and braces: the orchestrators also fail open (--keep-going), so one dead box never aborts a 100-host run.</a:t>
+            </a:r>
+          </a:p>
+        </p:txBody>
+      </p:sp>
+    </p:spTree>
+  </p:cSld>
+  <p:clrMapOvr>
+    <a:masterClrMapping/>
+  </p:clrMapOvr>
+</p:sld>
+</file>
+
+<file path=ppt/slides/slide5.xml><?xml version="1.0" encoding="utf-8"?>
+<p:sld xmlns:a="http://schemas.openxmlformats.org/drawingml/2006/main" xmlns:p="http://schemas.openxmlformats.org/presentationml/2006/main" xmlns:r="http://schemas.openxmlformats.org/officeDocument/2006/relationships">
+  <p:cSld>
+    <p:spTree>
+      <p:nvGrpSpPr>
+        <p:cNvPr id="1" name=""/>
+        <p:cNvGrpSpPr/>
+        <p:nvPr/>
+      </p:nvGrpSpPr>
+      <p:grpSpPr/>
+      <p:sp>
+        <p:nvSpPr>
+          <p:cNvPr id="2" name="Title 1"/>
+          <p:cNvSpPr>
+            <a:spLocks noGrp="1"/>
+          </p:cNvSpPr>
+          <p:nvPr>
+            <p:ph type="title"/>
+          </p:nvPr>
+        </p:nvSpPr>
+        <p:spPr/>
+        <p:txBody>
+          <a:bodyPr/>
+          <a:lstStyle/>
+          <a:p>
+            <a:r>
+              <a:t>Part 1 — iperf_orchestrator</a:t>
+            </a:r>
+          </a:p>
+        </p:txBody>
+      </p:sp>
+      <p:sp>
+        <p:nvSpPr>
+          <p:cNvPr id="3" name="Text Placeholder 2"/>
+          <p:cNvSpPr>
+            <a:spLocks noGrp="1"/>
+          </p:cNvSpPr>
+          <p:nvPr>
+            <p:ph type="body" idx="1"/>
+          </p:nvPr>
+        </p:nvSpPr>
+        <p:spPr/>
+        <p:txBody>
+          <a:bodyPr/>
+          <a:lstStyle/>
+          <a:p/>
+        </p:txBody>
+      </p:sp>
     </p:spTree>
   </p:cSld>
   <p:clrMapOvr>
@@ -8654,7 +8881,7 @@
               </a:defRPr>
             </a:pPr>
             <a:r>
-              <a:t>When to use which</a:t>
+              <a:t>What it is</a:t>
             </a:r>
           </a:p>
         </p:txBody>
@@ -8680,7 +8907,7 @@
               <a:defRPr sz="1600"/>
             </a:pPr>
             <a:r>
-              <a:t>reachable — before *any* fan-out, every time: prune the list so the run measures the fleet, not the list.</a:t>
+              <a:t>A single self-contained bash script (with embedded Python) that runs a full-mesh iperf2 throughput test across a server list.</a:t>
             </a:r>
           </a:p>
           <a:p>
@@ -8688,7 +8915,7 @@
               <a:defRPr sz="1600"/>
             </a:pPr>
             <a:r>
-              <a:t>netmesh — "is it the network at all, and which link?" Incidents, new fabrics, before blaming anything. Prod-safe.</a:t>
+              <a:t>Samples per-host CPU during the run; parses everything into iperf_results.csv, cpu_summary.csv, iperf_pivot.txt, iperf_heatmap.png.</a:t>
             </a:r>
           </a:p>
           <a:p>
@@ -8696,7 +8923,7 @@
               <a:defRPr sz="1600"/>
             </a:pPr>
             <a:r>
-              <a:t>iperf_orchestrator — fabric acceptance &amp; stress: "will it carry line rate? what breaks under full load?"</a:t>
+              <a:t>Built for fabric stress testing: load every link in both directions simultaneously, find what breaks or degrades. Also a one-off "is the network healthy" fleet survey.</a:t>
             </a:r>
           </a:p>
           <a:p>
@@ -8704,7 +8931,7 @@
               <a:defRPr sz="1600"/>
             </a:pPr>
             <a:r>
-              <a:t>mx — RPC-shaped capacity: "how many answered packets/sec?" Small packets at rate is where fabrics and NICs actually fall over.</a:t>
+              <a:t>Stateless: each run gets a timestamped results/&lt;run-id&gt;/; results/latest follows the newest.</a:t>
             </a:r>
           </a:p>
           <a:p>
@@ -8712,7 +8939,7 @@
               <a:defRPr sz="1600"/>
             </a:pPr>
             <a:r>
-              <a:t>Commissioning a new fabric, run them in order: reachable → netmesh → iperf_orchestrator → mx → netmesh under load.</a:t>
+              <a:t>pip install iperf-orchestrator (or run the script straight from a checkout).</a:t>
             </a:r>
           </a:p>
         </p:txBody>
@@ -8758,7 +8985,7 @@
               </a:defRPr>
             </a:pPr>
             <a:r>
-              <a:t>reachable — the run that survives dead servers</a:t>
+              <a:t>What is iperf?</a:t>
             </a:r>
           </a:p>
         </p:txBody>
@@ -8784,7 +9011,7 @@
               <a:defRPr sz="1600"/>
             </a:pPr>
             <a:r>
-              <a:t>Server lists rot: decommissioned, renamed, rebuilt without your key. A fan-out that silently skips 11 of 200 hosts looks identical to one that had nothing to say about them.</a:t>
+              <a:t>The standard throughput tool: a client opens a TCP connection to a server and pushes bytes as fast as it can for N seconds; the report is the achieved end-to-end bandwidth.</a:t>
             </a:r>
           </a:p>
           <a:p>
@@ -8792,7 +9019,7 @@
               <a:defRPr sz="1600"/>
             </a:pPr>
             <a:r>
-              <a:t>reachable prod.txt -i pings + ssh's every entry and comments out failures with the reason and date; every other tool still reads the file.</a:t>
+              <a:t>iperf2 and iperf3 are different codebases, not versions of each other.</a:t>
             </a:r>
           </a:p>
           <a:p>
@@ -8800,31 +9027,7 @@
               <a:defRPr sz="1600"/>
             </a:pPr>
             <a:r>
-              <a:t>ssh is the gate, ping is the explanation — a host answering ssh is kept even with ICMP blocked. Outcomes distinguished: auth / refused / dns / no-route / timeout / down.</a:t>
-            </a:r>
-          </a:p>
-          <a:p>
-            <a:pPr>
-              <a:defRPr sz="1600"/>
-            </a:pPr>
-            <a:r>
-              <a:t>Re-runs uncomment hosts that come back — the list converges instead of decaying; your own comments are never touched; safe on cron (exit 0/1/2).</a:t>
-            </a:r>
-          </a:p>
-          <a:p>
-            <a:pPr>
-              <a:defRPr sz="1600"/>
-            </a:pPr>
-            <a:r>
-              <a:t>Ranges (node[01-24]) expand; a mixed range is split so failures comment out individually.</a:t>
-            </a:r>
-          </a:p>
-          <a:p>
-            <a:pPr>
-              <a:defRPr sz="1600"/>
-            </a:pPr>
-            <a:r>
-              <a:t>Belt and braces: the orchestrators also fail open — per-host failures are tracked and reported, and iperf_orchestrator's --keep-going finishes the fleet past a bad host.</a:t>
+              <a:t>The orchestrator uses iperf2's --full-duplex: both directions concurrently on a single TCP socket — one test per pair, and closer to what real traffic does to switch buffers.</a:t>
             </a:r>
           </a:p>
         </p:txBody>
@@ -8862,27 +9065,99 @@
           <a:bodyPr/>
           <a:lstStyle/>
           <a:p>
-            <a:r>
-              <a:t>Part 1 — iperf_orchestrator</a:t>
-            </a:r>
-          </a:p>
-        </p:txBody>
-      </p:sp>
-      <p:sp>
-        <p:nvSpPr>
-          <p:cNvPr id="3" name="Text Placeholder 2"/>
-          <p:cNvSpPr>
-            <a:spLocks noGrp="1"/>
-          </p:cNvSpPr>
-          <p:nvPr>
-            <p:ph type="body" idx="1"/>
-          </p:nvPr>
-        </p:nvSpPr>
-        <p:spPr/>
-        <p:txBody>
-          <a:bodyPr/>
-          <a:lstStyle/>
-          <a:p/>
+            <a:pPr>
+              <a:defRPr sz="2800" b="1">
+                <a:solidFill>
+                  <a:srgbClr val="1C2B3A"/>
+                </a:solidFill>
+              </a:defRPr>
+            </a:pPr>
+            <a:r>
+              <a:t>Why iperf2, not iperf3 (and why the orchestrator was necessary)</a:t>
+            </a:r>
+          </a:p>
+        </p:txBody>
+      </p:sp>
+      <p:sp>
+        <p:nvSpPr>
+          <p:cNvPr id="3" name="Content Placeholder 2"/>
+          <p:cNvSpPr>
+            <a:spLocks noGrp="1"/>
+          </p:cNvSpPr>
+          <p:nvPr>
+            <p:ph idx="1"/>
+          </p:nvPr>
+        </p:nvSpPr>
+        <p:spPr/>
+        <p:txBody>
+          <a:bodyPr wrap="square">
+            <a:normAutofit/>
+          </a:bodyPr>
+          <a:lstStyle/>
+          <a:p>
+            <a:pPr>
+              <a:defRPr sz="1600"/>
+            </a:pPr>
+            <a:r>
+              <a:t>iperf3's server is single-threaded, one client at a time — in a mesh, everyone else gets "server busy". Workaround at N=100: 100 daemons × 100 ports × 100× firewall holes per host. The first version used iperf3 and collapsed under its own workarounds.</a:t>
+            </a:r>
+          </a:p>
+          <a:p>
+            <a:pPr>
+              <a:defRPr sz="1600"/>
+            </a:pPr>
+            <a:r>
+              <a:t>iperf2's multi-threaded server takes concurrent clients on one port (5001) — one daemon per host, done.</a:t>
+            </a:r>
+          </a:p>
+          <a:p>
+            <a:pPr>
+              <a:defRPr sz="1600"/>
+            </a:pPr>
+            <a:r>
+              <a:t>Why an orchestrator at all — a mesh has quadratic moving parts:</a:t>
+            </a:r>
+          </a:p>
+          <a:p>
+            <a:pPr lvl="1">
+              <a:defRPr sz="1400"/>
+            </a:pPr>
+            <a:r>
+              <a:t>4,950 pairs at N=100 — nobody runs that by hand.</a:t>
+            </a:r>
+          </a:p>
+          <a:p>
+            <a:pPr lvl="1">
+              <a:defRPr sz="1400"/>
+            </a:pPr>
+            <a:r>
+              <a:t>Synchronized start: compute now + 30 s once, push the epoch, every host busy-waits and fires within a fraction of a second. No locks, no protocol — just a number.</a:t>
+            </a:r>
+          </a:p>
+          <a:p>
+            <a:pPr lvl="1">
+              <a:defRPr sz="1400"/>
+            </a:pPr>
+            <a:r>
+              <a:t>Balanced client assignment (parity rule): for pair {i, j}, client = smaller index if i+j even, larger if odd → every host runs 49–50 clients instead of 0–99. Both ends compute it independently.</a:t>
+            </a:r>
+          </a:p>
+          <a:p>
+            <a:pPr lvl="1">
+              <a:defRPr sz="1400"/>
+            </a:pPr>
+            <a:r>
+              <a:t>Tar-batched collection: one tar + scp + untar per host ≈ minutes, vs ~80 minutes of N² scp handshakes.</a:t>
+            </a:r>
+          </a:p>
+          <a:p>
+            <a:pPr lvl="1">
+              <a:defRPr sz="1400"/>
+            </a:pPr>
+            <a:r>
+              <a:t>CPU sampled on every host during the run — because a throughput number without CPU next to it gets misread.</a:t>
+            </a:r>
+          </a:p>
         </p:txBody>
       </p:sp>
     </p:spTree>
@@ -8926,7 +9201,7 @@
               </a:defRPr>
             </a:pPr>
             <a:r>
-              <a:t>What it is</a:t>
+              <a:t>Why run it — and what it does / doesn't do</a:t>
             </a:r>
           </a:p>
         </p:txBody>
@@ -8952,7 +9227,7 @@
               <a:defRPr sz="1600"/>
             </a:pPr>
             <a:r>
-              <a:t>A single self-contained bash script (with embedded Python) that runs a full-mesh iperf2 throughput test across a server list.</a:t>
+              <a:t>Why: acceptance-test a new fabric or change window (load everything, see what breaks); rank slow hosts/links; get a defensible baseline picture of the fleet.</a:t>
             </a:r>
           </a:p>
           <a:p>
@@ -8960,7 +9235,7 @@
               <a:defRPr sz="1600"/>
             </a:pPr>
             <a:r>
-              <a:t>Samples per-host CPU during the run; parses everything into iperf_results.csv, cpu_summary.csv, iperf_pivot.txt, iperf_heatmap.png.</a:t>
+              <a:t>Does: full-duplex TCP mesh; synchronized start; balanced pairs; per-host CPU (mpstat, /proc/stat fallback); parse → CSV/pivot/heatmap re-runnable per run-id; capped ssh fan-out (--jobs), optional --retries; fails open — one bad host doesn't abort a 100-host run.</a:t>
             </a:r>
           </a:p>
           <a:p>
@@ -8968,23 +9243,47 @@
               <a:defRPr sz="1600"/>
             </a:pPr>
             <a:r>
-              <a:t>Built for fabric stress testing: load every link in both directions simultaneously, find what breaks or degrades. Also a one-off "is the network healthy" fleet survey.</a:t>
-            </a:r>
-          </a:p>
-          <a:p>
-            <a:pPr>
-              <a:defRPr sz="1600"/>
-            </a:pPr>
-            <a:r>
-              <a:t>Stateless: each run gets a timestamped results/&lt;run-id&gt;/; results/latest follows the newest.</a:t>
-            </a:r>
-          </a:p>
-          <a:p>
-            <a:pPr>
-              <a:defRPr sz="1600"/>
-            </a:pPr>
-            <a:r>
-              <a:t>pip install iperf-orchestrator (or run the script straight from a checkout).</a:t>
+              <a:t>Doesn't:</a:t>
+            </a:r>
+          </a:p>
+          <a:p>
+            <a:pPr lvl="1">
+              <a:defRPr sz="1400"/>
+            </a:pPr>
+            <a:r>
+              <a:t>No UDP, no latency, no packet rate — that's netmesh/mx territory.</a:t>
+            </a:r>
+          </a:p>
+          <a:p>
+            <a:pPr lvl="1">
+              <a:defRPr sz="1400"/>
+            </a:pPr>
+            <a:r>
+              <a:t>Doesn't install iperf2 or distribute ssh keys — doctor / check-iperf verify, you provision.</a:t>
+            </a:r>
+          </a:p>
+          <a:p>
+            <a:pPr lvl="1">
+              <a:defRPr sz="1400"/>
+            </a:pPr>
+            <a:r>
+              <a:t>No normalization for mixed NIC speeds (1G hosts look red next to 10G).</a:t>
+            </a:r>
+          </a:p>
+          <a:p>
+            <a:pPr lvl="1">
+              <a:defRPr sz="1400"/>
+            </a:pPr>
+            <a:r>
+              <a:t>Heatmap past ~60 hosts drops cell labels by design; read the CSV for exact values.</a:t>
+            </a:r>
+          </a:p>
+          <a:p>
+            <a:pPr lvl="1">
+              <a:defRPr sz="1400"/>
+            </a:pPr>
+            <a:r>
+              <a:t>sequential-pair at N=100 ≈ 14 hours — the cleanest mode is priced accordingly.</a:t>
             </a:r>
           </a:p>
         </p:txBody>

--- a/network-testing/network_testing.pptx
+++ b/network-testing/network_testing.pptx
@@ -36,6 +36,10 @@
     <p:sldId id="284" r:id="rId36"/>
     <p:sldId id="285" r:id="rId37"/>
     <p:sldId id="286" r:id="rId38"/>
+    <p:sldId id="287" r:id="rId39"/>
+    <p:sldId id="288" r:id="rId40"/>
+    <p:sldId id="289" r:id="rId41"/>
+    <p:sldId id="290" r:id="rId42"/>
   </p:sldIdLst>
   <p:sldSz cx="12191695" cy="6858000" type="screen4x3"/>
   <p:notesSz cx="6858000" cy="9144000"/>
@@ -557,6 +561,706 @@
 </p:notes>
 </file>
 
+<file path=ppt/notesSlides/notesSlide10.xml><?xml version="1.0" encoding="utf-8"?>
+<p:notes xmlns:a="http://schemas.openxmlformats.org/drawingml/2006/main" xmlns:p="http://schemas.openxmlformats.org/presentationml/2006/main" xmlns:r="http://schemas.openxmlformats.org/officeDocument/2006/relationships">
+  <p:cSld>
+    <p:spTree>
+      <p:nvGrpSpPr>
+        <p:cNvPr id="1" name=""/>
+        <p:cNvGrpSpPr/>
+        <p:nvPr/>
+      </p:nvGrpSpPr>
+      <p:grpSpPr>
+        <a:xfrm>
+          <a:off x="0" y="0"/>
+          <a:ext cx="0" cy="0"/>
+          <a:chOff x="0" y="0"/>
+          <a:chExt cx="0" cy="0"/>
+        </a:xfrm>
+      </p:grpSpPr>
+      <p:sp>
+        <p:nvSpPr>
+          <p:cNvPr id="2" name="Slide Image Placeholder 1"/>
+          <p:cNvSpPr>
+            <a:spLocks noGrp="1"/>
+          </p:cNvSpPr>
+          <p:nvPr>
+            <p:ph type="sldImg" idx="2"/>
+          </p:nvPr>
+        </p:nvSpPr>
+        <p:spPr/>
+      </p:sp>
+      <p:sp>
+        <p:nvSpPr>
+          <p:cNvPr id="3" name="Notes Placeholder 2"/>
+          <p:cNvSpPr>
+            <a:spLocks noGrp="1"/>
+          </p:cNvSpPr>
+          <p:nvPr>
+            <p:ph type="body" idx="3" sz="quarter"/>
+          </p:nvPr>
+        </p:nvSpPr>
+        <p:spPr/>
+        <p:txBody>
+          <a:bodyPr/>
+          <a:lstStyle/>
+          <a:p>
+            <a:r>
+              <a:t>The parallel/sequential-host comparison is the diagnostic one-two punch: the first finds the suspect, the second tells you whether it's the host or the fabric. This is also the mode for baselining what "good" looks like per host class before a stress run.</a:t>
+            </a:r>
+          </a:p>
+        </p:txBody>
+      </p:sp>
+      <p:sp>
+        <p:nvSpPr>
+          <p:cNvPr id="4" name="Slide Number Placeholder 3"/>
+          <p:cNvSpPr>
+            <a:spLocks noGrp="1"/>
+          </p:cNvSpPr>
+          <p:nvPr>
+            <p:ph type="sldNum" idx="5" sz="quarter"/>
+          </p:nvPr>
+        </p:nvSpPr>
+        <p:spPr/>
+      </p:sp>
+    </p:spTree>
+  </p:cSld>
+  <p:clrMapOvr>
+    <a:masterClrMapping/>
+  </p:clrMapOvr>
+</p:notes>
+</file>
+
+<file path=ppt/notesSlides/notesSlide11.xml><?xml version="1.0" encoding="utf-8"?>
+<p:notes xmlns:a="http://schemas.openxmlformats.org/drawingml/2006/main" xmlns:p="http://schemas.openxmlformats.org/presentationml/2006/main" xmlns:r="http://schemas.openxmlformats.org/officeDocument/2006/relationships">
+  <p:cSld>
+    <p:spTree>
+      <p:nvGrpSpPr>
+        <p:cNvPr id="1" name=""/>
+        <p:cNvGrpSpPr/>
+        <p:nvPr/>
+      </p:nvGrpSpPr>
+      <p:grpSpPr>
+        <a:xfrm>
+          <a:off x="0" y="0"/>
+          <a:ext cx="0" cy="0"/>
+          <a:chOff x="0" y="0"/>
+          <a:chExt cx="0" cy="0"/>
+        </a:xfrm>
+      </p:grpSpPr>
+      <p:sp>
+        <p:nvSpPr>
+          <p:cNvPr id="2" name="Slide Image Placeholder 1"/>
+          <p:cNvSpPr>
+            <a:spLocks noGrp="1"/>
+          </p:cNvSpPr>
+          <p:nvPr>
+            <p:ph type="sldImg" idx="2"/>
+          </p:nvPr>
+        </p:nvSpPr>
+        <p:spPr/>
+      </p:sp>
+      <p:sp>
+        <p:nvSpPr>
+          <p:cNvPr id="3" name="Notes Placeholder 2"/>
+          <p:cNvSpPr>
+            <a:spLocks noGrp="1"/>
+          </p:cNvSpPr>
+          <p:nvPr>
+            <p:ph type="body" idx="3" sz="quarter"/>
+          </p:nvPr>
+        </p:nvSpPr>
+        <p:spPr/>
+        <p:txBody>
+          <a:bodyPr/>
+          <a:lstStyle/>
+          <a:p>
+            <a:r>
+              <a:t>The trap to warn about: running sequential-pair across a big fleet because it's "the accurate one". It is — and it's quadratic. The right use is surgical: three or four hosts you already suspect, cleanest numbers in minutes, then escalate to path-level tools if it's still slow.</a:t>
+            </a:r>
+          </a:p>
+        </p:txBody>
+      </p:sp>
+      <p:sp>
+        <p:nvSpPr>
+          <p:cNvPr id="4" name="Slide Number Placeholder 3"/>
+          <p:cNvSpPr>
+            <a:spLocks noGrp="1"/>
+          </p:cNvSpPr>
+          <p:nvPr>
+            <p:ph type="sldNum" idx="5" sz="quarter"/>
+          </p:nvPr>
+        </p:nvSpPr>
+        <p:spPr/>
+      </p:sp>
+    </p:spTree>
+  </p:cSld>
+  <p:clrMapOvr>
+    <a:masterClrMapping/>
+  </p:clrMapOvr>
+</p:notes>
+</file>
+
+<file path=ppt/notesSlides/notesSlide12.xml><?xml version="1.0" encoding="utf-8"?>
+<p:notes xmlns:a="http://schemas.openxmlformats.org/drawingml/2006/main" xmlns:p="http://schemas.openxmlformats.org/presentationml/2006/main" xmlns:r="http://schemas.openxmlformats.org/officeDocument/2006/relationships">
+  <p:cSld>
+    <p:spTree>
+      <p:nvGrpSpPr>
+        <p:cNvPr id="1" name=""/>
+        <p:cNvGrpSpPr/>
+        <p:nvPr/>
+      </p:nvGrpSpPr>
+      <p:grpSpPr>
+        <a:xfrm>
+          <a:off x="0" y="0"/>
+          <a:ext cx="0" cy="0"/>
+          <a:chOff x="0" y="0"/>
+          <a:chExt cx="0" cy="0"/>
+        </a:xfrm>
+      </p:grpSpPr>
+      <p:sp>
+        <p:nvSpPr>
+          <p:cNvPr id="2" name="Slide Image Placeholder 1"/>
+          <p:cNvSpPr>
+            <a:spLocks noGrp="1"/>
+          </p:cNvSpPr>
+          <p:nvPr>
+            <p:ph type="sldImg" idx="2"/>
+          </p:nvPr>
+        </p:nvSpPr>
+        <p:spPr/>
+      </p:sp>
+      <p:sp>
+        <p:nvSpPr>
+          <p:cNvPr id="3" name="Notes Placeholder 2"/>
+          <p:cNvSpPr>
+            <a:spLocks noGrp="1"/>
+          </p:cNvSpPr>
+          <p:nvPr>
+            <p:ph type="body" idx="3" sz="quarter"/>
+          </p:nvPr>
+        </p:nvSpPr>
+        <p:spPr/>
+        <p:txBody>
+          <a:bodyPr/>
+          <a:lstStyle/>
+          <a:p>
+            <a:r>
+              <a:t>The contrast to land: parallel is one synchronized photograph of the fleet under maximum load; rolling is a long exposure at gentle, constant load. At 1,000 hosts a full mesh is half a million pairs — rolling is the only shape that stays sane there, and its per-host load being independent of fleet size is the property that makes it safe.</a:t>
+            </a:r>
+          </a:p>
+        </p:txBody>
+      </p:sp>
+      <p:sp>
+        <p:nvSpPr>
+          <p:cNvPr id="4" name="Slide Number Placeholder 3"/>
+          <p:cNvSpPr>
+            <a:spLocks noGrp="1"/>
+          </p:cNvSpPr>
+          <p:nvPr>
+            <p:ph type="sldNum" idx="5" sz="quarter"/>
+          </p:nvPr>
+        </p:nvSpPr>
+        <p:spPr/>
+      </p:sp>
+    </p:spTree>
+  </p:cSld>
+  <p:clrMapOvr>
+    <a:masterClrMapping/>
+  </p:clrMapOvr>
+</p:notes>
+</file>
+
+<file path=ppt/notesSlides/notesSlide13.xml><?xml version="1.0" encoding="utf-8"?>
+<p:notes xmlns:a="http://schemas.openxmlformats.org/drawingml/2006/main" xmlns:p="http://schemas.openxmlformats.org/presentationml/2006/main" xmlns:r="http://schemas.openxmlformats.org/officeDocument/2006/relationships">
+  <p:cSld>
+    <p:spTree>
+      <p:nvGrpSpPr>
+        <p:cNvPr id="1" name=""/>
+        <p:cNvGrpSpPr/>
+        <p:nvPr/>
+      </p:nvGrpSpPr>
+      <p:grpSpPr>
+        <a:xfrm>
+          <a:off x="0" y="0"/>
+          <a:ext cx="0" cy="0"/>
+          <a:chOff x="0" y="0"/>
+          <a:chExt cx="0" cy="0"/>
+        </a:xfrm>
+      </p:grpSpPr>
+      <p:sp>
+        <p:nvSpPr>
+          <p:cNvPr id="2" name="Slide Image Placeholder 1"/>
+          <p:cNvSpPr>
+            <a:spLocks noGrp="1"/>
+          </p:cNvSpPr>
+          <p:nvPr>
+            <p:ph type="sldImg" idx="2"/>
+          </p:nvPr>
+        </p:nvSpPr>
+        <p:spPr/>
+      </p:sp>
+      <p:sp>
+        <p:nvSpPr>
+          <p:cNvPr id="3" name="Notes Placeholder 2"/>
+          <p:cNvSpPr>
+            <a:spLocks noGrp="1"/>
+          </p:cNvSpPr>
+          <p:nvPr>
+            <p:ph type="body" idx="3" sz="quarter"/>
+          </p:nvPr>
+        </p:nvSpPr>
+        <p:spPr/>
+        <p:txBody>
+          <a:bodyPr/>
+          <a:lstStyle/>
+          <a:p>
+            <a:r>
+              <a:t>This and the next slide are the take-home reference. If demoing live, four small VMs are plenty. The two preflights catch ninety percent of first-run failures: missing local python packages, iperf secretly being iperf3, mpstat absent, or a host that still wants a password.</a:t>
+            </a:r>
+          </a:p>
+        </p:txBody>
+      </p:sp>
+      <p:sp>
+        <p:nvSpPr>
+          <p:cNvPr id="4" name="Slide Number Placeholder 3"/>
+          <p:cNvSpPr>
+            <a:spLocks noGrp="1"/>
+          </p:cNvSpPr>
+          <p:nvPr>
+            <p:ph type="sldNum" idx="5" sz="quarter"/>
+          </p:nvPr>
+        </p:nvSpPr>
+        <p:spPr/>
+      </p:sp>
+    </p:spTree>
+  </p:cSld>
+  <p:clrMapOvr>
+    <a:masterClrMapping/>
+  </p:clrMapOvr>
+</p:notes>
+</file>
+
+<file path=ppt/notesSlides/notesSlide14.xml><?xml version="1.0" encoding="utf-8"?>
+<p:notes xmlns:a="http://schemas.openxmlformats.org/drawingml/2006/main" xmlns:p="http://schemas.openxmlformats.org/presentationml/2006/main" xmlns:r="http://schemas.openxmlformats.org/officeDocument/2006/relationships">
+  <p:cSld>
+    <p:spTree>
+      <p:nvGrpSpPr>
+        <p:cNvPr id="1" name=""/>
+        <p:cNvGrpSpPr/>
+        <p:nvPr/>
+      </p:nvGrpSpPr>
+      <p:grpSpPr>
+        <a:xfrm>
+          <a:off x="0" y="0"/>
+          <a:ext cx="0" cy="0"/>
+          <a:chOff x="0" y="0"/>
+          <a:chExt cx="0" cy="0"/>
+        </a:xfrm>
+      </p:grpSpPr>
+      <p:sp>
+        <p:nvSpPr>
+          <p:cNvPr id="2" name="Slide Image Placeholder 1"/>
+          <p:cNvSpPr>
+            <a:spLocks noGrp="1"/>
+          </p:cNvSpPr>
+          <p:nvPr>
+            <p:ph type="sldImg" idx="2"/>
+          </p:nvPr>
+        </p:nvSpPr>
+        <p:spPr/>
+      </p:sp>
+      <p:sp>
+        <p:nvSpPr>
+          <p:cNvPr id="3" name="Notes Placeholder 2"/>
+          <p:cNvSpPr>
+            <a:spLocks noGrp="1"/>
+          </p:cNvSpPr>
+          <p:nvPr>
+            <p:ph type="body" idx="3" sz="quarter"/>
+          </p:nvPr>
+        </p:nvSpPr>
+        <p:spPr/>
+        <p:txBody>
+          <a:bodyPr/>
+          <a:lstStyle/>
+          <a:p>
+            <a:r>
+              <a:t>The habits to leave the audience with: heatmap → CPU → summary, in that order; bump --duration and -P when a single 10-second stream can't fill the pipe (common on 25G+); and treat run folders as records — the before/after diff across a change window is often the most valuable artifact the tool produces.</a:t>
+            </a:r>
+          </a:p>
+        </p:txBody>
+      </p:sp>
+      <p:sp>
+        <p:nvSpPr>
+          <p:cNvPr id="4" name="Slide Number Placeholder 3"/>
+          <p:cNvSpPr>
+            <a:spLocks noGrp="1"/>
+          </p:cNvSpPr>
+          <p:nvPr>
+            <p:ph type="sldNum" idx="5" sz="quarter"/>
+          </p:nvPr>
+        </p:nvSpPr>
+        <p:spPr/>
+      </p:sp>
+    </p:spTree>
+  </p:cSld>
+  <p:clrMapOvr>
+    <a:masterClrMapping/>
+  </p:clrMapOvr>
+</p:notes>
+</file>
+
+<file path=ppt/notesSlides/notesSlide15.xml><?xml version="1.0" encoding="utf-8"?>
+<p:notes xmlns:a="http://schemas.openxmlformats.org/drawingml/2006/main" xmlns:p="http://schemas.openxmlformats.org/presentationml/2006/main" xmlns:r="http://schemas.openxmlformats.org/officeDocument/2006/relationships">
+  <p:cSld>
+    <p:spTree>
+      <p:nvGrpSpPr>
+        <p:cNvPr id="1" name=""/>
+        <p:cNvGrpSpPr/>
+        <p:nvPr/>
+      </p:nvGrpSpPr>
+      <p:grpSpPr>
+        <a:xfrm>
+          <a:off x="0" y="0"/>
+          <a:ext cx="0" cy="0"/>
+          <a:chOff x="0" y="0"/>
+          <a:chExt cx="0" cy="0"/>
+        </a:xfrm>
+      </p:grpSpPr>
+      <p:sp>
+        <p:nvSpPr>
+          <p:cNvPr id="2" name="Slide Image Placeholder 1"/>
+          <p:cNvSpPr>
+            <a:spLocks noGrp="1"/>
+          </p:cNvSpPr>
+          <p:nvPr>
+            <p:ph type="sldImg" idx="2"/>
+          </p:nvPr>
+        </p:nvSpPr>
+        <p:spPr/>
+      </p:sp>
+      <p:sp>
+        <p:nvSpPr>
+          <p:cNvPr id="3" name="Notes Placeholder 2"/>
+          <p:cNvSpPr>
+            <a:spLocks noGrp="1"/>
+          </p:cNvSpPr>
+          <p:nvPr>
+            <p:ph type="body" idx="3" sz="quarter"/>
+          </p:nvPr>
+        </p:nvSpPr>
+        <p:spPr/>
+        <p:txBody>
+          <a:bodyPr/>
+          <a:lstStyle/>
+          <a:p>
+            <a:r>
+              <a:t>Land the contrast with a picture in words: a fabric can move 100 gigabits of bulk TCP happily and still collapse at two million answered packets per second — and your database traffic looks like the second thing, not the first. If asked why UDP: TCP would quietly merge small packets together, so a "packets per second" number over TCP would be fiction. The two tools are two halves of the load story: iperf_orchestrator for bytes, mx for packets.</a:t>
+            </a:r>
+          </a:p>
+        </p:txBody>
+      </p:sp>
+      <p:sp>
+        <p:nvSpPr>
+          <p:cNvPr id="4" name="Slide Number Placeholder 3"/>
+          <p:cNvSpPr>
+            <a:spLocks noGrp="1"/>
+          </p:cNvSpPr>
+          <p:nvPr>
+            <p:ph type="sldNum" idx="5" sz="quarter"/>
+          </p:nvPr>
+        </p:nvSpPr>
+        <p:spPr/>
+      </p:sp>
+    </p:spTree>
+  </p:cSld>
+  <p:clrMapOvr>
+    <a:masterClrMapping/>
+  </p:clrMapOvr>
+</p:notes>
+</file>
+
+<file path=ppt/notesSlides/notesSlide16.xml><?xml version="1.0" encoding="utf-8"?>
+<p:notes xmlns:a="http://schemas.openxmlformats.org/drawingml/2006/main" xmlns:p="http://schemas.openxmlformats.org/presentationml/2006/main" xmlns:r="http://schemas.openxmlformats.org/officeDocument/2006/relationships">
+  <p:cSld>
+    <p:spTree>
+      <p:nvGrpSpPr>
+        <p:cNvPr id="1" name=""/>
+        <p:cNvGrpSpPr/>
+        <p:nvPr/>
+      </p:nvGrpSpPr>
+      <p:grpSpPr>
+        <a:xfrm>
+          <a:off x="0" y="0"/>
+          <a:ext cx="0" cy="0"/>
+          <a:chOff x="0" y="0"/>
+          <a:chExt cx="0" cy="0"/>
+        </a:xfrm>
+      </p:grpSpPr>
+      <p:sp>
+        <p:nvSpPr>
+          <p:cNvPr id="2" name="Slide Image Placeholder 1"/>
+          <p:cNvSpPr>
+            <a:spLocks noGrp="1"/>
+          </p:cNvSpPr>
+          <p:nvPr>
+            <p:ph type="sldImg" idx="2"/>
+          </p:nvPr>
+        </p:nvSpPr>
+        <p:spPr/>
+      </p:sp>
+      <p:sp>
+        <p:nvSpPr>
+          <p:cNvPr id="3" name="Notes Placeholder 2"/>
+          <p:cNvSpPr>
+            <a:spLocks noGrp="1"/>
+          </p:cNvSpPr>
+          <p:nvPr>
+            <p:ph type="body" idx="3" sz="quarter"/>
+          </p:nvPr>
+        </p:nvSpPr>
+        <p:spPr/>
+        <p:txBody>
+          <a:bodyPr/>
+          <a:lstStyle/>
+          <a:p>
+            <a:r>
+              <a:t>The theme is honesty: receiver-counted delivery, split loss, refusal to report numbers that can't be true, and self-awareness about its own ceiling. That last one matters most in practice — a load generator that silently saturates makes the network look guilty; this one names itself and names the fix (more workers, more streams, or more hosts).</a:t>
+            </a:r>
+          </a:p>
+        </p:txBody>
+      </p:sp>
+      <p:sp>
+        <p:nvSpPr>
+          <p:cNvPr id="4" name="Slide Number Placeholder 3"/>
+          <p:cNvSpPr>
+            <a:spLocks noGrp="1"/>
+          </p:cNvSpPr>
+          <p:nvPr>
+            <p:ph type="sldNum" idx="5" sz="quarter"/>
+          </p:nvPr>
+        </p:nvSpPr>
+        <p:spPr/>
+      </p:sp>
+    </p:spTree>
+  </p:cSld>
+  <p:clrMapOvr>
+    <a:masterClrMapping/>
+  </p:clrMapOvr>
+</p:notes>
+</file>
+
+<file path=ppt/notesSlides/notesSlide17.xml><?xml version="1.0" encoding="utf-8"?>
+<p:notes xmlns:a="http://schemas.openxmlformats.org/drawingml/2006/main" xmlns:p="http://schemas.openxmlformats.org/presentationml/2006/main" xmlns:r="http://schemas.openxmlformats.org/officeDocument/2006/relationships">
+  <p:cSld>
+    <p:spTree>
+      <p:nvGrpSpPr>
+        <p:cNvPr id="1" name=""/>
+        <p:cNvGrpSpPr/>
+        <p:nvPr/>
+      </p:nvGrpSpPr>
+      <p:grpSpPr>
+        <a:xfrm>
+          <a:off x="0" y="0"/>
+          <a:ext cx="0" cy="0"/>
+          <a:chOff x="0" y="0"/>
+          <a:chExt cx="0" cy="0"/>
+        </a:xfrm>
+      </p:grpSpPr>
+      <p:sp>
+        <p:nvSpPr>
+          <p:cNvPr id="2" name="Slide Image Placeholder 1"/>
+          <p:cNvSpPr>
+            <a:spLocks noGrp="1"/>
+          </p:cNvSpPr>
+          <p:nvPr>
+            <p:ph type="sldImg" idx="2"/>
+          </p:nvPr>
+        </p:nvSpPr>
+        <p:spPr/>
+      </p:sp>
+      <p:sp>
+        <p:nvSpPr>
+          <p:cNvPr id="3" name="Notes Placeholder 2"/>
+          <p:cNvSpPr>
+            <a:spLocks noGrp="1"/>
+          </p:cNvSpPr>
+          <p:nvPr>
+            <p:ph type="body" idx="3" sz="quarter"/>
+          </p:nvPr>
+        </p:nvSpPr>
+        <p:spPr/>
+        <p:txBody>
+          <a:bodyPr/>
+          <a:lstStyle/>
+          <a:p>
+            <a:r>
+              <a:t>Deliberately simpler than iperf_orchestrator: six verbs and one file. Also worth naming the helpers — mx doctor checks the fleet is ready, mx check asks "can the NICs even carry what you're about to request?", and mx hints turns a goal ("2 million packets per second per host") into the exact command.</a:t>
+            </a:r>
+          </a:p>
+        </p:txBody>
+      </p:sp>
+      <p:sp>
+        <p:nvSpPr>
+          <p:cNvPr id="4" name="Slide Number Placeholder 3"/>
+          <p:cNvSpPr>
+            <a:spLocks noGrp="1"/>
+          </p:cNvSpPr>
+          <p:nvPr>
+            <p:ph type="sldNum" idx="5" sz="quarter"/>
+          </p:nvPr>
+        </p:nvSpPr>
+        <p:spPr/>
+      </p:sp>
+    </p:spTree>
+  </p:cSld>
+  <p:clrMapOvr>
+    <a:masterClrMapping/>
+  </p:clrMapOvr>
+</p:notes>
+</file>
+
+<file path=ppt/notesSlides/notesSlide18.xml><?xml version="1.0" encoding="utf-8"?>
+<p:notes xmlns:a="http://schemas.openxmlformats.org/drawingml/2006/main" xmlns:p="http://schemas.openxmlformats.org/presentationml/2006/main" xmlns:r="http://schemas.openxmlformats.org/officeDocument/2006/relationships">
+  <p:cSld>
+    <p:spTree>
+      <p:nvGrpSpPr>
+        <p:cNvPr id="1" name=""/>
+        <p:cNvGrpSpPr/>
+        <p:nvPr/>
+      </p:nvGrpSpPr>
+      <p:grpSpPr>
+        <a:xfrm>
+          <a:off x="0" y="0"/>
+          <a:ext cx="0" cy="0"/>
+          <a:chOff x="0" y="0"/>
+          <a:chExt cx="0" cy="0"/>
+        </a:xfrm>
+      </p:grpSpPr>
+      <p:sp>
+        <p:nvSpPr>
+          <p:cNvPr id="2" name="Slide Image Placeholder 1"/>
+          <p:cNvSpPr>
+            <a:spLocks noGrp="1"/>
+          </p:cNvSpPr>
+          <p:nvPr>
+            <p:ph type="sldImg" idx="2"/>
+          </p:nvPr>
+        </p:nvSpPr>
+        <p:spPr/>
+      </p:sp>
+      <p:sp>
+        <p:nvSpPr>
+          <p:cNvPr id="3" name="Notes Placeholder 2"/>
+          <p:cNvSpPr>
+            <a:spLocks noGrp="1"/>
+          </p:cNvSpPr>
+          <p:nvPr>
+            <p:ph type="body" idx="3" sz="quarter"/>
+          </p:nvPr>
+        </p:nvSpPr>
+        <p:spPr/>
+        <p:txBody>
+          <a:bodyPr/>
+          <a:lstStyle/>
+          <a:p>
+            <a:r>
+              <a:t>This is the tool's real interface, and the mid-stream story: investigations are edits. Agents redeploy in seconds and reports keep accumulating, so iterating on the traffic shape mid-session is normal, not exceptional.</a:t>
+            </a:r>
+          </a:p>
+        </p:txBody>
+      </p:sp>
+      <p:sp>
+        <p:nvSpPr>
+          <p:cNvPr id="4" name="Slide Number Placeholder 3"/>
+          <p:cNvSpPr>
+            <a:spLocks noGrp="1"/>
+          </p:cNvSpPr>
+          <p:nvPr>
+            <p:ph type="sldNum" idx="5" sz="quarter"/>
+          </p:nvPr>
+        </p:nvSpPr>
+        <p:spPr/>
+      </p:sp>
+    </p:spTree>
+  </p:cSld>
+  <p:clrMapOvr>
+    <a:masterClrMapping/>
+  </p:clrMapOvr>
+</p:notes>
+</file>
+
+<file path=ppt/notesSlides/notesSlide19.xml><?xml version="1.0" encoding="utf-8"?>
+<p:notes xmlns:a="http://schemas.openxmlformats.org/drawingml/2006/main" xmlns:p="http://schemas.openxmlformats.org/presentationml/2006/main" xmlns:r="http://schemas.openxmlformats.org/officeDocument/2006/relationships">
+  <p:cSld>
+    <p:spTree>
+      <p:nvGrpSpPr>
+        <p:cNvPr id="1" name=""/>
+        <p:cNvGrpSpPr/>
+        <p:nvPr/>
+      </p:nvGrpSpPr>
+      <p:grpSpPr>
+        <a:xfrm>
+          <a:off x="0" y="0"/>
+          <a:ext cx="0" cy="0"/>
+          <a:chOff x="0" y="0"/>
+          <a:chExt cx="0" cy="0"/>
+        </a:xfrm>
+      </p:grpSpPr>
+      <p:sp>
+        <p:nvSpPr>
+          <p:cNvPr id="2" name="Slide Image Placeholder 1"/>
+          <p:cNvSpPr>
+            <a:spLocks noGrp="1"/>
+          </p:cNvSpPr>
+          <p:nvPr>
+            <p:ph type="sldImg" idx="2"/>
+          </p:nvPr>
+        </p:nvSpPr>
+        <p:spPr/>
+      </p:sp>
+      <p:sp>
+        <p:nvSpPr>
+          <p:cNvPr id="3" name="Notes Placeholder 2"/>
+          <p:cNvSpPr>
+            <a:spLocks noGrp="1"/>
+          </p:cNvSpPr>
+          <p:nvPr>
+            <p:ph type="body" idx="3" sz="quarter"/>
+          </p:nvPr>
+        </p:nvSpPr>
+        <p:spPr/>
+        <p:txBody>
+          <a:bodyPr/>
+          <a:lstStyle/>
+          <a:p>
+            <a:r>
+              <a:t>Rule of thumb for the room: believe what arrived, not what was sent — then check whether the tool itself was working too hard before blaming the fabric. The performance model in one breath: roughly 200k packets/sec per worker process per core, times workers, times hosts; mx hints does that arithmetic for you.</a:t>
+            </a:r>
+          </a:p>
+        </p:txBody>
+      </p:sp>
+      <p:sp>
+        <p:nvSpPr>
+          <p:cNvPr id="4" name="Slide Number Placeholder 3"/>
+          <p:cNvSpPr>
+            <a:spLocks noGrp="1"/>
+          </p:cNvSpPr>
+          <p:nvPr>
+            <p:ph type="sldNum" idx="5" sz="quarter"/>
+          </p:nvPr>
+        </p:nvSpPr>
+        <p:spPr/>
+      </p:sp>
+    </p:spTree>
+  </p:cSld>
+  <p:clrMapOvr>
+    <a:masterClrMapping/>
+  </p:clrMapOvr>
+</p:notes>
+</file>
+
 <file path=ppt/notesSlides/notesSlide2.xml><?xml version="1.0" encoding="utf-8"?>
 <p:notes xmlns:a="http://schemas.openxmlformats.org/drawingml/2006/main" xmlns:p="http://schemas.openxmlformats.org/presentationml/2006/main" xmlns:r="http://schemas.openxmlformats.org/officeDocument/2006/relationships">
   <p:cSld>
@@ -603,6 +1307,706 @@
           <a:p>
             <a:r>
               <a:t>The alternative is a week of hand-run iperf, ad-hoc pssh loops, and numbers nobody trusts. Spell out "they compose" plainly: one server list drives everything, and the outputs are designed to sit next to each other — pruning the list, baselining, then loading is a chain of commands, not three integrations. The pipeline on the slide is the whole talk in one line; the three big sections that follow just walk it left to right.</a:t>
+            </a:r>
+          </a:p>
+        </p:txBody>
+      </p:sp>
+      <p:sp>
+        <p:nvSpPr>
+          <p:cNvPr id="4" name="Slide Number Placeholder 3"/>
+          <p:cNvSpPr>
+            <a:spLocks noGrp="1"/>
+          </p:cNvSpPr>
+          <p:nvPr>
+            <p:ph type="sldNum" idx="5" sz="quarter"/>
+          </p:nvPr>
+        </p:nvSpPr>
+        <p:spPr/>
+      </p:sp>
+    </p:spTree>
+  </p:cSld>
+  <p:clrMapOvr>
+    <a:masterClrMapping/>
+  </p:clrMapOvr>
+</p:notes>
+</file>
+
+<file path=ppt/notesSlides/notesSlide20.xml><?xml version="1.0" encoding="utf-8"?>
+<p:notes xmlns:a="http://schemas.openxmlformats.org/drawingml/2006/main" xmlns:p="http://schemas.openxmlformats.org/presentationml/2006/main" xmlns:r="http://schemas.openxmlformats.org/officeDocument/2006/relationships">
+  <p:cSld>
+    <p:spTree>
+      <p:nvGrpSpPr>
+        <p:cNvPr id="1" name=""/>
+        <p:cNvGrpSpPr/>
+        <p:nvPr/>
+      </p:nvGrpSpPr>
+      <p:grpSpPr>
+        <a:xfrm>
+          <a:off x="0" y="0"/>
+          <a:ext cx="0" cy="0"/>
+          <a:chOff x="0" y="0"/>
+          <a:chExt cx="0" cy="0"/>
+        </a:xfrm>
+      </p:grpSpPr>
+      <p:sp>
+        <p:nvSpPr>
+          <p:cNvPr id="2" name="Slide Image Placeholder 1"/>
+          <p:cNvSpPr>
+            <a:spLocks noGrp="1"/>
+          </p:cNvSpPr>
+          <p:nvPr>
+            <p:ph type="sldImg" idx="2"/>
+          </p:nvPr>
+        </p:nvSpPr>
+        <p:spPr/>
+      </p:sp>
+      <p:sp>
+        <p:nvSpPr>
+          <p:cNvPr id="3" name="Notes Placeholder 2"/>
+          <p:cNvSpPr>
+            <a:spLocks noGrp="1"/>
+          </p:cNvSpPr>
+          <p:nvPr>
+            <p:ph type="body" idx="3" sz="quarter"/>
+          </p:nvPr>
+        </p:nvSpPr>
+        <p:spPr/>
+        <p:txBody>
+          <a:bodyPr/>
+          <a:lstStyle/>
+          <a:p>
+            <a:r>
+              <a:t>Queues fill before packets drop, so latency is the early warning — that ordering is the one thing to remember from this slide. Run mx check first so you never spend an afternoon discovering you asked a 10G NIC for 25G of replies.</a:t>
+            </a:r>
+          </a:p>
+        </p:txBody>
+      </p:sp>
+      <p:sp>
+        <p:nvSpPr>
+          <p:cNvPr id="4" name="Slide Number Placeholder 3"/>
+          <p:cNvSpPr>
+            <a:spLocks noGrp="1"/>
+          </p:cNvSpPr>
+          <p:nvPr>
+            <p:ph type="sldNum" idx="5" sz="quarter"/>
+          </p:nvPr>
+        </p:nvSpPr>
+        <p:spPr/>
+      </p:sp>
+    </p:spTree>
+  </p:cSld>
+  <p:clrMapOvr>
+    <a:masterClrMapping/>
+  </p:clrMapOvr>
+</p:notes>
+</file>
+
+<file path=ppt/notesSlides/notesSlide21.xml><?xml version="1.0" encoding="utf-8"?>
+<p:notes xmlns:a="http://schemas.openxmlformats.org/drawingml/2006/main" xmlns:p="http://schemas.openxmlformats.org/presentationml/2006/main" xmlns:r="http://schemas.openxmlformats.org/officeDocument/2006/relationships">
+  <p:cSld>
+    <p:spTree>
+      <p:nvGrpSpPr>
+        <p:cNvPr id="1" name=""/>
+        <p:cNvGrpSpPr/>
+        <p:nvPr/>
+      </p:nvGrpSpPr>
+      <p:grpSpPr>
+        <a:xfrm>
+          <a:off x="0" y="0"/>
+          <a:ext cx="0" cy="0"/>
+          <a:chOff x="0" y="0"/>
+          <a:chExt cx="0" cy="0"/>
+        </a:xfrm>
+      </p:grpSpPr>
+      <p:sp>
+        <p:nvSpPr>
+          <p:cNvPr id="2" name="Slide Image Placeholder 1"/>
+          <p:cNvSpPr>
+            <a:spLocks noGrp="1"/>
+          </p:cNvSpPr>
+          <p:nvPr>
+            <p:ph type="sldImg" idx="2"/>
+          </p:nvPr>
+        </p:nvSpPr>
+        <p:spPr/>
+      </p:sp>
+      <p:sp>
+        <p:nvSpPr>
+          <p:cNvPr id="3" name="Notes Placeholder 2"/>
+          <p:cNvSpPr>
+            <a:spLocks noGrp="1"/>
+          </p:cNvSpPr>
+          <p:nvPr>
+            <p:ph type="body" idx="3" sz="quarter"/>
+          </p:nvPr>
+        </p:nvSpPr>
+        <p:spPr/>
+        <p:txBody>
+          <a:bodyPr/>
+          <a:lstStyle/>
+          <a:p>
+            <a:r>
+              <a:t>The intuition without the math: a random 8-peer assignment already spreads load evenly and crosses every layer of the fabric — the full mesh isn't needed for equal load, only for complete pair coverage, and the rotation buys that back at the same cost. A thousand-host fleet gets every-pair coverage every few minutes on eight sockets per host. The construction is seeded and replayable if anyone asks.</a:t>
+            </a:r>
+          </a:p>
+        </p:txBody>
+      </p:sp>
+      <p:sp>
+        <p:nvSpPr>
+          <p:cNvPr id="4" name="Slide Number Placeholder 3"/>
+          <p:cNvSpPr>
+            <a:spLocks noGrp="1"/>
+          </p:cNvSpPr>
+          <p:nvPr>
+            <p:ph type="sldNum" idx="5" sz="quarter"/>
+          </p:nvPr>
+        </p:nvSpPr>
+        <p:spPr/>
+      </p:sp>
+    </p:spTree>
+  </p:cSld>
+  <p:clrMapOvr>
+    <a:masterClrMapping/>
+  </p:clrMapOvr>
+</p:notes>
+</file>
+
+<file path=ppt/notesSlides/notesSlide22.xml><?xml version="1.0" encoding="utf-8"?>
+<p:notes xmlns:a="http://schemas.openxmlformats.org/drawingml/2006/main" xmlns:p="http://schemas.openxmlformats.org/presentationml/2006/main" xmlns:r="http://schemas.openxmlformats.org/officeDocument/2006/relationships">
+  <p:cSld>
+    <p:spTree>
+      <p:nvGrpSpPr>
+        <p:cNvPr id="1" name=""/>
+        <p:cNvGrpSpPr/>
+        <p:nvPr/>
+      </p:nvGrpSpPr>
+      <p:grpSpPr>
+        <a:xfrm>
+          <a:off x="0" y="0"/>
+          <a:ext cx="0" cy="0"/>
+          <a:chOff x="0" y="0"/>
+          <a:chExt cx="0" cy="0"/>
+        </a:xfrm>
+      </p:grpSpPr>
+      <p:sp>
+        <p:nvSpPr>
+          <p:cNvPr id="2" name="Slide Image Placeholder 1"/>
+          <p:cNvSpPr>
+            <a:spLocks noGrp="1"/>
+          </p:cNvSpPr>
+          <p:nvPr>
+            <p:ph type="sldImg" idx="2"/>
+          </p:nvPr>
+        </p:nvSpPr>
+        <p:spPr/>
+      </p:sp>
+      <p:sp>
+        <p:nvSpPr>
+          <p:cNvPr id="3" name="Notes Placeholder 2"/>
+          <p:cNvSpPr>
+            <a:spLocks noGrp="1"/>
+          </p:cNvSpPr>
+          <p:nvPr>
+            <p:ph type="body" idx="3" sz="quarter"/>
+          </p:nvPr>
+        </p:nvSpPr>
+        <p:spPr/>
+        <p:txBody>
+          <a:bodyPr/>
+          <a:lstStyle/>
+          <a:p>
+            <a:r>
+              <a:t>Same shape as the iperf_orchestrator tutorial on purpose: list, preflight, one command. For a live demo three small VMs are enough — and mx selftest-style confidence comes from mx doctor plus a tiny --pps first run.</a:t>
+            </a:r>
+          </a:p>
+        </p:txBody>
+      </p:sp>
+      <p:sp>
+        <p:nvSpPr>
+          <p:cNvPr id="4" name="Slide Number Placeholder 3"/>
+          <p:cNvSpPr>
+            <a:spLocks noGrp="1"/>
+          </p:cNvSpPr>
+          <p:nvPr>
+            <p:ph type="sldNum" idx="5" sz="quarter"/>
+          </p:nvPr>
+        </p:nvSpPr>
+        <p:spPr/>
+      </p:sp>
+    </p:spTree>
+  </p:cSld>
+  <p:clrMapOvr>
+    <a:masterClrMapping/>
+  </p:clrMapOvr>
+</p:notes>
+</file>
+
+<file path=ppt/notesSlides/notesSlide23.xml><?xml version="1.0" encoding="utf-8"?>
+<p:notes xmlns:a="http://schemas.openxmlformats.org/drawingml/2006/main" xmlns:p="http://schemas.openxmlformats.org/presentationml/2006/main" xmlns:r="http://schemas.openxmlformats.org/officeDocument/2006/relationships">
+  <p:cSld>
+    <p:spTree>
+      <p:nvGrpSpPr>
+        <p:cNvPr id="1" name=""/>
+        <p:cNvGrpSpPr/>
+        <p:nvPr/>
+      </p:nvGrpSpPr>
+      <p:grpSpPr>
+        <a:xfrm>
+          <a:off x="0" y="0"/>
+          <a:ext cx="0" cy="0"/>
+          <a:chOff x="0" y="0"/>
+          <a:chExt cx="0" cy="0"/>
+        </a:xfrm>
+      </p:grpSpPr>
+      <p:sp>
+        <p:nvSpPr>
+          <p:cNvPr id="2" name="Slide Image Placeholder 1"/>
+          <p:cNvSpPr>
+            <a:spLocks noGrp="1"/>
+          </p:cNvSpPr>
+          <p:nvPr>
+            <p:ph type="sldImg" idx="2"/>
+          </p:nvPr>
+        </p:nvSpPr>
+        <p:spPr/>
+      </p:sp>
+      <p:sp>
+        <p:nvSpPr>
+          <p:cNvPr id="3" name="Notes Placeholder 2"/>
+          <p:cNvSpPr>
+            <a:spLocks noGrp="1"/>
+          </p:cNvSpPr>
+          <p:nvPr>
+            <p:ph type="body" idx="3" sz="quarter"/>
+          </p:nvPr>
+        </p:nvSpPr>
+        <p:spPr/>
+        <p:txBody>
+          <a:bodyPr/>
+          <a:lstStyle/>
+          <a:p>
+            <a:r>
+              <a:t>The workflow to model: run, summarize, edit the matrix, run again — an investigation loop measured in seconds. Collect logs and summaries before clean; after clean there is genuinely nothing left, which is the point.</a:t>
+            </a:r>
+          </a:p>
+        </p:txBody>
+      </p:sp>
+      <p:sp>
+        <p:nvSpPr>
+          <p:cNvPr id="4" name="Slide Number Placeholder 3"/>
+          <p:cNvSpPr>
+            <a:spLocks noGrp="1"/>
+          </p:cNvSpPr>
+          <p:nvPr>
+            <p:ph type="sldNum" idx="5" sz="quarter"/>
+          </p:nvPr>
+        </p:nvSpPr>
+        <p:spPr/>
+      </p:sp>
+    </p:spTree>
+  </p:cSld>
+  <p:clrMapOvr>
+    <a:masterClrMapping/>
+  </p:clrMapOvr>
+</p:notes>
+</file>
+
+<file path=ppt/notesSlides/notesSlide24.xml><?xml version="1.0" encoding="utf-8"?>
+<p:notes xmlns:a="http://schemas.openxmlformats.org/drawingml/2006/main" xmlns:p="http://schemas.openxmlformats.org/presentationml/2006/main" xmlns:r="http://schemas.openxmlformats.org/officeDocument/2006/relationships">
+  <p:cSld>
+    <p:spTree>
+      <p:nvGrpSpPr>
+        <p:cNvPr id="1" name=""/>
+        <p:cNvGrpSpPr/>
+        <p:nvPr/>
+      </p:nvGrpSpPr>
+      <p:grpSpPr>
+        <a:xfrm>
+          <a:off x="0" y="0"/>
+          <a:ext cx="0" cy="0"/>
+          <a:chOff x="0" y="0"/>
+          <a:chExt cx="0" cy="0"/>
+        </a:xfrm>
+      </p:grpSpPr>
+      <p:sp>
+        <p:nvSpPr>
+          <p:cNvPr id="2" name="Slide Image Placeholder 1"/>
+          <p:cNvSpPr>
+            <a:spLocks noGrp="1"/>
+          </p:cNvSpPr>
+          <p:nvPr>
+            <p:ph type="sldImg" idx="2"/>
+          </p:nvPr>
+        </p:nvSpPr>
+        <p:spPr/>
+      </p:sp>
+      <p:sp>
+        <p:nvSpPr>
+          <p:cNvPr id="3" name="Notes Placeholder 2"/>
+          <p:cNvSpPr>
+            <a:spLocks noGrp="1"/>
+          </p:cNvSpPr>
+          <p:nvPr>
+            <p:ph type="body" idx="3" sz="quarter"/>
+          </p:nvPr>
+        </p:nvSpPr>
+        <p:spPr/>
+        <p:txBody>
+          <a:bodyPr/>
+          <a:lstStyle/>
+          <a:p>
+            <a:r>
+              <a:t>The one-sentence pitch: a 9.4 gigabit result over a 300-microsecond path and the same result over a 42-millisecond path are different results — netmesh is how you know which one you have. It's also the tool to reach for first in an incident, because it's the only one of the three that's safe to point at production while users are on it.</a:t>
+            </a:r>
+          </a:p>
+        </p:txBody>
+      </p:sp>
+      <p:sp>
+        <p:nvSpPr>
+          <p:cNvPr id="4" name="Slide Number Placeholder 3"/>
+          <p:cNvSpPr>
+            <a:spLocks noGrp="1"/>
+          </p:cNvSpPr>
+          <p:nvPr>
+            <p:ph type="sldNum" idx="5" sz="quarter"/>
+          </p:nvPr>
+        </p:nvSpPr>
+        <p:spPr/>
+      </p:sp>
+    </p:spTree>
+  </p:cSld>
+  <p:clrMapOvr>
+    <a:masterClrMapping/>
+  </p:clrMapOvr>
+</p:notes>
+</file>
+
+<file path=ppt/notesSlides/notesSlide25.xml><?xml version="1.0" encoding="utf-8"?>
+<p:notes xmlns:a="http://schemas.openxmlformats.org/drawingml/2006/main" xmlns:p="http://schemas.openxmlformats.org/presentationml/2006/main" xmlns:r="http://schemas.openxmlformats.org/officeDocument/2006/relationships">
+  <p:cSld>
+    <p:spTree>
+      <p:nvGrpSpPr>
+        <p:cNvPr id="1" name=""/>
+        <p:cNvGrpSpPr/>
+        <p:nvPr/>
+      </p:nvGrpSpPr>
+      <p:grpSpPr>
+        <a:xfrm>
+          <a:off x="0" y="0"/>
+          <a:ext cx="0" cy="0"/>
+          <a:chOff x="0" y="0"/>
+          <a:chExt cx="0" cy="0"/>
+        </a:xfrm>
+      </p:grpSpPr>
+      <p:sp>
+        <p:nvSpPr>
+          <p:cNvPr id="2" name="Slide Image Placeholder 1"/>
+          <p:cNvSpPr>
+            <a:spLocks noGrp="1"/>
+          </p:cNvSpPr>
+          <p:nvPr>
+            <p:ph type="sldImg" idx="2"/>
+          </p:nvPr>
+        </p:nvSpPr>
+        <p:spPr/>
+      </p:sp>
+      <p:sp>
+        <p:nvSpPr>
+          <p:cNvPr id="3" name="Notes Placeholder 2"/>
+          <p:cNvSpPr>
+            <a:spLocks noGrp="1"/>
+          </p:cNvSpPr>
+          <p:nvPr>
+            <p:ph type="body" idx="3" sz="quarter"/>
+          </p:nvPr>
+        </p:nvSpPr>
+        <p:spPr/>
+        <p:txBody>
+          <a:bodyPr/>
+          <a:lstStyle/>
+          <a:p>
+            <a:r>
+              <a:t>For endpoints you can't put an agent on — a VIP, a router, an appliance — prefix the host with ~ and it falls back to ping, but those rows are clearly quarantined in the report as one-sided, because they carry less truth. The theme continues: every number quoted is one that is actually true.</a:t>
+            </a:r>
+          </a:p>
+        </p:txBody>
+      </p:sp>
+      <p:sp>
+        <p:nvSpPr>
+          <p:cNvPr id="4" name="Slide Number Placeholder 3"/>
+          <p:cNvSpPr>
+            <a:spLocks noGrp="1"/>
+          </p:cNvSpPr>
+          <p:nvPr>
+            <p:ph type="sldNum" idx="5" sz="quarter"/>
+          </p:nvPr>
+        </p:nvSpPr>
+        <p:spPr/>
+      </p:sp>
+    </p:spTree>
+  </p:cSld>
+  <p:clrMapOvr>
+    <a:masterClrMapping/>
+  </p:clrMapOvr>
+</p:notes>
+</file>
+
+<file path=ppt/notesSlides/notesSlide26.xml><?xml version="1.0" encoding="utf-8"?>
+<p:notes xmlns:a="http://schemas.openxmlformats.org/drawingml/2006/main" xmlns:p="http://schemas.openxmlformats.org/presentationml/2006/main" xmlns:r="http://schemas.openxmlformats.org/officeDocument/2006/relationships">
+  <p:cSld>
+    <p:spTree>
+      <p:nvGrpSpPr>
+        <p:cNvPr id="1" name=""/>
+        <p:cNvGrpSpPr/>
+        <p:nvPr/>
+      </p:nvGrpSpPr>
+      <p:grpSpPr>
+        <a:xfrm>
+          <a:off x="0" y="0"/>
+          <a:ext cx="0" cy="0"/>
+          <a:chOff x="0" y="0"/>
+          <a:chExt cx="0" cy="0"/>
+        </a:xfrm>
+      </p:grpSpPr>
+      <p:sp>
+        <p:nvSpPr>
+          <p:cNvPr id="2" name="Slide Image Placeholder 1"/>
+          <p:cNvSpPr>
+            <a:spLocks noGrp="1"/>
+          </p:cNvSpPr>
+          <p:nvPr>
+            <p:ph type="sldImg" idx="2"/>
+          </p:nvPr>
+        </p:nvSpPr>
+        <p:spPr/>
+      </p:sp>
+      <p:sp>
+        <p:nvSpPr>
+          <p:cNvPr id="3" name="Notes Placeholder 2"/>
+          <p:cNvSpPr>
+            <a:spLocks noGrp="1"/>
+          </p:cNvSpPr>
+          <p:nvPr>
+            <p:ph type="body" idx="3" sz="quarter"/>
+          </p:nvPr>
+        </p:nvSpPr>
+        <p:spPr/>
+        <p:txBody>
+          <a:bodyPr/>
+          <a:lstStyle/>
+          <a:p>
+            <a:r>
+              <a:t>Every diagnosis is computed from the data, not canned: slow pairs sharing a source point at that host's egress; sharing a destination, its ingress; crossing a rack boundary, the path between. The under-load section is the bridge back to the other two tools — wrap netmesh around an iperf or mx run and the latency cost of the throughput number appears in the same report.</a:t>
+            </a:r>
+          </a:p>
+        </p:txBody>
+      </p:sp>
+      <p:sp>
+        <p:nvSpPr>
+          <p:cNvPr id="4" name="Slide Number Placeholder 3"/>
+          <p:cNvSpPr>
+            <a:spLocks noGrp="1"/>
+          </p:cNvSpPr>
+          <p:nvPr>
+            <p:ph type="sldNum" idx="5" sz="quarter"/>
+          </p:nvPr>
+        </p:nvSpPr>
+        <p:spPr/>
+      </p:sp>
+    </p:spTree>
+  </p:cSld>
+  <p:clrMapOvr>
+    <a:masterClrMapping/>
+  </p:clrMapOvr>
+</p:notes>
+</file>
+
+<file path=ppt/notesSlides/notesSlide27.xml><?xml version="1.0" encoding="utf-8"?>
+<p:notes xmlns:a="http://schemas.openxmlformats.org/drawingml/2006/main" xmlns:p="http://schemas.openxmlformats.org/presentationml/2006/main" xmlns:r="http://schemas.openxmlformats.org/officeDocument/2006/relationships">
+  <p:cSld>
+    <p:spTree>
+      <p:nvGrpSpPr>
+        <p:cNvPr id="1" name=""/>
+        <p:cNvGrpSpPr/>
+        <p:nvPr/>
+      </p:nvGrpSpPr>
+      <p:grpSpPr>
+        <a:xfrm>
+          <a:off x="0" y="0"/>
+          <a:ext cx="0" cy="0"/>
+          <a:chOff x="0" y="0"/>
+          <a:chExt cx="0" cy="0"/>
+        </a:xfrm>
+      </p:grpSpPr>
+      <p:sp>
+        <p:nvSpPr>
+          <p:cNvPr id="2" name="Slide Image Placeholder 1"/>
+          <p:cNvSpPr>
+            <a:spLocks noGrp="1"/>
+          </p:cNvSpPr>
+          <p:nvPr>
+            <p:ph type="sldImg" idx="2"/>
+          </p:nvPr>
+        </p:nvSpPr>
+        <p:spPr/>
+      </p:sp>
+      <p:sp>
+        <p:nvSpPr>
+          <p:cNvPr id="3" name="Notes Placeholder 2"/>
+          <p:cNvSpPr>
+            <a:spLocks noGrp="1"/>
+          </p:cNvSpPr>
+          <p:nvPr>
+            <p:ph type="body" idx="3" sz="quarter"/>
+          </p:nvPr>
+        </p:nvSpPr>
+        <p:spPr/>
+        <p:txBody>
+          <a:bodyPr/>
+          <a:lstStyle/>
+          <a:p>
+            <a:r>
+              <a:t>The comparison trick in paths --compare is the practical gem: a sick route diffed against a healthy one turns "somewhere in the fabric" into "this hop". And the report itself tells you when to stop debugging the network — a clean baseline pointing you at the load tools closes the loop of the talk.</a:t>
+            </a:r>
+          </a:p>
+        </p:txBody>
+      </p:sp>
+      <p:sp>
+        <p:nvSpPr>
+          <p:cNvPr id="4" name="Slide Number Placeholder 3"/>
+          <p:cNvSpPr>
+            <a:spLocks noGrp="1"/>
+          </p:cNvSpPr>
+          <p:nvPr>
+            <p:ph type="sldNum" idx="5" sz="quarter"/>
+          </p:nvPr>
+        </p:nvSpPr>
+        <p:spPr/>
+      </p:sp>
+    </p:spTree>
+  </p:cSld>
+  <p:clrMapOvr>
+    <a:masterClrMapping/>
+  </p:clrMapOvr>
+</p:notes>
+</file>
+
+<file path=ppt/notesSlides/notesSlide28.xml><?xml version="1.0" encoding="utf-8"?>
+<p:notes xmlns:a="http://schemas.openxmlformats.org/drawingml/2006/main" xmlns:p="http://schemas.openxmlformats.org/presentationml/2006/main" xmlns:r="http://schemas.openxmlformats.org/officeDocument/2006/relationships">
+  <p:cSld>
+    <p:spTree>
+      <p:nvGrpSpPr>
+        <p:cNvPr id="1" name=""/>
+        <p:cNvGrpSpPr/>
+        <p:nvPr/>
+      </p:nvGrpSpPr>
+      <p:grpSpPr>
+        <a:xfrm>
+          <a:off x="0" y="0"/>
+          <a:ext cx="0" cy="0"/>
+          <a:chOff x="0" y="0"/>
+          <a:chExt cx="0" cy="0"/>
+        </a:xfrm>
+      </p:grpSpPr>
+      <p:sp>
+        <p:nvSpPr>
+          <p:cNvPr id="2" name="Slide Image Placeholder 1"/>
+          <p:cNvSpPr>
+            <a:spLocks noGrp="1"/>
+          </p:cNvSpPr>
+          <p:nvPr>
+            <p:ph type="sldImg" idx="2"/>
+          </p:nvPr>
+        </p:nvSpPr>
+        <p:spPr/>
+      </p:sp>
+      <p:sp>
+        <p:nvSpPr>
+          <p:cNvPr id="3" name="Notes Placeholder 2"/>
+          <p:cNvSpPr>
+            <a:spLocks noGrp="1"/>
+          </p:cNvSpPr>
+          <p:nvPr>
+            <p:ph type="body" idx="3" sz="quarter"/>
+          </p:nvPr>
+        </p:nvSpPr>
+        <p:spPr/>
+        <p:txBody>
+          <a:bodyPr/>
+          <a:lstStyle/>
+          <a:p>
+            <a:r>
+              <a:t>selftest first is the confidence builder — two agents over loopback, no second machine, no privileges. Then the two-host check is genuinely the whole experience for most users; --flows is the flag to remember when a fault reproduces only sometimes, because which bundle member you hash onto is luck until you sweep.</a:t>
+            </a:r>
+          </a:p>
+        </p:txBody>
+      </p:sp>
+      <p:sp>
+        <p:nvSpPr>
+          <p:cNvPr id="4" name="Slide Number Placeholder 3"/>
+          <p:cNvSpPr>
+            <a:spLocks noGrp="1"/>
+          </p:cNvSpPr>
+          <p:nvPr>
+            <p:ph type="sldNum" idx="5" sz="quarter"/>
+          </p:nvPr>
+        </p:nvSpPr>
+        <p:spPr/>
+      </p:sp>
+    </p:spTree>
+  </p:cSld>
+  <p:clrMapOvr>
+    <a:masterClrMapping/>
+  </p:clrMapOvr>
+</p:notes>
+</file>
+
+<file path=ppt/notesSlides/notesSlide29.xml><?xml version="1.0" encoding="utf-8"?>
+<p:notes xmlns:a="http://schemas.openxmlformats.org/drawingml/2006/main" xmlns:p="http://schemas.openxmlformats.org/presentationml/2006/main" xmlns:r="http://schemas.openxmlformats.org/officeDocument/2006/relationships">
+  <p:cSld>
+    <p:spTree>
+      <p:nvGrpSpPr>
+        <p:cNvPr id="1" name=""/>
+        <p:cNvGrpSpPr/>
+        <p:nvPr/>
+      </p:nvGrpSpPr>
+      <p:grpSpPr>
+        <a:xfrm>
+          <a:off x="0" y="0"/>
+          <a:ext cx="0" cy="0"/>
+          <a:chOff x="0" y="0"/>
+          <a:chExt cx="0" cy="0"/>
+        </a:xfrm>
+      </p:grpSpPr>
+      <p:sp>
+        <p:nvSpPr>
+          <p:cNvPr id="2" name="Slide Image Placeholder 1"/>
+          <p:cNvSpPr>
+            <a:spLocks noGrp="1"/>
+          </p:cNvSpPr>
+          <p:nvPr>
+            <p:ph type="sldImg" idx="2"/>
+          </p:nvPr>
+        </p:nvSpPr>
+        <p:spPr/>
+      </p:sp>
+      <p:sp>
+        <p:nvSpPr>
+          <p:cNvPr id="3" name="Notes Placeholder 2"/>
+          <p:cNvSpPr>
+            <a:spLocks noGrp="1"/>
+          </p:cNvSpPr>
+          <p:nvPr>
+            <p:ph type="body" idx="3" sz="quarter"/>
+          </p:nvPr>
+        </p:nvSpPr>
+        <p:spPr/>
+        <p:txBody>
+          <a:bodyPr/>
+          <a:lstStyle/>
+          <a:p>
+            <a:r>
+              <a:t>The --baseline wrapper is the closing move of the whole talk: baseline, then load, one report showing both. Grids land next to mx's grids in the same spreadsheet. And the honesty rule one last time — a pair that stopped answering writes blanks, because averaging zeros in would flatter the baseline, and a baseline tool must never flatter.</a:t>
             </a:r>
           </a:p>
         </p:txBody>
@@ -697,6 +2101,76 @@
 </p:notes>
 </file>
 
+<file path=ppt/notesSlides/notesSlide30.xml><?xml version="1.0" encoding="utf-8"?>
+<p:notes xmlns:a="http://schemas.openxmlformats.org/drawingml/2006/main" xmlns:p="http://schemas.openxmlformats.org/presentationml/2006/main" xmlns:r="http://schemas.openxmlformats.org/officeDocument/2006/relationships">
+  <p:cSld>
+    <p:spTree>
+      <p:nvGrpSpPr>
+        <p:cNvPr id="1" name=""/>
+        <p:cNvGrpSpPr/>
+        <p:nvPr/>
+      </p:nvGrpSpPr>
+      <p:grpSpPr>
+        <a:xfrm>
+          <a:off x="0" y="0"/>
+          <a:ext cx="0" cy="0"/>
+          <a:chOff x="0" y="0"/>
+          <a:chExt cx="0" cy="0"/>
+        </a:xfrm>
+      </p:grpSpPr>
+      <p:sp>
+        <p:nvSpPr>
+          <p:cNvPr id="2" name="Slide Image Placeholder 1"/>
+          <p:cNvSpPr>
+            <a:spLocks noGrp="1"/>
+          </p:cNvSpPr>
+          <p:nvPr>
+            <p:ph type="sldImg" idx="2"/>
+          </p:nvPr>
+        </p:nvSpPr>
+        <p:spPr/>
+      </p:sp>
+      <p:sp>
+        <p:nvSpPr>
+          <p:cNvPr id="3" name="Notes Placeholder 2"/>
+          <p:cNvSpPr>
+            <a:spLocks noGrp="1"/>
+          </p:cNvSpPr>
+          <p:nvPr>
+            <p:ph type="body" idx="3" sz="quarter"/>
+          </p:nvPr>
+        </p:nvSpPr>
+        <p:spPr/>
+        <p:txBody>
+          <a:bodyPr/>
+          <a:lstStyle/>
+          <a:p>
+            <a:r>
+              <a:t>Walk the flow left to right, one sentence per box — it's the whole talk replayed in thirty seconds. Each stage's answer is the context for the next: a pruned list makes the baseline trustworthy, the baseline makes the load numbers readable, and the two load ceilings — bytes and packets — bracket what the fabric can really do. The last box closes the loop: throughput always has a latency price, and measuring it is one wrapper command. Everything installs with pip; netmesh and reachable ship together in one package alongside the two orchestrators.</a:t>
+            </a:r>
+          </a:p>
+        </p:txBody>
+      </p:sp>
+      <p:sp>
+        <p:nvSpPr>
+          <p:cNvPr id="4" name="Slide Number Placeholder 3"/>
+          <p:cNvSpPr>
+            <a:spLocks noGrp="1"/>
+          </p:cNvSpPr>
+          <p:nvPr>
+            <p:ph type="sldNum" idx="5" sz="quarter"/>
+          </p:nvPr>
+        </p:nvSpPr>
+        <p:spPr/>
+      </p:sp>
+    </p:spTree>
+  </p:cSld>
+  <p:clrMapOvr>
+    <a:masterClrMapping/>
+  </p:clrMapOvr>
+</p:notes>
+</file>
+
 <file path=ppt/notesSlides/notesSlide4.xml><?xml version="1.0" encoding="utf-8"?>
 <p:notes xmlns:a="http://schemas.openxmlformats.org/drawingml/2006/main" xmlns:p="http://schemas.openxmlformats.org/presentationml/2006/main" xmlns:r="http://schemas.openxmlformats.org/officeDocument/2006/relationships">
   <p:cSld>
@@ -742,7 +2216,7 @@
           <a:lstStyle/>
           <a:p>
             <a:r>
-              <a:t>One command in (iperf-orchestrator --servers servers.txt all), four artifacts out; the heatmap is the one you open first.</a:t>
+              <a:t>Lead with the goal, not the implementation: a mesh of N hosts has N·(N−1)/2 pairs, and the only way to truly max out a fabric in a short window is to orchestrate all of them at once — that's the tool's whole reason to exist. Mention only in passing that it happens to be a single script; what matters is that servers need zero setup beyond iperf and an ssh key.</a:t>
             </a:r>
           </a:p>
         </p:txBody>
@@ -812,7 +2286,7 @@
           <a:lstStyle/>
           <a:p>
             <a:r>
-              <a:t>Quick grounding for anyone who hasn't used it. Set up the iperf2-vs-iperf3 story here.</a:t>
+              <a:t>Take a beat here for anyone who hasn't used iperf. The mental model: it answers "how fast is the pipe between A and B, really?" by filling it. Emphasize that the number includes the whole path — a slow result can be the NIC, the host's CPU, or the network, which is exactly why the orchestrator also samples CPU. The pair-at-a-time limitation is the segue to the next slide.</a:t>
             </a:r>
           </a:p>
         </p:txBody>
@@ -882,7 +2356,7 @@
           <a:lstStyle/>
           <a:p>
             <a:r>
-              <a:t>Each of these was a real problem hit and fixed; the tool is the accumulated answers. Mention check-iperf catches distros where iperf is secretly a symlink to iperf3 (WRONG_VERSION).</a:t>
+              <a:t>Each of these was a real problem hit and fixed — the tool is the accumulated answers. Worth a warning: some distros ship "iperf" as a symlink to iperf3; the check-iperf preflight catches that (WRONG_VERSION). The parity rule detail if asked: for pair {i, j}, the client is the smaller index when i+j is even, the larger when odd — both ends compute it independently, so no coordination is needed.</a:t>
             </a:r>
           </a:p>
         </p:txBody>
@@ -952,7 +2426,147 @@
           <a:lstStyle/>
           <a:p>
             <a:r>
-              <a:t>Pick by question: stress = parallel, capability = sequential-host, forensic = sequential-pair, huge fleet = rolling.</a:t>
+              <a:t>Keep this non-specialist: one command does the whole pipeline, and each box in the flow is also a standalone subcommand for day-2 work — re-render a heatmap, re-collect from one host, re-run just the analysis. The reading order matters more than any switch: heatmap for *where*, CPU for *whether to believe it*, summary for *how bad*. Narration extras if asked: collection is batched one archive per host, and the remote directory is safe on shared filesystems because every file embeds host + run-id.</a:t>
+            </a:r>
+          </a:p>
+        </p:txBody>
+      </p:sp>
+      <p:sp>
+        <p:nvSpPr>
+          <p:cNvPr id="4" name="Slide Number Placeholder 3"/>
+          <p:cNvSpPr>
+            <a:spLocks noGrp="1"/>
+          </p:cNvSpPr>
+          <p:nvPr>
+            <p:ph type="sldNum" idx="5" sz="quarter"/>
+          </p:nvPr>
+        </p:nvSpPr>
+        <p:spPr/>
+      </p:sp>
+    </p:spTree>
+  </p:cSld>
+  <p:clrMapOvr>
+    <a:masterClrMapping/>
+  </p:clrMapOvr>
+</p:notes>
+</file>
+
+<file path=ppt/notesSlides/notesSlide8.xml><?xml version="1.0" encoding="utf-8"?>
+<p:notes xmlns:a="http://schemas.openxmlformats.org/drawingml/2006/main" xmlns:p="http://schemas.openxmlformats.org/presentationml/2006/main" xmlns:r="http://schemas.openxmlformats.org/officeDocument/2006/relationships">
+  <p:cSld>
+    <p:spTree>
+      <p:nvGrpSpPr>
+        <p:cNvPr id="1" name=""/>
+        <p:cNvGrpSpPr/>
+        <p:nvPr/>
+      </p:nvGrpSpPr>
+      <p:grpSpPr>
+        <a:xfrm>
+          <a:off x="0" y="0"/>
+          <a:ext cx="0" cy="0"/>
+          <a:chOff x="0" y="0"/>
+          <a:chExt cx="0" cy="0"/>
+        </a:xfrm>
+      </p:grpSpPr>
+      <p:sp>
+        <p:nvSpPr>
+          <p:cNvPr id="2" name="Slide Image Placeholder 1"/>
+          <p:cNvSpPr>
+            <a:spLocks noGrp="1"/>
+          </p:cNvSpPr>
+          <p:nvPr>
+            <p:ph type="sldImg" idx="2"/>
+          </p:nvPr>
+        </p:nvSpPr>
+        <p:spPr/>
+      </p:sp>
+      <p:sp>
+        <p:nvSpPr>
+          <p:cNvPr id="3" name="Notes Placeholder 2"/>
+          <p:cNvSpPr>
+            <a:spLocks noGrp="1"/>
+          </p:cNvSpPr>
+          <p:nvPr>
+            <p:ph type="body" idx="3" sz="quarter"/>
+          </p:nvPr>
+        </p:nvSpPr>
+        <p:spPr/>
+        <p:txBody>
+          <a:bodyPr/>
+          <a:lstStyle/>
+          <a:p>
+            <a:r>
+              <a:t>Frame it as one dial, four positions. parallel is realism: everything contends, like a bad day in production. The sequential modes buy isolation with time. rolling gives up the synchronized snapshot entirely in exchange for a constant, gentle load that works at any fleet size. The next four slides take them one at a time.</a:t>
+            </a:r>
+          </a:p>
+        </p:txBody>
+      </p:sp>
+      <p:sp>
+        <p:nvSpPr>
+          <p:cNvPr id="4" name="Slide Number Placeholder 3"/>
+          <p:cNvSpPr>
+            <a:spLocks noGrp="1"/>
+          </p:cNvSpPr>
+          <p:nvPr>
+            <p:ph type="sldNum" idx="5" sz="quarter"/>
+          </p:nvPr>
+        </p:nvSpPr>
+        <p:spPr/>
+      </p:sp>
+    </p:spTree>
+  </p:cSld>
+  <p:clrMapOvr>
+    <a:masterClrMapping/>
+  </p:clrMapOvr>
+</p:notes>
+</file>
+
+<file path=ppt/notesSlides/notesSlide9.xml><?xml version="1.0" encoding="utf-8"?>
+<p:notes xmlns:a="http://schemas.openxmlformats.org/drawingml/2006/main" xmlns:p="http://schemas.openxmlformats.org/presentationml/2006/main" xmlns:r="http://schemas.openxmlformats.org/officeDocument/2006/relationships">
+  <p:cSld>
+    <p:spTree>
+      <p:nvGrpSpPr>
+        <p:cNvPr id="1" name=""/>
+        <p:cNvGrpSpPr/>
+        <p:nvPr/>
+      </p:nvGrpSpPr>
+      <p:grpSpPr>
+        <a:xfrm>
+          <a:off x="0" y="0"/>
+          <a:ext cx="0" cy="0"/>
+          <a:chOff x="0" y="0"/>
+          <a:chExt cx="0" cy="0"/>
+        </a:xfrm>
+      </p:grpSpPr>
+      <p:sp>
+        <p:nvSpPr>
+          <p:cNvPr id="2" name="Slide Image Placeholder 1"/>
+          <p:cNvSpPr>
+            <a:spLocks noGrp="1"/>
+          </p:cNvSpPr>
+          <p:nvPr>
+            <p:ph type="sldImg" idx="2"/>
+          </p:nvPr>
+        </p:nvSpPr>
+        <p:spPr/>
+      </p:sp>
+      <p:sp>
+        <p:nvSpPr>
+          <p:cNvPr id="3" name="Notes Placeholder 2"/>
+          <p:cNvSpPr>
+            <a:spLocks noGrp="1"/>
+          </p:cNvSpPr>
+          <p:nvPr>
+            <p:ph type="body" idx="3" sz="quarter"/>
+          </p:nvPr>
+        </p:nvSpPr>
+        <p:spPr/>
+        <p:txBody>
+          <a:bodyPr/>
+          <a:lstStyle/>
+          <a:p>
+            <a:r>
+              <a:t>This is the mode the tool was built for and the one to demo. Set expectations about the numbers: under full contention a 10G host talking to 49 peers won't show 10G to each — you're reading the *distribution* and its outliers, not absolute line rate. If something looks bad here, the next two modes are how you isolate it.</a:t>
             </a:r>
           </a:p>
         </p:txBody>
@@ -4017,7 +5631,7 @@
               <a:defRPr sz="1500" i="1"/>
             </a:pPr>
             <a:r>
-              <a:t>with binnacle’s reachable keeping the server list honest</a:t>
+              <a:t>and reachable, keeping the server list honest</a:t>
             </a:r>
           </a:p>
           <a:p/>
@@ -4072,333 +5686,52 @@
               </a:defRPr>
             </a:pPr>
             <a:r>
-              <a:t>Setup needs</a:t>
-            </a:r>
-          </a:p>
-        </p:txBody>
-      </p:sp>
-      <p:sp>
-        <p:nvSpPr>
-          <p:cNvPr id="3" name="Content Placeholder 2"/>
-          <p:cNvSpPr>
-            <a:spLocks noGrp="1"/>
-          </p:cNvSpPr>
-          <p:nvPr>
-            <p:ph idx="1"/>
-          </p:nvPr>
-        </p:nvSpPr>
-        <p:spPr/>
+              <a:t>The four run modes</a:t>
+            </a:r>
+          </a:p>
+        </p:txBody>
+      </p:sp>
+      <p:sp>
+        <p:nvSpPr>
+          <p:cNvPr id="3" name="TextBox 2"/>
+          <p:cNvSpPr txBox="1"/>
+          <p:nvPr/>
+        </p:nvSpPr>
+        <p:spPr>
+          <a:xfrm>
+            <a:off x="822960" y="1234440"/>
+            <a:ext cx="10607040" cy="621792"/>
+          </a:xfrm>
+          <a:prstGeom prst="rect">
+            <a:avLst/>
+          </a:prstGeom>
+          <a:noFill/>
+        </p:spPr>
         <p:txBody>
           <a:bodyPr wrap="square">
-            <a:normAutofit/>
+            <a:spAutoFit/>
           </a:bodyPr>
           <a:lstStyle/>
           <a:p>
             <a:pPr>
-              <a:defRPr sz="1600"/>
-            </a:pPr>
-            <a:r>
-              <a:t>Orchestrator host: bash 4+, ssh/scp, tar/gzip, Python 3.6+ (numpy + matplotlib only for the heatmap step).</a:t>
-            </a:r>
-          </a:p>
-          <a:p>
-            <a:pPr>
-              <a:defRPr sz="1600"/>
-            </a:pPr>
-            <a:r>
-              <a:t>Every server: iperf2 (binary named iperf, 2.0.13+ for --full-duplex); sysstat's mpstat recommended; key-based ssh from the orchestrator (BatchMode — a password prompt is a failure, not a prompt).</a:t>
-            </a:r>
-          </a:p>
-          <a:p>
-            <a:pPr>
-              <a:defRPr sz="1600"/>
-            </a:pPr>
-            <a:r>
-              <a:t>Keys first: for h in $(grep -v '^#' servers.txt); do ssh-copy-id "$h"; done</a:t>
-            </a:r>
-          </a:p>
-          <a:p>
-            <a:pPr>
-              <a:defRPr sz="1600"/>
-            </a:pPr>
-            <a:r>
-              <a:t>Preflight: doctor (local deps + install hints), check-iperf (fleet), check-servers (what's already running).</a:t>
-            </a:r>
-          </a:p>
-        </p:txBody>
-      </p:sp>
-    </p:spTree>
-  </p:cSld>
-  <p:clrMapOvr>
-    <a:masterClrMapping/>
-  </p:clrMapOvr>
-</p:sld>
-</file>
-
-<file path=ppt/slides/slide11.xml><?xml version="1.0" encoding="utf-8"?>
-<p:sld xmlns:a="http://schemas.openxmlformats.org/drawingml/2006/main" xmlns:p="http://schemas.openxmlformats.org/presentationml/2006/main" xmlns:r="http://schemas.openxmlformats.org/officeDocument/2006/relationships">
-  <p:cSld>
-    <p:spTree>
-      <p:nvGrpSpPr>
-        <p:cNvPr id="1" name=""/>
-        <p:cNvGrpSpPr/>
-        <p:nvPr/>
-      </p:nvGrpSpPr>
-      <p:grpSpPr/>
-      <p:sp>
-        <p:nvSpPr>
-          <p:cNvPr id="2" name="Title 1"/>
-          <p:cNvSpPr>
-            <a:spLocks noGrp="1"/>
-          </p:cNvSpPr>
-          <p:nvPr>
-            <p:ph type="title"/>
-          </p:nvPr>
-        </p:nvSpPr>
-        <p:spPr/>
-        <p:txBody>
-          <a:bodyPr/>
-          <a:lstStyle/>
-          <a:p>
-            <a:pPr>
-              <a:defRPr sz="2800" b="1">
-                <a:solidFill>
-                  <a:srgbClr val="1C2B3A"/>
-                </a:solidFill>
-              </a:defRPr>
-            </a:pPr>
-            <a:r>
-              <a:t>Running, collecting, interpreting, cleaning up</a:t>
-            </a:r>
-          </a:p>
-        </p:txBody>
-      </p:sp>
-      <p:sp>
-        <p:nvSpPr>
-          <p:cNvPr id="3" name="Content Placeholder 2"/>
-          <p:cNvSpPr>
-            <a:spLocks noGrp="1"/>
-          </p:cNvSpPr>
-          <p:nvPr>
-            <p:ph idx="1"/>
-          </p:nvPr>
-        </p:nvSpPr>
-        <p:spPr/>
-        <p:txBody>
-          <a:bodyPr wrap="square">
-            <a:normAutofit/>
-          </a:bodyPr>
-          <a:lstStyle/>
-          <a:p>
-            <a:pPr>
-              <a:defRPr sz="1600"/>
-            </a:pPr>
-            <a:r>
-              <a:t>Pipeline: start-servers → run-tests → collect-results → parse-csv / parse-cpu / make-pivot / make-heatmap → stop-servers → cleanup --yes</a:t>
-            </a:r>
-          </a:p>
-          <a:p>
-            <a:pPr>
-              <a:defRPr sz="1600"/>
-            </a:pPr>
-            <a:r>
-              <a:t>all runs the whole thing; every stage is a standalone subcommand, safe to re-run (--run-id addresses old runs; results/latest symlink).</a:t>
-            </a:r>
-          </a:p>
-          <a:p>
-            <a:pPr>
-              <a:defRPr sz="1600"/>
-            </a:pPr>
-            <a:r>
-              <a:t>Interpreting: start with iperf_heatmap.png and results-summary (P50/P95/min/mean/max + 5 slowest pairs).</a:t>
-            </a:r>
-          </a:p>
-          <a:p>
-            <a:pPr lvl="1">
               <a:defRPr sz="1400"/>
             </a:pPr>
             <a:r>
-              <a:t>Rows = sender, columns = receiver. All-red row → that host's outbound is sick; all-red column → sick inbound. Bar chart ranks hosts by mean outgoing Mbps, with peak CPU% on each bar.</a:t>
-            </a:r>
-          </a:p>
-          <a:p>
-            <a:pPr lvl="1">
-              <a:defRPr sz="1400"/>
-            </a:pPr>
-            <a:r>
-              <a:t>The classic misread: slow host + peak_total_pct ≈ 100% ⇒ you measured the CPU, not the fabric. Second classic: box-wide CPU 30% but softirq pinned at 100% on core 0 ⇒ RSS isn't spreading NIC IRQs — invisible without per-core data (mpstat -P ALL).</a:t>
-            </a:r>
-          </a:p>
-          <a:p>
-            <a:pPr>
-              <a:defRPr sz="1600"/>
-            </a:pPr>
-            <a:r>
-              <a:t>Cleanup: stop-servers kills daemons; cleanup --yes removes the remote dir — scoped to the run-id, so parallel runs on a shared FS never collide. Died halfway? all --resume; flaky host? all --keep-going.</a:t>
-            </a:r>
-          </a:p>
-        </p:txBody>
-      </p:sp>
-    </p:spTree>
-  </p:cSld>
-  <p:clrMapOvr>
-    <a:masterClrMapping/>
-  </p:clrMapOvr>
-</p:sld>
-</file>
-
-<file path=ppt/slides/slide12.xml><?xml version="1.0" encoding="utf-8"?>
-<p:sld xmlns:a="http://schemas.openxmlformats.org/drawingml/2006/main" xmlns:p="http://schemas.openxmlformats.org/presentationml/2006/main" xmlns:r="http://schemas.openxmlformats.org/officeDocument/2006/relationships">
-  <p:cSld>
-    <p:spTree>
-      <p:nvGrpSpPr>
-        <p:cNvPr id="1" name=""/>
-        <p:cNvGrpSpPr/>
-        <p:nvPr/>
-      </p:nvGrpSpPr>
-      <p:grpSpPr/>
-      <p:sp>
-        <p:nvSpPr>
-          <p:cNvPr id="2" name="Title 1"/>
-          <p:cNvSpPr>
-            <a:spLocks noGrp="1"/>
-          </p:cNvSpPr>
-          <p:nvPr>
-            <p:ph type="title"/>
-          </p:nvPr>
-        </p:nvSpPr>
-        <p:spPr/>
-        <p:txBody>
-          <a:bodyPr/>
-          <a:lstStyle/>
-          <a:p>
-            <a:pPr>
-              <a:defRPr sz="2800" b="1">
-                <a:solidFill>
-                  <a:srgbClr val="1C2B3A"/>
-                </a:solidFill>
-              </a:defRPr>
-            </a:pPr>
-            <a:r>
-              <a:t>Different ways to run</a:t>
-            </a:r>
-          </a:p>
-        </p:txBody>
-      </p:sp>
-      <p:sp>
-        <p:nvSpPr>
-          <p:cNvPr id="3" name="Content Placeholder 2"/>
-          <p:cNvSpPr>
-            <a:spLocks noGrp="1"/>
-          </p:cNvSpPr>
-          <p:nvPr>
-            <p:ph idx="1"/>
-          </p:nvPr>
-        </p:nvSpPr>
-        <p:spPr/>
-        <p:txBody>
-          <a:bodyPr wrap="square">
-            <a:normAutofit/>
-          </a:bodyPr>
-          <a:lstStyle/>
-          <a:p>
-            <a:pPr>
-              <a:defRPr sz="1600"/>
-            </a:pPr>
-            <a:r>
-              <a:t>One-liner: iperf-orchestrator --servers servers.txt all — everything else is refinement.</a:t>
-            </a:r>
-          </a:p>
-          <a:p>
-            <a:pPr>
-              <a:defRPr sz="1600"/>
-            </a:pPr>
-            <a:r>
-              <a:t>Every setting is both a flag and an env var (--duration 60 ≡ IPERF_DURATION=60); flags win.</a:t>
-            </a:r>
-          </a:p>
-          <a:p>
-            <a:pPr>
-              <a:defRPr sz="1600"/>
-            </a:pPr>
-            <a:r>
-              <a:t>Scale: --jobs 64 (ssh fan-out cap, setup/teardown only), --retries N (linear back-off), -P parallel streams, rolling's --total-time / --flows.</a:t>
-            </a:r>
-          </a:p>
-          <a:p>
-            <a:pPr>
-              <a:defRPr sz="1600"/>
-            </a:pPr>
-            <a:r>
-              <a:t>Trust: --dry-run prints every ssh/scp command; --verbose / --quiet; status probes hosts live.</a:t>
-            </a:r>
-          </a:p>
-          <a:p>
-            <a:pPr>
-              <a:defRPr sz="1600"/>
-            </a:pPr>
-            <a:r>
-              <a:t>Fit: --run-id for history; REMOTE_DIR safe on shared filesystems (files embed host + run-id); no hidden state anywhere.</a:t>
-            </a:r>
-          </a:p>
-        </p:txBody>
-      </p:sp>
-    </p:spTree>
-  </p:cSld>
-  <p:clrMapOvr>
-    <a:masterClrMapping/>
-  </p:clrMapOvr>
-</p:sld>
-</file>
-
-<file path=ppt/slides/slide13.xml><?xml version="1.0" encoding="utf-8"?>
-<p:sld xmlns:a="http://schemas.openxmlformats.org/drawingml/2006/main" xmlns:p="http://schemas.openxmlformats.org/presentationml/2006/main" xmlns:r="http://schemas.openxmlformats.org/officeDocument/2006/relationships">
-  <p:cSld>
-    <p:spTree>
-      <p:nvGrpSpPr>
-        <p:cNvPr id="1" name=""/>
-        <p:cNvGrpSpPr/>
-        <p:nvPr/>
-      </p:nvGrpSpPr>
-      <p:grpSpPr/>
-      <p:sp>
-        <p:nvSpPr>
-          <p:cNvPr id="2" name="Title 1"/>
-          <p:cNvSpPr>
-            <a:spLocks noGrp="1"/>
-          </p:cNvSpPr>
-          <p:nvPr>
-            <p:ph type="title"/>
-          </p:nvPr>
-        </p:nvSpPr>
-        <p:spPr/>
-        <p:txBody>
-          <a:bodyPr/>
-          <a:lstStyle/>
-          <a:p>
-            <a:pPr>
-              <a:defRPr sz="2800" b="1">
-                <a:solidFill>
-                  <a:srgbClr val="1C2B3A"/>
-                </a:solidFill>
-              </a:defRPr>
-            </a:pPr>
-            <a:r>
-              <a:t>Run modes — what they are, when to use them, why they exist</a:t>
+              <a:t>Every run answers "how fast?" — the mode decides *how much traffic shares the wire at once*. That one choice trades realism against isolation against wall-clock time.</a:t>
             </a:r>
           </a:p>
         </p:txBody>
       </p:sp>
       <p:graphicFrame>
         <p:nvGraphicFramePr>
-          <p:cNvPr id="3" name="Table 2"/>
+          <p:cNvPr id="4" name="Table 3"/>
           <p:cNvGraphicFramePr>
             <a:graphicFrameLocks noGrp="1"/>
           </p:cNvGraphicFramePr>
           <p:nvPr/>
         </p:nvGraphicFramePr>
         <p:xfrm>
-          <a:off x="640080" y="1234440"/>
+          <a:off x="640080" y="1929384"/>
           <a:ext cx="10972800" cy="1828800"/>
         </p:xfrm>
         <a:graphic>
@@ -4438,7 +5771,7 @@
                         <a:defRPr sz="1250" b="1"/>
                       </a:pPr>
                       <a:r>
-                        <a:t>Concurrency</a:t>
+                        <a:t>On the wire at once</a:t>
                       </a:r>
                     </a:p>
                   </a:txBody>
@@ -4453,7 +5786,7 @@
                         <a:defRPr sz="1250" b="1"/>
                       </a:pPr>
                       <a:r>
-                        <a:t>Wall-clock @ N=100, 10 s tests</a:t>
+                        <a:t>@ 100 hosts</a:t>
                       </a:r>
                     </a:p>
                   </a:txBody>
@@ -4468,7 +5801,7 @@
                         <a:defRPr sz="1250" b="1"/>
                       </a:pPr>
                       <a:r>
-                        <a:t>Use it when</a:t>
+                        <a:t>In one line</a:t>
                       </a:r>
                     </a:p>
                   </a:txBody>
@@ -4500,7 +5833,7 @@
                         <a:defRPr sz="1200" b="0"/>
                       </a:pPr>
                       <a:r>
-                        <a:t>every host fires all clients after one synchronized start</a:t>
+                        <a:t>everything</a:t>
                       </a:r>
                     </a:p>
                   </a:txBody>
@@ -4515,7 +5848,7 @@
                         <a:defRPr sz="1200" b="0"/>
                       </a:pPr>
                       <a:r>
-                        <a:t>~50 s</a:t>
+                        <a:t>~1 min</a:t>
                       </a:r>
                     </a:p>
                   </a:txBody>
@@ -4530,7 +5863,7 @@
                         <a:defRPr sz="1200" b="0"/>
                       </a:pPr>
                       <a:r>
-                        <a:t>Stress: load the whole fabric at once, see what breaks</a:t>
+                        <a:t>the stress test — load it all, see what breaks</a:t>
                       </a:r>
                     </a:p>
                   </a:txBody>
@@ -4562,7 +5895,7 @@
                         <a:defRPr sz="1200" b="0"/>
                       </a:pPr>
                       <a:r>
-                        <a:t>one host at a time runs all its clients</a:t>
+                        <a:t>one host's tests</a:t>
                       </a:r>
                     </a:p>
                   </a:txBody>
@@ -4592,7 +5925,7 @@
                         <a:defRPr sz="1200" b="0"/>
                       </a:pPr>
                       <a:r>
-                        <a:t>Clean per-host numbers without inter-host interference</a:t>
+                        <a:t>what is each *server* capable of?</a:t>
                       </a:r>
                     </a:p>
                   </a:txBody>
@@ -4624,7 +5957,7 @@
                         <a:defRPr sz="1200" b="0"/>
                       </a:pPr>
                       <a:r>
-                        <a:t>exactly one connection on the wire</a:t>
+                        <a:t>one connection</a:t>
                       </a:r>
                     </a:p>
                   </a:txBody>
@@ -4654,7 +5987,7 @@
                         <a:defRPr sz="1200" b="0"/>
                       </a:pPr>
                       <a:r>
-                        <a:t>Cleanest per-pair numbers — usually overkill</a:t>
+                        <a:t>the microscope — cleanest possible pair numbers</a:t>
                       </a:r>
                     </a:p>
                   </a:txBody>
@@ -4686,7 +6019,7 @@
                         <a:defRPr sz="1200" b="0"/>
                       </a:pPr>
                       <a:r>
-                        <a:t>each host keeps testing its least-tested peer, ≤ --flows at once, for --total-time</a:t>
+                        <a:t>a few per host, continuously</a:t>
                       </a:r>
                     </a:p>
                   </a:txBody>
@@ -4701,7 +6034,7 @@
                         <a:defRPr sz="1200" b="0"/>
                       </a:pPr>
                       <a:r>
-                        <a:t>bounded by --total-time</a:t>
+                        <a:t>you choose</a:t>
                       </a:r>
                     </a:p>
                   </a:txBody>
@@ -4716,7 +6049,7 @@
                         <a:defRPr sz="1200" b="0"/>
                       </a:pPr>
                       <a:r>
-                        <a:t>Very large N: per-host load constant regardless of fleet size</a:t>
+                        <a:t>fleets too big to mesh; long soaks</a:t>
                       </a:r>
                     </a:p>
                   </a:txBody>
@@ -4727,33 +6060,314 @@
           </a:graphicData>
         </a:graphic>
       </p:graphicFrame>
-      <p:sp>
-        <p:nvSpPr>
-          <p:cNvPr id="4" name="TextBox 3"/>
-          <p:cNvSpPr txBox="1"/>
-          <p:nvPr/>
-        </p:nvSpPr>
-        <p:spPr>
-          <a:xfrm>
-            <a:off x="822960" y="3246120"/>
-            <a:ext cx="10607040" cy="932688"/>
-          </a:xfrm>
-          <a:prstGeom prst="rect">
-            <a:avLst/>
-          </a:prstGeom>
-          <a:noFill/>
-        </p:spPr>
+    </p:spTree>
+  </p:cSld>
+  <p:clrMapOvr>
+    <a:masterClrMapping/>
+  </p:clrMapOvr>
+</p:sld>
+</file>
+
+<file path=ppt/slides/slide11.xml><?xml version="1.0" encoding="utf-8"?>
+<p:sld xmlns:a="http://schemas.openxmlformats.org/drawingml/2006/main" xmlns:p="http://schemas.openxmlformats.org/presentationml/2006/main" xmlns:r="http://schemas.openxmlformats.org/officeDocument/2006/relationships">
+  <p:cSld>
+    <p:spTree>
+      <p:nvGrpSpPr>
+        <p:cNvPr id="1" name=""/>
+        <p:cNvGrpSpPr/>
+        <p:nvPr/>
+      </p:nvGrpSpPr>
+      <p:grpSpPr/>
+      <p:sp>
+        <p:nvSpPr>
+          <p:cNvPr id="2" name="Title 1"/>
+          <p:cNvSpPr>
+            <a:spLocks noGrp="1"/>
+          </p:cNvSpPr>
+          <p:nvPr>
+            <p:ph type="title"/>
+          </p:nvPr>
+        </p:nvSpPr>
+        <p:spPr/>
+        <p:txBody>
+          <a:bodyPr/>
+          <a:lstStyle/>
+          <a:p>
+            <a:pPr>
+              <a:defRPr sz="2800" b="1">
+                <a:solidFill>
+                  <a:srgbClr val="1C2B3A"/>
+                </a:solidFill>
+              </a:defRPr>
+            </a:pPr>
+            <a:r>
+              <a:t>parallel — the stress test (default)</a:t>
+            </a:r>
+          </a:p>
+        </p:txBody>
+      </p:sp>
+      <p:sp>
+        <p:nvSpPr>
+          <p:cNvPr id="3" name="Content Placeholder 2"/>
+          <p:cNvSpPr>
+            <a:spLocks noGrp="1"/>
+          </p:cNvSpPr>
+          <p:nvPr>
+            <p:ph idx="1"/>
+          </p:nvPr>
+        </p:nvSpPr>
+        <p:spPr/>
         <p:txBody>
           <a:bodyPr wrap="square">
-            <a:spAutoFit/>
+            <a:normAutofit/>
           </a:bodyPr>
           <a:lstStyle/>
           <a:p>
             <a:pPr>
-              <a:defRPr sz="1400"/>
-            </a:pPr>
-            <a:r>
-              <a:t>• Why modes exist: one knob — how much traffic shares the wire at once — trades realism vs isolation vs wall-clock. parallel answers "what breaks under load?"; sequential modes answer "what is each host/pair capable of?"; rolling exists because at huge N even the full-mesh schedule itself becomes the problem.</a:t>
+              <a:defRPr sz="1600"/>
+            </a:pPr>
+            <a:r>
+              <a:t>What happens: after a synchronized start, every host fires all of its tests at once — the entire fabric is under full bidirectional load within a second.</a:t>
+            </a:r>
+          </a:p>
+          <a:p>
+            <a:pPr>
+              <a:defRPr sz="1600"/>
+            </a:pPr>
+            <a:r>
+              <a:t>When to use it: accepting a new fabric, validating a change window, or any time the question is "what breaks under full load?"</a:t>
+            </a:r>
+          </a:p>
+          <a:p>
+            <a:pPr>
+              <a:defRPr sz="1600"/>
+            </a:pPr>
+            <a:r>
+              <a:t>How: iperf-orchestrator --servers servers.txt all — parallel is the default.</a:t>
+            </a:r>
+          </a:p>
+          <a:p>
+            <a:pPr>
+              <a:defRPr sz="1600"/>
+            </a:pPr>
+            <a:r>
+              <a:t>Time: about one test-duration regardless of fleet size (~50 s at N=100).</a:t>
+            </a:r>
+          </a:p>
+          <a:p>
+            <a:pPr>
+              <a:defRPr sz="1600"/>
+            </a:pPr>
+            <a:r>
+              <a:t>Reading the results: every pair shares the fabric, so numbers *below* line rate everywhere are normal — what matters is the outliers: dark rows/columns on the heatmap, and hosts whose CPU pegged. This mode finds congestion, oversubscription and weak links; it does not give you any single pair's clean maximum.</a:t>
+            </a:r>
+          </a:p>
+        </p:txBody>
+      </p:sp>
+    </p:spTree>
+  </p:cSld>
+  <p:clrMapOvr>
+    <a:masterClrMapping/>
+  </p:clrMapOvr>
+</p:sld>
+</file>
+
+<file path=ppt/slides/slide12.xml><?xml version="1.0" encoding="utf-8"?>
+<p:sld xmlns:a="http://schemas.openxmlformats.org/drawingml/2006/main" xmlns:p="http://schemas.openxmlformats.org/presentationml/2006/main" xmlns:r="http://schemas.openxmlformats.org/officeDocument/2006/relationships">
+  <p:cSld>
+    <p:spTree>
+      <p:nvGrpSpPr>
+        <p:cNvPr id="1" name=""/>
+        <p:cNvGrpSpPr/>
+        <p:nvPr/>
+      </p:nvGrpSpPr>
+      <p:grpSpPr/>
+      <p:sp>
+        <p:nvSpPr>
+          <p:cNvPr id="2" name="Title 1"/>
+          <p:cNvSpPr>
+            <a:spLocks noGrp="1"/>
+          </p:cNvSpPr>
+          <p:nvPr>
+            <p:ph type="title"/>
+          </p:nvPr>
+        </p:nvSpPr>
+        <p:spPr/>
+        <p:txBody>
+          <a:bodyPr/>
+          <a:lstStyle/>
+          <a:p>
+            <a:pPr>
+              <a:defRPr sz="2800" b="1">
+                <a:solidFill>
+                  <a:srgbClr val="1C2B3A"/>
+                </a:solidFill>
+              </a:defRPr>
+            </a:pPr>
+            <a:r>
+              <a:t>sequential-host — one server at a time</a:t>
+            </a:r>
+          </a:p>
+        </p:txBody>
+      </p:sp>
+      <p:sp>
+        <p:nvSpPr>
+          <p:cNvPr id="3" name="Content Placeholder 2"/>
+          <p:cNvSpPr>
+            <a:spLocks noGrp="1"/>
+          </p:cNvSpPr>
+          <p:nvPr>
+            <p:ph idx="1"/>
+          </p:nvPr>
+        </p:nvSpPr>
+        <p:spPr/>
+        <p:txBody>
+          <a:bodyPr wrap="square">
+            <a:normAutofit/>
+          </a:bodyPr>
+          <a:lstStyle/>
+          <a:p>
+            <a:pPr>
+              <a:defRPr sz="1600"/>
+            </a:pPr>
+            <a:r>
+              <a:t>What happens: each host in turn runs all of its tests in parallel while every other host stays quiet.</a:t>
+            </a:r>
+          </a:p>
+          <a:p>
+            <a:pPr>
+              <a:defRPr sz="1600"/>
+            </a:pPr>
+            <a:r>
+              <a:t>When to use it: "what is this *server* capable of?" — clean per-host numbers with no neighbors interfering; the natural follow-up for a host that looked bad under parallel.</a:t>
+            </a:r>
+          </a:p>
+          <a:p>
+            <a:pPr>
+              <a:defRPr sz="1600"/>
+            </a:pPr>
+            <a:r>
+              <a:t>How: iperf-orchestrator --servers servers.txt all sequential-host</a:t>
+            </a:r>
+          </a:p>
+          <a:p>
+            <a:pPr>
+              <a:defRPr sz="1600"/>
+            </a:pPr>
+            <a:r>
+              <a:t>Time: ~N × duration (~17 min at N=100).</a:t>
+            </a:r>
+          </a:p>
+          <a:p>
+            <a:pPr>
+              <a:defRPr sz="1600"/>
+            </a:pPr>
+            <a:r>
+              <a:t>Reading the results: with the fabric to itself, each host should approach line rate. One that is still slow has a *local* problem — NIC, driver, CPU — not congestion. Compare against the parallel run: fine alone but bad in parallel = contention; bad in both = the host itself.</a:t>
+            </a:r>
+          </a:p>
+        </p:txBody>
+      </p:sp>
+    </p:spTree>
+  </p:cSld>
+  <p:clrMapOvr>
+    <a:masterClrMapping/>
+  </p:clrMapOvr>
+</p:sld>
+</file>
+
+<file path=ppt/slides/slide13.xml><?xml version="1.0" encoding="utf-8"?>
+<p:sld xmlns:a="http://schemas.openxmlformats.org/drawingml/2006/main" xmlns:p="http://schemas.openxmlformats.org/presentationml/2006/main" xmlns:r="http://schemas.openxmlformats.org/officeDocument/2006/relationships">
+  <p:cSld>
+    <p:spTree>
+      <p:nvGrpSpPr>
+        <p:cNvPr id="1" name=""/>
+        <p:cNvGrpSpPr/>
+        <p:nvPr/>
+      </p:nvGrpSpPr>
+      <p:grpSpPr/>
+      <p:sp>
+        <p:nvSpPr>
+          <p:cNvPr id="2" name="Title 1"/>
+          <p:cNvSpPr>
+            <a:spLocks noGrp="1"/>
+          </p:cNvSpPr>
+          <p:nvPr>
+            <p:ph type="title"/>
+          </p:nvPr>
+        </p:nvSpPr>
+        <p:spPr/>
+        <p:txBody>
+          <a:bodyPr/>
+          <a:lstStyle/>
+          <a:p>
+            <a:pPr>
+              <a:defRPr sz="2800" b="1">
+                <a:solidFill>
+                  <a:srgbClr val="1C2B3A"/>
+                </a:solidFill>
+              </a:defRPr>
+            </a:pPr>
+            <a:r>
+              <a:t>sequential-pair — the microscope</a:t>
+            </a:r>
+          </a:p>
+        </p:txBody>
+      </p:sp>
+      <p:sp>
+        <p:nvSpPr>
+          <p:cNvPr id="3" name="Content Placeholder 2"/>
+          <p:cNvSpPr>
+            <a:spLocks noGrp="1"/>
+          </p:cNvSpPr>
+          <p:nvPr>
+            <p:ph idx="1"/>
+          </p:nvPr>
+        </p:nvSpPr>
+        <p:spPr/>
+        <p:txBody>
+          <a:bodyPr wrap="square">
+            <a:normAutofit/>
+          </a:bodyPr>
+          <a:lstStyle/>
+          <a:p>
+            <a:pPr>
+              <a:defRPr sz="1600"/>
+            </a:pPr>
+            <a:r>
+              <a:t>What happens: exactly one connection on the wire at any moment, pair after pair.</a:t>
+            </a:r>
+          </a:p>
+          <a:p>
+            <a:pPr>
+              <a:defRPr sz="1600"/>
+            </a:pPr>
+            <a:r>
+              <a:t>When to use it: confirming a single suspect pair with the cleanest number possible — almost never for a whole fleet.</a:t>
+            </a:r>
+          </a:p>
+          <a:p>
+            <a:pPr>
+              <a:defRPr sz="1600"/>
+            </a:pPr>
+            <a:r>
+              <a:t>How: iperf-orchestrator --servers suspects.txt all sequential-pair — put just the suspect hosts in the list.</a:t>
+            </a:r>
+          </a:p>
+          <a:p>
+            <a:pPr>
+              <a:defRPr sz="1600"/>
+            </a:pPr>
+            <a:r>
+              <a:t>Time: N(N−1)/2 × duration. At N=100 that's ~14 hours; at N=4 it's a minute. Priced accordingly.</a:t>
+            </a:r>
+          </a:p>
+          <a:p>
+            <a:pPr>
+              <a:defRPr sz="1600"/>
+            </a:pPr>
+            <a:r>
+              <a:t>Reading the results: as clean as pair numbers get — nothing else was running. If a pair is still slow here, the *path itself* is the problem: hand it to netmesh paths to find the hop.</a:t>
             </a:r>
           </a:p>
         </p:txBody>
@@ -4791,27 +6405,75 @@
           <a:bodyPr/>
           <a:lstStyle/>
           <a:p>
-            <a:r>
-              <a:t>Part 2 — matrix_orchestrator (mx)</a:t>
-            </a:r>
-          </a:p>
-        </p:txBody>
-      </p:sp>
-      <p:sp>
-        <p:nvSpPr>
-          <p:cNvPr id="3" name="Text Placeholder 2"/>
-          <p:cNvSpPr>
-            <a:spLocks noGrp="1"/>
-          </p:cNvSpPr>
-          <p:nvPr>
-            <p:ph type="body" idx="1"/>
-          </p:nvPr>
-        </p:nvSpPr>
-        <p:spPr/>
-        <p:txBody>
-          <a:bodyPr/>
-          <a:lstStyle/>
-          <a:p/>
+            <a:pPr>
+              <a:defRPr sz="2800" b="1">
+                <a:solidFill>
+                  <a:srgbClr val="1C2B3A"/>
+                </a:solidFill>
+              </a:defRPr>
+            </a:pPr>
+            <a:r>
+              <a:t>rolling — fleets too big to mesh</a:t>
+            </a:r>
+          </a:p>
+        </p:txBody>
+      </p:sp>
+      <p:sp>
+        <p:nvSpPr>
+          <p:cNvPr id="3" name="Content Placeholder 2"/>
+          <p:cNvSpPr>
+            <a:spLocks noGrp="1"/>
+          </p:cNvSpPr>
+          <p:nvPr>
+            <p:ph idx="1"/>
+          </p:nvPr>
+        </p:nvSpPr>
+        <p:spPr/>
+        <p:txBody>
+          <a:bodyPr wrap="square">
+            <a:normAutofit/>
+          </a:bodyPr>
+          <a:lstStyle/>
+          <a:p>
+            <a:pPr>
+              <a:defRPr sz="1600"/>
+            </a:pPr>
+            <a:r>
+              <a:t>What happens: no grand schedule. Each host just keeps a couple of short tests running — always against its *least-tested* peer — for as long as you budget.</a:t>
+            </a:r>
+          </a:p>
+          <a:p>
+            <a:pPr>
+              <a:defRPr sz="1600"/>
+            </a:pPr>
+            <a:r>
+              <a:t>When to use it: very large fleets, where even the parallel mesh's setup and load become the problem; long soak tests.</a:t>
+            </a:r>
+          </a:p>
+          <a:p>
+            <a:pPr>
+              <a:defRPr sz="1600"/>
+            </a:pPr>
+            <a:r>
+              <a:t>How: iperf-orchestrator --servers servers.txt --total-time 1800 --flows 2 all rolling</a:t>
+            </a:r>
+          </a:p>
+          <a:p>
+            <a:pPr>
+              <a:defRPr sz="1600"/>
+            </a:pPr>
+            <a:r>
+              <a:t>Time: exactly the budget you give it. Per-host load stays constant no matter how big the fleet is.</a:t>
+            </a:r>
+          </a:p>
+          <a:p>
+            <a:pPr>
+              <a:defRPr sz="1600"/>
+            </a:pPr>
+            <a:r>
+              <a:t>Reading the results: a survey, not a snapshot — coverage evens out over time because every host picks its least-tested peer. Read the percentiles and the slowest pairs; give it enough time that every pair has been visited a few times.</a:t>
+            </a:r>
+          </a:p>
         </p:txBody>
       </p:sp>
     </p:spTree>
@@ -4855,73 +6517,269 @@
               </a:defRPr>
             </a:pPr>
             <a:r>
-              <a:t>Purpose — beyond iperf_orchestrator</a:t>
-            </a:r>
-          </a:p>
-        </p:txBody>
-      </p:sp>
-      <p:sp>
-        <p:nvSpPr>
-          <p:cNvPr id="3" name="Content Placeholder 2"/>
-          <p:cNvSpPr>
-            <a:spLocks noGrp="1"/>
-          </p:cNvSpPr>
-          <p:nvPr>
-            <p:ph idx="1"/>
-          </p:nvPr>
-        </p:nvSpPr>
-        <p:spPr/>
+              <a:t>Tutorial — your first run</a:t>
+            </a:r>
+          </a:p>
+        </p:txBody>
+      </p:sp>
+      <p:sp>
+        <p:nvSpPr>
+          <p:cNvPr id="3" name="TextBox 2"/>
+          <p:cNvSpPr txBox="1"/>
+          <p:nvPr/>
+        </p:nvSpPr>
+        <p:spPr>
+          <a:xfrm>
+            <a:off x="640080" y="1234440"/>
+            <a:ext cx="10972800" cy="3739896"/>
+          </a:xfrm>
+          <a:prstGeom prst="rect">
+            <a:avLst/>
+          </a:prstGeom>
+          <a:noFill/>
+        </p:spPr>
+        <p:txBody>
+          <a:bodyPr wrap="none">
+            <a:spAutoFit/>
+          </a:bodyPr>
+          <a:lstStyle/>
+          <a:p>
+            <a:pPr>
+              <a:defRPr sz="1300">
+                <a:solidFill>
+                  <a:srgbClr val="24354A"/>
+                </a:solidFill>
+                <a:latin typeface="Consolas"/>
+              </a:defRPr>
+            </a:pPr>
+            <a:r>
+              <a:t># 0. install on the machine you'll drive from</a:t>
+            </a:r>
+          </a:p>
+          <a:p>
+            <a:pPr>
+              <a:defRPr sz="1300">
+                <a:solidFill>
+                  <a:srgbClr val="24354A"/>
+                </a:solidFill>
+                <a:latin typeface="Consolas"/>
+              </a:defRPr>
+            </a:pPr>
+            <a:r>
+              <a:t>#    (servers need only iperf2 + your ssh key)</a:t>
+            </a:r>
+          </a:p>
+          <a:p>
+            <a:pPr>
+              <a:defRPr sz="1300">
+                <a:solidFill>
+                  <a:srgbClr val="24354A"/>
+                </a:solidFill>
+                <a:latin typeface="Consolas"/>
+              </a:defRPr>
+            </a:pPr>
+            <a:r>
+              <a:t>pip install iperf-orchestrator</a:t>
+            </a:r>
+          </a:p>
+          <a:p>
+            <a:pPr>
+              <a:defRPr sz="1300">
+                <a:solidFill>
+                  <a:srgbClr val="24354A"/>
+                </a:solidFill>
+                <a:latin typeface="Consolas"/>
+              </a:defRPr>
+            </a:pPr>
+            <a:r>
+              <a:t> </a:t>
+            </a:r>
+          </a:p>
+          <a:p>
+            <a:pPr>
+              <a:defRPr sz="1300">
+                <a:solidFill>
+                  <a:srgbClr val="24354A"/>
+                </a:solidFill>
+                <a:latin typeface="Consolas"/>
+              </a:defRPr>
+            </a:pPr>
+            <a:r>
+              <a:t># 1. list your servers, one per line</a:t>
+            </a:r>
+          </a:p>
+          <a:p>
+            <a:pPr>
+              <a:defRPr sz="1300">
+                <a:solidFill>
+                  <a:srgbClr val="24354A"/>
+                </a:solidFill>
+                <a:latin typeface="Consolas"/>
+              </a:defRPr>
+            </a:pPr>
+            <a:r>
+              <a:t>printf '%s\n' 10.0.0.10 10.0.0.11 10.0.0.12 10.0.0.13 &gt; servers.txt</a:t>
+            </a:r>
+          </a:p>
+          <a:p>
+            <a:pPr>
+              <a:defRPr sz="1300">
+                <a:solidFill>
+                  <a:srgbClr val="24354A"/>
+                </a:solidFill>
+                <a:latin typeface="Consolas"/>
+              </a:defRPr>
+            </a:pPr>
+            <a:r>
+              <a:t> </a:t>
+            </a:r>
+          </a:p>
+          <a:p>
+            <a:pPr>
+              <a:defRPr sz="1300">
+                <a:solidFill>
+                  <a:srgbClr val="24354A"/>
+                </a:solidFill>
+                <a:latin typeface="Consolas"/>
+              </a:defRPr>
+            </a:pPr>
+            <a:r>
+              <a:t># 2. make key-based ssh work everywhere</a:t>
+            </a:r>
+          </a:p>
+          <a:p>
+            <a:pPr>
+              <a:defRPr sz="1300">
+                <a:solidFill>
+                  <a:srgbClr val="24354A"/>
+                </a:solidFill>
+                <a:latin typeface="Consolas"/>
+              </a:defRPr>
+            </a:pPr>
+            <a:r>
+              <a:t>for h in $(grep -v '^#' servers.txt); do ssh-copy-id "$h"; done</a:t>
+            </a:r>
+          </a:p>
+          <a:p>
+            <a:pPr>
+              <a:defRPr sz="1300">
+                <a:solidFill>
+                  <a:srgbClr val="24354A"/>
+                </a:solidFill>
+                <a:latin typeface="Consolas"/>
+              </a:defRPr>
+            </a:pPr>
+            <a:r>
+              <a:t> </a:t>
+            </a:r>
+          </a:p>
+          <a:p>
+            <a:pPr>
+              <a:defRPr sz="1300">
+                <a:solidFill>
+                  <a:srgbClr val="24354A"/>
+                </a:solidFill>
+                <a:latin typeface="Consolas"/>
+              </a:defRPr>
+            </a:pPr>
+            <a:r>
+              <a:t># 3. preflight: local deps, then iperf2 + mpstat on every host</a:t>
+            </a:r>
+          </a:p>
+          <a:p>
+            <a:pPr>
+              <a:defRPr sz="1300">
+                <a:solidFill>
+                  <a:srgbClr val="24354A"/>
+                </a:solidFill>
+                <a:latin typeface="Consolas"/>
+              </a:defRPr>
+            </a:pPr>
+            <a:r>
+              <a:t>iperf-orchestrator doctor</a:t>
+            </a:r>
+          </a:p>
+          <a:p>
+            <a:pPr>
+              <a:defRPr sz="1300">
+                <a:solidFill>
+                  <a:srgbClr val="24354A"/>
+                </a:solidFill>
+                <a:latin typeface="Consolas"/>
+              </a:defRPr>
+            </a:pPr>
+            <a:r>
+              <a:t>iperf-orchestrator --servers servers.txt check-iperf</a:t>
+            </a:r>
+          </a:p>
+          <a:p>
+            <a:pPr>
+              <a:defRPr sz="1300">
+                <a:solidFill>
+                  <a:srgbClr val="24354A"/>
+                </a:solidFill>
+                <a:latin typeface="Consolas"/>
+              </a:defRPr>
+            </a:pPr>
+            <a:r>
+              <a:t> </a:t>
+            </a:r>
+          </a:p>
+          <a:p>
+            <a:pPr>
+              <a:defRPr sz="1300">
+                <a:solidFill>
+                  <a:srgbClr val="24354A"/>
+                </a:solidFill>
+                <a:latin typeface="Consolas"/>
+              </a:defRPr>
+            </a:pPr>
+            <a:r>
+              <a:t># 4. the whole pipeline, default (parallel) mode</a:t>
+            </a:r>
+          </a:p>
+          <a:p>
+            <a:pPr>
+              <a:defRPr sz="1300">
+                <a:solidFill>
+                  <a:srgbClr val="24354A"/>
+                </a:solidFill>
+                <a:latin typeface="Consolas"/>
+              </a:defRPr>
+            </a:pPr>
+            <a:r>
+              <a:t>iperf-orchestrator --servers servers.txt all</a:t>
+            </a:r>
+          </a:p>
+        </p:txBody>
+      </p:sp>
+      <p:sp>
+        <p:nvSpPr>
+          <p:cNvPr id="4" name="TextBox 3"/>
+          <p:cNvSpPr txBox="1"/>
+          <p:nvPr/>
+        </p:nvSpPr>
+        <p:spPr>
+          <a:xfrm>
+            <a:off x="822960" y="5111496"/>
+            <a:ext cx="10607040" cy="621792"/>
+          </a:xfrm>
+          <a:prstGeom prst="rect">
+            <a:avLst/>
+          </a:prstGeom>
+          <a:noFill/>
+        </p:spPr>
         <p:txBody>
           <a:bodyPr wrap="square">
-            <a:normAutofit/>
+            <a:spAutoFit/>
           </a:bodyPr>
           <a:lstStyle/>
           <a:p>
             <a:pPr>
-              <a:defRPr sz="1600"/>
-            </a:pPr>
-            <a:r>
-              <a:t>iperf_orchestrator gives each pair's max TCP bandwidth. Real traffic isn't bulk bytes — it's RPCs, storage reads, control planes: small requests, sized answers, measured in packets.</a:t>
-            </a:r>
-          </a:p>
-          <a:p>
-            <a:pPr>
-              <a:defRPr sz="1600"/>
-            </a:pPr>
-            <a:r>
-              <a:t>mx runs that shape: every host sends *x*-byte requests at a target rate to every peer; every request gets a *y*-byte reply. That's the whole model.</a:t>
-            </a:r>
-          </a:p>
-          <a:p>
-            <a:pPr>
-              <a:defRPr sz="1600"/>
-            </a:pPr>
-            <a:r>
-              <a:t>Headline: packets per second the fleet can exchange when every packet must be answered — where fabrics and NICs actually fall over.</a:t>
-            </a:r>
-          </a:p>
-          <a:p>
-            <a:pPr>
-              <a:defRPr sz="1600"/>
-            </a:pPr>
-            <a:r>
-              <a:t>RTT falls out free: the reply carries the request's timestamp back → true round trip, no clock sync.</a:t>
-            </a:r>
-          </a:p>
-          <a:p>
-            <a:pPr>
-              <a:defRPr sz="1600"/>
-            </a:pPr>
-            <a:r>
-              <a:t>Asymmetry by design: --tx-size 128 --rx-size 8192 = RPC — equal pps both ways, 64× the bandwidth on the reply path. That asymmetry usually breaks first; the report keeps directions separate.</a:t>
-            </a:r>
-          </a:p>
-          <a:p>
-            <a:pPr>
-              <a:defRPr sz="1600"/>
-            </a:pPr>
-            <a:r>
-              <a:t>Why UDP only: "every x-byte request gets a y-byte reply" is a statement about packets; TCP would coalesce and re-segment → the pps number would be fiction. TCP goodput → iperf_orchestrator.</a:t>
+              <a:defRPr sz="1400"/>
+            </a:pPr>
+            <a:r>
+              <a:t>• You'll watch the five stages run; per-host warnings are printed but don't stop the run. A few minutes later the results directory is announced.</a:t>
             </a:r>
           </a:p>
         </p:txBody>
@@ -4967,73 +6825,214 @@
               </a:defRPr>
             </a:pPr>
             <a:r>
-              <a:t>What it does / doesn't do</a:t>
-            </a:r>
-          </a:p>
-        </p:txBody>
-      </p:sp>
-      <p:sp>
-        <p:nvSpPr>
-          <p:cNvPr id="3" name="Content Placeholder 2"/>
-          <p:cNvSpPr>
-            <a:spLocks noGrp="1"/>
-          </p:cNvSpPr>
-          <p:nvPr>
-            <p:ph idx="1"/>
-          </p:nvPr>
-        </p:nvSpPr>
-        <p:spPr/>
+              <a:t>Tutorial — reading it, and running it again</a:t>
+            </a:r>
+          </a:p>
+        </p:txBody>
+      </p:sp>
+      <p:sp>
+        <p:nvSpPr>
+          <p:cNvPr id="3" name="TextBox 2"/>
+          <p:cNvSpPr txBox="1"/>
+          <p:nvPr/>
+        </p:nvSpPr>
+        <p:spPr>
+          <a:xfrm>
+            <a:off x="640080" y="1234440"/>
+            <a:ext cx="10972800" cy="1764792"/>
+          </a:xfrm>
+          <a:prstGeom prst="rect">
+            <a:avLst/>
+          </a:prstGeom>
+          <a:noFill/>
+        </p:spPr>
+        <p:txBody>
+          <a:bodyPr wrap="none">
+            <a:spAutoFit/>
+          </a:bodyPr>
+          <a:lstStyle/>
+          <a:p>
+            <a:pPr>
+              <a:defRPr sz="1300">
+                <a:solidFill>
+                  <a:srgbClr val="24354A"/>
+                </a:solidFill>
+                <a:latin typeface="Consolas"/>
+              </a:defRPr>
+            </a:pPr>
+            <a:r>
+              <a:t>ls results/latest/                # iperf_results.csv  cpu_summary.csv</a:t>
+            </a:r>
+          </a:p>
+          <a:p>
+            <a:pPr>
+              <a:defRPr sz="1300">
+                <a:solidFill>
+                  <a:srgbClr val="24354A"/>
+                </a:solidFill>
+                <a:latin typeface="Consolas"/>
+              </a:defRPr>
+            </a:pPr>
+            <a:r>
+              <a:t>                                  # iperf_pivot.txt    iperf_heatmap.png</a:t>
+            </a:r>
+          </a:p>
+          <a:p>
+            <a:pPr>
+              <a:defRPr sz="1300">
+                <a:solidFill>
+                  <a:srgbClr val="24354A"/>
+                </a:solidFill>
+                <a:latin typeface="Consolas"/>
+              </a:defRPr>
+            </a:pPr>
+            <a:r>
+              <a:t>iperf-orchestrator results-summary          # P50/P95 + 5 slowest pairs</a:t>
+            </a:r>
+          </a:p>
+          <a:p>
+            <a:pPr>
+              <a:defRPr sz="1300">
+                <a:solidFill>
+                  <a:srgbClr val="24354A"/>
+                </a:solidFill>
+                <a:latin typeface="Consolas"/>
+              </a:defRPr>
+            </a:pPr>
+            <a:r>
+              <a:t> </a:t>
+            </a:r>
+          </a:p>
+          <a:p>
+            <a:pPr>
+              <a:defRPr sz="1300">
+                <a:solidFill>
+                  <a:srgbClr val="24354A"/>
+                </a:solidFill>
+                <a:latin typeface="Consolas"/>
+              </a:defRPr>
+            </a:pPr>
+            <a:r>
+              <a:t>iperf-orchestrator --duration 30 -P 4 all   # longer tests, 4 streams each</a:t>
+            </a:r>
+          </a:p>
+          <a:p>
+            <a:pPr>
+              <a:defRPr sz="1300">
+                <a:solidFill>
+                  <a:srgbClr val="24354A"/>
+                </a:solidFill>
+                <a:latin typeface="Consolas"/>
+              </a:defRPr>
+            </a:pPr>
+            <a:r>
+              <a:t>iperf-orchestrator --run-id &lt;id&gt; make-heatmap        # re-render an old run</a:t>
+            </a:r>
+          </a:p>
+          <a:p>
+            <a:pPr>
+              <a:defRPr sz="1300">
+                <a:solidFill>
+                  <a:srgbClr val="24354A"/>
+                </a:solidFill>
+                <a:latin typeface="Consolas"/>
+              </a:defRPr>
+            </a:pPr>
+            <a:r>
+              <a:t>iperf-orchestrator --servers servers.txt cleanup --yes   # tidy the servers</a:t>
+            </a:r>
+          </a:p>
+        </p:txBody>
+      </p:sp>
+      <p:sp>
+        <p:nvSpPr>
+          <p:cNvPr id="4" name="TextBox 3"/>
+          <p:cNvSpPr txBox="1"/>
+          <p:nvPr/>
+        </p:nvSpPr>
+        <p:spPr>
+          <a:xfrm>
+            <a:off x="822960" y="3136392"/>
+            <a:ext cx="10607040" cy="621792"/>
+          </a:xfrm>
+          <a:prstGeom prst="rect">
+            <a:avLst/>
+          </a:prstGeom>
+          <a:noFill/>
+        </p:spPr>
         <p:txBody>
           <a:bodyPr wrap="square">
-            <a:normAutofit/>
+            <a:spAutoFit/>
           </a:bodyPr>
           <a:lstStyle/>
           <a:p>
             <a:pPr>
-              <a:defRPr sz="1600"/>
-            </a:pPr>
-            <a:r>
-              <a:t>Does: paced request/response matrix (rates, sizes, port all in one editable CSV); payload *and* wire rate (+66 B framing/packet — what the NIC actually carries); loss split forward/return; DELIVERED as the honest headline; RTT avg/p50/p99/max per flow; per-host CPU incl. the agent's own share; grids; check/hints/doctor preflight; fd soft-limits raised automatically.</a:t>
-            </a:r>
-          </a:p>
-          <a:p>
-            <a:pPr>
-              <a:defRPr sz="1600"/>
-            </a:pPr>
-            <a:r>
-              <a:t>Doesn't / limits:</a:t>
-            </a:r>
-          </a:p>
-          <a:p>
-            <a:pPr lvl="1">
               <a:defRPr sz="1400"/>
             </a:pPr>
             <a:r>
-              <a:t>No TCP; no one-way delay (needs clock sync it refuses to pretend it has).</a:t>
-            </a:r>
-          </a:p>
-          <a:p>
-            <a:pPr lvl="1">
+              <a:t>• Open the heatmap first: rows = sending, columns = receiving. A red row is a host with bad outbound; a red column, bad inbound.</a:t>
+            </a:r>
+          </a:p>
+        </p:txBody>
+      </p:sp>
+      <p:sp>
+        <p:nvSpPr>
+          <p:cNvPr id="5" name="TextBox 4"/>
+          <p:cNvSpPr txBox="1"/>
+          <p:nvPr/>
+        </p:nvSpPr>
+        <p:spPr>
+          <a:xfrm>
+            <a:off x="822960" y="3831336"/>
+            <a:ext cx="10607040" cy="310896"/>
+          </a:xfrm>
+          <a:prstGeom prst="rect">
+            <a:avLst/>
+          </a:prstGeom>
+          <a:noFill/>
+        </p:spPr>
+        <p:txBody>
+          <a:bodyPr wrap="square">
+            <a:spAutoFit/>
+          </a:bodyPr>
+          <a:lstStyle/>
+          <a:p>
+            <a:pPr>
               <a:defRPr sz="1400"/>
             </a:pPr>
             <a:r>
-              <a:t>Not a kernel-bypass blaster: ~200k pps per worker (one core), 1–4 Mpps per typical host; beyond a few Mpps the kernel UDP path is the wall as much as Python — wider fleet or AF_XDP/DPDK.</a:t>
-            </a:r>
-          </a:p>
-          <a:p>
-            <a:pPr lvl="1">
+              <a:t>• Before blaming the network, open cpu_summary.csv — a pegged host makes its own links look slow.</a:t>
+            </a:r>
+          </a:p>
+        </p:txBody>
+      </p:sp>
+      <p:sp>
+        <p:nvSpPr>
+          <p:cNvPr id="6" name="TextBox 5"/>
+          <p:cNvSpPr txBox="1"/>
+          <p:nvPr/>
+        </p:nvSpPr>
+        <p:spPr>
+          <a:xfrm>
+            <a:off x="822960" y="4215384"/>
+            <a:ext cx="10607040" cy="310896"/>
+          </a:xfrm>
+          <a:prstGeom prst="rect">
+            <a:avLst/>
+          </a:prstGeom>
+          <a:noFill/>
+        </p:spPr>
+        <p:txBody>
+          <a:bodyPr wrap="square">
+            <a:spAutoFit/>
+          </a:bodyPr>
+          <a:lstStyle/>
+          <a:p>
+            <a:pPr>
               <a:defRPr sz="1400"/>
             </a:pPr>
             <a:r>
-              <a:t>Payload 32–65507 bytes; key-based ssh assumed (mx doctor checks).</a:t>
-            </a:r>
-          </a:p>
-          <a:p>
-            <a:pPr lvl="1">
-              <a:defRPr sz="1400"/>
-            </a:pPr>
-            <a:r>
-              <a:t>Won't hide its own limits: when a worker saturates, the summary says you're measuring the tool and names the fix.</a:t>
+              <a:t>• Every run is a timestamped folder: keep them, and diff results across change windows.</a:t>
             </a:r>
           </a:p>
         </p:txBody>
@@ -5071,237 +7070,27 @@
           <a:bodyPr/>
           <a:lstStyle/>
           <a:p>
-            <a:pPr>
-              <a:defRPr sz="2800" b="1">
-                <a:solidFill>
-                  <a:srgbClr val="1C2B3A"/>
-                </a:solidFill>
-              </a:defRPr>
-            </a:pPr>
-            <a:r>
-              <a:t>How to run it — different from iperf_orchestrator</a:t>
-            </a:r>
-          </a:p>
-        </p:txBody>
-      </p:sp>
-      <p:sp>
-        <p:nvSpPr>
-          <p:cNvPr id="3" name="TextBox 2"/>
-          <p:cNvSpPr txBox="1"/>
-          <p:nvPr/>
-        </p:nvSpPr>
-        <p:spPr>
-          <a:xfrm>
-            <a:off x="640080" y="1234440"/>
-            <a:ext cx="10972800" cy="1984248"/>
-          </a:xfrm>
-          <a:prstGeom prst="rect">
-            <a:avLst/>
-          </a:prstGeom>
-          <a:noFill/>
-        </p:spPr>
-        <p:txBody>
-          <a:bodyPr wrap="none">
-            <a:spAutoFit/>
-          </a:bodyPr>
-          <a:lstStyle/>
-          <a:p>
-            <a:pPr>
-              <a:defRPr sz="1300">
-                <a:solidFill>
-                  <a:srgbClr val="24354A"/>
-                </a:solidFill>
-                <a:latin typeface="Consolas"/>
-              </a:defRPr>
-            </a:pPr>
-            <a:r>
-              <a:t>printf '%s\n' 10.0.0.10 10.0.0.11 10.0.0.12 &gt; servers.txt</a:t>
-            </a:r>
-          </a:p>
-          <a:p>
-            <a:pPr>
-              <a:defRPr sz="1300">
-                <a:solidFill>
-                  <a:srgbClr val="24354A"/>
-                </a:solidFill>
-                <a:latin typeface="Consolas"/>
-              </a:defRPr>
-            </a:pPr>
-            <a:r>
-              <a:t>mx gen --servers servers.txt --pps 20000   # 1. build matrix.csv</a:t>
-            </a:r>
-          </a:p>
-          <a:p>
-            <a:pPr>
-              <a:defRPr sz="1300">
-                <a:solidFill>
-                  <a:srgbClr val="24354A"/>
-                </a:solidFill>
-                <a:latin typeface="Consolas"/>
-              </a:defRPr>
-            </a:pPr>
-            <a:r>
-              <a:t>mx start                                   # 2. deploy + run everywhere</a:t>
-            </a:r>
-          </a:p>
-          <a:p>
-            <a:pPr>
-              <a:defRPr sz="1300">
-                <a:solidFill>
-                  <a:srgbClr val="24354A"/>
-                </a:solidFill>
-                <a:latin typeface="Consolas"/>
-              </a:defRPr>
-            </a:pPr>
-            <a:r>
-              <a:t>mx status                                  # 3. running? how fast?</a:t>
-            </a:r>
-          </a:p>
-          <a:p>
-            <a:pPr>
-              <a:defRPr sz="1300">
-                <a:solidFill>
-                  <a:srgbClr val="24354A"/>
-                </a:solidFill>
-                <a:latin typeface="Consolas"/>
-              </a:defRPr>
-            </a:pPr>
-            <a:r>
-              <a:t>mx summarize                               # 4. pps / Gbps / loss / latency</a:t>
-            </a:r>
-          </a:p>
-          <a:p>
-            <a:pPr>
-              <a:defRPr sz="1300">
-                <a:solidFill>
-                  <a:srgbClr val="24354A"/>
-                </a:solidFill>
-                <a:latin typeface="Consolas"/>
-              </a:defRPr>
-            </a:pPr>
-            <a:r>
-              <a:t>mx stop                                    # 5. stop the agents</a:t>
-            </a:r>
-          </a:p>
-          <a:p>
-            <a:pPr>
-              <a:defRPr sz="1300">
-                <a:solidFill>
-                  <a:srgbClr val="24354A"/>
-                </a:solidFill>
-                <a:latin typeface="Consolas"/>
-              </a:defRPr>
-            </a:pPr>
-            <a:r>
-              <a:t>mx clean                                   # 6. leave no trace</a:t>
-            </a:r>
-          </a:p>
-          <a:p>
-            <a:pPr>
-              <a:defRPr sz="1300">
-                <a:solidFill>
-                  <a:srgbClr val="24354A"/>
-                </a:solidFill>
-                <a:latin typeface="Consolas"/>
-              </a:defRPr>
-            </a:pPr>
-            <a:r>
-              <a:t># or all of it: mx run --for 60</a:t>
-            </a:r>
-          </a:p>
-        </p:txBody>
-      </p:sp>
-      <p:sp>
-        <p:nvSpPr>
-          <p:cNvPr id="4" name="TextBox 3"/>
-          <p:cNvSpPr txBox="1"/>
-          <p:nvPr/>
-        </p:nvSpPr>
-        <p:spPr>
-          <a:xfrm>
-            <a:off x="822960" y="3355848"/>
-            <a:ext cx="10607040" cy="621792"/>
-          </a:xfrm>
-          <a:prstGeom prst="rect">
-            <a:avLst/>
-          </a:prstGeom>
-          <a:noFill/>
-        </p:spPr>
-        <p:txBody>
-          <a:bodyPr wrap="square">
-            <a:spAutoFit/>
-          </a:bodyPr>
-          <a:lstStyle/>
-          <a:p>
-            <a:pPr>
-              <a:defRPr sz="1400"/>
-            </a:pPr>
-            <a:r>
-              <a:t>• Differences from iperf_orchestrator: servers need nothing but Python 3.6+ (no iperf2 to install); config lives in matrix.csv, not flags you re-type; pure-Python single file, stdlib only.</a:t>
-            </a:r>
-          </a:p>
-        </p:txBody>
-      </p:sp>
-      <p:sp>
-        <p:nvSpPr>
-          <p:cNvPr id="5" name="TextBox 4"/>
-          <p:cNvSpPr txBox="1"/>
-          <p:nvPr/>
-        </p:nvSpPr>
-        <p:spPr>
-          <a:xfrm>
-            <a:off x="822960" y="4050792"/>
-            <a:ext cx="10607040" cy="310896"/>
-          </a:xfrm>
-          <a:prstGeom prst="rect">
-            <a:avLst/>
-          </a:prstGeom>
-          <a:noFill/>
-        </p:spPr>
-        <p:txBody>
-          <a:bodyPr wrap="square">
-            <a:spAutoFit/>
-          </a:bodyPr>
-          <a:lstStyle/>
-          <a:p>
-            <a:pPr>
-              <a:defRPr sz="1400"/>
-            </a:pPr>
-            <a:r>
-              <a:t>• Five more when needed: run, check (will the NICs carry this?), hints (goal → command), logs, doctor.</a:t>
-            </a:r>
-          </a:p>
-        </p:txBody>
-      </p:sp>
-      <p:sp>
-        <p:nvSpPr>
-          <p:cNvPr id="6" name="TextBox 5"/>
-          <p:cNvSpPr txBox="1"/>
-          <p:nvPr/>
-        </p:nvSpPr>
-        <p:spPr>
-          <a:xfrm>
-            <a:off x="822960" y="4434840"/>
-            <a:ext cx="10607040" cy="310896"/>
-          </a:xfrm>
-          <a:prstGeom prst="rect">
-            <a:avLst/>
-          </a:prstGeom>
-          <a:noFill/>
-        </p:spPr>
-        <p:txBody>
-          <a:bodyPr wrap="square">
-            <a:spAutoFit/>
-          </a:bodyPr>
-          <a:lstStyle/>
-          <a:p>
-            <a:pPr>
-              <a:defRPr sz="1400"/>
-            </a:pPr>
-            <a:r>
-              <a:t>• Every fleet command: --user --jobs --remote-dir --python --dry-run (+ MX_* env vars).</a:t>
-            </a:r>
-          </a:p>
+            <a:r>
+              <a:t>Part 2 — matrix_orchestrator (mx)</a:t>
+            </a:r>
+          </a:p>
+        </p:txBody>
+      </p:sp>
+      <p:sp>
+        <p:nvSpPr>
+          <p:cNvPr id="3" name="Text Placeholder 2"/>
+          <p:cNvSpPr>
+            <a:spLocks noGrp="1"/>
+          </p:cNvSpPr>
+          <p:nvPr>
+            <p:ph type="body" idx="1"/>
+          </p:nvPr>
+        </p:nvSpPr>
+        <p:spPr/>
+        <p:txBody>
+          <a:bodyPr/>
+          <a:lstStyle/>
+          <a:p/>
         </p:txBody>
       </p:sp>
     </p:spTree>
@@ -5345,325 +7134,65 @@
               </a:defRPr>
             </a:pPr>
             <a:r>
-              <a:t>The matrix file — and changing the run mid-stream</a:t>
-            </a:r>
-          </a:p>
-        </p:txBody>
-      </p:sp>
-      <p:sp>
-        <p:nvSpPr>
-          <p:cNvPr id="3" name="TextBox 2"/>
-          <p:cNvSpPr txBox="1"/>
-          <p:nvPr/>
-        </p:nvSpPr>
-        <p:spPr>
-          <a:xfrm>
-            <a:off x="640080" y="1234440"/>
-            <a:ext cx="10972800" cy="1545336"/>
-          </a:xfrm>
-          <a:prstGeom prst="rect">
-            <a:avLst/>
-          </a:prstGeom>
-          <a:noFill/>
-        </p:spPr>
-        <p:txBody>
-          <a:bodyPr wrap="none">
-            <a:spAutoFit/>
+              <a:t>The question iperf can't answer</a:t>
+            </a:r>
+          </a:p>
+        </p:txBody>
+      </p:sp>
+      <p:sp>
+        <p:nvSpPr>
+          <p:cNvPr id="3" name="Content Placeholder 2"/>
+          <p:cNvSpPr>
+            <a:spLocks noGrp="1"/>
+          </p:cNvSpPr>
+          <p:nvPr>
+            <p:ph idx="1"/>
+          </p:nvPr>
+        </p:nvSpPr>
+        <p:spPr/>
+        <p:txBody>
+          <a:bodyPr wrap="square">
+            <a:normAutofit/>
           </a:bodyPr>
           <a:lstStyle/>
           <a:p>
             <a:pPr>
-              <a:defRPr sz="1300">
-                <a:solidFill>
-                  <a:srgbClr val="24354A"/>
-                </a:solidFill>
-                <a:latin typeface="Consolas"/>
-              </a:defRPr>
-            </a:pPr>
-            <a:r>
-              <a:t># mx matrix v1 -- rows send, columns receive, cells are packets/sec</a:t>
-            </a:r>
-          </a:p>
-          <a:p>
-            <a:pPr>
-              <a:defRPr sz="1300">
-                <a:solidFill>
-                  <a:srgbClr val="24354A"/>
-                </a:solidFill>
-                <a:latin typeface="Consolas"/>
-              </a:defRPr>
-            </a:pPr>
-            <a:r>
-              <a:t># tx_size=64 rx_size=512 port=5300</a:t>
-            </a:r>
-          </a:p>
-          <a:p>
-            <a:pPr>
-              <a:defRPr sz="1300">
-                <a:solidFill>
-                  <a:srgbClr val="24354A"/>
-                </a:solidFill>
-                <a:latin typeface="Consolas"/>
-              </a:defRPr>
-            </a:pPr>
-            <a:r>
-              <a:t>src\dst,10.0.0.10,10.0.0.11,10.0.0.12</a:t>
-            </a:r>
-          </a:p>
-          <a:p>
-            <a:pPr>
-              <a:defRPr sz="1300">
-                <a:solidFill>
-                  <a:srgbClr val="24354A"/>
-                </a:solidFill>
-                <a:latin typeface="Consolas"/>
-              </a:defRPr>
-            </a:pPr>
-            <a:r>
-              <a:t>10.0.0.10,,20000,20000</a:t>
-            </a:r>
-          </a:p>
-          <a:p>
-            <a:pPr>
-              <a:defRPr sz="1300">
-                <a:solidFill>
-                  <a:srgbClr val="24354A"/>
-                </a:solidFill>
-                <a:latin typeface="Consolas"/>
-              </a:defRPr>
-            </a:pPr>
-            <a:r>
-              <a:t>10.0.0.11,5000,,max</a:t>
-            </a:r>
-          </a:p>
-          <a:p>
-            <a:pPr>
-              <a:defRPr sz="1300">
-                <a:solidFill>
-                  <a:srgbClr val="24354A"/>
-                </a:solidFill>
-                <a:latin typeface="Consolas"/>
-              </a:defRPr>
-            </a:pPr>
-            <a:r>
-              <a:t>10.0.0.12,20000,20000,</a:t>
-            </a:r>
-          </a:p>
-        </p:txBody>
-      </p:sp>
-      <p:sp>
-        <p:nvSpPr>
-          <p:cNvPr id="4" name="TextBox 3"/>
-          <p:cNvSpPr txBox="1"/>
-          <p:nvPr/>
-        </p:nvSpPr>
-        <p:spPr>
-          <a:xfrm>
-            <a:off x="822960" y="2916936"/>
-            <a:ext cx="10607040" cy="310896"/>
-          </a:xfrm>
-          <a:prstGeom prst="rect">
-            <a:avLst/>
-          </a:prstGeom>
-          <a:noFill/>
-        </p:spPr>
-        <p:txBody>
-          <a:bodyPr wrap="square">
-            <a:spAutoFit/>
-          </a:bodyPr>
-          <a:lstStyle/>
-          <a:p>
-            <a:pPr>
-              <a:defRPr sz="1400"/>
-            </a:pPr>
-            <a:r>
-              <a:t>• Everything about the traffic lives here; no command needs the flags again. Host tokens: name[=addr[:port]].</a:t>
-            </a:r>
-          </a:p>
-        </p:txBody>
-      </p:sp>
-      <p:sp>
-        <p:nvSpPr>
-          <p:cNvPr id="5" name="TextBox 4"/>
-          <p:cNvSpPr txBox="1"/>
-          <p:nvPr/>
-        </p:nvSpPr>
-        <p:spPr>
-          <a:xfrm>
-            <a:off x="822960" y="3300984"/>
-            <a:ext cx="10607040" cy="310896"/>
-          </a:xfrm>
-          <a:prstGeom prst="rect">
-            <a:avLst/>
-          </a:prstGeom>
-          <a:noFill/>
-        </p:spPr>
-        <p:txBody>
-          <a:bodyPr wrap="square">
-            <a:spAutoFit/>
-          </a:bodyPr>
-          <a:lstStyle/>
-          <a:p>
-            <a:pPr>
-              <a:defRPr sz="1400"/>
-            </a:pPr>
-            <a:r>
-              <a:t>• Mid-stream = edit + mx start again (agents redeploy in seconds):</a:t>
-            </a:r>
-          </a:p>
-        </p:txBody>
-      </p:sp>
-      <p:sp>
-        <p:nvSpPr>
-          <p:cNvPr id="6" name="TextBox 5"/>
-          <p:cNvSpPr txBox="1"/>
-          <p:nvPr/>
-        </p:nvSpPr>
-        <p:spPr>
-          <a:xfrm>
-            <a:off x="1143000" y="3685032"/>
-            <a:ext cx="10287000" cy="310896"/>
-          </a:xfrm>
-          <a:prstGeom prst="rect">
-            <a:avLst/>
-          </a:prstGeom>
-          <a:noFill/>
-        </p:spPr>
-        <p:txBody>
-          <a:bodyPr wrap="square">
-            <a:spAutoFit/>
-          </a:bodyPr>
-          <a:lstStyle/>
-          <a:p>
-            <a:pPr>
-              <a:defRPr sz="1250"/>
-            </a:pPr>
-            <a:r>
-              <a:t>• blank a cell → that flow is gone</a:t>
-            </a:r>
-          </a:p>
-        </p:txBody>
-      </p:sp>
-      <p:sp>
-        <p:nvSpPr>
-          <p:cNvPr id="7" name="TextBox 6"/>
-          <p:cNvSpPr txBox="1"/>
-          <p:nvPr/>
-        </p:nvSpPr>
-        <p:spPr>
-          <a:xfrm>
-            <a:off x="1143000" y="4069080"/>
-            <a:ext cx="10287000" cy="310896"/>
-          </a:xfrm>
-          <a:prstGeom prst="rect">
-            <a:avLst/>
-          </a:prstGeom>
-          <a:noFill/>
-        </p:spPr>
-        <p:txBody>
-          <a:bodyPr wrap="square">
-            <a:spAutoFit/>
-          </a:bodyPr>
-          <a:lstStyle/>
-          <a:p>
-            <a:pPr>
-              <a:defRPr sz="1250"/>
-            </a:pPr>
-            <a:r>
-              <a:t>• change a cell → that pair gets its own rate</a:t>
-            </a:r>
-          </a:p>
-        </p:txBody>
-      </p:sp>
-      <p:sp>
-        <p:nvSpPr>
-          <p:cNvPr id="8" name="TextBox 7"/>
-          <p:cNvSpPr txBox="1"/>
-          <p:nvPr/>
-        </p:nvSpPr>
-        <p:spPr>
-          <a:xfrm>
-            <a:off x="1143000" y="4453128"/>
-            <a:ext cx="10287000" cy="310896"/>
-          </a:xfrm>
-          <a:prstGeom prst="rect">
-            <a:avLst/>
-          </a:prstGeom>
-          <a:noFill/>
-        </p:spPr>
-        <p:txBody>
-          <a:bodyPr wrap="square">
-            <a:spAutoFit/>
-          </a:bodyPr>
-          <a:lstStyle/>
-          <a:p>
-            <a:pPr>
-              <a:defRPr sz="1250"/>
-            </a:pPr>
-            <a:r>
-              <a:t>• write max → that pair runs unpaced</a:t>
-            </a:r>
-          </a:p>
-        </p:txBody>
-      </p:sp>
-      <p:sp>
-        <p:nvSpPr>
-          <p:cNvPr id="9" name="TextBox 8"/>
-          <p:cNvSpPr txBox="1"/>
-          <p:nvPr/>
-        </p:nvSpPr>
-        <p:spPr>
-          <a:xfrm>
-            <a:off x="1143000" y="4837176"/>
-            <a:ext cx="10287000" cy="310896"/>
-          </a:xfrm>
-          <a:prstGeom prst="rect">
-            <a:avLst/>
-          </a:prstGeom>
-          <a:noFill/>
-        </p:spPr>
-        <p:txBody>
-          <a:bodyPr wrap="square">
-            <a:spAutoFit/>
-          </a:bodyPr>
-          <a:lstStyle/>
-          <a:p>
-            <a:pPr>
-              <a:defRPr sz="1250"/>
-            </a:pPr>
-            <a:r>
-              <a:t>• edit the header → reshape sizes / port</a:t>
-            </a:r>
-          </a:p>
-        </p:txBody>
-      </p:sp>
-      <p:sp>
-        <p:nvSpPr>
-          <p:cNvPr id="10" name="TextBox 9"/>
-          <p:cNvSpPr txBox="1"/>
-          <p:nvPr/>
-        </p:nvSpPr>
-        <p:spPr>
-          <a:xfrm>
-            <a:off x="822960" y="5221224"/>
-            <a:ext cx="10607040" cy="621792"/>
-          </a:xfrm>
-          <a:prstGeom prst="rect">
-            <a:avLst/>
-          </a:prstGeom>
-          <a:noFill/>
-        </p:spPr>
-        <p:txBody>
-          <a:bodyPr wrap="square">
-            <a:spAutoFit/>
-          </a:bodyPr>
-          <a:lstStyle/>
-          <a:p>
-            <a:pPr>
-              <a:defRPr sz="1400"/>
-            </a:pPr>
-            <a:r>
-              <a:t>• Non-uniform investigations ("only cross-rack pairs", "one hot pair unpaced") are text edits, not new features.</a:t>
+              <a:defRPr sz="1600"/>
+            </a:pPr>
+            <a:r>
+              <a:t>iperf just told us how many bytes per second the fabric can move. But most real traffic isn't bulk bytes — it's *conversations*: a small request goes out, an answer comes back. RPCs, storage reads, control planes.</a:t>
+            </a:r>
+          </a:p>
+          <a:p>
+            <a:pPr>
+              <a:defRPr sz="1600"/>
+            </a:pPr>
+            <a:r>
+              <a:t>That traffic stresses a network in packets per second, not bits per second — and pps is where fabrics and NICs actually fall over.</a:t>
+            </a:r>
+          </a:p>
+          <a:p>
+            <a:pPr>
+              <a:defRPr sz="1600"/>
+            </a:pPr>
+            <a:r>
+              <a:t>mx runs exactly that shape: every host sends small requests at a steady rate to every other host, and every request gets a reply.</a:t>
+            </a:r>
+          </a:p>
+          <a:p>
+            <a:pPr>
+              <a:defRPr sz="1600"/>
+            </a:pPr>
+            <a:r>
+              <a:t>Bonus: the reply carries the request's own timestamp back, so you get true round-trip latency for free — no clock synchronization anywhere.</a:t>
+            </a:r>
+          </a:p>
+          <a:p>
+            <a:pPr>
+              <a:defRPr sz="1600"/>
+            </a:pPr>
+            <a:r>
+              <a:t>A realistic example: --tx-size 128 --rx-size 8192 is an RPC — the same packet rate in both directions, but 64× the bytes on the reply path. That asymmetry is usually what breaks first.</a:t>
             </a:r>
           </a:p>
         </p:txBody>
@@ -5709,7 +7238,7 @@
               </a:defRPr>
             </a:pPr>
             <a:r>
-              <a:t>Getting results</a:t>
+              <a:t>What it does — and where it stops</a:t>
             </a:r>
           </a:p>
         </p:txBody>
@@ -5735,7 +7264,7 @@
               <a:defRPr sz="1600"/>
             </a:pPr>
             <a:r>
-              <a:t>mx status --watch 5 — live ticker, one line per host.</a:t>
+              <a:t>Does: a paced request/response matrix between every pair — rate, sizes and port all in one editable file.</a:t>
             </a:r>
           </a:p>
           <a:p>
@@ -5743,7 +7272,7 @@
               <a:defRPr sz="1600"/>
             </a:pPr>
             <a:r>
-              <a:t>mx summarize — fleet totals, per-host table (worst delivery first), worst flows, and a computed WHAT TO DO NEXT.</a:t>
+              <a:t>Does: honest accounting — the headline is what the *receivers* counted, and loss is split into the outbound leg and the return leg.</a:t>
             </a:r>
           </a:p>
           <a:p>
@@ -5751,7 +7280,7 @@
               <a:defRPr sz="1600"/>
             </a:pPr>
             <a:r>
-              <a:t>mx summarize --grid g — N×N CSVs in the matrix's shape: pps, delivered, loss, rtt_p99. Dark row = sick sender; dark column = sick receiver; dark block = congested pair of leaves.</a:t>
+              <a:t>Does: true round-trip percentiles per flow, and it reports its own CPU cost right next to the network numbers.</a:t>
             </a:r>
           </a:p>
           <a:p>
@@ -5759,7 +7288,7 @@
               <a:defRPr sz="1600"/>
             </a:pPr>
             <a:r>
-              <a:t>reports/&lt;host&gt;.csv — one row per flow per interval (pps, loss, RTT percentiles, CPU, workers). Plain CSV; plot with anything.</a:t>
+              <a:t>Doesn't: TCP — that's iperf_orchestrator's job.</a:t>
             </a:r>
           </a:p>
           <a:p>
@@ -5767,7 +7296,15 @@
               <a:defRPr sz="1600"/>
             </a:pPr>
             <a:r>
-              <a:t>mx logs for the agents' own logs. Reports survive mx stop; only mx clean removes them.</a:t>
+              <a:t>Doesn't: one-way delay — that would need synchronized clocks nobody has, so it refuses to fake it.</a:t>
+            </a:r>
+          </a:p>
+          <a:p>
+            <a:pPr>
+              <a:defRPr sz="1600"/>
+            </a:pPr>
+            <a:r>
+              <a:t>Doesn't: more than a few million packets/sec per host — beyond that you're in kernel-bypass territory. And when the tool itself becomes the limit, it tells you so rather than letting you blame the network.</a:t>
             </a:r>
           </a:p>
         </p:txBody>
@@ -6197,21 +7734,271 @@
               </a:defRPr>
             </a:pPr>
             <a:r>
-              <a:t>Interpreting the summary</a:t>
-            </a:r>
-          </a:p>
-        </p:txBody>
-      </p:sp>
-      <p:sp>
-        <p:nvSpPr>
-          <p:cNvPr id="3" name="TextBox 2"/>
+              <a:t>Six commands drive it</a:t>
+            </a:r>
+          </a:p>
+        </p:txBody>
+      </p:sp>
+      <p:graphicFrame>
+        <p:nvGraphicFramePr>
+          <p:cNvPr id="3" name="Table 2"/>
+          <p:cNvGraphicFramePr>
+            <a:graphicFrameLocks noGrp="1"/>
+          </p:cNvGraphicFramePr>
+          <p:nvPr/>
+        </p:nvGraphicFramePr>
+        <p:xfrm>
+          <a:off x="640080" y="1234440"/>
+          <a:ext cx="10972800" cy="2560320"/>
+        </p:xfrm>
+        <a:graphic>
+          <a:graphicData uri="http://schemas.openxmlformats.org/drawingml/2006/table">
+            <a:tbl>
+              <a:tblPr firstRow="1" bandRow="1">
+                <a:tableStyleId>{5C22544A-7EE6-4342-B048-85BDC9FD1C3A}</a:tableStyleId>
+              </a:tblPr>
+              <a:tblGrid>
+                <a:gridCol w="5486400"/>
+                <a:gridCol w="5486400"/>
+              </a:tblGrid>
+              <a:tr h="365760">
+                <a:tc>
+                  <a:txBody>
+                    <a:bodyPr/>
+                    <a:lstStyle/>
+                    <a:p>
+                      <a:pPr>
+                        <a:defRPr sz="1250" b="1"/>
+                      </a:pPr>
+                      <a:r>
+                        <a:t>Command</a:t>
+                      </a:r>
+                    </a:p>
+                  </a:txBody>
+                  <a:tcPr/>
+                </a:tc>
+                <a:tc>
+                  <a:txBody>
+                    <a:bodyPr/>
+                    <a:lstStyle/>
+                    <a:p>
+                      <a:pPr>
+                        <a:defRPr sz="1250" b="1"/>
+                      </a:pPr>
+                      <a:r>
+                        <a:t>What it does</a:t>
+                      </a:r>
+                    </a:p>
+                  </a:txBody>
+                  <a:tcPr/>
+                </a:tc>
+              </a:tr>
+              <a:tr h="365760">
+                <a:tc>
+                  <a:txBody>
+                    <a:bodyPr/>
+                    <a:lstStyle/>
+                    <a:p>
+                      <a:pPr>
+                        <a:defRPr sz="1200" b="0"/>
+                      </a:pPr>
+                      <a:r>
+                        <a:t>mx gen</a:t>
+                      </a:r>
+                    </a:p>
+                  </a:txBody>
+                  <a:tcPr/>
+                </a:tc>
+                <a:tc>
+                  <a:txBody>
+                    <a:bodyPr/>
+                    <a:lstStyle/>
+                    <a:p>
+                      <a:pPr>
+                        <a:defRPr sz="1200" b="0"/>
+                      </a:pPr>
+                      <a:r>
+                        <a:t>build the traffic matrix from your server list</a:t>
+                      </a:r>
+                    </a:p>
+                  </a:txBody>
+                  <a:tcPr/>
+                </a:tc>
+              </a:tr>
+              <a:tr h="365760">
+                <a:tc>
+                  <a:txBody>
+                    <a:bodyPr/>
+                    <a:lstStyle/>
+                    <a:p>
+                      <a:pPr>
+                        <a:defRPr sz="1200" b="0"/>
+                      </a:pPr>
+                      <a:r>
+                        <a:t>mx start</a:t>
+                      </a:r>
+                    </a:p>
+                  </a:txBody>
+                  <a:tcPr/>
+                </a:tc>
+                <a:tc>
+                  <a:txBody>
+                    <a:bodyPr/>
+                    <a:lstStyle/>
+                    <a:p>
+                      <a:pPr>
+                        <a:defRPr sz="1200" b="0"/>
+                      </a:pPr>
+                      <a:r>
+                        <a:t>copy the agent everywhere and start it</a:t>
+                      </a:r>
+                    </a:p>
+                  </a:txBody>
+                  <a:tcPr/>
+                </a:tc>
+              </a:tr>
+              <a:tr h="365760">
+                <a:tc>
+                  <a:txBody>
+                    <a:bodyPr/>
+                    <a:lstStyle/>
+                    <a:p>
+                      <a:pPr>
+                        <a:defRPr sz="1200" b="0"/>
+                      </a:pPr>
+                      <a:r>
+                        <a:t>mx status</a:t>
+                      </a:r>
+                    </a:p>
+                  </a:txBody>
+                  <a:tcPr/>
+                </a:tc>
+                <a:tc>
+                  <a:txBody>
+                    <a:bodyPr/>
+                    <a:lstStyle/>
+                    <a:p>
+                      <a:pPr>
+                        <a:defRPr sz="1200" b="0"/>
+                      </a:pPr>
+                      <a:r>
+                        <a:t>one live line per host — running, and how fast?</a:t>
+                      </a:r>
+                    </a:p>
+                  </a:txBody>
+                  <a:tcPr/>
+                </a:tc>
+              </a:tr>
+              <a:tr h="365760">
+                <a:tc>
+                  <a:txBody>
+                    <a:bodyPr/>
+                    <a:lstStyle/>
+                    <a:p>
+                      <a:pPr>
+                        <a:defRPr sz="1200" b="0"/>
+                      </a:pPr>
+                      <a:r>
+                        <a:t>mx summarize</a:t>
+                      </a:r>
+                    </a:p>
+                  </a:txBody>
+                  <a:tcPr/>
+                </a:tc>
+                <a:tc>
+                  <a:txBody>
+                    <a:bodyPr/>
+                    <a:lstStyle/>
+                    <a:p>
+                      <a:pPr>
+                        <a:defRPr sz="1200" b="0"/>
+                      </a:pPr>
+                      <a:r>
+                        <a:t>collect reports → pps / loss / latency + *what to do next*</a:t>
+                      </a:r>
+                    </a:p>
+                  </a:txBody>
+                  <a:tcPr/>
+                </a:tc>
+              </a:tr>
+              <a:tr h="365760">
+                <a:tc>
+                  <a:txBody>
+                    <a:bodyPr/>
+                    <a:lstStyle/>
+                    <a:p>
+                      <a:pPr>
+                        <a:defRPr sz="1200" b="0"/>
+                      </a:pPr>
+                      <a:r>
+                        <a:t>mx stop</a:t>
+                      </a:r>
+                    </a:p>
+                  </a:txBody>
+                  <a:tcPr/>
+                </a:tc>
+                <a:tc>
+                  <a:txBody>
+                    <a:bodyPr/>
+                    <a:lstStyle/>
+                    <a:p>
+                      <a:pPr>
+                        <a:defRPr sz="1200" b="0"/>
+                      </a:pPr>
+                      <a:r>
+                        <a:t>stop the agents — reports stay on the hosts</a:t>
+                      </a:r>
+                    </a:p>
+                  </a:txBody>
+                  <a:tcPr/>
+                </a:tc>
+              </a:tr>
+              <a:tr h="365760">
+                <a:tc>
+                  <a:txBody>
+                    <a:bodyPr/>
+                    <a:lstStyle/>
+                    <a:p>
+                      <a:pPr>
+                        <a:defRPr sz="1200" b="0"/>
+                      </a:pPr>
+                      <a:r>
+                        <a:t>mx clean</a:t>
+                      </a:r>
+                    </a:p>
+                  </a:txBody>
+                  <a:tcPr/>
+                </a:tc>
+                <a:tc>
+                  <a:txBody>
+                    <a:bodyPr/>
+                    <a:lstStyle/>
+                    <a:p>
+                      <a:pPr>
+                        <a:defRPr sz="1200" b="0"/>
+                      </a:pPr>
+                      <a:r>
+                        <a:t>stop, delete every trace, and verify it's gone</a:t>
+                      </a:r>
+                    </a:p>
+                  </a:txBody>
+                  <a:tcPr/>
+                </a:tc>
+              </a:tr>
+            </a:tbl>
+          </a:graphicData>
+        </a:graphic>
+      </p:graphicFrame>
+      <p:sp>
+        <p:nvSpPr>
+          <p:cNvPr id="4" name="TextBox 3"/>
           <p:cNvSpPr txBox="1"/>
           <p:nvPr/>
         </p:nvSpPr>
         <p:spPr>
           <a:xfrm>
-            <a:off x="640080" y="1234440"/>
-            <a:ext cx="10972800" cy="1545336"/>
+            <a:off x="822960" y="3977640"/>
+            <a:ext cx="10607040" cy="621792"/>
           </a:xfrm>
           <a:prstGeom prst="rect">
             <a:avLst/>
@@ -6219,107 +8006,6 @@
           <a:noFill/>
         </p:spPr>
         <p:txBody>
-          <a:bodyPr wrap="none">
-            <a:spAutoFit/>
-          </a:bodyPr>
-          <a:lstStyle/>
-          <a:p>
-            <a:pPr>
-              <a:defRPr sz="1300">
-                <a:solidFill>
-                  <a:srgbClr val="24354A"/>
-                </a:solidFill>
-                <a:latin typeface="Consolas"/>
-              </a:defRPr>
-            </a:pPr>
-            <a:r>
-              <a:t>REQUESTS   2.640 Mpps   2.75 Gbps wire</a:t>
-            </a:r>
-          </a:p>
-          <a:p>
-            <a:pPr>
-              <a:defRPr sz="1300">
-                <a:solidFill>
-                  <a:srgbClr val="24354A"/>
-                </a:solidFill>
-                <a:latin typeface="Consolas"/>
-              </a:defRPr>
-            </a:pPr>
-            <a:r>
-              <a:t>DELIVERED  2.601 Mpps   98.52% of what was sent</a:t>
-            </a:r>
-          </a:p>
-          <a:p>
-            <a:pPr>
-              <a:defRPr sz="1300">
-                <a:solidFill>
-                  <a:srgbClr val="24354A"/>
-                </a:solidFill>
-                <a:latin typeface="Consolas"/>
-              </a:defRPr>
-            </a:pPr>
-            <a:r>
-              <a:t>REPLIES    2.598 Mpps   2.71 Gbps wire</a:t>
-            </a:r>
-          </a:p>
-          <a:p>
-            <a:pPr>
-              <a:defRPr sz="1300">
-                <a:solidFill>
-                  <a:srgbClr val="24354A"/>
-                </a:solidFill>
-                <a:latin typeface="Consolas"/>
-              </a:defRPr>
-            </a:pPr>
-            <a:r>
-              <a:t>TARGET     2.640 Mpps   100.0% achieved</a:t>
-            </a:r>
-          </a:p>
-          <a:p>
-            <a:pPr>
-              <a:defRPr sz="1300">
-                <a:solidFill>
-                  <a:srgbClr val="24354A"/>
-                </a:solidFill>
-                <a:latin typeface="Consolas"/>
-              </a:defRPr>
-            </a:pPr>
-            <a:r>
-              <a:t>LOSS       1.59% round trip (1.48% forward, 0.11% back)</a:t>
-            </a:r>
-          </a:p>
-          <a:p>
-            <a:pPr>
-              <a:defRPr sz="1300">
-                <a:solidFill>
-                  <a:srgbClr val="24354A"/>
-                </a:solidFill>
-                <a:latin typeface="Consolas"/>
-              </a:defRPr>
-            </a:pPr>
-            <a:r>
-              <a:t>RTT        avg 240us; worst flow p50 190us p99 4.1ms max 31ms</a:t>
-            </a:r>
-          </a:p>
-        </p:txBody>
-      </p:sp>
-      <p:sp>
-        <p:nvSpPr>
-          <p:cNvPr id="4" name="TextBox 3"/>
-          <p:cNvSpPr txBox="1"/>
-          <p:nvPr/>
-        </p:nvSpPr>
-        <p:spPr>
-          <a:xfrm>
-            <a:off x="822960" y="2916936"/>
-            <a:ext cx="10607040" cy="310896"/>
-          </a:xfrm>
-          <a:prstGeom prst="rect">
-            <a:avLst/>
-          </a:prstGeom>
-          <a:noFill/>
-        </p:spPr>
-        <p:txBody>
           <a:bodyPr wrap="square">
             <a:spAutoFit/>
           </a:bodyPr>
@@ -6329,131 +8015,7 @@
               <a:defRPr sz="1400"/>
             </a:pPr>
             <a:r>
-              <a:t>• DELIVERED is the honest number — senders can't see their own drops.</a:t>
-            </a:r>
-          </a:p>
-        </p:txBody>
-      </p:sp>
-      <p:sp>
-        <p:nvSpPr>
-          <p:cNvPr id="5" name="TextBox 4"/>
-          <p:cNvSpPr txBox="1"/>
-          <p:nvPr/>
-        </p:nvSpPr>
-        <p:spPr>
-          <a:xfrm>
-            <a:off x="822960" y="3300984"/>
-            <a:ext cx="10607040" cy="310896"/>
-          </a:xfrm>
-          <a:prstGeom prst="rect">
-            <a:avLst/>
-          </a:prstGeom>
-          <a:noFill/>
-        </p:spPr>
-        <p:txBody>
-          <a:bodyPr wrap="square">
-            <a:spAutoFit/>
-          </a:bodyPr>
-          <a:lstStyle/>
-          <a:p>
-            <a:pPr>
-              <a:defRPr sz="1400"/>
-            </a:pPr>
-            <a:r>
-              <a:t>• Loss split by leg — dropping 64 B requests vs dropping 8 KB replies need different fixes.</a:t>
-            </a:r>
-          </a:p>
-        </p:txBody>
-      </p:sp>
-      <p:sp>
-        <p:nvSpPr>
-          <p:cNvPr id="6" name="TextBox 5"/>
-          <p:cNvSpPr txBox="1"/>
-          <p:nvPr/>
-        </p:nvSpPr>
-        <p:spPr>
-          <a:xfrm>
-            <a:off x="822960" y="3685032"/>
-            <a:ext cx="10607040" cy="310896"/>
-          </a:xfrm>
-          <a:prstGeom prst="rect">
-            <a:avLst/>
-          </a:prstGeom>
-          <a:noFill/>
-        </p:spPr>
-        <p:txBody>
-          <a:bodyPr wrap="square">
-            <a:spAutoFit/>
-          </a:bodyPr>
-          <a:lstStyle/>
-          <a:p>
-            <a:pPr>
-              <a:defRPr sz="1400"/>
-            </a:pPr>
-            <a:r>
-              <a:t>• RTT is a true round trip — the stamp comes back; no clock sync involved.</a:t>
-            </a:r>
-          </a:p>
-        </p:txBody>
-      </p:sp>
-      <p:sp>
-        <p:nvSpPr>
-          <p:cNvPr id="7" name="TextBox 6"/>
-          <p:cNvSpPr txBox="1"/>
-          <p:nvPr/>
-        </p:nvSpPr>
-        <p:spPr>
-          <a:xfrm>
-            <a:off x="822960" y="4069080"/>
-            <a:ext cx="10607040" cy="932688"/>
-          </a:xfrm>
-          <a:prstGeom prst="rect">
-            <a:avLst/>
-          </a:prstGeom>
-          <a:noFill/>
-        </p:spPr>
-        <p:txBody>
-          <a:bodyPr wrap="square">
-            <a:spAutoFit/>
-          </a:bodyPr>
-          <a:lstStyle/>
-          <a:p>
-            <a:pPr>
-              <a:defRPr sz="1400"/>
-            </a:pPr>
-            <a:r>
-              <a:t>• Per-host CPU columns: cpu (box) / 1 core (busiest core) / agent (busiest worker as share of one core). agent ≈ 100% ⇒ you're measuring the tool, not the network — add workers (spare cores) or hosts; the summary says so in as many words.</a:t>
-            </a:r>
-          </a:p>
-        </p:txBody>
-      </p:sp>
-      <p:sp>
-        <p:nvSpPr>
-          <p:cNvPr id="8" name="TextBox 7"/>
-          <p:cNvSpPr txBox="1"/>
-          <p:nvPr/>
-        </p:nvSpPr>
-        <p:spPr>
-          <a:xfrm>
-            <a:off x="822960" y="5074920"/>
-            <a:ext cx="10607040" cy="1243584"/>
-          </a:xfrm>
-          <a:prstGeom prst="rect">
-            <a:avLst/>
-          </a:prstGeom>
-          <a:noFill/>
-        </p:spPr>
-        <p:txBody>
-          <a:bodyPr wrap="square">
-            <a:spAutoFit/>
-          </a:bodyPr>
-          <a:lstStyle/>
-          <a:p>
-            <a:pPr>
-              <a:defRPr sz="1400"/>
-            </a:pPr>
-            <a:r>
-              <a:t>• Performance model: ~200k pps × workers × hosts. Processes, not threads (GIL: 4 threads = 57k pps; 4 processes = 1.09M). One core pegged while the box idles? Workers can't outnumber flows → --streams N gives each pair N sockets (rate split, not multiplied) so workers/RSS/ECMP have tuples to spread: mx start --streams 8 --workers 32.</a:t>
+              <a:t>mx run --for 60 does the whole cycle in one shot. Servers need nothing but Python and your ssh key — no iperf, no packages, no root.</a:t>
             </a:r>
           </a:p>
         </p:txBody>
@@ -6499,65 +8061,201 @@
               </a:defRPr>
             </a:pPr>
             <a:r>
-              <a:t>Finding the limit — and common options</a:t>
-            </a:r>
-          </a:p>
-        </p:txBody>
-      </p:sp>
-      <p:sp>
-        <p:nvSpPr>
-          <p:cNvPr id="3" name="Content Placeholder 2"/>
-          <p:cNvSpPr>
-            <a:spLocks noGrp="1"/>
-          </p:cNvSpPr>
-          <p:nvPr>
-            <p:ph idx="1"/>
-          </p:nvPr>
-        </p:nvSpPr>
-        <p:spPr/>
+              <a:t>One file describes the traffic — edit it, even mid-run</a:t>
+            </a:r>
+          </a:p>
+        </p:txBody>
+      </p:sp>
+      <p:sp>
+        <p:nvSpPr>
+          <p:cNvPr id="3" name="TextBox 2"/>
+          <p:cNvSpPr txBox="1"/>
+          <p:nvPr/>
+        </p:nvSpPr>
+        <p:spPr>
+          <a:xfrm>
+            <a:off x="640080" y="1234440"/>
+            <a:ext cx="10972800" cy="1545336"/>
+          </a:xfrm>
+          <a:prstGeom prst="rect">
+            <a:avLst/>
+          </a:prstGeom>
+          <a:noFill/>
+        </p:spPr>
+        <p:txBody>
+          <a:bodyPr wrap="none">
+            <a:spAutoFit/>
+          </a:bodyPr>
+          <a:lstStyle/>
+          <a:p>
+            <a:pPr>
+              <a:defRPr sz="1300">
+                <a:solidFill>
+                  <a:srgbClr val="24354A"/>
+                </a:solidFill>
+                <a:latin typeface="Consolas"/>
+              </a:defRPr>
+            </a:pPr>
+            <a:r>
+              <a:t># rows send, columns receive, cells are packets/sec</a:t>
+            </a:r>
+          </a:p>
+          <a:p>
+            <a:pPr>
+              <a:defRPr sz="1300">
+                <a:solidFill>
+                  <a:srgbClr val="24354A"/>
+                </a:solidFill>
+                <a:latin typeface="Consolas"/>
+              </a:defRPr>
+            </a:pPr>
+            <a:r>
+              <a:t># tx_size=64 rx_size=512 port=5300</a:t>
+            </a:r>
+          </a:p>
+          <a:p>
+            <a:pPr>
+              <a:defRPr sz="1300">
+                <a:solidFill>
+                  <a:srgbClr val="24354A"/>
+                </a:solidFill>
+                <a:latin typeface="Consolas"/>
+              </a:defRPr>
+            </a:pPr>
+            <a:r>
+              <a:t>src\dst,10.0.0.10,10.0.0.11,10.0.0.12</a:t>
+            </a:r>
+          </a:p>
+          <a:p>
+            <a:pPr>
+              <a:defRPr sz="1300">
+                <a:solidFill>
+                  <a:srgbClr val="24354A"/>
+                </a:solidFill>
+                <a:latin typeface="Consolas"/>
+              </a:defRPr>
+            </a:pPr>
+            <a:r>
+              <a:t>10.0.0.10,,20000,20000</a:t>
+            </a:r>
+          </a:p>
+          <a:p>
+            <a:pPr>
+              <a:defRPr sz="1300">
+                <a:solidFill>
+                  <a:srgbClr val="24354A"/>
+                </a:solidFill>
+                <a:latin typeface="Consolas"/>
+              </a:defRPr>
+            </a:pPr>
+            <a:r>
+              <a:t>10.0.0.11,5000,,max</a:t>
+            </a:r>
+          </a:p>
+          <a:p>
+            <a:pPr>
+              <a:defRPr sz="1300">
+                <a:solidFill>
+                  <a:srgbClr val="24354A"/>
+                </a:solidFill>
+                <a:latin typeface="Consolas"/>
+              </a:defRPr>
+            </a:pPr>
+            <a:r>
+              <a:t>10.0.0.12,20000,20000,</a:t>
+            </a:r>
+          </a:p>
+        </p:txBody>
+      </p:sp>
+      <p:sp>
+        <p:nvSpPr>
+          <p:cNvPr id="4" name="TextBox 3"/>
+          <p:cNvSpPr txBox="1"/>
+          <p:nvPr/>
+        </p:nvSpPr>
+        <p:spPr>
+          <a:xfrm>
+            <a:off x="822960" y="2916936"/>
+            <a:ext cx="10607040" cy="310896"/>
+          </a:xfrm>
+          <a:prstGeom prst="rect">
+            <a:avLst/>
+          </a:prstGeom>
+          <a:noFill/>
+        </p:spPr>
         <p:txBody>
           <a:bodyPr wrap="square">
-            <a:normAutofit/>
+            <a:spAutoFit/>
           </a:bodyPr>
           <a:lstStyle/>
           <a:p>
             <a:pPr>
-              <a:defRPr sz="1600"/>
-            </a:pPr>
-            <a:r>
-              <a:t>mx check --nic-gbps 25 --nic-mpps 15 first — was what you asked for even possible?</a:t>
-            </a:r>
-          </a:p>
-          <a:p>
-            <a:pPr>
-              <a:defRPr sz="1600"/>
-            </a:pPr>
-            <a:r>
-              <a:t>Ramp: --pps 50000 → run → --pps 100000 → … The last rate that delivers cleanly is the fleet's sustainable all-to-all packet rate.</a:t>
-            </a:r>
-          </a:p>
-          <a:p>
-            <a:pPr>
-              <a:defRPr sz="1600"/>
-            </a:pPr>
-            <a:r>
-              <a:t>Watch in order: (1) p99 lifting off the p50 — queues filling, usually before loss; (2) DELIVERED falling behind REQUESTS — something's dropping.</a:t>
-            </a:r>
-          </a:p>
-          <a:p>
-            <a:pPr>
-              <a:defRPr sz="1600"/>
-            </a:pPr>
-            <a:r>
-              <a:t>--pps max = unpaced: finds the ceiling fastest, tells you less about where it is.</a:t>
-            </a:r>
-          </a:p>
-          <a:p>
-            <a:pPr>
-              <a:defRPr sz="1600"/>
-            </a:pPr>
-            <a:r>
-              <a:t>Common shapes: --tx-size 64 --rx-size 64 --pps max (small-packet torture) · --tx-size 128 --rx-size 8192 (RPC) · --gbps 10 --tx-size 1400 (bandwidth-budget sizing) · mx start --bind eth1 (data-NIC pinning — retargets peers' addresses too, both halves of the two-NIC job).</a:t>
+              <a:defRPr sz="1400"/>
+            </a:pPr>
+            <a:r>
+              <a:t>• Everything about the traffic lives in matrix.csv — no flags to remember or re-type.</a:t>
+            </a:r>
+          </a:p>
+        </p:txBody>
+      </p:sp>
+      <p:sp>
+        <p:nvSpPr>
+          <p:cNvPr id="5" name="TextBox 4"/>
+          <p:cNvSpPr txBox="1"/>
+          <p:nvPr/>
+        </p:nvSpPr>
+        <p:spPr>
+          <a:xfrm>
+            <a:off x="822960" y="3300984"/>
+            <a:ext cx="10607040" cy="621792"/>
+          </a:xfrm>
+          <a:prstGeom prst="rect">
+            <a:avLst/>
+          </a:prstGeom>
+          <a:noFill/>
+        </p:spPr>
+        <p:txBody>
+          <a:bodyPr wrap="square">
+            <a:spAutoFit/>
+          </a:bodyPr>
+          <a:lstStyle/>
+          <a:p>
+            <a:pPr>
+              <a:defRPr sz="1400"/>
+            </a:pPr>
+            <a:r>
+              <a:t>• Want to change a running test? Edit the file, mx start again. Blank a cell to silence a pair · raise a cell to make a hot pair · write max to run one pair unpaced · edit the header to reshape every packet.</a:t>
+            </a:r>
+          </a:p>
+        </p:txBody>
+      </p:sp>
+      <p:sp>
+        <p:nvSpPr>
+          <p:cNvPr id="6" name="TextBox 5"/>
+          <p:cNvSpPr txBox="1"/>
+          <p:nvPr/>
+        </p:nvSpPr>
+        <p:spPr>
+          <a:xfrm>
+            <a:off x="822960" y="3995928"/>
+            <a:ext cx="10607040" cy="310896"/>
+          </a:xfrm>
+          <a:prstGeom prst="rect">
+            <a:avLst/>
+          </a:prstGeom>
+          <a:noFill/>
+        </p:spPr>
+        <p:txBody>
+          <a:bodyPr wrap="square">
+            <a:spAutoFit/>
+          </a:bodyPr>
+          <a:lstStyle/>
+          <a:p>
+            <a:pPr>
+              <a:defRPr sz="1400"/>
+            </a:pPr>
+            <a:r>
+              <a:t>• "What if only the cross-rack pairs run?" is a thirty-second text edit, not a feature request.</a:t>
             </a:r>
           </a:p>
         </p:txBody>
@@ -6603,65 +8301,237 @@
               </a:defRPr>
             </a:pPr>
             <a:r>
-              <a:t>Ways to run at different scales — getting the best run</a:t>
-            </a:r>
-          </a:p>
-        </p:txBody>
-      </p:sp>
-      <p:sp>
-        <p:nvSpPr>
-          <p:cNvPr id="3" name="Content Placeholder 2"/>
-          <p:cNvSpPr>
-            <a:spLocks noGrp="1"/>
-          </p:cNvSpPr>
-          <p:nvPr>
-            <p:ph idx="1"/>
-          </p:nvPr>
-        </p:nvSpPr>
-        <p:spPr/>
+              <a:t>Reading the summary</a:t>
+            </a:r>
+          </a:p>
+        </p:txBody>
+      </p:sp>
+      <p:sp>
+        <p:nvSpPr>
+          <p:cNvPr id="3" name="TextBox 2"/>
+          <p:cNvSpPr txBox="1"/>
+          <p:nvPr/>
+        </p:nvSpPr>
+        <p:spPr>
+          <a:xfrm>
+            <a:off x="640080" y="1234440"/>
+            <a:ext cx="10972800" cy="1106424"/>
+          </a:xfrm>
+          <a:prstGeom prst="rect">
+            <a:avLst/>
+          </a:prstGeom>
+          <a:noFill/>
+        </p:spPr>
+        <p:txBody>
+          <a:bodyPr wrap="none">
+            <a:spAutoFit/>
+          </a:bodyPr>
+          <a:lstStyle/>
+          <a:p>
+            <a:pPr>
+              <a:defRPr sz="1300">
+                <a:solidFill>
+                  <a:srgbClr val="24354A"/>
+                </a:solidFill>
+                <a:latin typeface="Consolas"/>
+              </a:defRPr>
+            </a:pPr>
+            <a:r>
+              <a:t>REQUESTS    2.640 Mpps        what the senders put on the wire</a:t>
+            </a:r>
+          </a:p>
+          <a:p>
+            <a:pPr>
+              <a:defRPr sz="1300">
+                <a:solidFill>
+                  <a:srgbClr val="24354A"/>
+                </a:solidFill>
+                <a:latin typeface="Consolas"/>
+              </a:defRPr>
+            </a:pPr>
+            <a:r>
+              <a:t>DELIVERED   2.601 Mpps        what the receivers actually counted</a:t>
+            </a:r>
+          </a:p>
+          <a:p>
+            <a:pPr>
+              <a:defRPr sz="1300">
+                <a:solidFill>
+                  <a:srgbClr val="24354A"/>
+                </a:solidFill>
+                <a:latin typeface="Consolas"/>
+              </a:defRPr>
+            </a:pPr>
+            <a:r>
+              <a:t>LOSS        1.59% round trip  (1.48% outbound, 0.11% coming back)</a:t>
+            </a:r>
+          </a:p>
+          <a:p>
+            <a:pPr>
+              <a:defRPr sz="1300">
+                <a:solidFill>
+                  <a:srgbClr val="24354A"/>
+                </a:solidFill>
+                <a:latin typeface="Consolas"/>
+              </a:defRPr>
+            </a:pPr>
+            <a:r>
+              <a:t>RTT         avg 240us         worst flow p99 4.1ms</a:t>
+            </a:r>
+          </a:p>
+        </p:txBody>
+      </p:sp>
+      <p:sp>
+        <p:nvSpPr>
+          <p:cNvPr id="4" name="TextBox 3"/>
+          <p:cNvSpPr txBox="1"/>
+          <p:nvPr/>
+        </p:nvSpPr>
+        <p:spPr>
+          <a:xfrm>
+            <a:off x="822960" y="2478024"/>
+            <a:ext cx="10607040" cy="310896"/>
+          </a:xfrm>
+          <a:prstGeom prst="rect">
+            <a:avLst/>
+          </a:prstGeom>
+          <a:noFill/>
+        </p:spPr>
         <p:txBody>
           <a:bodyPr wrap="square">
-            <a:normAutofit/>
+            <a:spAutoFit/>
           </a:bodyPr>
           <a:lstStyle/>
           <a:p>
             <a:pPr>
-              <a:defRPr sz="1600"/>
-            </a:pPr>
-            <a:r>
-              <a:t>Small fleet (≤ ~30): full mesh (default gen). Every pair, continuously — the forensic shape. Big box, few peers? add --streams.</a:t>
-            </a:r>
-          </a:p>
-          <a:p>
-            <a:pPr>
-              <a:defRPr sz="1600"/>
-            </a:pPr>
-            <a:r>
-              <a:t>Large fleet: --peers K — k-regular shuffle: each host talks to exactly K shuffled peers. Equal per-host load by construction (K superimposed permutations), K sockets instead of N−1, seeded + replayable (--seed). --streams S multiplies 4-tuples for ECMP coverage; a host holds K×S sockets.</a:t>
-            </a:r>
-          </a:p>
-          <a:p>
-            <a:pPr>
-              <a:defRPr sz="1600"/>
-            </a:pPr>
-            <a:r>
-              <a:t>Full pair coverage at huge N: --peers K --dwell T — layered rotation: the N−1 shifts of the shuffle are dealt out K at a time into ⌈(N−1)/K⌉ edge-disjoint layers; agents switch layers on their own wall clock (no control channel). After one cycle every ordered pair measured exactly once; per-host load never changes. 1000 hosts: full coverage every ~6 min on 8 sockets (--dwell 3 --interval 1). --equal-layers for dip-free soaks; COVERAGE section + coverage_grid.csv report progress.</a:t>
-            </a:r>
-          </a:p>
-          <a:p>
-            <a:pPr>
-              <a:defRPr sz="1600"/>
-            </a:pPr>
-            <a:r>
-              <a:t>Dwell floor: whole multiple of --interval; useful floor ≈ 3× interval.</a:t>
-            </a:r>
-          </a:p>
-          <a:p>
-            <a:pPr>
-              <a:defRPr sz="1600"/>
-            </a:pPr>
-            <a:r>
-              <a:t>Don't want to remember this? mx hints --servers s.txt --pps-per-host N does the arithmetic and prints the command.</a:t>
+              <a:defRPr sz="1400"/>
+            </a:pPr>
+            <a:r>
+              <a:t>• DELIVERED is the headline — a sender can't see its own drops.</a:t>
+            </a:r>
+          </a:p>
+        </p:txBody>
+      </p:sp>
+      <p:sp>
+        <p:nvSpPr>
+          <p:cNvPr id="5" name="TextBox 4"/>
+          <p:cNvSpPr txBox="1"/>
+          <p:nvPr/>
+        </p:nvSpPr>
+        <p:spPr>
+          <a:xfrm>
+            <a:off x="822960" y="2862072"/>
+            <a:ext cx="10607040" cy="310896"/>
+          </a:xfrm>
+          <a:prstGeom prst="rect">
+            <a:avLst/>
+          </a:prstGeom>
+          <a:noFill/>
+        </p:spPr>
+        <p:txBody>
+          <a:bodyPr wrap="square">
+            <a:spAutoFit/>
+          </a:bodyPr>
+          <a:lstStyle/>
+          <a:p>
+            <a:pPr>
+              <a:defRPr sz="1400"/>
+            </a:pPr>
+            <a:r>
+              <a:t>• Loss is split by direction — dropping tiny requests and dropping big replies point at different problems.</a:t>
+            </a:r>
+          </a:p>
+        </p:txBody>
+      </p:sp>
+      <p:sp>
+        <p:nvSpPr>
+          <p:cNvPr id="6" name="TextBox 5"/>
+          <p:cNvSpPr txBox="1"/>
+          <p:nvPr/>
+        </p:nvSpPr>
+        <p:spPr>
+          <a:xfrm>
+            <a:off x="822960" y="3246120"/>
+            <a:ext cx="10607040" cy="310896"/>
+          </a:xfrm>
+          <a:prstGeom prst="rect">
+            <a:avLst/>
+          </a:prstGeom>
+          <a:noFill/>
+        </p:spPr>
+        <p:txBody>
+          <a:bodyPr wrap="square">
+            <a:spAutoFit/>
+          </a:bodyPr>
+          <a:lstStyle/>
+          <a:p>
+            <a:pPr>
+              <a:defRPr sz="1400"/>
+            </a:pPr>
+            <a:r>
+              <a:t>• The summary ends with WHAT TO DO NEXT — it reads its own numbers and names the knob they point at.</a:t>
+            </a:r>
+          </a:p>
+        </p:txBody>
+      </p:sp>
+      <p:sp>
+        <p:nvSpPr>
+          <p:cNvPr id="7" name="TextBox 6"/>
+          <p:cNvSpPr txBox="1"/>
+          <p:nvPr/>
+        </p:nvSpPr>
+        <p:spPr>
+          <a:xfrm>
+            <a:off x="822960" y="3630168"/>
+            <a:ext cx="10607040" cy="621792"/>
+          </a:xfrm>
+          <a:prstGeom prst="rect">
+            <a:avLst/>
+          </a:prstGeom>
+          <a:noFill/>
+        </p:spPr>
+        <p:txBody>
+          <a:bodyPr wrap="square">
+            <a:spAutoFit/>
+          </a:bodyPr>
+          <a:lstStyle/>
+          <a:p>
+            <a:pPr>
+              <a:defRPr sz="1400"/>
+            </a:pPr>
+            <a:r>
+              <a:t>• Watch the agent CPU column: near 100% means the tool is the bottleneck, not your network — add workers (--workers), spread with --streams, or add hosts. The summary says this in as many words.</a:t>
+            </a:r>
+          </a:p>
+        </p:txBody>
+      </p:sp>
+      <p:sp>
+        <p:nvSpPr>
+          <p:cNvPr id="8" name="TextBox 7"/>
+          <p:cNvSpPr txBox="1"/>
+          <p:nvPr/>
+        </p:nvSpPr>
+        <p:spPr>
+          <a:xfrm>
+            <a:off x="822960" y="4325112"/>
+            <a:ext cx="10607040" cy="621792"/>
+          </a:xfrm>
+          <a:prstGeom prst="rect">
+            <a:avLst/>
+          </a:prstGeom>
+          <a:noFill/>
+        </p:spPr>
+        <p:txBody>
+          <a:bodyPr wrap="square">
+            <a:spAutoFit/>
+          </a:bodyPr>
+          <a:lstStyle/>
+          <a:p>
+            <a:pPr>
+              <a:defRPr sz="1400"/>
+            </a:pPr>
+            <a:r>
+              <a:t>• mx summarize --grid g writes N×N grids: a dark row is a sick sender, a dark column a sick receiver — read exactly like the iperf heatmap.</a:t>
             </a:r>
           </a:p>
         </p:txBody>
@@ -6707,65 +8577,175 @@
               </a:defRPr>
             </a:pPr>
             <a:r>
-              <a:t>Stopping and cleaning up</a:t>
-            </a:r>
-          </a:p>
-        </p:txBody>
-      </p:sp>
-      <p:sp>
-        <p:nvSpPr>
-          <p:cNvPr id="3" name="Content Placeholder 2"/>
-          <p:cNvSpPr>
-            <a:spLocks noGrp="1"/>
-          </p:cNvSpPr>
-          <p:nvPr>
-            <p:ph idx="1"/>
-          </p:nvPr>
-        </p:nvSpPr>
-        <p:spPr/>
+              <a:t>Finding the fleet's limit</a:t>
+            </a:r>
+          </a:p>
+        </p:txBody>
+      </p:sp>
+      <p:sp>
+        <p:nvSpPr>
+          <p:cNvPr id="3" name="TextBox 2"/>
+          <p:cNvSpPr txBox="1"/>
+          <p:nvPr/>
+        </p:nvSpPr>
+        <p:spPr>
+          <a:xfrm>
+            <a:off x="640080" y="1234440"/>
+            <a:ext cx="10972800" cy="1106424"/>
+          </a:xfrm>
+          <a:prstGeom prst="rect">
+            <a:avLst/>
+          </a:prstGeom>
+          <a:noFill/>
+        </p:spPr>
+        <p:txBody>
+          <a:bodyPr wrap="none">
+            <a:spAutoFit/>
+          </a:bodyPr>
+          <a:lstStyle/>
+          <a:p>
+            <a:pPr>
+              <a:defRPr sz="1300">
+                <a:solidFill>
+                  <a:srgbClr val="24354A"/>
+                </a:solidFill>
+                <a:latin typeface="Consolas"/>
+              </a:defRPr>
+            </a:pPr>
+            <a:r>
+              <a:t>mx check --nic-gbps 25            # was what you're asking even possible?</a:t>
+            </a:r>
+          </a:p>
+          <a:p>
+            <a:pPr>
+              <a:defRPr sz="1300">
+                <a:solidFill>
+                  <a:srgbClr val="24354A"/>
+                </a:solidFill>
+                <a:latin typeface="Consolas"/>
+              </a:defRPr>
+            </a:pPr>
+            <a:r>
+              <a:t>mx gen --servers s.txt --pps 50000  &amp;&amp; mx run --for 120</a:t>
+            </a:r>
+          </a:p>
+          <a:p>
+            <a:pPr>
+              <a:defRPr sz="1300">
+                <a:solidFill>
+                  <a:srgbClr val="24354A"/>
+                </a:solidFill>
+                <a:latin typeface="Consolas"/>
+              </a:defRPr>
+            </a:pPr>
+            <a:r>
+              <a:t>mx gen --servers s.txt --pps 100000 &amp;&amp; mx run --for 120</a:t>
+            </a:r>
+          </a:p>
+          <a:p>
+            <a:pPr>
+              <a:defRPr sz="1300">
+                <a:solidFill>
+                  <a:srgbClr val="24354A"/>
+                </a:solidFill>
+                <a:latin typeface="Consolas"/>
+              </a:defRPr>
+            </a:pPr>
+            <a:r>
+              <a:t>...                               # raise until delivery stops keeping up</a:t>
+            </a:r>
+          </a:p>
+        </p:txBody>
+      </p:sp>
+      <p:sp>
+        <p:nvSpPr>
+          <p:cNvPr id="4" name="TextBox 3"/>
+          <p:cNvSpPr txBox="1"/>
+          <p:nvPr/>
+        </p:nvSpPr>
+        <p:spPr>
+          <a:xfrm>
+            <a:off x="822960" y="2478024"/>
+            <a:ext cx="10607040" cy="310896"/>
+          </a:xfrm>
+          <a:prstGeom prst="rect">
+            <a:avLst/>
+          </a:prstGeom>
+          <a:noFill/>
+        </p:spPr>
         <p:txBody>
           <a:bodyPr wrap="square">
-            <a:normAutofit/>
+            <a:spAutoFit/>
           </a:bodyPr>
           <a:lstStyle/>
           <a:p>
             <a:pPr>
-              <a:defRPr sz="1600"/>
-            </a:pPr>
-            <a:r>
-              <a:t>Everything on a server lives in one directory (/var/tmp/mx; --remote-dir to change): agent, matrix, log, report. No package, no sysctl, no unit file.</a:t>
-            </a:r>
-          </a:p>
-          <a:p>
-            <a:pPr>
-              <a:defRPr sz="1600"/>
-            </a:pPr>
-            <a:r>
-              <a:t>mx stop — agents halt; reports and logs stay for later collection.</a:t>
-            </a:r>
-          </a:p>
-          <a:p>
-            <a:pPr>
-              <a:defRPr sz="1600"/>
-            </a:pPr>
-            <a:r>
-              <a:t>Take mx logs and mx summarize first — then mx clean.</a:t>
-            </a:r>
-          </a:p>
-          <a:p>
-            <a:pPr>
-              <a:defRPr sz="1600"/>
-            </a:pPr>
-            <a:r>
-              <a:t>mx clean refuses to report success unless the directory is verifiably gone and no agent still runs.</a:t>
-            </a:r>
-          </a:p>
-          <a:p>
-            <a:pPr>
-              <a:defRPr sz="1600"/>
-            </a:pPr>
-            <a:r>
-              <a:t>Agents flush the current interval on SIGTERM — stopping doesn't discard the last seconds of data.</a:t>
+              <a:defRPr sz="1400"/>
+            </a:pPr>
+            <a:r>
+              <a:t>• The last rate that delivers cleanly is the fleet's sustainable packet rate.</a:t>
+            </a:r>
+          </a:p>
+        </p:txBody>
+      </p:sp>
+      <p:sp>
+        <p:nvSpPr>
+          <p:cNvPr id="5" name="TextBox 4"/>
+          <p:cNvSpPr txBox="1"/>
+          <p:nvPr/>
+        </p:nvSpPr>
+        <p:spPr>
+          <a:xfrm>
+            <a:off x="822960" y="2862072"/>
+            <a:ext cx="10607040" cy="621792"/>
+          </a:xfrm>
+          <a:prstGeom prst="rect">
+            <a:avLst/>
+          </a:prstGeom>
+          <a:noFill/>
+        </p:spPr>
+        <p:txBody>
+          <a:bodyPr wrap="square">
+            <a:spAutoFit/>
+          </a:bodyPr>
+          <a:lstStyle/>
+          <a:p>
+            <a:pPr>
+              <a:defRPr sz="1400"/>
+            </a:pPr>
+            <a:r>
+              <a:t>• Two warning signs, in the order they appear: ① p99 latency lifts away from the median — queues are filling; ② DELIVERED falls behind REQUESTS — something is now dropping.</a:t>
+            </a:r>
+          </a:p>
+        </p:txBody>
+      </p:sp>
+      <p:sp>
+        <p:nvSpPr>
+          <p:cNvPr id="6" name="TextBox 5"/>
+          <p:cNvSpPr txBox="1"/>
+          <p:nvPr/>
+        </p:nvSpPr>
+        <p:spPr>
+          <a:xfrm>
+            <a:off x="822960" y="3557016"/>
+            <a:ext cx="10607040" cy="621792"/>
+          </a:xfrm>
+          <a:prstGeom prst="rect">
+            <a:avLst/>
+          </a:prstGeom>
+          <a:noFill/>
+        </p:spPr>
+        <p:txBody>
+          <a:bodyPr wrap="square">
+            <a:spAutoFit/>
+          </a:bodyPr>
+          <a:lstStyle/>
+          <a:p>
+            <a:pPr>
+              <a:defRPr sz="1400"/>
+            </a:pPr>
+            <a:r>
+              <a:t>• In a hurry? --pps max sends unpaced and finds the ceiling fastest — but tells you less about where the comfortable limit is.</a:t>
             </a:r>
           </a:p>
         </p:txBody>
@@ -6803,27 +8783,67 @@
           <a:bodyPr/>
           <a:lstStyle/>
           <a:p>
-            <a:r>
-              <a:t>Part 3 — netmesh</a:t>
-            </a:r>
-          </a:p>
-        </p:txBody>
-      </p:sp>
-      <p:sp>
-        <p:nvSpPr>
-          <p:cNvPr id="3" name="Text Placeholder 2"/>
-          <p:cNvSpPr>
-            <a:spLocks noGrp="1"/>
-          </p:cNvSpPr>
-          <p:nvPr>
-            <p:ph type="body" idx="1"/>
-          </p:nvPr>
-        </p:nvSpPr>
-        <p:spPr/>
-        <p:txBody>
-          <a:bodyPr/>
-          <a:lstStyle/>
-          <a:p/>
+            <a:pPr>
+              <a:defRPr sz="2800" b="1">
+                <a:solidFill>
+                  <a:srgbClr val="1C2B3A"/>
+                </a:solidFill>
+              </a:defRPr>
+            </a:pPr>
+            <a:r>
+              <a:t>Big fleets</a:t>
+            </a:r>
+          </a:p>
+        </p:txBody>
+      </p:sp>
+      <p:sp>
+        <p:nvSpPr>
+          <p:cNvPr id="3" name="Content Placeholder 2"/>
+          <p:cNvSpPr>
+            <a:spLocks noGrp="1"/>
+          </p:cNvSpPr>
+          <p:nvPr>
+            <p:ph idx="1"/>
+          </p:nvPr>
+        </p:nvSpPr>
+        <p:spPr/>
+        <p:txBody>
+          <a:bodyPr wrap="square">
+            <a:normAutofit/>
+          </a:bodyPr>
+          <a:lstStyle/>
+          <a:p>
+            <a:pPr>
+              <a:defRPr sz="1600"/>
+            </a:pPr>
+            <a:r>
+              <a:t>Small fleet? The default full mesh is perfect — every pair, all the time.</a:t>
+            </a:r>
+          </a:p>
+          <a:p>
+            <a:pPr>
+              <a:defRPr sz="1600"/>
+            </a:pPr>
+            <a:r>
+              <a:t>Big fleet? --peers 8: each host talks to exactly 8 shuffled peers instead of all N−1. Every host still carries identical load, the whole fabric is still exercised — with 8 connections per host instead of hundreds.</a:t>
+            </a:r>
+          </a:p>
+          <a:p>
+            <a:pPr>
+              <a:defRPr sz="1600"/>
+            </a:pPr>
+            <a:r>
+              <a:t>Still need every pair checked? Add --dwell 60: the 8 peers rotate on a schedule until every pair has been measured — per-host load never changes, and no coordination traffic is needed.</a:t>
+            </a:r>
+          </a:p>
+          <a:p>
+            <a:pPr>
+              <a:defRPr sz="1600"/>
+            </a:pPr>
+            <a:r>
+              <a:t>Don't want to think about any of this? mx hints — tell it your goal, it prints the command.</a:t>
+            </a:r>
+          </a:p>
         </p:txBody>
       </p:sp>
     </p:spTree>
@@ -6867,73 +8887,295 @@
               </a:defRPr>
             </a:pPr>
             <a:r>
-              <a:t>What it is, and how it fits the grouping</a:t>
-            </a:r>
-          </a:p>
-        </p:txBody>
-      </p:sp>
-      <p:sp>
-        <p:nvSpPr>
-          <p:cNvPr id="3" name="Content Placeholder 2"/>
-          <p:cNvSpPr>
-            <a:spLocks noGrp="1"/>
-          </p:cNvSpPr>
-          <p:nvPr>
-            <p:ph idx="1"/>
-          </p:nvPr>
-        </p:nvSpPr>
-        <p:spPr/>
+              <a:t>Tutorial — your first mx run</a:t>
+            </a:r>
+          </a:p>
+        </p:txBody>
+      </p:sp>
+      <p:sp>
+        <p:nvSpPr>
+          <p:cNvPr id="3" name="TextBox 2"/>
+          <p:cNvSpPr txBox="1"/>
+          <p:nvPr/>
+        </p:nvSpPr>
+        <p:spPr>
+          <a:xfrm>
+            <a:off x="640080" y="1234440"/>
+            <a:ext cx="10972800" cy="4178808"/>
+          </a:xfrm>
+          <a:prstGeom prst="rect">
+            <a:avLst/>
+          </a:prstGeom>
+          <a:noFill/>
+        </p:spPr>
+        <p:txBody>
+          <a:bodyPr wrap="none">
+            <a:spAutoFit/>
+          </a:bodyPr>
+          <a:lstStyle/>
+          <a:p>
+            <a:pPr>
+              <a:defRPr sz="1300">
+                <a:solidFill>
+                  <a:srgbClr val="24354A"/>
+                </a:solidFill>
+                <a:latin typeface="Consolas"/>
+              </a:defRPr>
+            </a:pPr>
+            <a:r>
+              <a:t># 0. install on the machine you drive from</a:t>
+            </a:r>
+          </a:p>
+          <a:p>
+            <a:pPr>
+              <a:defRPr sz="1300">
+                <a:solidFill>
+                  <a:srgbClr val="24354A"/>
+                </a:solidFill>
+                <a:latin typeface="Consolas"/>
+              </a:defRPr>
+            </a:pPr>
+            <a:r>
+              <a:t>#    (servers need only python3 + your ssh key)</a:t>
+            </a:r>
+          </a:p>
+          <a:p>
+            <a:pPr>
+              <a:defRPr sz="1300">
+                <a:solidFill>
+                  <a:srgbClr val="24354A"/>
+                </a:solidFill>
+                <a:latin typeface="Consolas"/>
+              </a:defRPr>
+            </a:pPr>
+            <a:r>
+              <a:t>pip install matrix-orchestrator</a:t>
+            </a:r>
+          </a:p>
+          <a:p>
+            <a:pPr>
+              <a:defRPr sz="1300">
+                <a:solidFill>
+                  <a:srgbClr val="24354A"/>
+                </a:solidFill>
+                <a:latin typeface="Consolas"/>
+              </a:defRPr>
+            </a:pPr>
+            <a:r>
+              <a:t> </a:t>
+            </a:r>
+          </a:p>
+          <a:p>
+            <a:pPr>
+              <a:defRPr sz="1300">
+                <a:solidFill>
+                  <a:srgbClr val="24354A"/>
+                </a:solidFill>
+                <a:latin typeface="Consolas"/>
+              </a:defRPr>
+            </a:pPr>
+            <a:r>
+              <a:t># 1. servers, one per line</a:t>
+            </a:r>
+          </a:p>
+          <a:p>
+            <a:pPr>
+              <a:defRPr sz="1300">
+                <a:solidFill>
+                  <a:srgbClr val="24354A"/>
+                </a:solidFill>
+                <a:latin typeface="Consolas"/>
+              </a:defRPr>
+            </a:pPr>
+            <a:r>
+              <a:t>printf '%s\n' 10.0.0.10 10.0.0.11 10.0.0.12 &gt; servers.txt</a:t>
+            </a:r>
+          </a:p>
+          <a:p>
+            <a:pPr>
+              <a:defRPr sz="1300">
+                <a:solidFill>
+                  <a:srgbClr val="24354A"/>
+                </a:solidFill>
+                <a:latin typeface="Consolas"/>
+              </a:defRPr>
+            </a:pPr>
+            <a:r>
+              <a:t> </a:t>
+            </a:r>
+          </a:p>
+          <a:p>
+            <a:pPr>
+              <a:defRPr sz="1300">
+                <a:solidFill>
+                  <a:srgbClr val="24354A"/>
+                </a:solidFill>
+                <a:latin typeface="Consolas"/>
+              </a:defRPr>
+            </a:pPr>
+            <a:r>
+              <a:t># 2. preflight the fleet: ssh, python, file-descriptor limits</a:t>
+            </a:r>
+          </a:p>
+          <a:p>
+            <a:pPr>
+              <a:defRPr sz="1300">
+                <a:solidFill>
+                  <a:srgbClr val="24354A"/>
+                </a:solidFill>
+                <a:latin typeface="Consolas"/>
+              </a:defRPr>
+            </a:pPr>
+            <a:r>
+              <a:t>mx doctor</a:t>
+            </a:r>
+          </a:p>
+          <a:p>
+            <a:pPr>
+              <a:defRPr sz="1300">
+                <a:solidFill>
+                  <a:srgbClr val="24354A"/>
+                </a:solidFill>
+                <a:latin typeface="Consolas"/>
+              </a:defRPr>
+            </a:pPr>
+            <a:r>
+              <a:t> </a:t>
+            </a:r>
+          </a:p>
+          <a:p>
+            <a:pPr>
+              <a:defRPr sz="1300">
+                <a:solidFill>
+                  <a:srgbClr val="24354A"/>
+                </a:solidFill>
+                <a:latin typeface="Consolas"/>
+              </a:defRPr>
+            </a:pPr>
+            <a:r>
+              <a:t># 3. describe the traffic: every pair, 20k requests/sec</a:t>
+            </a:r>
+          </a:p>
+          <a:p>
+            <a:pPr>
+              <a:defRPr sz="1300">
+                <a:solidFill>
+                  <a:srgbClr val="24354A"/>
+                </a:solidFill>
+                <a:latin typeface="Consolas"/>
+              </a:defRPr>
+            </a:pPr>
+            <a:r>
+              <a:t>mx gen --servers servers.txt --pps 20000</a:t>
+            </a:r>
+          </a:p>
+          <a:p>
+            <a:pPr>
+              <a:defRPr sz="1300">
+                <a:solidFill>
+                  <a:srgbClr val="24354A"/>
+                </a:solidFill>
+                <a:latin typeface="Consolas"/>
+              </a:defRPr>
+            </a:pPr>
+            <a:r>
+              <a:t> </a:t>
+            </a:r>
+          </a:p>
+          <a:p>
+            <a:pPr>
+              <a:defRPr sz="1300">
+                <a:solidFill>
+                  <a:srgbClr val="24354A"/>
+                </a:solidFill>
+                <a:latin typeface="Consolas"/>
+              </a:defRPr>
+            </a:pPr>
+            <a:r>
+              <a:t># 4. sanity-check it against the hardware</a:t>
+            </a:r>
+          </a:p>
+          <a:p>
+            <a:pPr>
+              <a:defRPr sz="1300">
+                <a:solidFill>
+                  <a:srgbClr val="24354A"/>
+                </a:solidFill>
+                <a:latin typeface="Consolas"/>
+              </a:defRPr>
+            </a:pPr>
+            <a:r>
+              <a:t>mx check --nic-gbps 10</a:t>
+            </a:r>
+          </a:p>
+          <a:p>
+            <a:pPr>
+              <a:defRPr sz="1300">
+                <a:solidFill>
+                  <a:srgbClr val="24354A"/>
+                </a:solidFill>
+                <a:latin typeface="Consolas"/>
+              </a:defRPr>
+            </a:pPr>
+            <a:r>
+              <a:t> </a:t>
+            </a:r>
+          </a:p>
+          <a:p>
+            <a:pPr>
+              <a:defRPr sz="1300">
+                <a:solidFill>
+                  <a:srgbClr val="24354A"/>
+                </a:solidFill>
+                <a:latin typeface="Consolas"/>
+              </a:defRPr>
+            </a:pPr>
+            <a:r>
+              <a:t># 5. run for 60 seconds: deploy, run, summarize, stop</a:t>
+            </a:r>
+          </a:p>
+          <a:p>
+            <a:pPr>
+              <a:defRPr sz="1300">
+                <a:solidFill>
+                  <a:srgbClr val="24354A"/>
+                </a:solidFill>
+                <a:latin typeface="Consolas"/>
+              </a:defRPr>
+            </a:pPr>
+            <a:r>
+              <a:t>mx run --for 60</a:t>
+            </a:r>
+          </a:p>
+        </p:txBody>
+      </p:sp>
+      <p:sp>
+        <p:nvSpPr>
+          <p:cNvPr id="4" name="TextBox 3"/>
+          <p:cNvSpPr txBox="1"/>
+          <p:nvPr/>
+        </p:nvSpPr>
+        <p:spPr>
+          <a:xfrm>
+            <a:off x="822960" y="5550408"/>
+            <a:ext cx="10607040" cy="310896"/>
+          </a:xfrm>
+          <a:prstGeom prst="rect">
+            <a:avLst/>
+          </a:prstGeom>
+          <a:noFill/>
+        </p:spPr>
         <p:txBody>
           <a:bodyPr wrap="square">
-            <a:normAutofit/>
+            <a:spAutoFit/>
           </a:bodyPr>
           <a:lstStyle/>
           <a:p>
             <a:pPr>
-              <a:defRPr sz="1600"/>
-            </a:pPr>
-            <a:r>
-              <a:t>One of binnacle's eight diagnostic tools (pip install binnacle); its question: "is it the network, and which link is sick?"</a:t>
-            </a:r>
-          </a:p>
-          <a:p>
-            <a:pPr>
-              <a:defRPr sz="1600"/>
-            </a:pPr>
-            <a:r>
-              <a:t>Measures RTT, jitter, loss and path MTU between machines when nothing else is running — the idle baseline.</a:t>
-            </a:r>
-          </a:p>
-          <a:p>
-            <a:pPr>
-              <a:defRPr sz="1600"/>
-            </a:pPr>
-            <a:r>
-              <a:t>The gap it fills: iperf_orchestrator = bandwidth under load; mx = pps under load. Neither says what the network does idle — and that's the baseline both numbers must be read against.</a:t>
-            </a:r>
-          </a:p>
-          <a:p>
-            <a:pPr>
-              <a:defRPr sz="1600"/>
-            </a:pPr>
-            <a:r>
-              <a:t>Deliberately the cheapest of the three: ~10 small packets/s per pair — safe on production during an incident.</a:t>
-            </a:r>
-          </a:p>
-          <a:p>
-            <a:pPr>
-              <a:defRPr sz="1600"/>
-            </a:pPr>
-            <a:r>
-              <a:t>Two hosts and one line is the design centre; mesh files, grids and layered scale-up exist but a two-box user never sees them.</a:t>
-            </a:r>
-          </a:p>
-          <a:p>
-            <a:pPr>
-              <a:defRPr sz="1600"/>
-            </a:pPr>
-            <a:r>
-              <a:t>Why run it: before blaming the network in an incident; before commissioning load tests; as a recurring health probe; and around a load test (--baseline) to see what the load does to latency.</a:t>
+              <a:defRPr sz="1400"/>
+            </a:pPr>
+            <a:r>
+              <a:t>• The summary prints totals, the worst hosts and flows, and what to do next.</a:t>
             </a:r>
           </a:p>
         </p:txBody>
@@ -6979,81 +9221,222 @@
               </a:defRPr>
             </a:pPr>
             <a:r>
-              <a:t>How it probes (why not ping)</a:t>
-            </a:r>
-          </a:p>
-        </p:txBody>
-      </p:sp>
-      <p:sp>
-        <p:nvSpPr>
-          <p:cNvPr id="3" name="Content Placeholder 2"/>
-          <p:cNvSpPr>
-            <a:spLocks noGrp="1"/>
-          </p:cNvSpPr>
-          <p:nvPr>
-            <p:ph idx="1"/>
-          </p:nvPr>
-        </p:nvSpPr>
-        <p:spPr/>
+              <a:t>Tutorial — watching, tuning, cleaning up</a:t>
+            </a:r>
+          </a:p>
+        </p:txBody>
+      </p:sp>
+      <p:sp>
+        <p:nvSpPr>
+          <p:cNvPr id="3" name="TextBox 2"/>
+          <p:cNvSpPr txBox="1"/>
+          <p:nvPr/>
+        </p:nvSpPr>
+        <p:spPr>
+          <a:xfrm>
+            <a:off x="640080" y="1234440"/>
+            <a:ext cx="10972800" cy="2423160"/>
+          </a:xfrm>
+          <a:prstGeom prst="rect">
+            <a:avLst/>
+          </a:prstGeom>
+          <a:noFill/>
+        </p:spPr>
+        <p:txBody>
+          <a:bodyPr wrap="none">
+            <a:spAutoFit/>
+          </a:bodyPr>
+          <a:lstStyle/>
+          <a:p>
+            <a:pPr>
+              <a:defRPr sz="1300">
+                <a:solidFill>
+                  <a:srgbClr val="24354A"/>
+                </a:solidFill>
+                <a:latin typeface="Consolas"/>
+              </a:defRPr>
+            </a:pPr>
+            <a:r>
+              <a:t>mx status --watch 5                  # live ticker while it runs</a:t>
+            </a:r>
+          </a:p>
+          <a:p>
+            <a:pPr>
+              <a:defRPr sz="1300">
+                <a:solidFill>
+                  <a:srgbClr val="24354A"/>
+                </a:solidFill>
+                <a:latin typeface="Consolas"/>
+              </a:defRPr>
+            </a:pPr>
+            <a:r>
+              <a:t>mx summarize                         # anytime -- reports accumulate</a:t>
+            </a:r>
+          </a:p>
+          <a:p>
+            <a:pPr>
+              <a:defRPr sz="1300">
+                <a:solidFill>
+                  <a:srgbClr val="24354A"/>
+                </a:solidFill>
+                <a:latin typeface="Consolas"/>
+              </a:defRPr>
+            </a:pPr>
+            <a:r>
+              <a:t>mx summarize --grid g                # N x N grids for a spreadsheet</a:t>
+            </a:r>
+          </a:p>
+          <a:p>
+            <a:pPr>
+              <a:defRPr sz="1300">
+                <a:solidFill>
+                  <a:srgbClr val="24354A"/>
+                </a:solidFill>
+                <a:latin typeface="Consolas"/>
+              </a:defRPr>
+            </a:pPr>
+            <a:r>
+              <a:t> </a:t>
+            </a:r>
+          </a:p>
+          <a:p>
+            <a:pPr>
+              <a:defRPr sz="1300">
+                <a:solidFill>
+                  <a:srgbClr val="24354A"/>
+                </a:solidFill>
+                <a:latin typeface="Consolas"/>
+              </a:defRPr>
+            </a:pPr>
+            <a:r>
+              <a:t>vi matrix.csv &amp;&amp; mx start            # change the traffic mid-flight</a:t>
+            </a:r>
+          </a:p>
+          <a:p>
+            <a:pPr>
+              <a:defRPr sz="1300">
+                <a:solidFill>
+                  <a:srgbClr val="24354A"/>
+                </a:solidFill>
+                <a:latin typeface="Consolas"/>
+              </a:defRPr>
+            </a:pPr>
+            <a:r>
+              <a:t>mx gen --servers servers.txt --pps 50000 &amp;&amp; mx run --for 120   # ramp up</a:t>
+            </a:r>
+          </a:p>
+          <a:p>
+            <a:pPr>
+              <a:defRPr sz="1300">
+                <a:solidFill>
+                  <a:srgbClr val="24354A"/>
+                </a:solidFill>
+                <a:latin typeface="Consolas"/>
+              </a:defRPr>
+            </a:pPr>
+            <a:r>
+              <a:t> </a:t>
+            </a:r>
+          </a:p>
+          <a:p>
+            <a:pPr>
+              <a:defRPr sz="1300">
+                <a:solidFill>
+                  <a:srgbClr val="24354A"/>
+                </a:solidFill>
+                <a:latin typeface="Consolas"/>
+              </a:defRPr>
+            </a:pPr>
+            <a:r>
+              <a:t>mx logs                              # keep the agent logs</a:t>
+            </a:r>
+          </a:p>
+          <a:p>
+            <a:pPr>
+              <a:defRPr sz="1300">
+                <a:solidFill>
+                  <a:srgbClr val="24354A"/>
+                </a:solidFill>
+                <a:latin typeface="Consolas"/>
+              </a:defRPr>
+            </a:pPr>
+            <a:r>
+              <a:t>mx stop                              # pause -- reports stay on hosts</a:t>
+            </a:r>
+          </a:p>
+          <a:p>
+            <a:pPr>
+              <a:defRPr sz="1300">
+                <a:solidFill>
+                  <a:srgbClr val="24354A"/>
+                </a:solidFill>
+                <a:latin typeface="Consolas"/>
+              </a:defRPr>
+            </a:pPr>
+            <a:r>
+              <a:t>mx clean                             # done -- delete every trace, verified</a:t>
+            </a:r>
+          </a:p>
+        </p:txBody>
+      </p:sp>
+      <p:sp>
+        <p:nvSpPr>
+          <p:cNvPr id="4" name="TextBox 3"/>
+          <p:cNvSpPr txBox="1"/>
+          <p:nvPr/>
+        </p:nvSpPr>
+        <p:spPr>
+          <a:xfrm>
+            <a:off x="822960" y="3794760"/>
+            <a:ext cx="10607040" cy="310896"/>
+          </a:xfrm>
+          <a:prstGeom prst="rect">
+            <a:avLst/>
+          </a:prstGeom>
+          <a:noFill/>
+        </p:spPr>
         <p:txBody>
           <a:bodyPr wrap="square">
-            <a:normAutofit/>
+            <a:spAutoFit/>
           </a:bodyPr>
           <a:lstStyle/>
           <a:p>
             <a:pPr>
-              <a:defRPr sz="1600"/>
-            </a:pPr>
-            <a:r>
-              <a:t>UDP echoes between temporary agents — the only approach giving all four:</a:t>
-            </a:r>
-          </a:p>
-          <a:p>
-            <a:pPr lvl="1">
               <a:defRPr sz="1400"/>
             </a:pPr>
             <a:r>
-              <a:t>No root — ordinary unprivileged UDP sockets both ends.</a:t>
-            </a:r>
-          </a:p>
-          <a:p>
-            <a:pPr lvl="1">
+              <a:t>• stop and clean are different on purpose: stop keeps the evidence, clean removes it and *proves* it's gone.</a:t>
+            </a:r>
+          </a:p>
+        </p:txBody>
+      </p:sp>
+      <p:sp>
+        <p:nvSpPr>
+          <p:cNvPr id="5" name="TextBox 4"/>
+          <p:cNvSpPr txBox="1"/>
+          <p:nvPr/>
+        </p:nvSpPr>
+        <p:spPr>
+          <a:xfrm>
+            <a:off x="822960" y="4178808"/>
+            <a:ext cx="10607040" cy="310896"/>
+          </a:xfrm>
+          <a:prstGeom prst="rect">
+            <a:avLst/>
+          </a:prstGeom>
+          <a:noFill/>
+        </p:spPr>
+        <p:txBody>
+          <a:bodyPr wrap="square">
+            <a:spAutoFit/>
+          </a:bodyPr>
+          <a:lstStyle/>
+          <a:p>
+            <a:pPr>
               <a:defRPr sz="1400"/>
             </a:pPr>
             <a:r>
-              <a:t>Exact RTT, one clock — sender's own monotonic stamp echoed back untouched; no NTP assumptions.</a:t>
-            </a:r>
-          </a:p>
-          <a:p>
-            <a:pPr lvl="1">
-              <a:defRPr sz="1400"/>
-            </a:pPr>
-            <a:r>
-              <a:t>Loss split into forward/return legs — the responder independently counts what arrived. Not available from ping.</a:t>
-            </a:r>
-          </a:p>
-          <a:p>
-            <a:pPr lvl="1">
-              <a:defRPr sz="1400"/>
-            </a:pPr>
-            <a:r>
-              <a:t>Measures the data plane — ICMP is answered by router control planes (rate-limited, deprioritized), so it systematically lies about what application traffic sees.</a:t>
-            </a:r>
-          </a:p>
-          <a:p>
-            <a:pPr>
-              <a:defRPr sz="1600"/>
-            </a:pPr>
-            <a:r>
-              <a:t>One-way delay deliberately not reported — without PTP the clock offset would swamp the microseconds that matter. Instead: two separate round trips (A→B timed by A, B→A timed by B), compared — every number quoted is one that is actually true.</a:t>
-            </a:r>
-          </a:p>
-          <a:p>
-            <a:pPr>
-              <a:defRPr sz="1600"/>
-            </a:pPr>
-            <a:r>
-              <a:t>Can't deploy an agent (VIP, router, appliance)? Prefix with ~ → probed with ping, but segregated as ONE-SIDED in the report because those rows carry materially less.</a:t>
+              <a:t>• Everything on a server lives in one directory — no packages, no services, nothing to un-install.</a:t>
             </a:r>
           </a:p>
         </p:txBody>
@@ -7091,224 +9474,27 @@
           <a:bodyPr/>
           <a:lstStyle/>
           <a:p>
-            <a:pPr>
-              <a:defRPr sz="2800" b="1">
-                <a:solidFill>
-                  <a:srgbClr val="1C2B3A"/>
-                </a:solidFill>
-              </a:defRPr>
-            </a:pPr>
-            <a:r>
-              <a:t>How to run it</a:t>
-            </a:r>
-          </a:p>
-        </p:txBody>
-      </p:sp>
-      <p:sp>
-        <p:nvSpPr>
-          <p:cNvPr id="3" name="TextBox 2"/>
-          <p:cNvSpPr txBox="1"/>
-          <p:nvPr/>
-        </p:nvSpPr>
-        <p:spPr>
-          <a:xfrm>
-            <a:off x="640080" y="1234440"/>
-            <a:ext cx="10972800" cy="1764792"/>
-          </a:xfrm>
-          <a:prstGeom prst="rect">
-            <a:avLst/>
-          </a:prstGeom>
-          <a:noFill/>
-        </p:spPr>
-        <p:txBody>
-          <a:bodyPr wrap="none">
-            <a:spAutoFit/>
-          </a:bodyPr>
-          <a:lstStyle/>
-          <a:p>
-            <a:pPr>
-              <a:defRPr sz="1300">
-                <a:solidFill>
-                  <a:srgbClr val="24354A"/>
-                </a:solidFill>
-                <a:latin typeface="Consolas"/>
-              </a:defRPr>
-            </a:pPr>
-            <a:r>
-              <a:t>netmesh selftest                        # prove it works here first (loopback, no ssh)</a:t>
-            </a:r>
-          </a:p>
-          <a:p>
-            <a:pPr>
-              <a:defRPr sz="1300">
-                <a:solidFill>
-                  <a:srgbClr val="24354A"/>
-                </a:solidFill>
-                <a:latin typeface="Consolas"/>
-              </a:defRPr>
-            </a:pPr>
-            <a:r>
-              <a:t>netmesh check web01 db01                # one-shot: gen, deploy, probe, summarize, clean</a:t>
-            </a:r>
-          </a:p>
-          <a:p>
-            <a:pPr>
-              <a:defRPr sz="1300">
-                <a:solidFill>
-                  <a:srgbClr val="24354A"/>
-                </a:solidFill>
-                <a:latin typeface="Consolas"/>
-              </a:defRPr>
-            </a:pPr>
-            <a:r>
-              <a:t>netmesh check web01 db01 --for 60</a:t>
-            </a:r>
-          </a:p>
-          <a:p>
-            <a:pPr>
-              <a:defRPr sz="1300">
-                <a:solidFill>
-                  <a:srgbClr val="24354A"/>
-                </a:solidFill>
-                <a:latin typeface="Consolas"/>
-              </a:defRPr>
-            </a:pPr>
-            <a:r>
-              <a:t>netmesh gen --servers prod.txt          # mesh file for repeat runs</a:t>
-            </a:r>
-          </a:p>
-          <a:p>
-            <a:pPr>
-              <a:defRPr sz="1300">
-                <a:solidFill>
-                  <a:srgbClr val="24354A"/>
-                </a:solidFill>
-                <a:latin typeface="Consolas"/>
-              </a:defRPr>
-            </a:pPr>
-            <a:r>
-              <a:t>netmesh run --for 300 --grid grids/</a:t>
-            </a:r>
-          </a:p>
-          <a:p>
-            <a:pPr>
-              <a:defRPr sz="1300">
-                <a:solidFill>
-                  <a:srgbClr val="24354A"/>
-                </a:solidFill>
-                <a:latin typeface="Consolas"/>
-              </a:defRPr>
-            </a:pPr>
-            <a:r>
-              <a:t>netmesh check web03 db01 --flows 8      # sweep source ports across a LAG/ECMP bundle</a:t>
-            </a:r>
-          </a:p>
-          <a:p>
-            <a:pPr>
-              <a:defRPr sz="1300">
-                <a:solidFill>
-                  <a:srgbClr val="24354A"/>
-                </a:solidFill>
-                <a:latin typeface="Consolas"/>
-              </a:defRPr>
-            </a:pPr>
-            <a:r>
-              <a:t>netmesh run --baseline 20 -- ./iperf_orchestrator.sh all   # idle first, then probe under load</a:t>
-            </a:r>
-          </a:p>
-        </p:txBody>
-      </p:sp>
-      <p:sp>
-        <p:nvSpPr>
-          <p:cNvPr id="4" name="TextBox 3"/>
-          <p:cNvSpPr txBox="1"/>
-          <p:nvPr/>
-        </p:nvSpPr>
-        <p:spPr>
-          <a:xfrm>
-            <a:off x="822960" y="3136392"/>
-            <a:ext cx="10607040" cy="621792"/>
-          </a:xfrm>
-          <a:prstGeom prst="rect">
-            <a:avLst/>
-          </a:prstGeom>
-          <a:noFill/>
-        </p:spPr>
-        <p:txBody>
-          <a:bodyPr wrap="square">
-            <a:spAutoFit/>
-          </a:bodyPr>
-          <a:lstStyle/>
-          <a:p>
-            <a:pPr>
-              <a:defRPr sz="1400"/>
-            </a:pPr>
-            <a:r>
-              <a:t>• Same verb set as mx (gen/start/status/summarize/stop/clean + run/collect/logs/paths/doctor); the mesh file shares mx's matrix grammar — learn one, know the other.</a:t>
-            </a:r>
-          </a:p>
-        </p:txBody>
-      </p:sp>
-      <p:sp>
-        <p:nvSpPr>
-          <p:cNvPr id="5" name="TextBox 4"/>
-          <p:cNvSpPr txBox="1"/>
-          <p:nvPr/>
-        </p:nvSpPr>
-        <p:spPr>
-          <a:xfrm>
-            <a:off x="822960" y="3831336"/>
-            <a:ext cx="10607040" cy="1243584"/>
-          </a:xfrm>
-          <a:prstGeom prst="rect">
-            <a:avLst/>
-          </a:prstGeom>
-          <a:noFill/>
-        </p:spPr>
-        <p:txBody>
-          <a:bodyPr wrap="square">
-            <a:spAutoFit/>
-          </a:bodyPr>
-          <a:lstStyle/>
-          <a:p>
-            <a:pPr>
-              <a:defRPr sz="1400"/>
-            </a:pPr>
-            <a:r>
-              <a:t>• --flows N matters: one source port = one 5-tuple = one path through a LAG/ECMP bundle — a sick member is hit or missed by luck (the fault that never reproduces). N buckets split the rate (never multiply it) and are compared against the median bucket: "port 40008 sees p50 4.1 ms where the median flow sees 142 µs — same pair, same instant, so what differs is the bundle member."</a:t>
-            </a:r>
-          </a:p>
-        </p:txBody>
-      </p:sp>
-      <p:sp>
-        <p:nvSpPr>
-          <p:cNvPr id="6" name="TextBox 5"/>
-          <p:cNvSpPr txBox="1"/>
-          <p:nvPr/>
-        </p:nvSpPr>
-        <p:spPr>
-          <a:xfrm>
-            <a:off x="822960" y="5148072"/>
-            <a:ext cx="10607040" cy="310896"/>
-          </a:xfrm>
-          <a:prstGeom prst="rect">
-            <a:avLst/>
-          </a:prstGeom>
-          <a:noFill/>
-        </p:spPr>
-        <p:txBody>
-          <a:bodyPr wrap="square">
-            <a:spAutoFit/>
-          </a:bodyPr>
-          <a:lstStyle/>
-          <a:p>
-            <a:pPr>
-              <a:defRPr sz="1400"/>
-            </a:pPr>
-            <a:r>
-              <a:t>• IPv6: refused by netmesh (the rest of binnacle's list grammar supports it).</a:t>
-            </a:r>
-          </a:p>
+            <a:r>
+              <a:t>Part 3 — netmesh</a:t>
+            </a:r>
+          </a:p>
+        </p:txBody>
+      </p:sp>
+      <p:sp>
+        <p:nvSpPr>
+          <p:cNvPr id="3" name="Text Placeholder 2"/>
+          <p:cNvSpPr>
+            <a:spLocks noGrp="1"/>
+          </p:cNvSpPr>
+          <p:nvPr>
+            <p:ph type="body" idx="1"/>
+          </p:nvPr>
+        </p:nvSpPr>
+        <p:spPr/>
+        <p:txBody>
+          <a:bodyPr/>
+          <a:lstStyle/>
+          <a:p/>
         </p:txBody>
       </p:sp>
     </p:spTree>
@@ -7352,89 +9538,365 @@
               </a:defRPr>
             </a:pPr>
             <a:r>
-              <a:t>Getting reports &amp; interpreting</a:t>
-            </a:r>
-          </a:p>
-        </p:txBody>
-      </p:sp>
-      <p:sp>
-        <p:nvSpPr>
-          <p:cNvPr id="3" name="Content Placeholder 2"/>
-          <p:cNvSpPr>
-            <a:spLocks noGrp="1"/>
-          </p:cNvSpPr>
-          <p:nvPr>
-            <p:ph idx="1"/>
-          </p:nvPr>
-        </p:nvSpPr>
-        <p:spPr/>
+              <a:t>The baseline the load tests need</a:t>
+            </a:r>
+          </a:p>
+        </p:txBody>
+      </p:sp>
+      <p:sp>
+        <p:nvSpPr>
+          <p:cNvPr id="3" name="Rounded Rectangle 2"/>
+          <p:cNvSpPr/>
+          <p:nvPr/>
+        </p:nvSpPr>
+        <p:spPr>
+          <a:xfrm>
+            <a:off x="640080" y="1234440"/>
+            <a:ext cx="3401568" cy="914400"/>
+          </a:xfrm>
+          <a:prstGeom prst="roundRect">
+            <a:avLst/>
+          </a:prstGeom>
+          <a:solidFill>
+            <a:srgbClr val="3D8B4F"/>
+          </a:solidFill>
+          <a:ln>
+            <a:noFill/>
+          </a:ln>
+        </p:spPr>
+        <p:style>
+          <a:lnRef idx="1">
+            <a:schemeClr val="accent1"/>
+          </a:lnRef>
+          <a:fillRef idx="3">
+            <a:schemeClr val="accent1"/>
+          </a:fillRef>
+          <a:effectRef idx="2">
+            <a:schemeClr val="accent1"/>
+          </a:effectRef>
+          <a:fontRef idx="minor">
+            <a:schemeClr val="lt1"/>
+          </a:fontRef>
+        </p:style>
+        <p:txBody>
+          <a:bodyPr rtlCol="0" anchor="ctr" wrap="square"/>
+          <a:lstStyle/>
+          <a:p>
+            <a:pPr algn="ctr">
+              <a:defRPr sz="1150" b="1">
+                <a:solidFill>
+                  <a:srgbClr val="FFFFFF"/>
+                </a:solidFill>
+                <a:latin typeface="Consolas"/>
+              </a:defRPr>
+            </a:pPr>
+            <a:r>
+              <a:t>netmesh</a:t>
+            </a:r>
+          </a:p>
+          <a:p>
+            <a:pPr>
+              <a:defRPr sz="1000">
+                <a:solidFill>
+                  <a:srgbClr val="F0F3F6"/>
+                </a:solidFill>
+              </a:defRPr>
+            </a:pPr>
+            <a:r>
+              <a:t>IDLE: latency · loss · path MTU</a:t>
+            </a:r>
+          </a:p>
+        </p:txBody>
+      </p:sp>
+      <p:sp>
+        <p:nvSpPr>
+          <p:cNvPr id="4" name="TextBox 3"/>
+          <p:cNvSpPr txBox="1"/>
+          <p:nvPr/>
+        </p:nvSpPr>
+        <p:spPr>
+          <a:xfrm>
+            <a:off x="4041648" y="1490472"/>
+            <a:ext cx="384048" cy="365760"/>
+          </a:xfrm>
+          <a:prstGeom prst="rect">
+            <a:avLst/>
+          </a:prstGeom>
+          <a:noFill/>
+        </p:spPr>
+        <p:txBody>
+          <a:bodyPr wrap="none">
+            <a:spAutoFit/>
+          </a:bodyPr>
+          <a:lstStyle/>
+          <a:p>
+            <a:pPr>
+              <a:defRPr sz="1600" b="1">
+                <a:solidFill>
+                  <a:srgbClr val="3E5C76"/>
+                </a:solidFill>
+              </a:defRPr>
+            </a:pPr>
+            <a:r>
+              <a:t>→</a:t>
+            </a:r>
+          </a:p>
+        </p:txBody>
+      </p:sp>
+      <p:sp>
+        <p:nvSpPr>
+          <p:cNvPr id="5" name="Rounded Rectangle 4"/>
+          <p:cNvSpPr/>
+          <p:nvPr/>
+        </p:nvSpPr>
+        <p:spPr>
+          <a:xfrm>
+            <a:off x="4425696" y="1234440"/>
+            <a:ext cx="3401568" cy="914400"/>
+          </a:xfrm>
+          <a:prstGeom prst="roundRect">
+            <a:avLst/>
+          </a:prstGeom>
+          <a:solidFill>
+            <a:srgbClr val="12897B"/>
+          </a:solidFill>
+          <a:ln>
+            <a:noFill/>
+          </a:ln>
+        </p:spPr>
+        <p:style>
+          <a:lnRef idx="1">
+            <a:schemeClr val="accent1"/>
+          </a:lnRef>
+          <a:fillRef idx="3">
+            <a:schemeClr val="accent1"/>
+          </a:fillRef>
+          <a:effectRef idx="2">
+            <a:schemeClr val="accent1"/>
+          </a:effectRef>
+          <a:fontRef idx="minor">
+            <a:schemeClr val="lt1"/>
+          </a:fontRef>
+        </p:style>
+        <p:txBody>
+          <a:bodyPr rtlCol="0" anchor="ctr" wrap="square"/>
+          <a:lstStyle/>
+          <a:p>
+            <a:pPr algn="ctr">
+              <a:defRPr sz="1150" b="1">
+                <a:solidFill>
+                  <a:srgbClr val="FFFFFF"/>
+                </a:solidFill>
+                <a:latin typeface="Consolas"/>
+              </a:defRPr>
+            </a:pPr>
+            <a:r>
+              <a:t>iperf-orchestrator</a:t>
+            </a:r>
+          </a:p>
+          <a:p>
+            <a:pPr>
+              <a:defRPr sz="1000">
+                <a:solidFill>
+                  <a:srgbClr val="F0F3F6"/>
+                </a:solidFill>
+              </a:defRPr>
+            </a:pPr>
+            <a:r>
+              <a:t>LOADED: TCP bandwidth</a:t>
+            </a:r>
+          </a:p>
+        </p:txBody>
+      </p:sp>
+      <p:sp>
+        <p:nvSpPr>
+          <p:cNvPr id="6" name="TextBox 5"/>
+          <p:cNvSpPr txBox="1"/>
+          <p:nvPr/>
+        </p:nvSpPr>
+        <p:spPr>
+          <a:xfrm>
+            <a:off x="7827264" y="1490472"/>
+            <a:ext cx="384048" cy="365760"/>
+          </a:xfrm>
+          <a:prstGeom prst="rect">
+            <a:avLst/>
+          </a:prstGeom>
+          <a:noFill/>
+        </p:spPr>
+        <p:txBody>
+          <a:bodyPr wrap="none">
+            <a:spAutoFit/>
+          </a:bodyPr>
+          <a:lstStyle/>
+          <a:p>
+            <a:pPr>
+              <a:defRPr sz="1600" b="1">
+                <a:solidFill>
+                  <a:srgbClr val="3E5C76"/>
+                </a:solidFill>
+              </a:defRPr>
+            </a:pPr>
+            <a:r>
+              <a:t>→</a:t>
+            </a:r>
+          </a:p>
+        </p:txBody>
+      </p:sp>
+      <p:sp>
+        <p:nvSpPr>
+          <p:cNvPr id="7" name="Rounded Rectangle 6"/>
+          <p:cNvSpPr/>
+          <p:nvPr/>
+        </p:nvSpPr>
+        <p:spPr>
+          <a:xfrm>
+            <a:off x="8211312" y="1234440"/>
+            <a:ext cx="3401568" cy="914400"/>
+          </a:xfrm>
+          <a:prstGeom prst="roundRect">
+            <a:avLst/>
+          </a:prstGeom>
+          <a:solidFill>
+            <a:srgbClr val="D97C1F"/>
+          </a:solidFill>
+          <a:ln>
+            <a:noFill/>
+          </a:ln>
+        </p:spPr>
+        <p:style>
+          <a:lnRef idx="1">
+            <a:schemeClr val="accent1"/>
+          </a:lnRef>
+          <a:fillRef idx="3">
+            <a:schemeClr val="accent1"/>
+          </a:fillRef>
+          <a:effectRef idx="2">
+            <a:schemeClr val="accent1"/>
+          </a:effectRef>
+          <a:fontRef idx="minor">
+            <a:schemeClr val="lt1"/>
+          </a:fontRef>
+        </p:style>
+        <p:txBody>
+          <a:bodyPr rtlCol="0" anchor="ctr" wrap="square"/>
+          <a:lstStyle/>
+          <a:p>
+            <a:pPr algn="ctr">
+              <a:defRPr sz="1150" b="1">
+                <a:solidFill>
+                  <a:srgbClr val="FFFFFF"/>
+                </a:solidFill>
+                <a:latin typeface="Consolas"/>
+              </a:defRPr>
+            </a:pPr>
+            <a:r>
+              <a:t>mx</a:t>
+            </a:r>
+          </a:p>
+          <a:p>
+            <a:pPr>
+              <a:defRPr sz="1000">
+                <a:solidFill>
+                  <a:srgbClr val="F0F3F6"/>
+                </a:solidFill>
+              </a:defRPr>
+            </a:pPr>
+            <a:r>
+              <a:t>LOADED: packets per second</a:t>
+            </a:r>
+          </a:p>
+        </p:txBody>
+      </p:sp>
+      <p:sp>
+        <p:nvSpPr>
+          <p:cNvPr id="8" name="TextBox 7"/>
+          <p:cNvSpPr txBox="1"/>
+          <p:nvPr/>
+        </p:nvSpPr>
+        <p:spPr>
+          <a:xfrm>
+            <a:off x="822960" y="2350008"/>
+            <a:ext cx="10607040" cy="621792"/>
+          </a:xfrm>
+          <a:prstGeom prst="rect">
+            <a:avLst/>
+          </a:prstGeom>
+          <a:noFill/>
+        </p:spPr>
         <p:txBody>
           <a:bodyPr wrap="square">
-            <a:normAutofit/>
+            <a:spAutoFit/>
           </a:bodyPr>
           <a:lstStyle/>
           <a:p>
             <a:pPr>
-              <a:defRPr sz="1600"/>
-            </a:pPr>
-            <a:r>
-              <a:t>reports/&lt;host&gt;.csv — tidy long format, one row per peer per direction per interval. Blank means "not measured", never zero. --grid DIR writes rtt_p50/rtt_p99/jitter/loss/mtu/asym grids matching mx's layout.</a:t>
-            </a:r>
-          </a:p>
-          <a:p>
-            <a:pPr>
-              <a:defRPr sz="1600"/>
-            </a:pPr>
-            <a:r>
-              <a:t>Headline = median of pair p50s (one sick pair can't move it or hide inside it); worst pairs ranked by p99.</a:t>
-            </a:r>
-          </a:p>
-          <a:p>
-            <a:pPr>
-              <a:defRPr sz="1600"/>
-            </a:pPr>
-            <a:r>
-              <a:t>ASYMMETRY — A→B 8× slower than B→A ⇒ look at A's egress; the return path just proved itself fine. Diagnosis is computed, not canned: slow pairs sharing a source → that host's egress; sharing a destination → its ingress; spanning a group boundary → the path between.</a:t>
-            </a:r>
-          </a:p>
-          <a:p>
-            <a:pPr>
-              <a:defRPr sz="1600"/>
-            </a:pPr>
-            <a:r>
-              <a:t>PATH MTU — four outcomes: confirmed / blackhole (small packets echo, large vanish, no error returns — "small requests work, large transfers hang") / cached / unsupported. Found without root; only an end-to-end echo counts.</a:t>
-            </a:r>
-          </a:p>
-          <a:p>
-            <a:pPr>
-              <a:defRPr sz="1600"/>
-            </a:pPr>
-            <a:r>
-              <a:t>PATH SPREAD (--flows) — one bucket 28.9× the median = a sick LAG/ECMP member, named while the run is fresh.</a:t>
-            </a:r>
-          </a:p>
-          <a:p>
-            <a:pPr>
-              <a:defRPr sz="1600"/>
-            </a:pPr>
-            <a:r>
-              <a:t>UNDER LOAD (--baseline) — p99 210 µs idle → 42 ms loaded: the queue in front of the bottleneck; what everything sharing the path paid for the throughput number. Loss appearing only under load gets its own finding.</a:t>
-            </a:r>
-          </a:p>
-          <a:p>
-            <a:pPr>
-              <a:defRPr sz="1600"/>
-            </a:pPr>
-            <a:r>
-              <a:t>Measurement honesty: flags when a NIC's rx-usecs coalescing timer is the floor you measured (with the ethtool line); agent_cpu_pct ≈ 100 ⇒ you're measuring the tool.</a:t>
-            </a:r>
-          </a:p>
-          <a:p>
-            <a:pPr>
-              <a:defRPr sz="1600"/>
-            </a:pPr>
-            <a:r>
-              <a:t>A clean run says so plainly — "the network is not your problem" — and points at mx / iperf_orchestrator for the load question.</a:t>
+              <a:defRPr sz="1400"/>
+            </a:pPr>
+            <a:r>
+              <a:t>• The load tools tell you what the fabric can *carry*. netmesh tells you what the fabric is *like* when nothing is running — and every loaded number has to be read against that baseline.</a:t>
+            </a:r>
+          </a:p>
+        </p:txBody>
+      </p:sp>
+      <p:sp>
+        <p:nvSpPr>
+          <p:cNvPr id="9" name="TextBox 8"/>
+          <p:cNvSpPr txBox="1"/>
+          <p:nvPr/>
+        </p:nvSpPr>
+        <p:spPr>
+          <a:xfrm>
+            <a:off x="822960" y="3044952"/>
+            <a:ext cx="10607040" cy="621792"/>
+          </a:xfrm>
+          <a:prstGeom prst="rect">
+            <a:avLst/>
+          </a:prstGeom>
+          <a:noFill/>
+        </p:spPr>
+        <p:txBody>
+          <a:bodyPr wrap="square">
+            <a:spAutoFit/>
+          </a:bodyPr>
+          <a:lstStyle/>
+          <a:p>
+            <a:pPr>
+              <a:defRPr sz="1400"/>
+            </a:pPr>
+            <a:r>
+              <a:t>• It measures round-trip time, jitter, loss and path MTU between your machines, using ~10 small packets per second per pair — light enough to run on production, during an incident.</a:t>
+            </a:r>
+          </a:p>
+        </p:txBody>
+      </p:sp>
+      <p:sp>
+        <p:nvSpPr>
+          <p:cNvPr id="10" name="TextBox 9"/>
+          <p:cNvSpPr txBox="1"/>
+          <p:nvPr/>
+        </p:nvSpPr>
+        <p:spPr>
+          <a:xfrm>
+            <a:off x="822960" y="3739896"/>
+            <a:ext cx="10607040" cy="310896"/>
+          </a:xfrm>
+          <a:prstGeom prst="rect">
+            <a:avLst/>
+          </a:prstGeom>
+          <a:noFill/>
+        </p:spPr>
+        <p:txBody>
+          <a:bodyPr wrap="square">
+            <a:spAutoFit/>
+          </a:bodyPr>
+          <a:lstStyle/>
+          <a:p>
+            <a:pPr>
+              <a:defRPr sz="1400"/>
+            </a:pPr>
+            <a:r>
+              <a:t>• Two hosts and one line is the whole experience: netmesh check web01 db01.</a:t>
             </a:r>
           </a:p>
         </p:txBody>
@@ -7480,7 +9942,7 @@
               </a:defRPr>
             </a:pPr>
             <a:r>
-              <a:t>Stopping, cleaning up, following up</a:t>
+              <a:t>Why not just ping?</a:t>
             </a:r>
           </a:p>
         </p:txBody>
@@ -7506,7 +9968,7 @@
               <a:defRPr sz="1600"/>
             </a:pPr>
             <a:r>
-              <a:t>check cleans up after itself — the two-host case never leaves anything behind. Managed runs: stop keeps reports; clean stops and removes every trace. No package, no daemon, no dotdir, no sysctl — ever. Agents flush on SIGTERM.</a:t>
+              <a:t>netmesh probes with small UDP packets between two tiny agents it places on your hosts — and that buys four things ping can't do:</a:t>
             </a:r>
           </a:p>
           <a:p>
@@ -7514,7 +9976,7 @@
               <a:defRPr sz="1600"/>
             </a:pPr>
             <a:r>
-              <a:t>Reports replay: summarize --reports ./reports, even re-split around a load window after the fact (--load-split &lt;ts&gt;).</a:t>
+              <a:t>No root, anywhere. Ordinary sockets, ordinary user.</a:t>
             </a:r>
           </a:p>
           <a:p>
@@ -7522,39 +9984,31 @@
               <a:defRPr sz="1600"/>
             </a:pPr>
             <a:r>
-              <a:t>Following up on findings:</a:t>
-            </a:r>
-          </a:p>
-          <a:p>
-            <a:pPr lvl="1">
-              <a:defRPr sz="1400"/>
-            </a:pPr>
-            <a:r>
-              <a:t>Sick pair → netmesh paths --compare web03:db01 web01:db01 — hop lists side by side, first divergent hop marked. That hop is where to look.</a:t>
-            </a:r>
-          </a:p>
-          <a:p>
-            <a:pPr lvl="1">
-              <a:defRPr sz="1400"/>
-            </a:pPr>
-            <a:r>
-              <a:t>Grids drop into the same spreadsheet as mx's — line up idle RTT against loaded loss, pair by pair.</a:t>
-            </a:r>
-          </a:p>
-          <a:p>
-            <a:pPr lvl="1">
-              <a:defRPr sz="1400"/>
-            </a:pPr>
-            <a:r>
-              <a:t>Clean baseline → the network isn't the problem: go load it (mx run --for 60, iperf-orchestrator all).</a:t>
-            </a:r>
-          </a:p>
-          <a:p>
-            <a:pPr lvl="1">
-              <a:defRPr sz="1400"/>
-            </a:pPr>
-            <a:r>
-              <a:t>Host still slow → binnacle's why-slow checks the box before you blame the network again.</a:t>
+              <a:t>Exact latency. The sender's own clock stamp comes back in the echo — one clock, so the round trip is exact, no time-sync assumptions.</a:t>
+            </a:r>
+          </a:p>
+          <a:p>
+            <a:pPr>
+              <a:defRPr sz="1600"/>
+            </a:pPr>
+            <a:r>
+              <a:t>Loss with a direction. The far end counts what actually arrived — so loss splits into *on the way there* vs *on the way back*. A sick sender and a sick receiver are different findings.</a:t>
+            </a:r>
+          </a:p>
+          <a:p>
+            <a:pPr>
+              <a:defRPr sz="1600"/>
+            </a:pPr>
+            <a:r>
+              <a:t>The real path. Routers answer ping with their slow management CPU, which gets rate-limited and deprioritized — ping systematically lies about what your application traffic sees. UDP probes travel the same path your traffic does.</a:t>
+            </a:r>
+          </a:p>
+          <a:p>
+            <a:pPr>
+              <a:defRPr sz="1600"/>
+            </a:pPr>
+            <a:r>
+              <a:t>One-way delay is deliberately not reported: without synchronized clocks it would be a made-up number, and this tool doesn't report those.</a:t>
             </a:r>
           </a:p>
         </p:txBody>
@@ -8258,27 +10712,83 @@
           <a:bodyPr/>
           <a:lstStyle/>
           <a:p>
-            <a:r>
-              <a:t>Close</a:t>
-            </a:r>
-          </a:p>
-        </p:txBody>
-      </p:sp>
-      <p:sp>
-        <p:nvSpPr>
-          <p:cNvPr id="3" name="Text Placeholder 2"/>
-          <p:cNvSpPr>
-            <a:spLocks noGrp="1"/>
-          </p:cNvSpPr>
-          <p:nvPr>
-            <p:ph type="body" idx="1"/>
-          </p:nvPr>
-        </p:nvSpPr>
-        <p:spPr/>
-        <p:txBody>
-          <a:bodyPr/>
-          <a:lstStyle/>
-          <a:p/>
+            <a:pPr>
+              <a:defRPr sz="2800" b="1">
+                <a:solidFill>
+                  <a:srgbClr val="1C2B3A"/>
+                </a:solidFill>
+              </a:defRPr>
+            </a:pPr>
+            <a:r>
+              <a:t>Reading the report</a:t>
+            </a:r>
+          </a:p>
+        </p:txBody>
+      </p:sp>
+      <p:sp>
+        <p:nvSpPr>
+          <p:cNvPr id="3" name="Content Placeholder 2"/>
+          <p:cNvSpPr>
+            <a:spLocks noGrp="1"/>
+          </p:cNvSpPr>
+          <p:nvPr>
+            <p:ph idx="1"/>
+          </p:nvPr>
+        </p:nvSpPr>
+        <p:spPr/>
+        <p:txBody>
+          <a:bodyPr wrap="square">
+            <a:normAutofit/>
+          </a:bodyPr>
+          <a:lstStyle/>
+          <a:p>
+            <a:pPr>
+              <a:defRPr sz="1600"/>
+            </a:pPr>
+            <a:r>
+              <a:t>The headline — the median pair's latency, so one sick pair can neither drag the fleet number nor hide inside it. Worst pairs listed underneath.</a:t>
+            </a:r>
+          </a:p>
+          <a:p>
+            <a:pPr>
+              <a:defRPr sz="1600"/>
+            </a:pPr>
+            <a:r>
+              <a:t>Asymmetry — A→B slow but B→A fine? Look at A's *sending* side: the return trip just proved the rest of the path is healthy.</a:t>
+            </a:r>
+          </a:p>
+          <a:p>
+            <a:pPr>
+              <a:defRPr sz="1600"/>
+            </a:pPr>
+            <a:r>
+              <a:t>MTU black hole — small packets pass, big ones silently vanish: the classic "small requests work, large transfers hang" bug. Found without root.</a:t>
+            </a:r>
+          </a:p>
+          <a:p>
+            <a:pPr>
+              <a:defRPr sz="1600"/>
+            </a:pPr>
+            <a:r>
+              <a:t>Path spread — with --flows, one traffic stream 29× slower than its siblings = a sick member inside a LAG/ECMP bundle. The fault that "never reproduces", pinned.</a:t>
+            </a:r>
+          </a:p>
+          <a:p>
+            <a:pPr>
+              <a:defRPr sz="1600"/>
+            </a:pPr>
+            <a:r>
+              <a:t>Under load — run it around a load test and it shows what the load *did* to latency: p99 210 µs idle → 42 ms loaded is what everyone else on that path paid.</a:t>
+            </a:r>
+          </a:p>
+          <a:p>
+            <a:pPr>
+              <a:defRPr sz="1600"/>
+            </a:pPr>
+            <a:r>
+              <a:t>And a clean run says so in plain words: "the network is not your problem."</a:t>
+            </a:r>
+          </a:p>
         </p:txBody>
       </p:sp>
     </p:spTree>
@@ -8322,7 +10832,103 @@
               </a:defRPr>
             </a:pPr>
             <a:r>
-              <a:t>Putting it together</a:t>
+              <a:t>Following up on what it finds</a:t>
+            </a:r>
+          </a:p>
+        </p:txBody>
+      </p:sp>
+      <p:sp>
+        <p:nvSpPr>
+          <p:cNvPr id="3" name="Content Placeholder 2"/>
+          <p:cNvSpPr>
+            <a:spLocks noGrp="1"/>
+          </p:cNvSpPr>
+          <p:nvPr>
+            <p:ph idx="1"/>
+          </p:nvPr>
+        </p:nvSpPr>
+        <p:spPr/>
+        <p:txBody>
+          <a:bodyPr wrap="square">
+            <a:normAutofit/>
+          </a:bodyPr>
+          <a:lstStyle/>
+          <a:p>
+            <a:pPr>
+              <a:defRPr sz="1600"/>
+            </a:pPr>
+            <a:r>
+              <a:t>A sick pair? netmesh paths --compare web03:db01 web01:db01 — prints the two routes side by side and marks the first hop where they differ. That hop is where to look.</a:t>
+            </a:r>
+          </a:p>
+          <a:p>
+            <a:pPr>
+              <a:defRPr sz="1600"/>
+            </a:pPr>
+            <a:r>
+              <a:t>A clean baseline? Then the network isn't your problem — go load it: iperf-orchestrator all, mx run.</a:t>
+            </a:r>
+          </a:p>
+          <a:p>
+            <a:pPr>
+              <a:defRPr sz="1600"/>
+            </a:pPr>
+            <a:r>
+              <a:t>A host that's still slow? Check the box itself before blaming the network again.</a:t>
+            </a:r>
+          </a:p>
+          <a:p>
+            <a:pPr>
+              <a:defRPr sz="1600"/>
+            </a:pPr>
+            <a:r>
+              <a:t>Cleanup is automatic for check (it removes everything it deployed); for managed runs, stop keeps the reports and clean verifiably removes every trace.</a:t>
+            </a:r>
+          </a:p>
+        </p:txBody>
+      </p:sp>
+    </p:spTree>
+  </p:cSld>
+  <p:clrMapOvr>
+    <a:masterClrMapping/>
+  </p:clrMapOvr>
+</p:sld>
+</file>
+
+<file path=ppt/slides/slide32.xml><?xml version="1.0" encoding="utf-8"?>
+<p:sld xmlns:a="http://schemas.openxmlformats.org/drawingml/2006/main" xmlns:p="http://schemas.openxmlformats.org/presentationml/2006/main" xmlns:r="http://schemas.openxmlformats.org/officeDocument/2006/relationships">
+  <p:cSld>
+    <p:spTree>
+      <p:nvGrpSpPr>
+        <p:cNvPr id="1" name=""/>
+        <p:cNvGrpSpPr/>
+        <p:nvPr/>
+      </p:nvGrpSpPr>
+      <p:grpSpPr/>
+      <p:sp>
+        <p:nvSpPr>
+          <p:cNvPr id="2" name="Title 1"/>
+          <p:cNvSpPr>
+            <a:spLocks noGrp="1"/>
+          </p:cNvSpPr>
+          <p:nvPr>
+            <p:ph type="title"/>
+          </p:nvPr>
+        </p:nvSpPr>
+        <p:spPr/>
+        <p:txBody>
+          <a:bodyPr/>
+          <a:lstStyle/>
+          <a:p>
+            <a:pPr>
+              <a:defRPr sz="2800" b="1">
+                <a:solidFill>
+                  <a:srgbClr val="1C2B3A"/>
+                </a:solidFill>
+              </a:defRPr>
+            </a:pPr>
+            <a:r>
+              <a:t>Tutorial — netmesh in five minutes</a:t>
             </a:r>
           </a:p>
         </p:txBody>
@@ -8336,7 +10942,7 @@
         <p:spPr>
           <a:xfrm>
             <a:off x="640080" y="1234440"/>
-            <a:ext cx="10972800" cy="1325880"/>
+            <a:ext cx="10972800" cy="2423160"/>
           </a:xfrm>
           <a:prstGeom prst="rect">
             <a:avLst/>
@@ -8358,7 +10964,7 @@
               </a:defRPr>
             </a:pPr>
             <a:r>
-              <a:t>reachable prod.txt -i                       # prune -- the run survives the dead</a:t>
+              <a:t># 0. prove the machinery works -- loopback only, no ssh needed</a:t>
             </a:r>
           </a:p>
           <a:p>
@@ -8371,7 +10977,7 @@
               </a:defRPr>
             </a:pPr>
             <a:r>
-              <a:t>netmesh check ...                           # idle baseline: is the fabric healthy?</a:t>
+              <a:t>netmesh selftest</a:t>
             </a:r>
           </a:p>
           <a:p>
@@ -8384,7 +10990,7 @@
               </a:defRPr>
             </a:pPr>
             <a:r>
-              <a:t>iperf-orchestrator --servers prod.txt all   # TCP bandwidth: what breaks under load?</a:t>
+              <a:t> </a:t>
             </a:r>
           </a:p>
           <a:p>
@@ -8397,7 +11003,7 @@
               </a:defRPr>
             </a:pPr>
             <a:r>
-              <a:t>mx run --for 300                            # answered packets/sec: the RPC ceiling</a:t>
+              <a:t># 1. the two-host check: deploy, probe, report, clean up</a:t>
             </a:r>
           </a:p>
           <a:p>
@@ -8410,7 +11016,72 @@
               </a:defRPr>
             </a:pPr>
             <a:r>
-              <a:t>netmesh run --baseline 20 -- &lt;load&gt;         # what the load did to latency</a:t>
+              <a:t>netmesh check web01 db01</a:t>
+            </a:r>
+          </a:p>
+          <a:p>
+            <a:pPr>
+              <a:defRPr sz="1300">
+                <a:solidFill>
+                  <a:srgbClr val="24354A"/>
+                </a:solidFill>
+                <a:latin typeface="Consolas"/>
+              </a:defRPr>
+            </a:pPr>
+            <a:r>
+              <a:t>netmesh check web01 db01 --for 60      # a longer look</a:t>
+            </a:r>
+          </a:p>
+          <a:p>
+            <a:pPr>
+              <a:defRPr sz="1300">
+                <a:solidFill>
+                  <a:srgbClr val="24354A"/>
+                </a:solidFill>
+                <a:latin typeface="Consolas"/>
+              </a:defRPr>
+            </a:pPr>
+            <a:r>
+              <a:t> </a:t>
+            </a:r>
+          </a:p>
+          <a:p>
+            <a:pPr>
+              <a:defRPr sz="1300">
+                <a:solidFill>
+                  <a:srgbClr val="24354A"/>
+                </a:solidFill>
+                <a:latin typeface="Consolas"/>
+              </a:defRPr>
+            </a:pPr>
+            <a:r>
+              <a:t># 2. hunting a fault that comes and goes: sweep the paths</a:t>
+            </a:r>
+          </a:p>
+          <a:p>
+            <a:pPr>
+              <a:defRPr sz="1300">
+                <a:solidFill>
+                  <a:srgbClr val="24354A"/>
+                </a:solidFill>
+                <a:latin typeface="Consolas"/>
+              </a:defRPr>
+            </a:pPr>
+            <a:r>
+              <a:t>#    inside a LAG/ECMP bundle</a:t>
+            </a:r>
+          </a:p>
+          <a:p>
+            <a:pPr>
+              <a:defRPr sz="1300">
+                <a:solidFill>
+                  <a:srgbClr val="24354A"/>
+                </a:solidFill>
+                <a:latin typeface="Consolas"/>
+              </a:defRPr>
+            </a:pPr>
+            <a:r>
+              <a:t>netmesh check web03 db01 --flows 8</a:t>
             </a:r>
           </a:p>
         </p:txBody>
@@ -8423,7 +11094,7 @@
         </p:nvSpPr>
         <p:spPr>
           <a:xfrm>
-            <a:off x="822960" y="2697480"/>
+            <a:off x="822960" y="3794760"/>
             <a:ext cx="10607040" cy="310896"/>
           </a:xfrm>
           <a:prstGeom prst="rect">
@@ -8441,7 +11112,7 @@
               <a:defRPr sz="1400"/>
             </a:pPr>
             <a:r>
-              <a:t>• Baseline before load — a throughput number without its idle RTT is half a result.</a:t>
+              <a:t>• check leaves nothing behind — it deploys its agents, probes, prints the report and cleans up after itself.</a:t>
             </a:r>
           </a:p>
         </p:txBody>
@@ -8454,7 +11125,7 @@
         </p:nvSpPr>
         <p:spPr>
           <a:xfrm>
-            <a:off x="822960" y="3081528"/>
+            <a:off x="822960" y="4178808"/>
             <a:ext cx="10607040" cy="310896"/>
           </a:xfrm>
           <a:prstGeom prst="rect">
@@ -8472,20 +11143,276 @@
               <a:defRPr sz="1400"/>
             </a:pPr>
             <a:r>
-              <a:t>• Trust what arrived, not what was sent — and watch the CPU, or you're measuring the tool.</a:t>
-            </a:r>
-          </a:p>
-        </p:txBody>
-      </p:sp>
-      <p:sp>
-        <p:nvSpPr>
-          <p:cNvPr id="6" name="TextBox 5"/>
+              <a:t>• The report ends with *what to do next*, including "the network is not your problem" when that's the truth.</a:t>
+            </a:r>
+          </a:p>
+        </p:txBody>
+      </p:sp>
+    </p:spTree>
+  </p:cSld>
+  <p:clrMapOvr>
+    <a:masterClrMapping/>
+  </p:clrMapOvr>
+</p:sld>
+</file>
+
+<file path=ppt/slides/slide33.xml><?xml version="1.0" encoding="utf-8"?>
+<p:sld xmlns:a="http://schemas.openxmlformats.org/drawingml/2006/main" xmlns:p="http://schemas.openxmlformats.org/presentationml/2006/main" xmlns:r="http://schemas.openxmlformats.org/officeDocument/2006/relationships">
+  <p:cSld>
+    <p:spTree>
+      <p:nvGrpSpPr>
+        <p:cNvPr id="1" name=""/>
+        <p:cNvGrpSpPr/>
+        <p:nvPr/>
+      </p:nvGrpSpPr>
+      <p:grpSpPr/>
+      <p:sp>
+        <p:nvSpPr>
+          <p:cNvPr id="2" name="Title 1"/>
+          <p:cNvSpPr>
+            <a:spLocks noGrp="1"/>
+          </p:cNvSpPr>
+          <p:nvPr>
+            <p:ph type="title"/>
+          </p:nvPr>
+        </p:nvSpPr>
+        <p:spPr/>
+        <p:txBody>
+          <a:bodyPr/>
+          <a:lstStyle/>
+          <a:p>
+            <a:pPr>
+              <a:defRPr sz="2800" b="1">
+                <a:solidFill>
+                  <a:srgbClr val="1C2B3A"/>
+                </a:solidFill>
+              </a:defRPr>
+            </a:pPr>
+            <a:r>
+              <a:t>Tutorial — repeat runs and load testing</a:t>
+            </a:r>
+          </a:p>
+        </p:txBody>
+      </p:sp>
+      <p:sp>
+        <p:nvSpPr>
+          <p:cNvPr id="3" name="TextBox 2"/>
           <p:cNvSpPr txBox="1"/>
           <p:nvPr/>
         </p:nvSpPr>
         <p:spPr>
           <a:xfrm>
-            <a:off x="822960" y="3465576"/>
+            <a:off x="640080" y="1234440"/>
+            <a:ext cx="10972800" cy="2862072"/>
+          </a:xfrm>
+          <a:prstGeom prst="rect">
+            <a:avLst/>
+          </a:prstGeom>
+          <a:noFill/>
+        </p:spPr>
+        <p:txBody>
+          <a:bodyPr wrap="none">
+            <a:spAutoFit/>
+          </a:bodyPr>
+          <a:lstStyle/>
+          <a:p>
+            <a:pPr>
+              <a:defRPr sz="1300">
+                <a:solidFill>
+                  <a:srgbClr val="24354A"/>
+                </a:solidFill>
+                <a:latin typeface="Consolas"/>
+              </a:defRPr>
+            </a:pPr>
+            <a:r>
+              <a:t># a standing mesh you can re-run</a:t>
+            </a:r>
+          </a:p>
+          <a:p>
+            <a:pPr>
+              <a:defRPr sz="1300">
+                <a:solidFill>
+                  <a:srgbClr val="24354A"/>
+                </a:solidFill>
+                <a:latin typeface="Consolas"/>
+              </a:defRPr>
+            </a:pPr>
+            <a:r>
+              <a:t>netmesh gen --servers prod.txt</a:t>
+            </a:r>
+          </a:p>
+          <a:p>
+            <a:pPr>
+              <a:defRPr sz="1300">
+                <a:solidFill>
+                  <a:srgbClr val="24354A"/>
+                </a:solidFill>
+                <a:latin typeface="Consolas"/>
+              </a:defRPr>
+            </a:pPr>
+            <a:r>
+              <a:t>netmesh run --for 300 --grid grids/    # 5 minutes + N x N grids</a:t>
+            </a:r>
+          </a:p>
+          <a:p>
+            <a:pPr>
+              <a:defRPr sz="1300">
+                <a:solidFill>
+                  <a:srgbClr val="24354A"/>
+                </a:solidFill>
+                <a:latin typeface="Consolas"/>
+              </a:defRPr>
+            </a:pPr>
+            <a:r>
+              <a:t> </a:t>
+            </a:r>
+          </a:p>
+          <a:p>
+            <a:pPr>
+              <a:defRPr sz="1300">
+                <a:solidFill>
+                  <a:srgbClr val="24354A"/>
+                </a:solidFill>
+                <a:latin typeface="Consolas"/>
+              </a:defRPr>
+            </a:pPr>
+            <a:r>
+              <a:t># measure what a load test does to latency:</a:t>
+            </a:r>
+          </a:p>
+          <a:p>
+            <a:pPr>
+              <a:defRPr sz="1300">
+                <a:solidFill>
+                  <a:srgbClr val="24354A"/>
+                </a:solidFill>
+                <a:latin typeface="Consolas"/>
+              </a:defRPr>
+            </a:pPr>
+            <a:r>
+              <a:t># 20 s idle baseline, then keep probing while the load runs</a:t>
+            </a:r>
+          </a:p>
+          <a:p>
+            <a:pPr>
+              <a:defRPr sz="1300">
+                <a:solidFill>
+                  <a:srgbClr val="24354A"/>
+                </a:solidFill>
+                <a:latin typeface="Consolas"/>
+              </a:defRPr>
+            </a:pPr>
+            <a:r>
+              <a:t>netmesh run --baseline 20 -- ./iperf_orchestrator.sh all</a:t>
+            </a:r>
+          </a:p>
+          <a:p>
+            <a:pPr>
+              <a:defRPr sz="1300">
+                <a:solidFill>
+                  <a:srgbClr val="24354A"/>
+                </a:solidFill>
+                <a:latin typeface="Consolas"/>
+              </a:defRPr>
+            </a:pPr>
+            <a:r>
+              <a:t> </a:t>
+            </a:r>
+          </a:p>
+          <a:p>
+            <a:pPr>
+              <a:defRPr sz="1300">
+                <a:solidFill>
+                  <a:srgbClr val="24354A"/>
+                </a:solidFill>
+                <a:latin typeface="Consolas"/>
+              </a:defRPr>
+            </a:pPr>
+            <a:r>
+              <a:t># a sick pair? find the hop where its route diverges</a:t>
+            </a:r>
+          </a:p>
+          <a:p>
+            <a:pPr>
+              <a:defRPr sz="1300">
+                <a:solidFill>
+                  <a:srgbClr val="24354A"/>
+                </a:solidFill>
+                <a:latin typeface="Consolas"/>
+              </a:defRPr>
+            </a:pPr>
+            <a:r>
+              <a:t>netmesh paths --compare web03:db01 web01:db01</a:t>
+            </a:r>
+          </a:p>
+          <a:p>
+            <a:pPr>
+              <a:defRPr sz="1300">
+                <a:solidFill>
+                  <a:srgbClr val="24354A"/>
+                </a:solidFill>
+                <a:latin typeface="Consolas"/>
+              </a:defRPr>
+            </a:pPr>
+            <a:r>
+              <a:t> </a:t>
+            </a:r>
+          </a:p>
+          <a:p>
+            <a:pPr>
+              <a:defRPr sz="1300">
+                <a:solidFill>
+                  <a:srgbClr val="24354A"/>
+                </a:solidFill>
+                <a:latin typeface="Consolas"/>
+              </a:defRPr>
+            </a:pPr>
+            <a:r>
+              <a:t>netmesh clean                          # managed runs: verified removal</a:t>
+            </a:r>
+          </a:p>
+        </p:txBody>
+      </p:sp>
+      <p:sp>
+        <p:nvSpPr>
+          <p:cNvPr id="4" name="TextBox 3"/>
+          <p:cNvSpPr txBox="1"/>
+          <p:nvPr/>
+        </p:nvSpPr>
+        <p:spPr>
+          <a:xfrm>
+            <a:off x="822960" y="4233672"/>
+            <a:ext cx="10607040" cy="621792"/>
+          </a:xfrm>
+          <a:prstGeom prst="rect">
+            <a:avLst/>
+          </a:prstGeom>
+          <a:noFill/>
+        </p:spPr>
+        <p:txBody>
+          <a:bodyPr wrap="square">
+            <a:spAutoFit/>
+          </a:bodyPr>
+          <a:lstStyle/>
+          <a:p>
+            <a:pPr>
+              <a:defRPr sz="1400"/>
+            </a:pPr>
+            <a:r>
+              <a:t>• Same verbs as mx (gen / start / status / summarize / stop / clean) and the same grid format — learn one, know both.</a:t>
+            </a:r>
+          </a:p>
+        </p:txBody>
+      </p:sp>
+      <p:sp>
+        <p:nvSpPr>
+          <p:cNvPr id="5" name="TextBox 4"/>
+          <p:cNvSpPr txBox="1"/>
+          <p:nvPr/>
+        </p:nvSpPr>
+        <p:spPr>
+          <a:xfrm>
+            <a:off x="822960" y="4928616"/>
             <a:ext cx="10607040" cy="310896"/>
           </a:xfrm>
           <a:prstGeom prst="rect">
@@ -8503,20 +11430,742 @@
               <a:defRPr sz="1400"/>
             </a:pPr>
             <a:r>
-              <a:t>• Keep the list real — reachable is why the whole pipeline still runs when servers are down.</a:t>
-            </a:r>
-          </a:p>
-        </p:txBody>
-      </p:sp>
-      <p:sp>
-        <p:nvSpPr>
-          <p:cNvPr id="7" name="TextBox 6"/>
+              <a:t>• In every report, blank means "not measured" — never zero.</a:t>
+            </a:r>
+          </a:p>
+        </p:txBody>
+      </p:sp>
+    </p:spTree>
+  </p:cSld>
+  <p:clrMapOvr>
+    <a:masterClrMapping/>
+  </p:clrMapOvr>
+</p:sld>
+</file>
+
+<file path=ppt/slides/slide34.xml><?xml version="1.0" encoding="utf-8"?>
+<p:sld xmlns:a="http://schemas.openxmlformats.org/drawingml/2006/main" xmlns:p="http://schemas.openxmlformats.org/presentationml/2006/main" xmlns:r="http://schemas.openxmlformats.org/officeDocument/2006/relationships">
+  <p:cSld>
+    <p:spTree>
+      <p:nvGrpSpPr>
+        <p:cNvPr id="1" name=""/>
+        <p:cNvGrpSpPr/>
+        <p:nvPr/>
+      </p:nvGrpSpPr>
+      <p:grpSpPr/>
+      <p:sp>
+        <p:nvSpPr>
+          <p:cNvPr id="2" name="Title 1"/>
+          <p:cNvSpPr>
+            <a:spLocks noGrp="1"/>
+          </p:cNvSpPr>
+          <p:nvPr>
+            <p:ph type="title"/>
+          </p:nvPr>
+        </p:nvSpPr>
+        <p:spPr/>
+        <p:txBody>
+          <a:bodyPr/>
+          <a:lstStyle/>
+          <a:p>
+            <a:r>
+              <a:t>Close</a:t>
+            </a:r>
+          </a:p>
+        </p:txBody>
+      </p:sp>
+      <p:sp>
+        <p:nvSpPr>
+          <p:cNvPr id="3" name="Text Placeholder 2"/>
+          <p:cNvSpPr>
+            <a:spLocks noGrp="1"/>
+          </p:cNvSpPr>
+          <p:nvPr>
+            <p:ph type="body" idx="1"/>
+          </p:nvPr>
+        </p:nvSpPr>
+        <p:spPr/>
+        <p:txBody>
+          <a:bodyPr/>
+          <a:lstStyle/>
+          <a:p/>
+        </p:txBody>
+      </p:sp>
+    </p:spTree>
+  </p:cSld>
+  <p:clrMapOvr>
+    <a:masterClrMapping/>
+  </p:clrMapOvr>
+</p:sld>
+</file>
+
+<file path=ppt/slides/slide35.xml><?xml version="1.0" encoding="utf-8"?>
+<p:sld xmlns:a="http://schemas.openxmlformats.org/drawingml/2006/main" xmlns:p="http://schemas.openxmlformats.org/presentationml/2006/main" xmlns:r="http://schemas.openxmlformats.org/officeDocument/2006/relationships">
+  <p:cSld>
+    <p:spTree>
+      <p:nvGrpSpPr>
+        <p:cNvPr id="1" name=""/>
+        <p:cNvGrpSpPr/>
+        <p:nvPr/>
+      </p:nvGrpSpPr>
+      <p:grpSpPr/>
+      <p:sp>
+        <p:nvSpPr>
+          <p:cNvPr id="2" name="Title 1"/>
+          <p:cNvSpPr>
+            <a:spLocks noGrp="1"/>
+          </p:cNvSpPr>
+          <p:nvPr>
+            <p:ph type="title"/>
+          </p:nvPr>
+        </p:nvSpPr>
+        <p:spPr/>
+        <p:txBody>
+          <a:bodyPr/>
+          <a:lstStyle/>
+          <a:p>
+            <a:pPr>
+              <a:defRPr sz="2800" b="1">
+                <a:solidFill>
+                  <a:srgbClr val="1C2B3A"/>
+                </a:solidFill>
+              </a:defRPr>
+            </a:pPr>
+            <a:r>
+              <a:t>Putting it together</a:t>
+            </a:r>
+          </a:p>
+        </p:txBody>
+      </p:sp>
+      <p:sp>
+        <p:nvSpPr>
+          <p:cNvPr id="3" name="Rounded Rectangle 2"/>
+          <p:cNvSpPr/>
+          <p:nvPr/>
+        </p:nvSpPr>
+        <p:spPr>
+          <a:xfrm>
+            <a:off x="640080" y="1234440"/>
+            <a:ext cx="1887321" cy="914400"/>
+          </a:xfrm>
+          <a:prstGeom prst="roundRect">
+            <a:avLst/>
+          </a:prstGeom>
+          <a:solidFill>
+            <a:srgbClr val="3D8B4F"/>
+          </a:solidFill>
+          <a:ln>
+            <a:noFill/>
+          </a:ln>
+        </p:spPr>
+        <p:style>
+          <a:lnRef idx="1">
+            <a:schemeClr val="accent1"/>
+          </a:lnRef>
+          <a:fillRef idx="3">
+            <a:schemeClr val="accent1"/>
+          </a:fillRef>
+          <a:effectRef idx="2">
+            <a:schemeClr val="accent1"/>
+          </a:effectRef>
+          <a:fontRef idx="minor">
+            <a:schemeClr val="lt1"/>
+          </a:fontRef>
+        </p:style>
+        <p:txBody>
+          <a:bodyPr rtlCol="0" anchor="ctr" wrap="square"/>
+          <a:lstStyle/>
+          <a:p>
+            <a:pPr algn="ctr">
+              <a:defRPr sz="1150" b="1">
+                <a:solidFill>
+                  <a:srgbClr val="FFFFFF"/>
+                </a:solidFill>
+                <a:latin typeface="Consolas"/>
+              </a:defRPr>
+            </a:pPr>
+            <a:r>
+              <a:t>reachable</a:t>
+            </a:r>
+          </a:p>
+          <a:p>
+            <a:pPr>
+              <a:defRPr sz="1000">
+                <a:solidFill>
+                  <a:srgbClr val="F0F3F6"/>
+                </a:solidFill>
+              </a:defRPr>
+            </a:pPr>
+            <a:r>
+              <a:t>keep the list real</a:t>
+            </a:r>
+          </a:p>
+        </p:txBody>
+      </p:sp>
+      <p:sp>
+        <p:nvSpPr>
+          <p:cNvPr id="4" name="TextBox 3"/>
           <p:cNvSpPr txBox="1"/>
           <p:nvPr/>
         </p:nvSpPr>
         <p:spPr>
           <a:xfrm>
-            <a:off x="822960" y="3849624"/>
+            <a:off x="2527401" y="1490472"/>
+            <a:ext cx="384048" cy="365760"/>
+          </a:xfrm>
+          <a:prstGeom prst="rect">
+            <a:avLst/>
+          </a:prstGeom>
+          <a:noFill/>
+        </p:spPr>
+        <p:txBody>
+          <a:bodyPr wrap="none">
+            <a:spAutoFit/>
+          </a:bodyPr>
+          <a:lstStyle/>
+          <a:p>
+            <a:pPr>
+              <a:defRPr sz="1600" b="1">
+                <a:solidFill>
+                  <a:srgbClr val="3E5C76"/>
+                </a:solidFill>
+              </a:defRPr>
+            </a:pPr>
+            <a:r>
+              <a:t>→</a:t>
+            </a:r>
+          </a:p>
+        </p:txBody>
+      </p:sp>
+      <p:sp>
+        <p:nvSpPr>
+          <p:cNvPr id="5" name="Rounded Rectangle 4"/>
+          <p:cNvSpPr/>
+          <p:nvPr/>
+        </p:nvSpPr>
+        <p:spPr>
+          <a:xfrm>
+            <a:off x="2911449" y="1234440"/>
+            <a:ext cx="1887321" cy="914400"/>
+          </a:xfrm>
+          <a:prstGeom prst="roundRect">
+            <a:avLst/>
+          </a:prstGeom>
+          <a:solidFill>
+            <a:srgbClr val="12897B"/>
+          </a:solidFill>
+          <a:ln>
+            <a:noFill/>
+          </a:ln>
+        </p:spPr>
+        <p:style>
+          <a:lnRef idx="1">
+            <a:schemeClr val="accent1"/>
+          </a:lnRef>
+          <a:fillRef idx="3">
+            <a:schemeClr val="accent1"/>
+          </a:fillRef>
+          <a:effectRef idx="2">
+            <a:schemeClr val="accent1"/>
+          </a:effectRef>
+          <a:fontRef idx="minor">
+            <a:schemeClr val="lt1"/>
+          </a:fontRef>
+        </p:style>
+        <p:txBody>
+          <a:bodyPr rtlCol="0" anchor="ctr" wrap="square"/>
+          <a:lstStyle/>
+          <a:p>
+            <a:pPr algn="ctr">
+              <a:defRPr sz="1150" b="1">
+                <a:solidFill>
+                  <a:srgbClr val="FFFFFF"/>
+                </a:solidFill>
+                <a:latin typeface="Consolas"/>
+              </a:defRPr>
+            </a:pPr>
+            <a:r>
+              <a:t>netmesh</a:t>
+            </a:r>
+          </a:p>
+          <a:p>
+            <a:pPr>
+              <a:defRPr sz="1000">
+                <a:solidFill>
+                  <a:srgbClr val="F0F3F6"/>
+                </a:solidFill>
+              </a:defRPr>
+            </a:pPr>
+            <a:r>
+              <a:t>idle baseline</a:t>
+            </a:r>
+          </a:p>
+        </p:txBody>
+      </p:sp>
+      <p:sp>
+        <p:nvSpPr>
+          <p:cNvPr id="6" name="TextBox 5"/>
+          <p:cNvSpPr txBox="1"/>
+          <p:nvPr/>
+        </p:nvSpPr>
+        <p:spPr>
+          <a:xfrm>
+            <a:off x="4798771" y="1490472"/>
+            <a:ext cx="384048" cy="365760"/>
+          </a:xfrm>
+          <a:prstGeom prst="rect">
+            <a:avLst/>
+          </a:prstGeom>
+          <a:noFill/>
+        </p:spPr>
+        <p:txBody>
+          <a:bodyPr wrap="none">
+            <a:spAutoFit/>
+          </a:bodyPr>
+          <a:lstStyle/>
+          <a:p>
+            <a:pPr>
+              <a:defRPr sz="1600" b="1">
+                <a:solidFill>
+                  <a:srgbClr val="3E5C76"/>
+                </a:solidFill>
+              </a:defRPr>
+            </a:pPr>
+            <a:r>
+              <a:t>→</a:t>
+            </a:r>
+          </a:p>
+        </p:txBody>
+      </p:sp>
+      <p:sp>
+        <p:nvSpPr>
+          <p:cNvPr id="7" name="Rounded Rectangle 6"/>
+          <p:cNvSpPr/>
+          <p:nvPr/>
+        </p:nvSpPr>
+        <p:spPr>
+          <a:xfrm>
+            <a:off x="5182819" y="1234440"/>
+            <a:ext cx="1887321" cy="914400"/>
+          </a:xfrm>
+          <a:prstGeom prst="roundRect">
+            <a:avLst/>
+          </a:prstGeom>
+          <a:solidFill>
+            <a:srgbClr val="D97C1F"/>
+          </a:solidFill>
+          <a:ln>
+            <a:noFill/>
+          </a:ln>
+        </p:spPr>
+        <p:style>
+          <a:lnRef idx="1">
+            <a:schemeClr val="accent1"/>
+          </a:lnRef>
+          <a:fillRef idx="3">
+            <a:schemeClr val="accent1"/>
+          </a:fillRef>
+          <a:effectRef idx="2">
+            <a:schemeClr val="accent1"/>
+          </a:effectRef>
+          <a:fontRef idx="minor">
+            <a:schemeClr val="lt1"/>
+          </a:fontRef>
+        </p:style>
+        <p:txBody>
+          <a:bodyPr rtlCol="0" anchor="ctr" wrap="square"/>
+          <a:lstStyle/>
+          <a:p>
+            <a:pPr algn="ctr">
+              <a:defRPr sz="1150" b="1">
+                <a:solidFill>
+                  <a:srgbClr val="FFFFFF"/>
+                </a:solidFill>
+                <a:latin typeface="Consolas"/>
+              </a:defRPr>
+            </a:pPr>
+            <a:r>
+              <a:t>iperf-orchestrator</a:t>
+            </a:r>
+          </a:p>
+          <a:p>
+            <a:pPr>
+              <a:defRPr sz="1000">
+                <a:solidFill>
+                  <a:srgbClr val="F0F3F6"/>
+                </a:solidFill>
+              </a:defRPr>
+            </a:pPr>
+            <a:r>
+              <a:t>TCP bandwidth</a:t>
+            </a:r>
+          </a:p>
+        </p:txBody>
+      </p:sp>
+      <p:sp>
+        <p:nvSpPr>
+          <p:cNvPr id="8" name="TextBox 7"/>
+          <p:cNvSpPr txBox="1"/>
+          <p:nvPr/>
+        </p:nvSpPr>
+        <p:spPr>
+          <a:xfrm>
+            <a:off x="7070140" y="1490472"/>
+            <a:ext cx="384048" cy="365760"/>
+          </a:xfrm>
+          <a:prstGeom prst="rect">
+            <a:avLst/>
+          </a:prstGeom>
+          <a:noFill/>
+        </p:spPr>
+        <p:txBody>
+          <a:bodyPr wrap="none">
+            <a:spAutoFit/>
+          </a:bodyPr>
+          <a:lstStyle/>
+          <a:p>
+            <a:pPr>
+              <a:defRPr sz="1600" b="1">
+                <a:solidFill>
+                  <a:srgbClr val="3E5C76"/>
+                </a:solidFill>
+              </a:defRPr>
+            </a:pPr>
+            <a:r>
+              <a:t>→</a:t>
+            </a:r>
+          </a:p>
+        </p:txBody>
+      </p:sp>
+      <p:sp>
+        <p:nvSpPr>
+          <p:cNvPr id="9" name="Rounded Rectangle 8"/>
+          <p:cNvSpPr/>
+          <p:nvPr/>
+        </p:nvSpPr>
+        <p:spPr>
+          <a:xfrm>
+            <a:off x="7454188" y="1234440"/>
+            <a:ext cx="1887321" cy="914400"/>
+          </a:xfrm>
+          <a:prstGeom prst="roundRect">
+            <a:avLst/>
+          </a:prstGeom>
+          <a:solidFill>
+            <a:srgbClr val="BE3B4E"/>
+          </a:solidFill>
+          <a:ln>
+            <a:noFill/>
+          </a:ln>
+        </p:spPr>
+        <p:style>
+          <a:lnRef idx="1">
+            <a:schemeClr val="accent1"/>
+          </a:lnRef>
+          <a:fillRef idx="3">
+            <a:schemeClr val="accent1"/>
+          </a:fillRef>
+          <a:effectRef idx="2">
+            <a:schemeClr val="accent1"/>
+          </a:effectRef>
+          <a:fontRef idx="minor">
+            <a:schemeClr val="lt1"/>
+          </a:fontRef>
+        </p:style>
+        <p:txBody>
+          <a:bodyPr rtlCol="0" anchor="ctr" wrap="square"/>
+          <a:lstStyle/>
+          <a:p>
+            <a:pPr algn="ctr">
+              <a:defRPr sz="1150" b="1">
+                <a:solidFill>
+                  <a:srgbClr val="FFFFFF"/>
+                </a:solidFill>
+                <a:latin typeface="Consolas"/>
+              </a:defRPr>
+            </a:pPr>
+            <a:r>
+              <a:t>mx</a:t>
+            </a:r>
+          </a:p>
+          <a:p>
+            <a:pPr>
+              <a:defRPr sz="1000">
+                <a:solidFill>
+                  <a:srgbClr val="F0F3F6"/>
+                </a:solidFill>
+              </a:defRPr>
+            </a:pPr>
+            <a:r>
+              <a:t>packets per second</a:t>
+            </a:r>
+          </a:p>
+        </p:txBody>
+      </p:sp>
+      <p:sp>
+        <p:nvSpPr>
+          <p:cNvPr id="10" name="TextBox 9"/>
+          <p:cNvSpPr txBox="1"/>
+          <p:nvPr/>
+        </p:nvSpPr>
+        <p:spPr>
+          <a:xfrm>
+            <a:off x="9341510" y="1490472"/>
+            <a:ext cx="384048" cy="365760"/>
+          </a:xfrm>
+          <a:prstGeom prst="rect">
+            <a:avLst/>
+          </a:prstGeom>
+          <a:noFill/>
+        </p:spPr>
+        <p:txBody>
+          <a:bodyPr wrap="none">
+            <a:spAutoFit/>
+          </a:bodyPr>
+          <a:lstStyle/>
+          <a:p>
+            <a:pPr>
+              <a:defRPr sz="1600" b="1">
+                <a:solidFill>
+                  <a:srgbClr val="3E5C76"/>
+                </a:solidFill>
+              </a:defRPr>
+            </a:pPr>
+            <a:r>
+              <a:t>→</a:t>
+            </a:r>
+          </a:p>
+        </p:txBody>
+      </p:sp>
+      <p:sp>
+        <p:nvSpPr>
+          <p:cNvPr id="11" name="Rounded Rectangle 10"/>
+          <p:cNvSpPr/>
+          <p:nvPr/>
+        </p:nvSpPr>
+        <p:spPr>
+          <a:xfrm>
+            <a:off x="9725558" y="1234440"/>
+            <a:ext cx="1887321" cy="914400"/>
+          </a:xfrm>
+          <a:prstGeom prst="roundRect">
+            <a:avLst/>
+          </a:prstGeom>
+          <a:solidFill>
+            <a:srgbClr val="12897B"/>
+          </a:solidFill>
+          <a:ln>
+            <a:noFill/>
+          </a:ln>
+        </p:spPr>
+        <p:style>
+          <a:lnRef idx="1">
+            <a:schemeClr val="accent1"/>
+          </a:lnRef>
+          <a:fillRef idx="3">
+            <a:schemeClr val="accent1"/>
+          </a:fillRef>
+          <a:effectRef idx="2">
+            <a:schemeClr val="accent1"/>
+          </a:effectRef>
+          <a:fontRef idx="minor">
+            <a:schemeClr val="lt1"/>
+          </a:fontRef>
+        </p:style>
+        <p:txBody>
+          <a:bodyPr rtlCol="0" anchor="ctr" wrap="square"/>
+          <a:lstStyle/>
+          <a:p>
+            <a:pPr algn="ctr">
+              <a:defRPr sz="1150" b="1">
+                <a:solidFill>
+                  <a:srgbClr val="FFFFFF"/>
+                </a:solidFill>
+                <a:latin typeface="Consolas"/>
+              </a:defRPr>
+            </a:pPr>
+            <a:r>
+              <a:t>netmesh --baseline</a:t>
+            </a:r>
+          </a:p>
+          <a:p>
+            <a:pPr>
+              <a:defRPr sz="1000">
+                <a:solidFill>
+                  <a:srgbClr val="F0F3F6"/>
+                </a:solidFill>
+              </a:defRPr>
+            </a:pPr>
+            <a:r>
+              <a:t>latency under load</a:t>
+            </a:r>
+          </a:p>
+        </p:txBody>
+      </p:sp>
+      <p:sp>
+        <p:nvSpPr>
+          <p:cNvPr id="12" name="TextBox 11"/>
+          <p:cNvSpPr txBox="1"/>
+          <p:nvPr/>
+        </p:nvSpPr>
+        <p:spPr>
+          <a:xfrm>
+            <a:off x="822960" y="2350008"/>
+            <a:ext cx="10607040" cy="621792"/>
+          </a:xfrm>
+          <a:prstGeom prst="rect">
+            <a:avLst/>
+          </a:prstGeom>
+          <a:noFill/>
+        </p:spPr>
+        <p:txBody>
+          <a:bodyPr wrap="square">
+            <a:spAutoFit/>
+          </a:bodyPr>
+          <a:lstStyle/>
+          <a:p>
+            <a:pPr>
+              <a:defRPr sz="1400"/>
+            </a:pPr>
+            <a:r>
+              <a:t>• 1 · Start with the list — reachable prod.txt -i comments out dead servers, so every later step measures the fleet, not the list.</a:t>
+            </a:r>
+          </a:p>
+        </p:txBody>
+      </p:sp>
+      <p:sp>
+        <p:nvSpPr>
+          <p:cNvPr id="13" name="TextBox 12"/>
+          <p:cNvSpPr txBox="1"/>
+          <p:nvPr/>
+        </p:nvSpPr>
+        <p:spPr>
+          <a:xfrm>
+            <a:off x="822960" y="3044952"/>
+            <a:ext cx="10607040" cy="621792"/>
+          </a:xfrm>
+          <a:prstGeom prst="rect">
+            <a:avLst/>
+          </a:prstGeom>
+          <a:noFill/>
+        </p:spPr>
+        <p:txBody>
+          <a:bodyPr wrap="square">
+            <a:spAutoFit/>
+          </a:bodyPr>
+          <a:lstStyle/>
+          <a:p>
+            <a:pPr>
+              <a:defRPr sz="1400"/>
+            </a:pPr>
+            <a:r>
+              <a:t>• 2 · Baseline while idle — netmesh check gives the latency, loss and MTU numbers every later result is read against. Safe on production.</a:t>
+            </a:r>
+          </a:p>
+        </p:txBody>
+      </p:sp>
+      <p:sp>
+        <p:nvSpPr>
+          <p:cNvPr id="14" name="TextBox 13"/>
+          <p:cNvSpPr txBox="1"/>
+          <p:nvPr/>
+        </p:nvSpPr>
+        <p:spPr>
+          <a:xfrm>
+            <a:off x="822960" y="3739896"/>
+            <a:ext cx="10607040" cy="621792"/>
+          </a:xfrm>
+          <a:prstGeom prst="rect">
+            <a:avLst/>
+          </a:prstGeom>
+          <a:noFill/>
+        </p:spPr>
+        <p:txBody>
+          <a:bodyPr wrap="square">
+            <a:spAutoFit/>
+          </a:bodyPr>
+          <a:lstStyle/>
+          <a:p>
+            <a:pPr>
+              <a:defRPr sz="1400"/>
+            </a:pPr>
+            <a:r>
+              <a:t>• 3 · Load it with bytes — iperf-orchestrator all floods every link both ways: the bandwidth ceiling, and the first look at what breaks.</a:t>
+            </a:r>
+          </a:p>
+        </p:txBody>
+      </p:sp>
+      <p:sp>
+        <p:nvSpPr>
+          <p:cNvPr id="15" name="TextBox 14"/>
+          <p:cNvSpPr txBox="1"/>
+          <p:nvPr/>
+        </p:nvSpPr>
+        <p:spPr>
+          <a:xfrm>
+            <a:off x="822960" y="4434840"/>
+            <a:ext cx="10607040" cy="621792"/>
+          </a:xfrm>
+          <a:prstGeom prst="rect">
+            <a:avLst/>
+          </a:prstGeom>
+          <a:noFill/>
+        </p:spPr>
+        <p:txBody>
+          <a:bodyPr wrap="square">
+            <a:spAutoFit/>
+          </a:bodyPr>
+          <a:lstStyle/>
+          <a:p>
+            <a:pPr>
+              <a:defRPr sz="1400"/>
+            </a:pPr>
+            <a:r>
+              <a:t>• 4 · Load it with packets — mx run finds the answered-packets-per-second ceiling: the shape of real RPC and storage traffic.</a:t>
+            </a:r>
+          </a:p>
+        </p:txBody>
+      </p:sp>
+      <p:sp>
+        <p:nvSpPr>
+          <p:cNvPr id="16" name="TextBox 15"/>
+          <p:cNvSpPr txBox="1"/>
+          <p:nvPr/>
+        </p:nvSpPr>
+        <p:spPr>
+          <a:xfrm>
+            <a:off x="822960" y="5129784"/>
+            <a:ext cx="10607040" cy="621792"/>
+          </a:xfrm>
+          <a:prstGeom prst="rect">
+            <a:avLst/>
+          </a:prstGeom>
+          <a:noFill/>
+        </p:spPr>
+        <p:txBody>
+          <a:bodyPr wrap="square">
+            <a:spAutoFit/>
+          </a:bodyPr>
+          <a:lstStyle/>
+          <a:p>
+            <a:pPr>
+              <a:defRPr sz="1400"/>
+            </a:pPr>
+            <a:r>
+              <a:t>• 5 · Measure the cost — wrap netmesh around a load run to see what the load did to latency for everyone else on the path.</a:t>
+            </a:r>
+          </a:p>
+        </p:txBody>
+      </p:sp>
+      <p:sp>
+        <p:nvSpPr>
+          <p:cNvPr id="17" name="TextBox 16"/>
+          <p:cNvSpPr txBox="1"/>
+          <p:nvPr/>
+        </p:nvSpPr>
+        <p:spPr>
+          <a:xfrm>
+            <a:off x="822960" y="5824728"/>
             <a:ext cx="10607040" cy="310896"/>
           </a:xfrm>
           <a:prstGeom prst="rect">
@@ -8534,7 +12183,7 @@
               <a:defRPr sz="1400"/>
             </a:pPr>
             <a:r>
-              <a:t>• All pip-installable: iperf-orchestrator, matrix-orchestrator, binnacle.</a:t>
+              <a:t>• Three habits: baseline before load · trust what arrived, not what was sent · keep the list real.</a:t>
             </a:r>
           </a:p>
         </p:txBody>
@@ -8881,7 +12530,7 @@
               </a:defRPr>
             </a:pPr>
             <a:r>
-              <a:t>What it is</a:t>
+              <a:t>What it is — and why you'd run it</a:t>
             </a:r>
           </a:p>
         </p:txBody>
@@ -8907,7 +12556,7 @@
               <a:defRPr sz="1600"/>
             </a:pPr>
             <a:r>
-              <a:t>A single self-contained bash script (with embedded Python) that runs a full-mesh iperf2 throughput test across a server list.</a:t>
+              <a:t>Takes iperf — the standard tool for measuring how fast the network really is between two machines — and runs it between every pair of servers in a fleet, at the same time.</a:t>
             </a:r>
           </a:p>
           <a:p>
@@ -8915,7 +12564,7 @@
               <a:defRPr sz="1600"/>
             </a:pPr>
             <a:r>
-              <a:t>Samples per-host CPU during the run; parses everything into iperf_results.csv, cpu_summary.csv, iperf_pivot.txt, iperf_heatmap.png.</a:t>
+              <a:t>The point is to load the network as *efficiently as possible*: every link, both directions, simultaneously. Ten seconds of that answers the real question — what can this fabric actually carry, and what breaks first?</a:t>
             </a:r>
           </a:p>
           <a:p>
@@ -8923,7 +12572,7 @@
               <a:defRPr sz="1600"/>
             </a:pPr>
             <a:r>
-              <a:t>Built for fabric stress testing: load every link in both directions simultaneously, find what breaks or degrades. Also a one-off "is the network healthy" fleet survey.</a:t>
+              <a:t>Why run it: accept a new fabric or a change window; find the slow links and slow hosts; get a quick "is the fleet's network healthy?" picture.</a:t>
             </a:r>
           </a:p>
           <a:p>
@@ -8931,7 +12580,7 @@
               <a:defRPr sz="1600"/>
             </a:pPr>
             <a:r>
-              <a:t>Stateless: each run gets a timestamped results/&lt;run-id&gt;/; results/latest follows the newest.</a:t>
+              <a:t>One command in → four artifacts out: results CSV · per-host CPU summary · pivot table · heatmap.</a:t>
             </a:r>
           </a:p>
           <a:p>
@@ -8939,7 +12588,15 @@
               <a:defRPr sz="1600"/>
             </a:pPr>
             <a:r>
-              <a:t>pip install iperf-orchestrator (or run the script straight from a checkout).</a:t>
+              <a:t>One self-contained script, driving everything over ssh — the servers need nothing but iperf itself. A dead host is reported and skipped, never fatal.</a:t>
+            </a:r>
+          </a:p>
+          <a:p>
+            <a:pPr>
+              <a:defRPr sz="1600"/>
+            </a:pPr>
+            <a:r>
+              <a:t>What it leaves to its siblings: latency and packet rate (that's netmesh and mx).</a:t>
             </a:r>
           </a:p>
         </p:txBody>
@@ -8992,42 +12649,312 @@
       </p:sp>
       <p:sp>
         <p:nvSpPr>
-          <p:cNvPr id="3" name="Content Placeholder 2"/>
-          <p:cNvSpPr>
-            <a:spLocks noGrp="1"/>
-          </p:cNvSpPr>
-          <p:nvPr>
-            <p:ph idx="1"/>
-          </p:nvPr>
-        </p:nvSpPr>
-        <p:spPr/>
+          <p:cNvPr id="3" name="TextBox 2"/>
+          <p:cNvSpPr txBox="1"/>
+          <p:nvPr/>
+        </p:nvSpPr>
+        <p:spPr>
+          <a:xfrm>
+            <a:off x="822960" y="1234440"/>
+            <a:ext cx="10607040" cy="932688"/>
+          </a:xfrm>
+          <a:prstGeom prst="rect">
+            <a:avLst/>
+          </a:prstGeom>
+          <a:noFill/>
+        </p:spPr>
         <p:txBody>
           <a:bodyPr wrap="square">
-            <a:normAutofit/>
+            <a:spAutoFit/>
           </a:bodyPr>
           <a:lstStyle/>
           <a:p>
             <a:pPr>
-              <a:defRPr sz="1600"/>
-            </a:pPr>
-            <a:r>
-              <a:t>The standard throughput tool: a client opens a TCP connection to a server and pushes bytes as fast as it can for N seconds; the report is the achieved end-to-end bandwidth.</a:t>
-            </a:r>
-          </a:p>
-          <a:p>
-            <a:pPr>
-              <a:defRPr sz="1600"/>
-            </a:pPr>
-            <a:r>
-              <a:t>iperf2 and iperf3 are different codebases, not versions of each other.</a:t>
-            </a:r>
-          </a:p>
-          <a:p>
-            <a:pPr>
-              <a:defRPr sz="1600"/>
-            </a:pPr>
-            <a:r>
-              <a:t>The orchestrator uses iperf2's --full-duplex: both directions concurrently on a single TCP socket — one test per pair, and closer to what real traffic does to switch buffers.</a:t>
+              <a:defRPr sz="1400"/>
+            </a:pPr>
+            <a:r>
+              <a:t>iperf is the de-facto standard throughput tool: one box plays server, another plays client, and the client pushes bytes over TCP as hard as it can for a fixed time. The achieved rate is the answer — the true end-to-end capacity of that path: NICs, kernel, cables, switches, everything in between.</a:t>
+            </a:r>
+          </a:p>
+        </p:txBody>
+      </p:sp>
+      <p:graphicFrame>
+        <p:nvGraphicFramePr>
+          <p:cNvPr id="4" name="Table 3"/>
+          <p:cNvGraphicFramePr>
+            <a:graphicFrameLocks noGrp="1"/>
+          </p:cNvGraphicFramePr>
+          <p:nvPr/>
+        </p:nvGraphicFramePr>
+        <p:xfrm>
+          <a:off x="640080" y="2240280"/>
+          <a:ext cx="10972800" cy="2560320"/>
+        </p:xfrm>
+        <a:graphic>
+          <a:graphicData uri="http://schemas.openxmlformats.org/drawingml/2006/table">
+            <a:tbl>
+              <a:tblPr firstRow="1" bandRow="1">
+                <a:tableStyleId>{5C22544A-7EE6-4342-B048-85BDC9FD1C3A}</a:tableStyleId>
+              </a:tblPr>
+              <a:tblGrid>
+                <a:gridCol w="5486400"/>
+                <a:gridCol w="5486400"/>
+              </a:tblGrid>
+              <a:tr h="365760">
+                <a:tc>
+                  <a:txBody>
+                    <a:bodyPr/>
+                    <a:lstStyle/>
+                    <a:p>
+                      <a:pPr>
+                        <a:defRPr sz="1250" b="1"/>
+                      </a:pPr>
+                      <a:r>
+                        <a:t>Concept</a:t>
+                      </a:r>
+                    </a:p>
+                  </a:txBody>
+                  <a:tcPr/>
+                </a:tc>
+                <a:tc>
+                  <a:txBody>
+                    <a:bodyPr/>
+                    <a:lstStyle/>
+                    <a:p>
+                      <a:pPr>
+                        <a:defRPr sz="1250" b="1"/>
+                      </a:pPr>
+                      <a:r>
+                        <a:t>What it means</a:t>
+                      </a:r>
+                    </a:p>
+                  </a:txBody>
+                  <a:tcPr/>
+                </a:tc>
+              </a:tr>
+              <a:tr h="365760">
+                <a:tc>
+                  <a:txBody>
+                    <a:bodyPr/>
+                    <a:lstStyle/>
+                    <a:p>
+                      <a:pPr>
+                        <a:defRPr sz="1200" b="0"/>
+                      </a:pPr>
+                      <a:r>
+                        <a:t>server / client</a:t>
+                      </a:r>
+                    </a:p>
+                  </a:txBody>
+                  <a:tcPr/>
+                </a:tc>
+                <a:tc>
+                  <a:txBody>
+                    <a:bodyPr/>
+                    <a:lstStyle/>
+                    <a:p>
+                      <a:pPr>
+                        <a:defRPr sz="1200" b="0"/>
+                      </a:pPr>
+                      <a:r>
+                        <a:t>iperf -s waits on the server; iperf -c &lt;server&gt; connects and sends</a:t>
+                      </a:r>
+                    </a:p>
+                  </a:txBody>
+                  <a:tcPr/>
+                </a:tc>
+              </a:tr>
+              <a:tr h="365760">
+                <a:tc>
+                  <a:txBody>
+                    <a:bodyPr/>
+                    <a:lstStyle/>
+                    <a:p>
+                      <a:pPr>
+                        <a:defRPr sz="1200" b="0"/>
+                      </a:pPr>
+                      <a:r>
+                        <a:t>duration (-t)</a:t>
+                      </a:r>
+                    </a:p>
+                  </a:txBody>
+                  <a:tcPr/>
+                </a:tc>
+                <a:tc>
+                  <a:txBody>
+                    <a:bodyPr/>
+                    <a:lstStyle/>
+                    <a:p>
+                      <a:pPr>
+                        <a:defRPr sz="1200" b="0"/>
+                      </a:pPr>
+                      <a:r>
+                        <a:t>how long the push lasts — 10 s default; longer smooths out bursts</a:t>
+                      </a:r>
+                    </a:p>
+                  </a:txBody>
+                  <a:tcPr/>
+                </a:tc>
+              </a:tr>
+              <a:tr h="365760">
+                <a:tc>
+                  <a:txBody>
+                    <a:bodyPr/>
+                    <a:lstStyle/>
+                    <a:p>
+                      <a:pPr>
+                        <a:defRPr sz="1200" b="0"/>
+                      </a:pPr>
+                      <a:r>
+                        <a:t>parallel streams (-P)</a:t>
+                      </a:r>
+                    </a:p>
+                  </a:txBody>
+                  <a:tcPr/>
+                </a:tc>
+                <a:tc>
+                  <a:txBody>
+                    <a:bodyPr/>
+                    <a:lstStyle/>
+                    <a:p>
+                      <a:pPr>
+                        <a:defRPr sz="1200" b="0"/>
+                      </a:pPr>
+                      <a:r>
+                        <a:t>several TCP connections at once — one stream often can't fill a fat pipe</a:t>
+                      </a:r>
+                    </a:p>
+                  </a:txBody>
+                  <a:tcPr/>
+                </a:tc>
+              </a:tr>
+              <a:tr h="365760">
+                <a:tc>
+                  <a:txBody>
+                    <a:bodyPr/>
+                    <a:lstStyle/>
+                    <a:p>
+                      <a:pPr>
+                        <a:defRPr sz="1200" b="0"/>
+                      </a:pPr>
+                      <a:r>
+                        <a:t>full-duplex</a:t>
+                      </a:r>
+                    </a:p>
+                  </a:txBody>
+                  <a:tcPr/>
+                </a:tc>
+                <a:tc>
+                  <a:txBody>
+                    <a:bodyPr/>
+                    <a:lstStyle/>
+                    <a:p>
+                      <a:pPr>
+                        <a:defRPr sz="1200" b="0"/>
+                      </a:pPr>
+                      <a:r>
+                        <a:t>both directions on the same connection at the same time — like real traffic</a:t>
+                      </a:r>
+                    </a:p>
+                  </a:txBody>
+                  <a:tcPr/>
+                </a:tc>
+              </a:tr>
+              <a:tr h="365760">
+                <a:tc>
+                  <a:txBody>
+                    <a:bodyPr/>
+                    <a:lstStyle/>
+                    <a:p>
+                      <a:pPr>
+                        <a:defRPr sz="1200" b="0"/>
+                      </a:pPr>
+                      <a:r>
+                        <a:t>TCP vs UDP</a:t>
+                      </a:r>
+                    </a:p>
+                  </a:txBody>
+                  <a:tcPr/>
+                </a:tc>
+                <a:tc>
+                  <a:txBody>
+                    <a:bodyPr/>
+                    <a:lstStyle/>
+                    <a:p>
+                      <a:pPr>
+                        <a:defRPr sz="1200" b="0"/>
+                      </a:pPr>
+                      <a:r>
+                        <a:t>TCP measures achievable throughput; UDP sends a fixed rate to measure loss/jitter</a:t>
+                      </a:r>
+                    </a:p>
+                  </a:txBody>
+                  <a:tcPr/>
+                </a:tc>
+              </a:tr>
+              <a:tr h="365760">
+                <a:tc>
+                  <a:txBody>
+                    <a:bodyPr/>
+                    <a:lstStyle/>
+                    <a:p>
+                      <a:pPr>
+                        <a:defRPr sz="1200" b="0"/>
+                      </a:pPr>
+                      <a:r>
+                        <a:t>the report</a:t>
+                      </a:r>
+                    </a:p>
+                  </a:txBody>
+                  <a:tcPr/>
+                </a:tc>
+                <a:tc>
+                  <a:txBody>
+                    <a:bodyPr/>
+                    <a:lstStyle/>
+                    <a:p>
+                      <a:pPr>
+                        <a:defRPr sz="1200" b="0"/>
+                      </a:pPr>
+                      <a:r>
+                        <a:t>bytes moved and bandwidth, per interval and in total</a:t>
+                      </a:r>
+                    </a:p>
+                  </a:txBody>
+                  <a:tcPr/>
+                </a:tc>
+              </a:tr>
+            </a:tbl>
+          </a:graphicData>
+        </a:graphic>
+      </p:graphicFrame>
+      <p:sp>
+        <p:nvSpPr>
+          <p:cNvPr id="5" name="TextBox 4"/>
+          <p:cNvSpPr txBox="1"/>
+          <p:nvPr/>
+        </p:nvSpPr>
+        <p:spPr>
+          <a:xfrm>
+            <a:off x="822960" y="4983480"/>
+            <a:ext cx="10607040" cy="621792"/>
+          </a:xfrm>
+          <a:prstGeom prst="rect">
+            <a:avLst/>
+          </a:prstGeom>
+          <a:noFill/>
+        </p:spPr>
+        <p:txBody>
+          <a:bodyPr wrap="square">
+            <a:spAutoFit/>
+          </a:bodyPr>
+          <a:lstStyle/>
+          <a:p>
+            <a:pPr>
+              <a:defRPr sz="1400"/>
+            </a:pPr>
+            <a:r>
+              <a:t>Given enough CPU, iperf will saturate a 1G / 10G / 25G link — exactly what a stress test needs. But it thinks in pairs: it has no idea a fleet exists. That's the orchestrator's job.</a:t>
             </a:r>
           </a:p>
         </p:txBody>
@@ -9073,7 +13000,7 @@
               </a:defRPr>
             </a:pPr>
             <a:r>
-              <a:t>Why iperf2, not iperf3 (and why the orchestrator was necessary)</a:t>
+              <a:t>Why iperf2 — and why an orchestrator at all</a:t>
             </a:r>
           </a:p>
         </p:txBody>
@@ -9099,7 +13026,7 @@
               <a:defRPr sz="1600"/>
             </a:pPr>
             <a:r>
-              <a:t>iperf3's server is single-threaded, one client at a time — in a mesh, everyone else gets "server busy". Workaround at N=100: 100 daemons × 100 ports × 100× firewall holes per host. The first version used iperf3 and collapsed under its own workarounds.</a:t>
+              <a:t>Two iperfs exist. iperf3's server takes one client at a time — in a mesh, everyone else gets "server busy". At 100 hosts the workaround is 100 daemons × 100 ports per host. iperf2 takes concurrent clients on one port, and its --full-duplex tests both directions on one connection. (The first version used iperf3; the architecture collapsed under its own workarounds.)</a:t>
             </a:r>
           </a:p>
           <a:p>
@@ -9107,15 +13034,7 @@
               <a:defRPr sz="1600"/>
             </a:pPr>
             <a:r>
-              <a:t>iperf2's multi-threaded server takes concurrent clients on one port (5001) — one daemon per host, done.</a:t>
-            </a:r>
-          </a:p>
-          <a:p>
-            <a:pPr>
-              <a:defRPr sz="1600"/>
-            </a:pPr>
-            <a:r>
-              <a:t>Why an orchestrator at all — a mesh has quadratic moving parts:</a:t>
+              <a:t>A mesh has quadratic moving parts — 4,950 pairs at N=100 — and making it efficient is the orchestrator's job:</a:t>
             </a:r>
           </a:p>
           <a:p>
@@ -9123,7 +13042,7 @@
               <a:defRPr sz="1400"/>
             </a:pPr>
             <a:r>
-              <a:t>4,950 pairs at N=100 — nobody runs that by hand.</a:t>
+              <a:t>Everyone starts together: one "start at" timestamp is pushed out; every host waits for it and fires within a fraction of a second.</a:t>
             </a:r>
           </a:p>
           <a:p>
@@ -9131,7 +13050,7 @@
               <a:defRPr sz="1400"/>
             </a:pPr>
             <a:r>
-              <a:t>Synchronized start: compute now + 30 s once, push the epoch, every host busy-waits and fires within a fraction of a second. No locks, no protocol — just a number.</a:t>
+              <a:t>The work is spread fairly: a parity rule on host positions gives every host ~half the client jobs (49–50 each at N=100, instead of one host running 99).</a:t>
             </a:r>
           </a:p>
           <a:p>
@@ -9139,7 +13058,7 @@
               <a:defRPr sz="1400"/>
             </a:pPr>
             <a:r>
-              <a:t>Balanced client assignment (parity rule): for pair {i, j}, client = smaller index if i+j even, larger if odd → every host runs 49–50 clients instead of 0–99. Both ends compute it independently.</a:t>
+              <a:t>Results come home fast: one archive per host instead of thousands of copies — minutes, not the ~80 minutes it once took.</a:t>
             </a:r>
           </a:p>
           <a:p>
@@ -9147,15 +13066,7 @@
               <a:defRPr sz="1400"/>
             </a:pPr>
             <a:r>
-              <a:t>Tar-batched collection: one tar + scp + untar per host ≈ minutes, vs ~80 minutes of N² scp handshakes.</a:t>
-            </a:r>
-          </a:p>
-          <a:p>
-            <a:pPr lvl="1">
-              <a:defRPr sz="1400"/>
-            </a:pPr>
-            <a:r>
-              <a:t>CPU sampled on every host during the run — because a throughput number without CPU next to it gets misread.</a:t>
+              <a:t>CPU is sampled everywhere during the run, because a throughput number without CPU next to it gets misread.</a:t>
             </a:r>
           </a:p>
         </p:txBody>
@@ -9201,89 +13112,601 @@
               </a:defRPr>
             </a:pPr>
             <a:r>
-              <a:t>Why run it — and what it does / doesn't do</a:t>
-            </a:r>
-          </a:p>
-        </p:txBody>
-      </p:sp>
-      <p:sp>
-        <p:nvSpPr>
-          <p:cNvPr id="3" name="Content Placeholder 2"/>
-          <p:cNvSpPr>
-            <a:spLocks noGrp="1"/>
-          </p:cNvSpPr>
-          <p:nvPr>
-            <p:ph idx="1"/>
-          </p:nvPr>
-        </p:nvSpPr>
-        <p:spPr/>
+              <a:t>Running it, start to finish</a:t>
+            </a:r>
+          </a:p>
+        </p:txBody>
+      </p:sp>
+      <p:sp>
+        <p:nvSpPr>
+          <p:cNvPr id="3" name="TextBox 2"/>
+          <p:cNvSpPr txBox="1"/>
+          <p:nvPr/>
+        </p:nvSpPr>
+        <p:spPr>
+          <a:xfrm>
+            <a:off x="640080" y="1234440"/>
+            <a:ext cx="10972800" cy="448056"/>
+          </a:xfrm>
+          <a:prstGeom prst="rect">
+            <a:avLst/>
+          </a:prstGeom>
+          <a:noFill/>
+        </p:spPr>
+        <p:txBody>
+          <a:bodyPr wrap="none">
+            <a:spAutoFit/>
+          </a:bodyPr>
+          <a:lstStyle/>
+          <a:p>
+            <a:pPr>
+              <a:defRPr sz="1300">
+                <a:solidFill>
+                  <a:srgbClr val="24354A"/>
+                </a:solidFill>
+                <a:latin typeface="Consolas"/>
+              </a:defRPr>
+            </a:pPr>
+            <a:r>
+              <a:t>iperf-orchestrator --servers servers.txt all</a:t>
+            </a:r>
+          </a:p>
+        </p:txBody>
+      </p:sp>
+      <p:sp>
+        <p:nvSpPr>
+          <p:cNvPr id="4" name="Rounded Rectangle 3"/>
+          <p:cNvSpPr/>
+          <p:nvPr/>
+        </p:nvSpPr>
+        <p:spPr>
+          <a:xfrm>
+            <a:off x="640080" y="1819656"/>
+            <a:ext cx="1887321" cy="914400"/>
+          </a:xfrm>
+          <a:prstGeom prst="roundRect">
+            <a:avLst/>
+          </a:prstGeom>
+          <a:solidFill>
+            <a:srgbClr val="3D8B4F"/>
+          </a:solidFill>
+          <a:ln>
+            <a:noFill/>
+          </a:ln>
+        </p:spPr>
+        <p:style>
+          <a:lnRef idx="1">
+            <a:schemeClr val="accent1"/>
+          </a:lnRef>
+          <a:fillRef idx="3">
+            <a:schemeClr val="accent1"/>
+          </a:fillRef>
+          <a:effectRef idx="2">
+            <a:schemeClr val="accent1"/>
+          </a:effectRef>
+          <a:fontRef idx="minor">
+            <a:schemeClr val="lt1"/>
+          </a:fontRef>
+        </p:style>
+        <p:txBody>
+          <a:bodyPr rtlCol="0" anchor="ctr" wrap="square"/>
+          <a:lstStyle/>
+          <a:p>
+            <a:pPr algn="ctr">
+              <a:defRPr sz="1150" b="1">
+                <a:solidFill>
+                  <a:srgbClr val="FFFFFF"/>
+                </a:solidFill>
+                <a:latin typeface="Consolas"/>
+              </a:defRPr>
+            </a:pPr>
+            <a:r>
+              <a:t>start-servers</a:t>
+            </a:r>
+          </a:p>
+          <a:p>
+            <a:pPr>
+              <a:defRPr sz="1000">
+                <a:solidFill>
+                  <a:srgbClr val="F0F3F6"/>
+                </a:solidFill>
+              </a:defRPr>
+            </a:pPr>
+            <a:r>
+              <a:t>iperf comes up everywhere</a:t>
+            </a:r>
+          </a:p>
+        </p:txBody>
+      </p:sp>
+      <p:sp>
+        <p:nvSpPr>
+          <p:cNvPr id="5" name="TextBox 4"/>
+          <p:cNvSpPr txBox="1"/>
+          <p:nvPr/>
+        </p:nvSpPr>
+        <p:spPr>
+          <a:xfrm>
+            <a:off x="2527401" y="2075688"/>
+            <a:ext cx="384048" cy="365760"/>
+          </a:xfrm>
+          <a:prstGeom prst="rect">
+            <a:avLst/>
+          </a:prstGeom>
+          <a:noFill/>
+        </p:spPr>
+        <p:txBody>
+          <a:bodyPr wrap="none">
+            <a:spAutoFit/>
+          </a:bodyPr>
+          <a:lstStyle/>
+          <a:p>
+            <a:pPr>
+              <a:defRPr sz="1600" b="1">
+                <a:solidFill>
+                  <a:srgbClr val="3E5C76"/>
+                </a:solidFill>
+              </a:defRPr>
+            </a:pPr>
+            <a:r>
+              <a:t>→</a:t>
+            </a:r>
+          </a:p>
+        </p:txBody>
+      </p:sp>
+      <p:sp>
+        <p:nvSpPr>
+          <p:cNvPr id="6" name="Rounded Rectangle 5"/>
+          <p:cNvSpPr/>
+          <p:nvPr/>
+        </p:nvSpPr>
+        <p:spPr>
+          <a:xfrm>
+            <a:off x="2911449" y="1819656"/>
+            <a:ext cx="1887321" cy="914400"/>
+          </a:xfrm>
+          <a:prstGeom prst="roundRect">
+            <a:avLst/>
+          </a:prstGeom>
+          <a:solidFill>
+            <a:srgbClr val="12897B"/>
+          </a:solidFill>
+          <a:ln>
+            <a:noFill/>
+          </a:ln>
+        </p:spPr>
+        <p:style>
+          <a:lnRef idx="1">
+            <a:schemeClr val="accent1"/>
+          </a:lnRef>
+          <a:fillRef idx="3">
+            <a:schemeClr val="accent1"/>
+          </a:fillRef>
+          <a:effectRef idx="2">
+            <a:schemeClr val="accent1"/>
+          </a:effectRef>
+          <a:fontRef idx="minor">
+            <a:schemeClr val="lt1"/>
+          </a:fontRef>
+        </p:style>
+        <p:txBody>
+          <a:bodyPr rtlCol="0" anchor="ctr" wrap="square"/>
+          <a:lstStyle/>
+          <a:p>
+            <a:pPr algn="ctr">
+              <a:defRPr sz="1150" b="1">
+                <a:solidFill>
+                  <a:srgbClr val="FFFFFF"/>
+                </a:solidFill>
+                <a:latin typeface="Consolas"/>
+              </a:defRPr>
+            </a:pPr>
+            <a:r>
+              <a:t>run-tests</a:t>
+            </a:r>
+          </a:p>
+          <a:p>
+            <a:pPr>
+              <a:defRPr sz="1000">
+                <a:solidFill>
+                  <a:srgbClr val="F0F3F6"/>
+                </a:solidFill>
+              </a:defRPr>
+            </a:pPr>
+            <a:r>
+              <a:t>the synchronized mesh</a:t>
+            </a:r>
+          </a:p>
+        </p:txBody>
+      </p:sp>
+      <p:sp>
+        <p:nvSpPr>
+          <p:cNvPr id="7" name="TextBox 6"/>
+          <p:cNvSpPr txBox="1"/>
+          <p:nvPr/>
+        </p:nvSpPr>
+        <p:spPr>
+          <a:xfrm>
+            <a:off x="4798771" y="2075688"/>
+            <a:ext cx="384048" cy="365760"/>
+          </a:xfrm>
+          <a:prstGeom prst="rect">
+            <a:avLst/>
+          </a:prstGeom>
+          <a:noFill/>
+        </p:spPr>
+        <p:txBody>
+          <a:bodyPr wrap="none">
+            <a:spAutoFit/>
+          </a:bodyPr>
+          <a:lstStyle/>
+          <a:p>
+            <a:pPr>
+              <a:defRPr sz="1600" b="1">
+                <a:solidFill>
+                  <a:srgbClr val="3E5C76"/>
+                </a:solidFill>
+              </a:defRPr>
+            </a:pPr>
+            <a:r>
+              <a:t>→</a:t>
+            </a:r>
+          </a:p>
+        </p:txBody>
+      </p:sp>
+      <p:sp>
+        <p:nvSpPr>
+          <p:cNvPr id="8" name="Rounded Rectangle 7"/>
+          <p:cNvSpPr/>
+          <p:nvPr/>
+        </p:nvSpPr>
+        <p:spPr>
+          <a:xfrm>
+            <a:off x="5182819" y="1819656"/>
+            <a:ext cx="1887321" cy="914400"/>
+          </a:xfrm>
+          <a:prstGeom prst="roundRect">
+            <a:avLst/>
+          </a:prstGeom>
+          <a:solidFill>
+            <a:srgbClr val="D97C1F"/>
+          </a:solidFill>
+          <a:ln>
+            <a:noFill/>
+          </a:ln>
+        </p:spPr>
+        <p:style>
+          <a:lnRef idx="1">
+            <a:schemeClr val="accent1"/>
+          </a:lnRef>
+          <a:fillRef idx="3">
+            <a:schemeClr val="accent1"/>
+          </a:fillRef>
+          <a:effectRef idx="2">
+            <a:schemeClr val="accent1"/>
+          </a:effectRef>
+          <a:fontRef idx="minor">
+            <a:schemeClr val="lt1"/>
+          </a:fontRef>
+        </p:style>
+        <p:txBody>
+          <a:bodyPr rtlCol="0" anchor="ctr" wrap="square"/>
+          <a:lstStyle/>
+          <a:p>
+            <a:pPr algn="ctr">
+              <a:defRPr sz="1150" b="1">
+                <a:solidFill>
+                  <a:srgbClr val="FFFFFF"/>
+                </a:solidFill>
+                <a:latin typeface="Consolas"/>
+              </a:defRPr>
+            </a:pPr>
+            <a:r>
+              <a:t>collect-results</a:t>
+            </a:r>
+          </a:p>
+          <a:p>
+            <a:pPr>
+              <a:defRPr sz="1000">
+                <a:solidFill>
+                  <a:srgbClr val="F0F3F6"/>
+                </a:solidFill>
+              </a:defRPr>
+            </a:pPr>
+            <a:r>
+              <a:t>logs come home</a:t>
+            </a:r>
+          </a:p>
+        </p:txBody>
+      </p:sp>
+      <p:sp>
+        <p:nvSpPr>
+          <p:cNvPr id="9" name="TextBox 8"/>
+          <p:cNvSpPr txBox="1"/>
+          <p:nvPr/>
+        </p:nvSpPr>
+        <p:spPr>
+          <a:xfrm>
+            <a:off x="7070140" y="2075688"/>
+            <a:ext cx="384048" cy="365760"/>
+          </a:xfrm>
+          <a:prstGeom prst="rect">
+            <a:avLst/>
+          </a:prstGeom>
+          <a:noFill/>
+        </p:spPr>
+        <p:txBody>
+          <a:bodyPr wrap="none">
+            <a:spAutoFit/>
+          </a:bodyPr>
+          <a:lstStyle/>
+          <a:p>
+            <a:pPr>
+              <a:defRPr sz="1600" b="1">
+                <a:solidFill>
+                  <a:srgbClr val="3E5C76"/>
+                </a:solidFill>
+              </a:defRPr>
+            </a:pPr>
+            <a:r>
+              <a:t>→</a:t>
+            </a:r>
+          </a:p>
+        </p:txBody>
+      </p:sp>
+      <p:sp>
+        <p:nvSpPr>
+          <p:cNvPr id="10" name="Rounded Rectangle 9"/>
+          <p:cNvSpPr/>
+          <p:nvPr/>
+        </p:nvSpPr>
+        <p:spPr>
+          <a:xfrm>
+            <a:off x="7454188" y="1819656"/>
+            <a:ext cx="1887321" cy="914400"/>
+          </a:xfrm>
+          <a:prstGeom prst="roundRect">
+            <a:avLst/>
+          </a:prstGeom>
+          <a:solidFill>
+            <a:srgbClr val="BE3B4E"/>
+          </a:solidFill>
+          <a:ln>
+            <a:noFill/>
+          </a:ln>
+        </p:spPr>
+        <p:style>
+          <a:lnRef idx="1">
+            <a:schemeClr val="accent1"/>
+          </a:lnRef>
+          <a:fillRef idx="3">
+            <a:schemeClr val="accent1"/>
+          </a:fillRef>
+          <a:effectRef idx="2">
+            <a:schemeClr val="accent1"/>
+          </a:effectRef>
+          <a:fontRef idx="minor">
+            <a:schemeClr val="lt1"/>
+          </a:fontRef>
+        </p:style>
+        <p:txBody>
+          <a:bodyPr rtlCol="0" anchor="ctr" wrap="square"/>
+          <a:lstStyle/>
+          <a:p>
+            <a:pPr algn="ctr">
+              <a:defRPr sz="1150" b="1">
+                <a:solidFill>
+                  <a:srgbClr val="FFFFFF"/>
+                </a:solidFill>
+                <a:latin typeface="Consolas"/>
+              </a:defRPr>
+            </a:pPr>
+            <a:r>
+              <a:t>process</a:t>
+            </a:r>
+          </a:p>
+          <a:p>
+            <a:pPr>
+              <a:defRPr sz="1000">
+                <a:solidFill>
+                  <a:srgbClr val="F0F3F6"/>
+                </a:solidFill>
+              </a:defRPr>
+            </a:pPr>
+            <a:r>
+              <a:t>CSV, pivot, heatmap</a:t>
+            </a:r>
+          </a:p>
+        </p:txBody>
+      </p:sp>
+      <p:sp>
+        <p:nvSpPr>
+          <p:cNvPr id="11" name="TextBox 10"/>
+          <p:cNvSpPr txBox="1"/>
+          <p:nvPr/>
+        </p:nvSpPr>
+        <p:spPr>
+          <a:xfrm>
+            <a:off x="9341510" y="2075688"/>
+            <a:ext cx="384048" cy="365760"/>
+          </a:xfrm>
+          <a:prstGeom prst="rect">
+            <a:avLst/>
+          </a:prstGeom>
+          <a:noFill/>
+        </p:spPr>
+        <p:txBody>
+          <a:bodyPr wrap="none">
+            <a:spAutoFit/>
+          </a:bodyPr>
+          <a:lstStyle/>
+          <a:p>
+            <a:pPr>
+              <a:defRPr sz="1600" b="1">
+                <a:solidFill>
+                  <a:srgbClr val="3E5C76"/>
+                </a:solidFill>
+              </a:defRPr>
+            </a:pPr>
+            <a:r>
+              <a:t>→</a:t>
+            </a:r>
+          </a:p>
+        </p:txBody>
+      </p:sp>
+      <p:sp>
+        <p:nvSpPr>
+          <p:cNvPr id="12" name="Rounded Rectangle 11"/>
+          <p:cNvSpPr/>
+          <p:nvPr/>
+        </p:nvSpPr>
+        <p:spPr>
+          <a:xfrm>
+            <a:off x="9725558" y="1819656"/>
+            <a:ext cx="1887321" cy="914400"/>
+          </a:xfrm>
+          <a:prstGeom prst="roundRect">
+            <a:avLst/>
+          </a:prstGeom>
+          <a:solidFill>
+            <a:srgbClr val="12897B"/>
+          </a:solidFill>
+          <a:ln>
+            <a:noFill/>
+          </a:ln>
+        </p:spPr>
+        <p:style>
+          <a:lnRef idx="1">
+            <a:schemeClr val="accent1"/>
+          </a:lnRef>
+          <a:fillRef idx="3">
+            <a:schemeClr val="accent1"/>
+          </a:fillRef>
+          <a:effectRef idx="2">
+            <a:schemeClr val="accent1"/>
+          </a:effectRef>
+          <a:fontRef idx="minor">
+            <a:schemeClr val="lt1"/>
+          </a:fontRef>
+        </p:style>
+        <p:txBody>
+          <a:bodyPr rtlCol="0" anchor="ctr" wrap="square"/>
+          <a:lstStyle/>
+          <a:p>
+            <a:pPr algn="ctr">
+              <a:defRPr sz="1150" b="1">
+                <a:solidFill>
+                  <a:srgbClr val="FFFFFF"/>
+                </a:solidFill>
+                <a:latin typeface="Consolas"/>
+              </a:defRPr>
+            </a:pPr>
+            <a:r>
+              <a:t>stop + cleanup</a:t>
+            </a:r>
+          </a:p>
+          <a:p>
+            <a:pPr>
+              <a:defRPr sz="1000">
+                <a:solidFill>
+                  <a:srgbClr val="F0F3F6"/>
+                </a:solidFill>
+              </a:defRPr>
+            </a:pPr>
+            <a:r>
+              <a:t>leave no trace</a:t>
+            </a:r>
+          </a:p>
+        </p:txBody>
+      </p:sp>
+      <p:sp>
+        <p:nvSpPr>
+          <p:cNvPr id="13" name="TextBox 12"/>
+          <p:cNvSpPr txBox="1"/>
+          <p:nvPr/>
+        </p:nvSpPr>
+        <p:spPr>
+          <a:xfrm>
+            <a:off x="822960" y="2935224"/>
+            <a:ext cx="10607040" cy="621792"/>
+          </a:xfrm>
+          <a:prstGeom prst="rect">
+            <a:avLst/>
+          </a:prstGeom>
+          <a:noFill/>
+        </p:spPr>
         <p:txBody>
           <a:bodyPr wrap="square">
-            <a:normAutofit/>
+            <a:spAutoFit/>
           </a:bodyPr>
           <a:lstStyle/>
           <a:p>
             <a:pPr>
-              <a:defRPr sz="1600"/>
-            </a:pPr>
-            <a:r>
-              <a:t>Why: acceptance-test a new fabric or change window (load everything, see what breaks); rank slow hosts/links; get a defensible baseline picture of the fleet.</a:t>
-            </a:r>
-          </a:p>
-          <a:p>
-            <a:pPr>
-              <a:defRPr sz="1600"/>
-            </a:pPr>
-            <a:r>
-              <a:t>Does: full-duplex TCP mesh; synchronized start; balanced pairs; per-host CPU (mpstat, /proc/stat fallback); parse → CSV/pivot/heatmap re-runnable per run-id; capped ssh fan-out (--jobs), optional --retries; fails open — one bad host doesn't abort a 100-host run.</a:t>
-            </a:r>
-          </a:p>
-          <a:p>
-            <a:pPr>
-              <a:defRPr sz="1600"/>
-            </a:pPr>
-            <a:r>
-              <a:t>Doesn't:</a:t>
-            </a:r>
-          </a:p>
-          <a:p>
-            <a:pPr lvl="1">
               <a:defRPr sz="1400"/>
             </a:pPr>
             <a:r>
-              <a:t>No UDP, no latency, no packet rate — that's netmesh/mx territory.</a:t>
-            </a:r>
-          </a:p>
-          <a:p>
-            <a:pPr lvl="1">
+              <a:t>• Every run lands in its own timestamped folder — results/&lt;run-id&gt;/, with results/latest pointing at the newest. Old runs can be re-analyzed any time (--run-id).</a:t>
+            </a:r>
+          </a:p>
+        </p:txBody>
+      </p:sp>
+      <p:sp>
+        <p:nvSpPr>
+          <p:cNvPr id="14" name="TextBox 13"/>
+          <p:cNvSpPr txBox="1"/>
+          <p:nvPr/>
+        </p:nvSpPr>
+        <p:spPr>
+          <a:xfrm>
+            <a:off x="822960" y="3630168"/>
+            <a:ext cx="10607040" cy="932688"/>
+          </a:xfrm>
+          <a:prstGeom prst="rect">
+            <a:avLst/>
+          </a:prstGeom>
+          <a:noFill/>
+        </p:spPr>
+        <p:txBody>
+          <a:bodyPr wrap="square">
+            <a:spAutoFit/>
+          </a:bodyPr>
+          <a:lstStyle/>
+          <a:p>
+            <a:pPr>
               <a:defRPr sz="1400"/>
             </a:pPr>
             <a:r>
-              <a:t>Doesn't install iperf2 or distribute ssh keys — doctor / check-iperf verify, you provision.</a:t>
-            </a:r>
-          </a:p>
-          <a:p>
-            <a:pPr lvl="1">
+              <a:t>• Reading a run, in order: ① the heatmap — a red *row* means that server sends slowly to everyone; a red *column* means everyone struggles to reach it. ② the CPU summary — if a "slow" host's CPU was pegged, you measured the host, not the network. ③ results-summary — percentiles plus the five slowest pairs.</a:t>
+            </a:r>
+          </a:p>
+        </p:txBody>
+      </p:sp>
+      <p:sp>
+        <p:nvSpPr>
+          <p:cNvPr id="15" name="TextBox 14"/>
+          <p:cNvSpPr txBox="1"/>
+          <p:nvPr/>
+        </p:nvSpPr>
+        <p:spPr>
+          <a:xfrm>
+            <a:off x="822960" y="4636008"/>
+            <a:ext cx="10607040" cy="932688"/>
+          </a:xfrm>
+          <a:prstGeom prst="rect">
+            <a:avLst/>
+          </a:prstGeom>
+          <a:noFill/>
+        </p:spPr>
+        <p:txBody>
+          <a:bodyPr wrap="square">
+            <a:spAutoFit/>
+          </a:bodyPr>
+          <a:lstStyle/>
+          <a:p>
+            <a:pPr>
               <a:defRPr sz="1400"/>
             </a:pPr>
             <a:r>
-              <a:t>No normalization for mixed NIC speeds (1G hosts look red next to 10G).</a:t>
-            </a:r>
-          </a:p>
-          <a:p>
-            <a:pPr lvl="1">
-              <a:defRPr sz="1400"/>
-            </a:pPr>
-            <a:r>
-              <a:t>Heatmap past ~60 hosts drops cell labels by design; read the CSV for exact values.</a:t>
-            </a:r>
-          </a:p>
-          <a:p>
-            <a:pPr lvl="1">
-              <a:defRPr sz="1400"/>
-            </a:pPr>
-            <a:r>
-              <a:t>sequential-pair at N=100 ≈ 14 hours — the cleanest mode is priced accordingly.</a:t>
+              <a:t>• Useful switches: --dry-run (show what would run, run nothing) · --keep-going (finish past a dead host) · --resume (pick up an aborted run) · --duration / -P (longer or multi-stream tests). Every switch is also an environment variable.</a:t>
             </a:r>
           </a:p>
         </p:txBody>

--- a/network-testing/network_testing.pptx
+++ b/network-testing/network_testing.pptx
@@ -1306,7 +1306,7 @@
           <a:lstStyle/>
           <a:p>
             <a:r>
-              <a:t>The alternative is a week of hand-run iperf, ad-hoc pssh loops, and numbers nobody trusts. Spell out "they compose" plainly: one server list drives everything, and the outputs are designed to sit next to each other — pruning the list, baselining, then loading is a chain of commands, not three integrations. The pipeline on the slide is the whole talk in one line; the three big sections that follow just walk it left to right.</a:t>
+              <a:t>The alternative is a week of hand-run iperf, ad-hoc pssh loops, and numbers nobody trusts. Each tool is complete on its own — grab the one that matches the question in front of you. The shared conventions are a convenience, not a dependency: one servers.txt works everywhere, and the gen / start / status / summarize / stop / clean verbs mean the muscle memory transfers.</a:t>
             </a:r>
           </a:p>
         </p:txBody>
@@ -10054,627 +10054,57 @@
               </a:defRPr>
             </a:pPr>
             <a:r>
-              <a:t>Why these tools — and how they fit together</a:t>
-            </a:r>
-          </a:p>
-        </p:txBody>
-      </p:sp>
-      <p:sp>
-        <p:nvSpPr>
-          <p:cNvPr id="3" name="TextBox 2"/>
-          <p:cNvSpPr txBox="1"/>
-          <p:nvPr/>
-        </p:nvSpPr>
-        <p:spPr>
-          <a:xfrm>
-            <a:off x="822960" y="1234440"/>
-            <a:ext cx="10607040" cy="621792"/>
-          </a:xfrm>
-          <a:prstGeom prst="rect">
-            <a:avLst/>
-          </a:prstGeom>
-          <a:noFill/>
-        </p:spPr>
+              <a:t>Why these tools</a:t>
+            </a:r>
+          </a:p>
+        </p:txBody>
+      </p:sp>
+      <p:sp>
+        <p:nvSpPr>
+          <p:cNvPr id="3" name="Content Placeholder 2"/>
+          <p:cNvSpPr>
+            <a:spLocks noGrp="1"/>
+          </p:cNvSpPr>
+          <p:nvPr>
+            <p:ph idx="1"/>
+          </p:nvPr>
+        </p:nvSpPr>
+        <p:spPr/>
         <p:txBody>
           <a:bodyPr wrap="square">
-            <a:spAutoFit/>
+            <a:normAutofit/>
           </a:bodyPr>
           <a:lstStyle/>
           <a:p>
             <a:pPr>
-              <a:defRPr sz="1400"/>
-            </a:pPr>
-            <a:r>
-              <a:t>• They go anywhere you can ssh. No agents, no daemons, no root — nothing installed on the servers, and clean removes every trace afterwards.</a:t>
-            </a:r>
-          </a:p>
-        </p:txBody>
-      </p:sp>
-      <p:sp>
-        <p:nvSpPr>
-          <p:cNvPr id="4" name="TextBox 3"/>
-          <p:cNvSpPr txBox="1"/>
-          <p:nvPr/>
-        </p:nvSpPr>
-        <p:spPr>
-          <a:xfrm>
-            <a:off x="822960" y="1929384"/>
-            <a:ext cx="10607040" cy="621792"/>
-          </a:xfrm>
-          <a:prstGeom prst="rect">
-            <a:avLst/>
-          </a:prstGeom>
-          <a:noFill/>
-        </p:spPr>
-        <p:txBody>
-          <a:bodyPr wrap="square">
-            <a:spAutoFit/>
-          </a:bodyPr>
-          <a:lstStyle/>
-          <a:p>
-            <a:pPr>
-              <a:defRPr sz="1400"/>
-            </a:pPr>
-            <a:r>
-              <a:t>• The numbers are honest. Blank never means zero, and the headline is what the *receiver* counted — not what the sender hoped. When a tool becomes its own bottleneck, it says so.</a:t>
-            </a:r>
-          </a:p>
-        </p:txBody>
-      </p:sp>
-      <p:sp>
-        <p:nvSpPr>
-          <p:cNvPr id="5" name="TextBox 4"/>
-          <p:cNvSpPr txBox="1"/>
-          <p:nvPr/>
-        </p:nvSpPr>
-        <p:spPr>
-          <a:xfrm>
-            <a:off x="822960" y="2624328"/>
-            <a:ext cx="10607040" cy="310896"/>
-          </a:xfrm>
-          <a:prstGeom prst="rect">
-            <a:avLst/>
-          </a:prstGeom>
-          <a:noFill/>
-        </p:spPr>
-        <p:txBody>
-          <a:bodyPr wrap="square">
-            <a:spAutoFit/>
-          </a:bodyPr>
-          <a:lstStyle/>
-          <a:p>
-            <a:pPr>
-              <a:defRPr sz="1400"/>
-            </a:pPr>
-            <a:r>
-              <a:t>• They're one file each. Stdlib-only Python — pip install it, or just scp the file and run it.</a:t>
-            </a:r>
-          </a:p>
-        </p:txBody>
-      </p:sp>
-      <p:sp>
-        <p:nvSpPr>
-          <p:cNvPr id="6" name="TextBox 5"/>
-          <p:cNvSpPr txBox="1"/>
-          <p:nvPr/>
-        </p:nvSpPr>
-        <p:spPr>
-          <a:xfrm>
-            <a:off x="822960" y="3008376"/>
-            <a:ext cx="10607040" cy="932688"/>
-          </a:xfrm>
-          <a:prstGeom prst="rect">
-            <a:avLst/>
-          </a:prstGeom>
-          <a:noFill/>
-        </p:spPr>
-        <p:txBody>
-          <a:bodyPr wrap="square">
-            <a:spAutoFit/>
-          </a:bodyPr>
-          <a:lstStyle/>
-          <a:p>
-            <a:pPr>
-              <a:defRPr sz="1400"/>
-            </a:pPr>
-            <a:r>
-              <a:t>• They compose — meaning each one's output is the next one's input. reachable rewrites the very servers.txt the others read; netmesh and mx write matching N×N grids that open side by side in one spreadsheet. You chain them; there's no glue to write.</a:t>
-            </a:r>
-          </a:p>
-        </p:txBody>
-      </p:sp>
-      <p:sp>
-        <p:nvSpPr>
-          <p:cNvPr id="7" name="Rounded Rectangle 6"/>
-          <p:cNvSpPr/>
-          <p:nvPr/>
-        </p:nvSpPr>
-        <p:spPr>
-          <a:xfrm>
-            <a:off x="640080" y="4014216"/>
-            <a:ext cx="1887321" cy="914400"/>
-          </a:xfrm>
-          <a:prstGeom prst="roundRect">
-            <a:avLst/>
-          </a:prstGeom>
-          <a:solidFill>
-            <a:srgbClr val="3D8B4F"/>
-          </a:solidFill>
-          <a:ln>
-            <a:noFill/>
-          </a:ln>
-        </p:spPr>
-        <p:style>
-          <a:lnRef idx="1">
-            <a:schemeClr val="accent1"/>
-          </a:lnRef>
-          <a:fillRef idx="3">
-            <a:schemeClr val="accent1"/>
-          </a:fillRef>
-          <a:effectRef idx="2">
-            <a:schemeClr val="accent1"/>
-          </a:effectRef>
-          <a:fontRef idx="minor">
-            <a:schemeClr val="lt1"/>
-          </a:fontRef>
-        </p:style>
-        <p:txBody>
-          <a:bodyPr rtlCol="0" anchor="ctr" wrap="square"/>
-          <a:lstStyle/>
-          <a:p>
-            <a:pPr algn="ctr">
-              <a:defRPr sz="1150" b="1">
-                <a:solidFill>
-                  <a:srgbClr val="FFFFFF"/>
-                </a:solidFill>
-                <a:latin typeface="Consolas"/>
-              </a:defRPr>
-            </a:pPr>
-            <a:r>
-              <a:t>reachable prod.txt -i</a:t>
-            </a:r>
-          </a:p>
-          <a:p>
-            <a:pPr>
-              <a:defRPr sz="1000">
-                <a:solidFill>
-                  <a:srgbClr val="F0F3F6"/>
-                </a:solidFill>
-              </a:defRPr>
-            </a:pPr>
-            <a:r>
-              <a:t>prune the list</a:t>
-            </a:r>
-          </a:p>
-        </p:txBody>
-      </p:sp>
-      <p:sp>
-        <p:nvSpPr>
-          <p:cNvPr id="8" name="TextBox 7"/>
-          <p:cNvSpPr txBox="1"/>
-          <p:nvPr/>
-        </p:nvSpPr>
-        <p:spPr>
-          <a:xfrm>
-            <a:off x="2527401" y="4270248"/>
-            <a:ext cx="384048" cy="365760"/>
-          </a:xfrm>
-          <a:prstGeom prst="rect">
-            <a:avLst/>
-          </a:prstGeom>
-          <a:noFill/>
-        </p:spPr>
-        <p:txBody>
-          <a:bodyPr wrap="none">
-            <a:spAutoFit/>
-          </a:bodyPr>
-          <a:lstStyle/>
-          <a:p>
-            <a:pPr>
-              <a:defRPr sz="1600" b="1">
-                <a:solidFill>
-                  <a:srgbClr val="3E5C76"/>
-                </a:solidFill>
-              </a:defRPr>
-            </a:pPr>
-            <a:r>
-              <a:t>→</a:t>
-            </a:r>
-          </a:p>
-        </p:txBody>
-      </p:sp>
-      <p:sp>
-        <p:nvSpPr>
-          <p:cNvPr id="9" name="Rounded Rectangle 8"/>
-          <p:cNvSpPr/>
-          <p:nvPr/>
-        </p:nvSpPr>
-        <p:spPr>
-          <a:xfrm>
-            <a:off x="2911449" y="4014216"/>
-            <a:ext cx="1887321" cy="914400"/>
-          </a:xfrm>
-          <a:prstGeom prst="roundRect">
-            <a:avLst/>
-          </a:prstGeom>
-          <a:solidFill>
-            <a:srgbClr val="12897B"/>
-          </a:solidFill>
-          <a:ln>
-            <a:noFill/>
-          </a:ln>
-        </p:spPr>
-        <p:style>
-          <a:lnRef idx="1">
-            <a:schemeClr val="accent1"/>
-          </a:lnRef>
-          <a:fillRef idx="3">
-            <a:schemeClr val="accent1"/>
-          </a:fillRef>
-          <a:effectRef idx="2">
-            <a:schemeClr val="accent1"/>
-          </a:effectRef>
-          <a:fontRef idx="minor">
-            <a:schemeClr val="lt1"/>
-          </a:fontRef>
-        </p:style>
-        <p:txBody>
-          <a:bodyPr rtlCol="0" anchor="ctr" wrap="square"/>
-          <a:lstStyle/>
-          <a:p>
-            <a:pPr algn="ctr">
-              <a:defRPr sz="1150" b="1">
-                <a:solidFill>
-                  <a:srgbClr val="FFFFFF"/>
-                </a:solidFill>
-                <a:latin typeface="Consolas"/>
-              </a:defRPr>
-            </a:pPr>
-            <a:r>
-              <a:t>netmesh check</a:t>
-            </a:r>
-          </a:p>
-          <a:p>
-            <a:pPr>
-              <a:defRPr sz="1000">
-                <a:solidFill>
-                  <a:srgbClr val="F0F3F6"/>
-                </a:solidFill>
-              </a:defRPr>
-            </a:pPr>
-            <a:r>
-              <a:t>idle baseline</a:t>
-            </a:r>
-          </a:p>
-        </p:txBody>
-      </p:sp>
-      <p:sp>
-        <p:nvSpPr>
-          <p:cNvPr id="10" name="TextBox 9"/>
-          <p:cNvSpPr txBox="1"/>
-          <p:nvPr/>
-        </p:nvSpPr>
-        <p:spPr>
-          <a:xfrm>
-            <a:off x="4798771" y="4270248"/>
-            <a:ext cx="384048" cy="365760"/>
-          </a:xfrm>
-          <a:prstGeom prst="rect">
-            <a:avLst/>
-          </a:prstGeom>
-          <a:noFill/>
-        </p:spPr>
-        <p:txBody>
-          <a:bodyPr wrap="none">
-            <a:spAutoFit/>
-          </a:bodyPr>
-          <a:lstStyle/>
-          <a:p>
-            <a:pPr>
-              <a:defRPr sz="1600" b="1">
-                <a:solidFill>
-                  <a:srgbClr val="3E5C76"/>
-                </a:solidFill>
-              </a:defRPr>
-            </a:pPr>
-            <a:r>
-              <a:t>→</a:t>
-            </a:r>
-          </a:p>
-        </p:txBody>
-      </p:sp>
-      <p:sp>
-        <p:nvSpPr>
-          <p:cNvPr id="11" name="Rounded Rectangle 10"/>
-          <p:cNvSpPr/>
-          <p:nvPr/>
-        </p:nvSpPr>
-        <p:spPr>
-          <a:xfrm>
-            <a:off x="5182819" y="4014216"/>
-            <a:ext cx="1887321" cy="914400"/>
-          </a:xfrm>
-          <a:prstGeom prst="roundRect">
-            <a:avLst/>
-          </a:prstGeom>
-          <a:solidFill>
-            <a:srgbClr val="D97C1F"/>
-          </a:solidFill>
-          <a:ln>
-            <a:noFill/>
-          </a:ln>
-        </p:spPr>
-        <p:style>
-          <a:lnRef idx="1">
-            <a:schemeClr val="accent1"/>
-          </a:lnRef>
-          <a:fillRef idx="3">
-            <a:schemeClr val="accent1"/>
-          </a:fillRef>
-          <a:effectRef idx="2">
-            <a:schemeClr val="accent1"/>
-          </a:effectRef>
-          <a:fontRef idx="minor">
-            <a:schemeClr val="lt1"/>
-          </a:fontRef>
-        </p:style>
-        <p:txBody>
-          <a:bodyPr rtlCol="0" anchor="ctr" wrap="square"/>
-          <a:lstStyle/>
-          <a:p>
-            <a:pPr algn="ctr">
-              <a:defRPr sz="1150" b="1">
-                <a:solidFill>
-                  <a:srgbClr val="FFFFFF"/>
-                </a:solidFill>
-                <a:latin typeface="Consolas"/>
-              </a:defRPr>
-            </a:pPr>
-            <a:r>
-              <a:t>iperf-orchestrator all</a:t>
-            </a:r>
-          </a:p>
-          <a:p>
-            <a:pPr>
-              <a:defRPr sz="1000">
-                <a:solidFill>
-                  <a:srgbClr val="F0F3F6"/>
-                </a:solidFill>
-              </a:defRPr>
-            </a:pPr>
-            <a:r>
-              <a:t>TCP under load</a:t>
-            </a:r>
-          </a:p>
-        </p:txBody>
-      </p:sp>
-      <p:sp>
-        <p:nvSpPr>
-          <p:cNvPr id="12" name="TextBox 11"/>
-          <p:cNvSpPr txBox="1"/>
-          <p:nvPr/>
-        </p:nvSpPr>
-        <p:spPr>
-          <a:xfrm>
-            <a:off x="7070140" y="4270248"/>
-            <a:ext cx="384048" cy="365760"/>
-          </a:xfrm>
-          <a:prstGeom prst="rect">
-            <a:avLst/>
-          </a:prstGeom>
-          <a:noFill/>
-        </p:spPr>
-        <p:txBody>
-          <a:bodyPr wrap="none">
-            <a:spAutoFit/>
-          </a:bodyPr>
-          <a:lstStyle/>
-          <a:p>
-            <a:pPr>
-              <a:defRPr sz="1600" b="1">
-                <a:solidFill>
-                  <a:srgbClr val="3E5C76"/>
-                </a:solidFill>
-              </a:defRPr>
-            </a:pPr>
-            <a:r>
-              <a:t>→</a:t>
-            </a:r>
-          </a:p>
-        </p:txBody>
-      </p:sp>
-      <p:sp>
-        <p:nvSpPr>
-          <p:cNvPr id="13" name="Rounded Rectangle 12"/>
-          <p:cNvSpPr/>
-          <p:nvPr/>
-        </p:nvSpPr>
-        <p:spPr>
-          <a:xfrm>
-            <a:off x="7454188" y="4014216"/>
-            <a:ext cx="1887321" cy="914400"/>
-          </a:xfrm>
-          <a:prstGeom prst="roundRect">
-            <a:avLst/>
-          </a:prstGeom>
-          <a:solidFill>
-            <a:srgbClr val="BE3B4E"/>
-          </a:solidFill>
-          <a:ln>
-            <a:noFill/>
-          </a:ln>
-        </p:spPr>
-        <p:style>
-          <a:lnRef idx="1">
-            <a:schemeClr val="accent1"/>
-          </a:lnRef>
-          <a:fillRef idx="3">
-            <a:schemeClr val="accent1"/>
-          </a:fillRef>
-          <a:effectRef idx="2">
-            <a:schemeClr val="accent1"/>
-          </a:effectRef>
-          <a:fontRef idx="minor">
-            <a:schemeClr val="lt1"/>
-          </a:fontRef>
-        </p:style>
-        <p:txBody>
-          <a:bodyPr rtlCol="0" anchor="ctr" wrap="square"/>
-          <a:lstStyle/>
-          <a:p>
-            <a:pPr algn="ctr">
-              <a:defRPr sz="1150" b="1">
-                <a:solidFill>
-                  <a:srgbClr val="FFFFFF"/>
-                </a:solidFill>
-                <a:latin typeface="Consolas"/>
-              </a:defRPr>
-            </a:pPr>
-            <a:r>
-              <a:t>mx run</a:t>
-            </a:r>
-          </a:p>
-          <a:p>
-            <a:pPr>
-              <a:defRPr sz="1000">
-                <a:solidFill>
-                  <a:srgbClr val="F0F3F6"/>
-                </a:solidFill>
-              </a:defRPr>
-            </a:pPr>
-            <a:r>
-              <a:t>pps under load</a:t>
-            </a:r>
-          </a:p>
-        </p:txBody>
-      </p:sp>
-      <p:sp>
-        <p:nvSpPr>
-          <p:cNvPr id="14" name="TextBox 13"/>
-          <p:cNvSpPr txBox="1"/>
-          <p:nvPr/>
-        </p:nvSpPr>
-        <p:spPr>
-          <a:xfrm>
-            <a:off x="9341510" y="4270248"/>
-            <a:ext cx="384048" cy="365760"/>
-          </a:xfrm>
-          <a:prstGeom prst="rect">
-            <a:avLst/>
-          </a:prstGeom>
-          <a:noFill/>
-        </p:spPr>
-        <p:txBody>
-          <a:bodyPr wrap="none">
-            <a:spAutoFit/>
-          </a:bodyPr>
-          <a:lstStyle/>
-          <a:p>
-            <a:pPr>
-              <a:defRPr sz="1600" b="1">
-                <a:solidFill>
-                  <a:srgbClr val="3E5C76"/>
-                </a:solidFill>
-              </a:defRPr>
-            </a:pPr>
-            <a:r>
-              <a:t>→</a:t>
-            </a:r>
-          </a:p>
-        </p:txBody>
-      </p:sp>
-      <p:sp>
-        <p:nvSpPr>
-          <p:cNvPr id="15" name="Rounded Rectangle 14"/>
-          <p:cNvSpPr/>
-          <p:nvPr/>
-        </p:nvSpPr>
-        <p:spPr>
-          <a:xfrm>
-            <a:off x="9725558" y="4014216"/>
-            <a:ext cx="1887321" cy="914400"/>
-          </a:xfrm>
-          <a:prstGeom prst="roundRect">
-            <a:avLst/>
-          </a:prstGeom>
-          <a:solidFill>
-            <a:srgbClr val="12897B"/>
-          </a:solidFill>
-          <a:ln>
-            <a:noFill/>
-          </a:ln>
-        </p:spPr>
-        <p:style>
-          <a:lnRef idx="1">
-            <a:schemeClr val="accent1"/>
-          </a:lnRef>
-          <a:fillRef idx="3">
-            <a:schemeClr val="accent1"/>
-          </a:fillRef>
-          <a:effectRef idx="2">
-            <a:schemeClr val="accent1"/>
-          </a:effectRef>
-          <a:fontRef idx="minor">
-            <a:schemeClr val="lt1"/>
-          </a:fontRef>
-        </p:style>
-        <p:txBody>
-          <a:bodyPr rtlCol="0" anchor="ctr" wrap="square"/>
-          <a:lstStyle/>
-          <a:p>
-            <a:pPr algn="ctr">
-              <a:defRPr sz="1150" b="1">
-                <a:solidFill>
-                  <a:srgbClr val="FFFFFF"/>
-                </a:solidFill>
-                <a:latin typeface="Consolas"/>
-              </a:defRPr>
-            </a:pPr>
-            <a:r>
-              <a:t>netmesh --baseline</a:t>
-            </a:r>
-          </a:p>
-          <a:p>
-            <a:pPr>
-              <a:defRPr sz="1000">
-                <a:solidFill>
-                  <a:srgbClr val="F0F3F6"/>
-                </a:solidFill>
-              </a:defRPr>
-            </a:pPr>
-            <a:r>
-              <a:t>latency under load</a:t>
-            </a:r>
-          </a:p>
-        </p:txBody>
-      </p:sp>
-      <p:sp>
-        <p:nvSpPr>
-          <p:cNvPr id="16" name="TextBox 15"/>
-          <p:cNvSpPr txBox="1"/>
-          <p:nvPr/>
-        </p:nvSpPr>
-        <p:spPr>
-          <a:xfrm>
-            <a:off x="822960" y="5129784"/>
-            <a:ext cx="10607040" cy="621792"/>
-          </a:xfrm>
-          <a:prstGeom prst="rect">
-            <a:avLst/>
-          </a:prstGeom>
-          <a:noFill/>
-        </p:spPr>
-        <p:txBody>
-          <a:bodyPr wrap="square">
-            <a:spAutoFit/>
-          </a:bodyPr>
-          <a:lstStyle/>
-          <a:p>
-            <a:pPr>
-              <a:defRPr sz="1400"/>
-            </a:pPr>
-            <a:r>
-              <a:t>Commissioning a new fabric? Run them left to right — each answer tells you whether the next number will make sense.</a:t>
+              <a:defRPr sz="1600"/>
+            </a:pPr>
+            <a:r>
+              <a:t>They go anywhere you can ssh. No agents, no daemons, no root — nothing installed on the servers, and clean removes every trace afterwards.</a:t>
+            </a:r>
+          </a:p>
+          <a:p>
+            <a:pPr>
+              <a:defRPr sz="1600"/>
+            </a:pPr>
+            <a:r>
+              <a:t>The numbers are honest. Blank never means zero, and the headline is what the *receiver* counted — not what the sender hoped. When a tool becomes its own bottleneck, it says so.</a:t>
+            </a:r>
+          </a:p>
+          <a:p>
+            <a:pPr>
+              <a:defRPr sz="1600"/>
+            </a:pPr>
+            <a:r>
+              <a:t>They're one file each. Stdlib-only Python — pip install it, or just scp the file and run it.</a:t>
+            </a:r>
+          </a:p>
+          <a:p>
+            <a:pPr>
+              <a:defRPr sz="1600"/>
+            </a:pPr>
+            <a:r>
+              <a:t>Each stands alone. Pick whichever answers today's question — no setup or ordering ties them together. They do share the same server-list format and the same verbs, so learning one means you can drive them all.</a:t>
             </a:r>
           </a:p>
         </p:txBody>
